--- a/docs/presentacion-tp.pptx
+++ b/docs/presentacion-tp.pptx
@@ -25,9 +25,13 @@
     <p:sldId id="273" r:id="rId19"/>
     <p:sldId id="274" r:id="rId20"/>
     <p:sldId id="275" r:id="rId21"/>
+    <p:sldId id="276" r:id="rId22"/>
+    <p:sldId id="277" r:id="rId23"/>
+    <p:sldId id="278" r:id="rId24"/>
+    <p:sldId id="279" r:id="rId25"/>
   </p:sldIdLst>
   <p:notesMasterIdLst>
-    <p:notesMasterId r:id="rId22"/>
+    <p:notesMasterId r:id="rId26"/>
   </p:notesMasterIdLst>
   <p:sldSz cx="12192000" cy="6858000"/>
   <p:notesSz cx="6858000" cy="12192000"/>
@@ -126,18 +130,18 @@
   <p:extLst>
     <p:ext uri="{521415D9-36F7-43E2-AB2F-B90AF26B5E84}">
       <p14:sectionLst xmlns:p14="http://schemas.microsoft.com/office/powerpoint/2010/main">
-        <p14:section name="Apertura" id="{b26c59d3-a0e3-68a9-c0a5-411f9eba2cd4}">
+        <p14:section name="Apertura" id="{aed83583-f080-3388-af1c-c8a63796cb9b}">
           <p14:sldIdLst>
             <p14:sldId id="256"/>
           </p14:sldIdLst>
         </p14:section>
-        <p14:section name="Problema" id="{6168e92f-fc51-a612-c1d5-8aba9ebc36d0}">
+        <p14:section name="Problema" id="{6703e7c6-aa73-e162-d096-5a16ca3546b8}">
           <p14:sldIdLst>
             <p14:sldId id="257"/>
             <p14:sldId id="258"/>
           </p14:sldIdLst>
         </p14:section>
-        <p14:section name="Cómo funciona" id="{0062b621-6735-c912-8ae6-ca99e2f2f8fb}">
+        <p14:section name="Cómo funciona" id="{cc5fb68c-a4e4-d506-f171-38cf32582641}">
           <p14:sldIdLst>
             <p14:sldId id="259"/>
             <p14:sldId id="260"/>
@@ -148,22 +152,26 @@
             <p14:sldId id="265"/>
           </p14:sldIdLst>
         </p14:section>
-        <p14:section name="Qué encontramos" id="{9a736f25-c470-c80d-d756-7a02cbbbbe97}">
+        <p14:section name="Qué encontramos" id="{cae65273-5069-643a-d7cc-a44225b685a5}">
           <p14:sldIdLst>
             <p14:sldId id="266"/>
             <p14:sldId id="267"/>
             <p14:sldId id="268"/>
             <p14:sldId id="269"/>
             <p14:sldId id="270"/>
-          </p14:sldIdLst>
-        </p14:section>
-        <p14:section name="Cierre" id="{afc8cb1c-4fb5-4122-d94f-5f9f87569295}">
-          <p14:sldIdLst>
             <p14:sldId id="271"/>
             <p14:sldId id="272"/>
             <p14:sldId id="273"/>
             <p14:sldId id="274"/>
+          </p14:sldIdLst>
+        </p14:section>
+        <p14:section name="Cierre" id="{84f43752-3cec-ae88-033a-d8b5f60c0181}">
+          <p14:sldIdLst>
             <p14:sldId id="275"/>
+            <p14:sldId id="276"/>
+            <p14:sldId id="277"/>
+            <p14:sldId id="278"/>
+            <p14:sldId id="279"/>
           </p14:sldIdLst>
         </p14:section>
       </p14:sectionLst>
@@ -614,31 +622,31 @@
                 <c:ptCount val="10"/>
                 <c:lvl>
                   <c:pt idx="0">
-                    <c:v>La Nación</c:v>
+                    <c:v>La Gaceta</c:v>
                   </c:pt>
                   <c:pt idx="1">
                     <c:v>Canal 26</c:v>
                   </c:pt>
                   <c:pt idx="2">
-                    <c:v>La Gaceta</c:v>
+                    <c:v>La Nación</c:v>
                   </c:pt>
                   <c:pt idx="3">
+                    <c:v>El Trece</c:v>
+                  </c:pt>
+                  <c:pt idx="4">
                     <c:v>TN</c:v>
                   </c:pt>
-                  <c:pt idx="4">
+                  <c:pt idx="5">
                     <c:v>C5N</c:v>
-                  </c:pt>
-                  <c:pt idx="5">
-                    <c:v>Radio Mitre</c:v>
                   </c:pt>
                   <c:pt idx="6">
                     <c:v>Eldoce</c:v>
                   </c:pt>
                   <c:pt idx="7">
-                    <c:v>El Destape</c:v>
+                    <c:v>Radio Mitre</c:v>
                   </c:pt>
                   <c:pt idx="8">
-                    <c:v>El Trece</c:v>
+                    <c:v>El Destape</c:v>
                   </c:pt>
                   <c:pt idx="9">
                     <c:v>A24</c:v>
@@ -654,28 +662,28 @@
                 <c:formatCode>General</c:formatCode>
                 <c:ptCount val="10"/>
                 <c:pt idx="0">
-                  <c:v>12.9</c:v>
+                  <c:v>13.6</c:v>
                 </c:pt>
                 <c:pt idx="1">
-                  <c:v>13.4</c:v>
+                  <c:v>14.6</c:v>
                 </c:pt>
                 <c:pt idx="2">
-                  <c:v>14.3</c:v>
+                  <c:v>14.8</c:v>
                 </c:pt>
                 <c:pt idx="3">
-                  <c:v>16</c:v>
+                  <c:v>15.8</c:v>
                 </c:pt>
                 <c:pt idx="4">
-                  <c:v>16.9</c:v>
+                  <c:v>16.1</c:v>
                 </c:pt>
                 <c:pt idx="5">
-                  <c:v>17.4</c:v>
+                  <c:v>16.8</c:v>
                 </c:pt>
                 <c:pt idx="6">
-                  <c:v>17.8</c:v>
+                  <c:v>17.9</c:v>
                 </c:pt>
                 <c:pt idx="7">
-                  <c:v>17.8</c:v>
+                  <c:v>18.8</c:v>
                 </c:pt>
                 <c:pt idx="8">
                   <c:v>0</c:v>
@@ -740,31 +748,31 @@
                 <c:ptCount val="10"/>
                 <c:lvl>
                   <c:pt idx="0">
-                    <c:v>La Nación</c:v>
+                    <c:v>La Gaceta</c:v>
                   </c:pt>
                   <c:pt idx="1">
                     <c:v>Canal 26</c:v>
                   </c:pt>
                   <c:pt idx="2">
-                    <c:v>La Gaceta</c:v>
+                    <c:v>La Nación</c:v>
                   </c:pt>
                   <c:pt idx="3">
+                    <c:v>El Trece</c:v>
+                  </c:pt>
+                  <c:pt idx="4">
                     <c:v>TN</c:v>
                   </c:pt>
-                  <c:pt idx="4">
+                  <c:pt idx="5">
                     <c:v>C5N</c:v>
-                  </c:pt>
-                  <c:pt idx="5">
-                    <c:v>Radio Mitre</c:v>
                   </c:pt>
                   <c:pt idx="6">
                     <c:v>Eldoce</c:v>
                   </c:pt>
                   <c:pt idx="7">
-                    <c:v>El Destape</c:v>
+                    <c:v>Radio Mitre</c:v>
                   </c:pt>
                   <c:pt idx="8">
-                    <c:v>El Trece</c:v>
+                    <c:v>El Destape</c:v>
                   </c:pt>
                   <c:pt idx="9">
                     <c:v>A24</c:v>
@@ -804,10 +812,10 @@
                   <c:v>0</c:v>
                 </c:pt>
                 <c:pt idx="8">
-                  <c:v>20.9</c:v>
+                  <c:v>19.3</c:v>
                 </c:pt>
                 <c:pt idx="9">
-                  <c:v>22.6</c:v>
+                  <c:v>22.2</c:v>
                 </c:pt>
               </c:numCache>
             </c:numRef>
@@ -887,7 +895,7 @@
         <c:axId val="2094734552"/>
         <c:scaling>
           <c:orientation val="minMax"/>
-          <c:max val="23.730000000000004"/>
+          <c:max val="23.31"/>
         </c:scaling>
         <c:delete val="1"/>
         <c:axPos val="b"/>
@@ -1015,28 +1023,28 @@
                     <c:v>El Chubut</c:v>
                   </c:pt>
                   <c:pt idx="1">
-                    <c:v>Uno Santa Fe</c:v>
+                    <c:v>Río Negro</c:v>
                   </c:pt>
                   <c:pt idx="2">
                     <c:v>TN</c:v>
                   </c:pt>
                   <c:pt idx="3">
+                    <c:v>Uno Santa Fe</c:v>
+                  </c:pt>
+                  <c:pt idx="4">
                     <c:v>Elonce</c:v>
                   </c:pt>
-                  <c:pt idx="4">
-                    <c:v>La Gaceta</c:v>
+                  <c:pt idx="5">
+                    <c:v>Perfil</c:v>
                   </c:pt>
-                  <c:pt idx="5">
+                  <c:pt idx="6">
                     <c:v>Aire de Santa Fe</c:v>
                   </c:pt>
-                  <c:pt idx="6">
-                    <c:v>Misiones Online</c:v>
-                  </c:pt>
                   <c:pt idx="7">
-                    <c:v>La Voz</c:v>
+                    <c:v>Eldoce</c:v>
                   </c:pt>
                   <c:pt idx="8">
-                    <c:v>Eldoce</c:v>
+                    <c:v>La Voz</c:v>
                   </c:pt>
                   <c:pt idx="9">
                     <c:v>Diario Chaco</c:v>
@@ -1052,19 +1060,19 @@
                 <c:formatCode>General</c:formatCode>
                 <c:ptCount val="10"/>
                 <c:pt idx="0">
-                  <c:v>20.2</c:v>
+                  <c:v>19.1</c:v>
                 </c:pt>
                 <c:pt idx="1">
-                  <c:v>23.1</c:v>
+                  <c:v>27</c:v>
                 </c:pt>
                 <c:pt idx="2">
-                  <c:v>26</c:v>
+                  <c:v>27.4</c:v>
                 </c:pt>
                 <c:pt idx="3">
-                  <c:v>29.4</c:v>
+                  <c:v>27.5</c:v>
                 </c:pt>
                 <c:pt idx="4">
-                  <c:v>31.1</c:v>
+                  <c:v>29.8</c:v>
                 </c:pt>
                 <c:pt idx="5">
                   <c:v>0</c:v>
@@ -1141,28 +1149,28 @@
                     <c:v>El Chubut</c:v>
                   </c:pt>
                   <c:pt idx="1">
-                    <c:v>Uno Santa Fe</c:v>
+                    <c:v>Río Negro</c:v>
                   </c:pt>
                   <c:pt idx="2">
                     <c:v>TN</c:v>
                   </c:pt>
                   <c:pt idx="3">
+                    <c:v>Uno Santa Fe</c:v>
+                  </c:pt>
+                  <c:pt idx="4">
                     <c:v>Elonce</c:v>
                   </c:pt>
-                  <c:pt idx="4">
-                    <c:v>La Gaceta</c:v>
+                  <c:pt idx="5">
+                    <c:v>Perfil</c:v>
                   </c:pt>
-                  <c:pt idx="5">
+                  <c:pt idx="6">
                     <c:v>Aire de Santa Fe</c:v>
                   </c:pt>
-                  <c:pt idx="6">
-                    <c:v>Misiones Online</c:v>
-                  </c:pt>
                   <c:pt idx="7">
-                    <c:v>La Voz</c:v>
+                    <c:v>Eldoce</c:v>
                   </c:pt>
                   <c:pt idx="8">
-                    <c:v>Eldoce</c:v>
+                    <c:v>La Voz</c:v>
                   </c:pt>
                   <c:pt idx="9">
                     <c:v>Diario Chaco</c:v>
@@ -1193,19 +1201,19 @@
                   <c:v>0</c:v>
                 </c:pt>
                 <c:pt idx="5">
-                  <c:v>47.7</c:v>
+                  <c:v>46.9</c:v>
                 </c:pt>
                 <c:pt idx="6">
-                  <c:v>48.9</c:v>
+                  <c:v>47.6</c:v>
                 </c:pt>
                 <c:pt idx="7">
-                  <c:v>50</c:v>
+                  <c:v>49.6</c:v>
                 </c:pt>
                 <c:pt idx="8">
-                  <c:v>50.8</c:v>
+                  <c:v>50.3</c:v>
                 </c:pt>
                 <c:pt idx="9">
-                  <c:v>52.6</c:v>
+                  <c:v>51.2</c:v>
                 </c:pt>
               </c:numCache>
             </c:numRef>
@@ -1285,7 +1293,7 @@
         <c:axId val="2094734552"/>
         <c:scaling>
           <c:orientation val="minMax"/>
-          <c:max val="55.230000000000004"/>
+          <c:max val="53.760000000000005"/>
         </c:scaling>
         <c:delete val="1"/>
         <c:axPos val="b"/>
@@ -1410,25 +1418,25 @@
                 <c:ptCount val="9"/>
                 <c:lvl>
                   <c:pt idx="0">
-                    <c:v>Canal 26</c:v>
+                    <c:v>Los Andes</c:v>
                   </c:pt>
                   <c:pt idx="1">
+                    <c:v>Página/12</c:v>
+                  </c:pt>
+                  <c:pt idx="2">
+                    <c:v>Noticias Argentinas</c:v>
+                  </c:pt>
+                  <c:pt idx="3">
                     <c:v>Infobae</c:v>
                   </c:pt>
-                  <c:pt idx="2">
-                    <c:v>Los Andes</c:v>
+                  <c:pt idx="4">
+                    <c:v>Eldoce</c:v>
                   </c:pt>
-                  <c:pt idx="3">
-                    <c:v>Página/12</c:v>
-                  </c:pt>
-                  <c:pt idx="4">
+                  <c:pt idx="5">
                     <c:v>TN</c:v>
                   </c:pt>
-                  <c:pt idx="5">
+                  <c:pt idx="6">
                     <c:v>El Cronista</c:v>
-                  </c:pt>
-                  <c:pt idx="6">
-                    <c:v>Eldoce</c:v>
                   </c:pt>
                   <c:pt idx="7">
                     <c:v>Misiones Online</c:v>
@@ -1447,28 +1455,28 @@
                 <c:formatCode>General</c:formatCode>
                 <c:ptCount val="9"/>
                 <c:pt idx="0">
-                  <c:v>38.6</c:v>
+                  <c:v>44.4</c:v>
                 </c:pt>
                 <c:pt idx="1">
-                  <c:v>43.1</c:v>
+                  <c:v>44.8</c:v>
                 </c:pt>
                 <c:pt idx="2">
-                  <c:v>45.3</c:v>
+                  <c:v>45.5</c:v>
                 </c:pt>
                 <c:pt idx="3">
-                  <c:v>47.2</c:v>
+                  <c:v>46.4</c:v>
                 </c:pt>
                 <c:pt idx="4">
-                  <c:v>60.3</c:v>
+                  <c:v>63.9</c:v>
                 </c:pt>
                 <c:pt idx="5">
-                  <c:v>65.7</c:v>
+                  <c:v>64.9</c:v>
                 </c:pt>
                 <c:pt idx="6">
-                  <c:v>65.8</c:v>
+                  <c:v>69.5</c:v>
                 </c:pt>
                 <c:pt idx="7">
-                  <c:v>74.1</c:v>
+                  <c:v>77.6</c:v>
                 </c:pt>
                 <c:pt idx="8">
                   <c:v>0</c:v>
@@ -1530,25 +1538,25 @@
                 <c:ptCount val="9"/>
                 <c:lvl>
                   <c:pt idx="0">
-                    <c:v>Canal 26</c:v>
+                    <c:v>Los Andes</c:v>
                   </c:pt>
                   <c:pt idx="1">
+                    <c:v>Página/12</c:v>
+                  </c:pt>
+                  <c:pt idx="2">
+                    <c:v>Noticias Argentinas</c:v>
+                  </c:pt>
+                  <c:pt idx="3">
                     <c:v>Infobae</c:v>
                   </c:pt>
-                  <c:pt idx="2">
-                    <c:v>Los Andes</c:v>
+                  <c:pt idx="4">
+                    <c:v>Eldoce</c:v>
                   </c:pt>
-                  <c:pt idx="3">
-                    <c:v>Página/12</c:v>
-                  </c:pt>
-                  <c:pt idx="4">
+                  <c:pt idx="5">
                     <c:v>TN</c:v>
                   </c:pt>
-                  <c:pt idx="5">
+                  <c:pt idx="6">
                     <c:v>El Cronista</c:v>
-                  </c:pt>
-                  <c:pt idx="6">
-                    <c:v>Eldoce</c:v>
                   </c:pt>
                   <c:pt idx="7">
                     <c:v>Misiones Online</c:v>
@@ -1591,7 +1599,7 @@
                   <c:v>0</c:v>
                 </c:pt>
                 <c:pt idx="8">
-                  <c:v>91.4</c:v>
+                  <c:v>92.2</c:v>
                 </c:pt>
               </c:numCache>
             </c:numRef>
@@ -1671,7 +1679,7 @@
         <c:axId val="2094734552"/>
         <c:scaling>
           <c:orientation val="minMax"/>
-          <c:max val="95.97000000000001"/>
+          <c:max val="96.81"/>
         </c:scaling>
         <c:delete val="1"/>
         <c:axPos val="b"/>
@@ -2302,7 +2310,7 @@
           <a:p>
             <a:r>
               <a:rPr lang="en-US" dirty="0"/>
-              <a:t>Exageración: comparamos el tono del título con el de la bajada, que es el resumen escrito por el propio medio. Cebo: rasgos de clickbait. Transparencia: notas firmadas por una persona según el JSON-LD.</a:t>
+              <a:t>El termómetro es el porcentaje estimado de notas negativas de las últimas 24 horas, de 0 a 100, con bandas y la comparación contra los días anteriores. El resumen lo arma el tablero con plantillas a partir de los datos: tema más cubierto, noticia más compartida y quién la publicó primero, figura más mencionada, medio más y menos negativo. No usa un modelo de lenguaje: es reproducible y gratis.</a:t>
             </a:r>
             <a:endParaRPr lang="en-US" dirty="0"/>
           </a:p>
@@ -2390,7 +2398,7 @@
           <a:p>
             <a:r>
               <a:rPr lang="en-US" dirty="0"/>
-              <a:t>Porcentaje de títulos con al menos un recurso de cebo. En el otro extremo, La Capital, Perfil y El Chubut están por debajo del 2%.</a:t>
+              <a:t>Exageración: comparamos el tono del título con el de la bajada, que es el resumen escrito por el propio medio. Cebo: rasgos de clickbait. Transparencia: notas firmadas por una persona según el JSON-LD.</a:t>
             </a:r>
             <a:endParaRPr lang="en-US" dirty="0"/>
           </a:p>
@@ -2478,7 +2486,7 @@
           <a:p>
             <a:r>
               <a:rPr lang="en-US" dirty="0"/>
-              <a:t>Cada punto es un medio. Eje horizontal: cebo. Eje vertical: exageración respecto de la propia bajada. Las líneas son las medianas y dividen en cuatro estilos. A24, El Trece, Radio Mitre y TN quedan como sensacionalistas; Elonce y El Chubut como sobrios. Es una medición automática con error conocido: comparar medios, no juzgar uno.</a:t>
+              <a:t>Porcentaje de títulos con al menos un recurso de cebo. En el otro extremo, Rosario Nuestro, El Chubut, Perfil están por debajo del 3%.</a:t>
             </a:r>
             <a:endParaRPr lang="en-US" dirty="0"/>
           </a:p>
@@ -2566,7 +2574,7 @@
           <a:p>
             <a:r>
               <a:rPr lang="en-US" dirty="0"/>
-              <a:t>Proporción de notas con tono negativo según el modelo combinado, medios con 60 notas o más. Muestra los 5 más negativos y los 5 menos negativos. El tono mide el hecho, no la postura del medio: un medio con más policiales tiene más negativas.</a:t>
+              <a:t>Cada punto es un medio. Eje horizontal: cebo. Eje vertical: exageración respecto de la propia bajada. Las líneas son las medianas y dividen en cuatro estilos. A24, El Trece, Radio Mitre y TN quedan como sensacionalistas; Elonce y El Chubut como sobrios. Es una medición automática con error conocido: comparar medios, no juzgar uno.</a:t>
             </a:r>
             <a:endParaRPr lang="en-US" dirty="0"/>
           </a:p>
@@ -2654,7 +2662,7 @@
           <a:p>
             <a:r>
               <a:rPr lang="en-US" dirty="0"/>
-              <a:t>Proporción de notas firmadas por una persona, según el autor declarado en el JSON-LD de cada nota. Medios con 40 notas o más con datos estructurados.</a:t>
+              <a:t>Proporción de notas con tono negativo según el modelo combinado, medios con 60 notas o más. Muestra los 5 más negativos y los 5 menos negativos. El tono mide el hecho, no la postura del medio: un medio con más policiales tiene más negativas.</a:t>
             </a:r>
             <a:endParaRPr lang="en-US" dirty="0"/>
           </a:p>
@@ -2742,7 +2750,7 @@
           <a:p>
             <a:r>
               <a:rPr lang="en-US" dirty="0"/>
-              <a:t>Mostrar el tablero en vivo. Recorrer Resumen, Titulares (con buscador), Monitor (seguir una persona), Cómo titulan y Salud de datos. Es una página estática en GitHub Pages: funciona también en el celular.</a:t>
+              <a:t>Proporción de notas firmadas por una persona, según el autor declarado en el JSON-LD de cada nota. Medios con 40 notas o más con datos estructurados.</a:t>
             </a:r>
             <a:endParaRPr lang="en-US" dirty="0"/>
           </a:p>
@@ -2830,7 +2838,7 @@
           <a:p>
             <a:r>
               <a:rPr lang="en-US" dirty="0"/>
-              <a:t>Abrir el tablero, tocar Explorar la base (SQL). Datasette Lite corre SQLite en el navegador con WebAssembly: no hay que instalar nada. Correr esta consulta y después una propuesta por la clase.</a:t>
+              <a:t>El sistema agrupa las notas que cuentan lo mismo (TF-IDF y similitud coseno) y muestra el título de cada medio en orden de publicación, con su tono y sus recursos de cebo. Ejemplo: el sobreseimiento de Milei en la causa Libra lo cubrieron 12 medios; la publicó primero El Cronista y el último llegó 8 horas después. Con eso también medimos quién llega primero.</a:t>
             </a:r>
             <a:endParaRPr lang="en-US" dirty="0"/>
           </a:p>
@@ -2918,7 +2926,7 @@
           <a:p>
             <a:r>
               <a:rPr lang="en-US" dirty="0"/>
-              <a:t>Sin servidores ni costos: todo corre en GitHub. SQLite simplifica la operación y se puede abrir en el navegador.</a:t>
+              <a:t>Matriz medio por figura: porcentaje de notas negativas cuando el medio menciona a esa figura. Rojo: más negativo que el promedio de los medios; verde: menos. Solo celdas con 3 notas o más. Con pocos días de datos los valores son ilustrativos: muestran el método.</a:t>
             </a:r>
             <a:endParaRPr lang="en-US" dirty="0"/>
           </a:p>
@@ -3006,7 +3014,7 @@
           <a:p>
             <a:r>
               <a:rPr lang="en-US" dirty="0"/>
-              <a:t>Ser claros con los límites: el tono es del título, 77% de acierto, 340 etiquetas de un criterio. El histórico es corto. Próximos pasos: NER con spaCy, sesgo de agenda, mapa de medios como grafo, primicia, resumen diario.</a:t>
+              <a:t>Grafo de medios: una arista une a dos medios que cubren las mismas historias, ponderada por historias compartidas sobre las del medio más chico; cada medio conserva sus 3 vínculos más fuertes. Las comunidades salen de propagación de etiquetas y el dibujo es una disposición por fuerzas. Es la rama de minería de estructura de la teoría, aplicada a la cobertura y no a los links.</a:t>
             </a:r>
             <a:endParaRPr lang="en-US" dirty="0"/>
           </a:p>
@@ -3182,7 +3190,7 @@
           <a:p>
             <a:r>
               <a:rPr lang="en-US" dirty="0"/>
-              <a:t>Cierre con la invitación a probarlo en vivo. Preguntas.</a:t>
+              <a:t>Mostrar el tablero en vivo. Recorrer Resumen, Titulares (con buscador), Monitor (seguir una persona), Cómo titulan y Salud de datos. Es una página estática en GitHub Pages: funciona también en el celular.</a:t>
             </a:r>
             <a:endParaRPr lang="en-US" dirty="0"/>
           </a:p>
@@ -3206,6 +3214,358 @@
             <a:fld id="{F7021451-1387-4CA6-816F-3879F97B5CBC}" type="slidenum">
               <a:rPr lang="en-US"/>
               <a:t>20</a:t>
+            </a:fld>
+            <a:endParaRPr lang="en-US"/>
+          </a:p>
+        </p:txBody>
+      </p:sp>
+    </p:spTree>
+    <p:extLst>
+      <p:ext uri="{BB962C8B-B14F-4D97-AF65-F5344CB8AC3E}">
+        <p14:creationId xmlns:p14="http://schemas.microsoft.com/office/powerpoint/2010/main" val="1024086991"/>
+      </p:ext>
+    </p:extLst>
+  </p:cSld>
+  <p:clrMapOvr>
+    <a:masterClrMapping/>
+  </p:clrMapOvr>
+</p:notes>
+</file>
+
+<file path=ppt/notesSlides/notesSlide21.xml><?xml version="1.0" encoding="utf-8"?>
+<p:notes xmlns:a="http://schemas.openxmlformats.org/drawingml/2006/main" xmlns:r="http://schemas.openxmlformats.org/officeDocument/2006/relationships" xmlns:p="http://schemas.openxmlformats.org/presentationml/2006/main">
+  <p:cSld>
+    <p:spTree>
+      <p:nvGrpSpPr>
+        <p:cNvPr id="1" name=""/>
+        <p:cNvGrpSpPr/>
+        <p:nvPr/>
+      </p:nvGrpSpPr>
+      <p:grpSpPr>
+        <a:xfrm>
+          <a:off x="0" y="0"/>
+          <a:ext cx="0" cy="0"/>
+          <a:chOff x="0" y="0"/>
+          <a:chExt cx="0" cy="0"/>
+        </a:xfrm>
+      </p:grpSpPr>
+      <p:sp>
+        <p:nvSpPr>
+          <p:cNvPr id="2" name="Slide Image Placeholder 1"/>
+          <p:cNvSpPr>
+            <a:spLocks noGrp="1" noRot="1" noChangeAspect="1"/>
+          </p:cNvSpPr>
+          <p:nvPr>
+            <p:ph type="sldImg"/>
+          </p:nvPr>
+        </p:nvSpPr>
+        <p:spPr/>
+      </p:sp>
+      <p:sp>
+        <p:nvSpPr>
+          <p:cNvPr id="3" name="Notes Placeholder 2"/>
+          <p:cNvSpPr>
+            <a:spLocks noGrp="1"/>
+          </p:cNvSpPr>
+          <p:nvPr>
+            <p:ph type="body" idx="1"/>
+          </p:nvPr>
+        </p:nvSpPr>
+        <p:spPr/>
+        <p:txBody>
+          <a:bodyPr/>
+          <a:lstStyle/>
+          <a:p>
+            <a:r>
+              <a:rPr lang="en-US" dirty="0"/>
+              <a:t>Abrir el tablero, tocar Explorar la base (SQL). Datasette Lite corre SQLite en el navegador con WebAssembly: no hay que instalar nada. Correr esta consulta y después una propuesta por la clase.</a:t>
+            </a:r>
+            <a:endParaRPr lang="en-US" dirty="0"/>
+          </a:p>
+        </p:txBody>
+      </p:sp>
+      <p:sp>
+        <p:nvSpPr>
+          <p:cNvPr id="4" name="Slide Number Placeholder 3"/>
+          <p:cNvSpPr>
+            <a:spLocks noGrp="1"/>
+          </p:cNvSpPr>
+          <p:nvPr>
+            <p:ph type="sldNum" sz="quarter" idx="10"/>
+          </p:nvPr>
+        </p:nvSpPr>
+        <p:spPr/>
+        <p:txBody>
+          <a:bodyPr/>
+          <a:lstStyle/>
+          <a:p>
+            <a:fld id="{F7021451-1387-4CA6-816F-3879F97B5CBC}" type="slidenum">
+              <a:rPr lang="en-US"/>
+              <a:t>21</a:t>
+            </a:fld>
+            <a:endParaRPr lang="en-US"/>
+          </a:p>
+        </p:txBody>
+      </p:sp>
+    </p:spTree>
+    <p:extLst>
+      <p:ext uri="{BB962C8B-B14F-4D97-AF65-F5344CB8AC3E}">
+        <p14:creationId xmlns:p14="http://schemas.microsoft.com/office/powerpoint/2010/main" val="1024086991"/>
+      </p:ext>
+    </p:extLst>
+  </p:cSld>
+  <p:clrMapOvr>
+    <a:masterClrMapping/>
+  </p:clrMapOvr>
+</p:notes>
+</file>
+
+<file path=ppt/notesSlides/notesSlide22.xml><?xml version="1.0" encoding="utf-8"?>
+<p:notes xmlns:a="http://schemas.openxmlformats.org/drawingml/2006/main" xmlns:r="http://schemas.openxmlformats.org/officeDocument/2006/relationships" xmlns:p="http://schemas.openxmlformats.org/presentationml/2006/main">
+  <p:cSld>
+    <p:spTree>
+      <p:nvGrpSpPr>
+        <p:cNvPr id="1" name=""/>
+        <p:cNvGrpSpPr/>
+        <p:nvPr/>
+      </p:nvGrpSpPr>
+      <p:grpSpPr>
+        <a:xfrm>
+          <a:off x="0" y="0"/>
+          <a:ext cx="0" cy="0"/>
+          <a:chOff x="0" y="0"/>
+          <a:chExt cx="0" cy="0"/>
+        </a:xfrm>
+      </p:grpSpPr>
+      <p:sp>
+        <p:nvSpPr>
+          <p:cNvPr id="2" name="Slide Image Placeholder 1"/>
+          <p:cNvSpPr>
+            <a:spLocks noGrp="1" noRot="1" noChangeAspect="1"/>
+          </p:cNvSpPr>
+          <p:nvPr>
+            <p:ph type="sldImg"/>
+          </p:nvPr>
+        </p:nvSpPr>
+        <p:spPr/>
+      </p:sp>
+      <p:sp>
+        <p:nvSpPr>
+          <p:cNvPr id="3" name="Notes Placeholder 2"/>
+          <p:cNvSpPr>
+            <a:spLocks noGrp="1"/>
+          </p:cNvSpPr>
+          <p:nvPr>
+            <p:ph type="body" idx="1"/>
+          </p:nvPr>
+        </p:nvSpPr>
+        <p:spPr/>
+        <p:txBody>
+          <a:bodyPr/>
+          <a:lstStyle/>
+          <a:p>
+            <a:r>
+              <a:rPr lang="en-US" dirty="0"/>
+              <a:t>Sin servidores ni costos: todo corre en GitHub. SQLite simplifica la operación y se puede abrir en el navegador.</a:t>
+            </a:r>
+            <a:endParaRPr lang="en-US" dirty="0"/>
+          </a:p>
+        </p:txBody>
+      </p:sp>
+      <p:sp>
+        <p:nvSpPr>
+          <p:cNvPr id="4" name="Slide Number Placeholder 3"/>
+          <p:cNvSpPr>
+            <a:spLocks noGrp="1"/>
+          </p:cNvSpPr>
+          <p:nvPr>
+            <p:ph type="sldNum" sz="quarter" idx="10"/>
+          </p:nvPr>
+        </p:nvSpPr>
+        <p:spPr/>
+        <p:txBody>
+          <a:bodyPr/>
+          <a:lstStyle/>
+          <a:p>
+            <a:fld id="{F7021451-1387-4CA6-816F-3879F97B5CBC}" type="slidenum">
+              <a:rPr lang="en-US"/>
+              <a:t>22</a:t>
+            </a:fld>
+            <a:endParaRPr lang="en-US"/>
+          </a:p>
+        </p:txBody>
+      </p:sp>
+    </p:spTree>
+    <p:extLst>
+      <p:ext uri="{BB962C8B-B14F-4D97-AF65-F5344CB8AC3E}">
+        <p14:creationId xmlns:p14="http://schemas.microsoft.com/office/powerpoint/2010/main" val="1024086991"/>
+      </p:ext>
+    </p:extLst>
+  </p:cSld>
+  <p:clrMapOvr>
+    <a:masterClrMapping/>
+  </p:clrMapOvr>
+</p:notes>
+</file>
+
+<file path=ppt/notesSlides/notesSlide23.xml><?xml version="1.0" encoding="utf-8"?>
+<p:notes xmlns:a="http://schemas.openxmlformats.org/drawingml/2006/main" xmlns:r="http://schemas.openxmlformats.org/officeDocument/2006/relationships" xmlns:p="http://schemas.openxmlformats.org/presentationml/2006/main">
+  <p:cSld>
+    <p:spTree>
+      <p:nvGrpSpPr>
+        <p:cNvPr id="1" name=""/>
+        <p:cNvGrpSpPr/>
+        <p:nvPr/>
+      </p:nvGrpSpPr>
+      <p:grpSpPr>
+        <a:xfrm>
+          <a:off x="0" y="0"/>
+          <a:ext cx="0" cy="0"/>
+          <a:chOff x="0" y="0"/>
+          <a:chExt cx="0" cy="0"/>
+        </a:xfrm>
+      </p:grpSpPr>
+      <p:sp>
+        <p:nvSpPr>
+          <p:cNvPr id="2" name="Slide Image Placeholder 1"/>
+          <p:cNvSpPr>
+            <a:spLocks noGrp="1" noRot="1" noChangeAspect="1"/>
+          </p:cNvSpPr>
+          <p:nvPr>
+            <p:ph type="sldImg"/>
+          </p:nvPr>
+        </p:nvSpPr>
+        <p:spPr/>
+      </p:sp>
+      <p:sp>
+        <p:nvSpPr>
+          <p:cNvPr id="3" name="Notes Placeholder 2"/>
+          <p:cNvSpPr>
+            <a:spLocks noGrp="1"/>
+          </p:cNvSpPr>
+          <p:nvPr>
+            <p:ph type="body" idx="1"/>
+          </p:nvPr>
+        </p:nvSpPr>
+        <p:spPr/>
+        <p:txBody>
+          <a:bodyPr/>
+          <a:lstStyle/>
+          <a:p>
+            <a:r>
+              <a:rPr lang="en-US" dirty="0"/>
+              <a:t>Ser claros con los límites: el tono es del título, 77% de acierto, 340 etiquetas de un criterio. El histórico es corto. Próximos pasos: NER con spaCy, evolución de comunidades, cruce con datos económicos y más etiquetas manuales.</a:t>
+            </a:r>
+            <a:endParaRPr lang="en-US" dirty="0"/>
+          </a:p>
+        </p:txBody>
+      </p:sp>
+      <p:sp>
+        <p:nvSpPr>
+          <p:cNvPr id="4" name="Slide Number Placeholder 3"/>
+          <p:cNvSpPr>
+            <a:spLocks noGrp="1"/>
+          </p:cNvSpPr>
+          <p:nvPr>
+            <p:ph type="sldNum" sz="quarter" idx="10"/>
+          </p:nvPr>
+        </p:nvSpPr>
+        <p:spPr/>
+        <p:txBody>
+          <a:bodyPr/>
+          <a:lstStyle/>
+          <a:p>
+            <a:fld id="{F7021451-1387-4CA6-816F-3879F97B5CBC}" type="slidenum">
+              <a:rPr lang="en-US"/>
+              <a:t>23</a:t>
+            </a:fld>
+            <a:endParaRPr lang="en-US"/>
+          </a:p>
+        </p:txBody>
+      </p:sp>
+    </p:spTree>
+    <p:extLst>
+      <p:ext uri="{BB962C8B-B14F-4D97-AF65-F5344CB8AC3E}">
+        <p14:creationId xmlns:p14="http://schemas.microsoft.com/office/powerpoint/2010/main" val="1024086991"/>
+      </p:ext>
+    </p:extLst>
+  </p:cSld>
+  <p:clrMapOvr>
+    <a:masterClrMapping/>
+  </p:clrMapOvr>
+</p:notes>
+</file>
+
+<file path=ppt/notesSlides/notesSlide24.xml><?xml version="1.0" encoding="utf-8"?>
+<p:notes xmlns:a="http://schemas.openxmlformats.org/drawingml/2006/main" xmlns:r="http://schemas.openxmlformats.org/officeDocument/2006/relationships" xmlns:p="http://schemas.openxmlformats.org/presentationml/2006/main">
+  <p:cSld>
+    <p:spTree>
+      <p:nvGrpSpPr>
+        <p:cNvPr id="1" name=""/>
+        <p:cNvGrpSpPr/>
+        <p:nvPr/>
+      </p:nvGrpSpPr>
+      <p:grpSpPr>
+        <a:xfrm>
+          <a:off x="0" y="0"/>
+          <a:ext cx="0" cy="0"/>
+          <a:chOff x="0" y="0"/>
+          <a:chExt cx="0" cy="0"/>
+        </a:xfrm>
+      </p:grpSpPr>
+      <p:sp>
+        <p:nvSpPr>
+          <p:cNvPr id="2" name="Slide Image Placeholder 1"/>
+          <p:cNvSpPr>
+            <a:spLocks noGrp="1" noRot="1" noChangeAspect="1"/>
+          </p:cNvSpPr>
+          <p:nvPr>
+            <p:ph type="sldImg"/>
+          </p:nvPr>
+        </p:nvSpPr>
+        <p:spPr/>
+      </p:sp>
+      <p:sp>
+        <p:nvSpPr>
+          <p:cNvPr id="3" name="Notes Placeholder 2"/>
+          <p:cNvSpPr>
+            <a:spLocks noGrp="1"/>
+          </p:cNvSpPr>
+          <p:nvPr>
+            <p:ph type="body" idx="1"/>
+          </p:nvPr>
+        </p:nvSpPr>
+        <p:spPr/>
+        <p:txBody>
+          <a:bodyPr/>
+          <a:lstStyle/>
+          <a:p>
+            <a:r>
+              <a:rPr lang="en-US" dirty="0"/>
+              <a:t>Cierre con la invitación a probarlo en vivo. Preguntas.</a:t>
+            </a:r>
+            <a:endParaRPr lang="en-US" dirty="0"/>
+          </a:p>
+        </p:txBody>
+      </p:sp>
+      <p:sp>
+        <p:nvSpPr>
+          <p:cNvPr id="4" name="Slide Number Placeholder 3"/>
+          <p:cNvSpPr>
+            <a:spLocks noGrp="1"/>
+          </p:cNvSpPr>
+          <p:nvPr>
+            <p:ph type="sldNum" sz="quarter" idx="10"/>
+          </p:nvPr>
+        </p:nvSpPr>
+        <p:spPr/>
+        <p:txBody>
+          <a:bodyPr/>
+          <a:lstStyle/>
+          <a:p>
+            <a:fld id="{F7021451-1387-4CA6-816F-3879F97B5CBC}" type="slidenum">
+              <a:rPr lang="en-US"/>
+              <a:t>24</a:t>
             </a:fld>
             <a:endParaRPr lang="en-US"/>
           </a:p>
@@ -5091,7 +5451,7 @@
                   <a:schemeClr val="accent1"/>
                 </a:solidFill>
               </a:rPr>
-              <a:t>CÓMO TITULA CADA MEDIO</a:t>
+              <a:t>EL DÍA EN UN NÚMERO</a:t>
             </a:r>
             <a:endParaRPr lang="en-US" sz="1200" dirty="0"/>
           </a:p>
@@ -5132,22 +5492,46 @@
                 <a:ea typeface="Cambria" pitchFamily="34" charset="-122"/>
                 <a:cs typeface="Cambria" pitchFamily="34" charset="-120"/>
               </a:rPr>
-              <a:t>Tres indicadores para medir el estilo, no solo el contenido</a:t>
+              <a:t>Un termómetro y un resumen que se escriben solos</a:t>
             </a:r>
             <a:endParaRPr lang="en-US" sz="3200" dirty="0"/>
           </a:p>
         </p:txBody>
       </p:sp>
-      <p:sp>
-        <p:nvSpPr>
-          <p:cNvPr id="5" name="Text 2"/>
+      <p:pic>
+        <p:nvPicPr>
+          <p:cNvPr id="5" name="termometro" descr="C:\Users\SBI\Documents\Martin Ceriotti Personales\Master Data Science\webmining\Web-Mining\docs\_fuentes\img\termo.png">    </p:cNvPr>
+          <p:cNvPicPr>
+            <a:picLocks noChangeAspect="1"/>
+          </p:cNvPicPr>
+          <p:nvPr/>
+        </p:nvPicPr>
+        <p:blipFill>
+          <a:blip r:embed="rId1"/>
+          <a:stretch>
+            <a:fillRect/>
+          </a:stretch>
+        </p:blipFill>
+        <p:spPr>
+          <a:xfrm>
+            <a:off x="548640" y="2011680"/>
+            <a:ext cx="11094415" cy="2804768"/>
+          </a:xfrm>
+          <a:prstGeom prst="rect">
+            <a:avLst/>
+          </a:prstGeom>
+        </p:spPr>
+      </p:pic>
+      <p:sp>
+        <p:nvSpPr>
+          <p:cNvPr id="6" name="Text 2"/>
           <p:cNvSpPr txBox="1"/>
           <p:nvPr/>
         </p:nvSpPr>
         <p:spPr>
           <a:xfrm>
-            <a:off x="548640" y="2011680"/>
-            <a:ext cx="640080" cy="914400"/>
+            <a:off x="548640" y="5120640"/>
+            <a:ext cx="11094415" cy="914400"/>
           </a:xfrm>
           <a:prstGeom prst="rect">
             <a:avLst/>
@@ -5160,49 +5544,13 @@
           <a:lstStyle/>
           <a:p>
             <a:pPr indent="0" marL="0">
-              <a:buNone/>
-            </a:pPr>
-            <a:r>
-              <a:rPr lang="en-US" sz="4800" b="1" dirty="0">
-                <a:solidFill>
-                  <a:srgbClr val="C8102E"/>
-                </a:solidFill>
-                <a:latin typeface="Cambria" pitchFamily="34" charset="0"/>
-                <a:ea typeface="Cambria" pitchFamily="34" charset="-122"/>
-                <a:cs typeface="Cambria" pitchFamily="34" charset="-120"/>
-              </a:rPr>
-              <a:t>1</a:t>
-            </a:r>
-            <a:endParaRPr lang="en-US" sz="4800" dirty="0"/>
-          </a:p>
-        </p:txBody>
-      </p:sp>
-      <p:sp>
-        <p:nvSpPr>
-          <p:cNvPr id="6" name="Text 3"/>
-          <p:cNvSpPr txBox="1"/>
-          <p:nvPr/>
-        </p:nvSpPr>
-        <p:spPr>
-          <a:xfrm>
-            <a:off x="1371600" y="2057400"/>
-            <a:ext cx="3108960" cy="457200"/>
-          </a:xfrm>
-          <a:prstGeom prst="rect">
-            <a:avLst/>
-          </a:prstGeom>
-          <a:noFill/>
-          <a:ln/>
-        </p:spPr>
-        <p:txBody>
-          <a:bodyPr wrap="square" lIns="0" tIns="0" rIns="0" bIns="0" rtlCol="0" anchor="t"/>
-          <a:lstStyle/>
-          <a:p>
-            <a:pPr indent="0" marL="0">
-              <a:buNone/>
-            </a:pPr>
-            <a:r>
-              <a:rPr lang="en-US" sz="2200" b="1" dirty="0">
+              <a:spcAft>
+                <a:spcPts val="600"/>
+              </a:spcAft>
+              <a:buNone/>
+            </a:pPr>
+            <a:r>
+              <a:rPr lang="en-US" sz="1600" b="1" dirty="0">
                 <a:solidFill>
                   <a:srgbClr val="1A1A1A"/>
                 </a:solidFill>
@@ -5210,104 +5558,36 @@
                 <a:ea typeface="Calibri" pitchFamily="34" charset="-122"/>
                 <a:cs typeface="Calibri" pitchFamily="34" charset="-120"/>
               </a:rPr>
-              <a:t>Exageración</a:t>
-            </a:r>
-            <a:endParaRPr lang="en-US" sz="2200" dirty="0"/>
-          </a:p>
-        </p:txBody>
-      </p:sp>
-      <p:sp>
-        <p:nvSpPr>
-          <p:cNvPr id="7" name="Text 4"/>
-          <p:cNvSpPr txBox="1"/>
-          <p:nvPr/>
-        </p:nvSpPr>
-        <p:spPr>
-          <a:xfrm>
-            <a:off x="1371600" y="2560320"/>
-            <a:ext cx="3291840" cy="731520"/>
-          </a:xfrm>
-          <a:prstGeom prst="rect">
-            <a:avLst/>
-          </a:prstGeom>
-          <a:noFill/>
-          <a:ln/>
-        </p:spPr>
-        <p:txBody>
-          <a:bodyPr wrap="square" lIns="0" tIns="0" rIns="0" bIns="0" rtlCol="0" anchor="t"/>
-          <a:lstStyle/>
-          <a:p>
-            <a:pPr indent="0" marL="0">
-              <a:buNone/>
-            </a:pPr>
-            <a:r>
-              <a:rPr lang="en-US" sz="1400" dirty="0">
-                <a:solidFill>
-                  <a:srgbClr val="6B6B6B"/>
+              <a:t>Termómetro: </a:t>
+            </a:r>
+            <a:pPr indent="0" marL="0">
+              <a:spcAft>
+                <a:spcPts val="600"/>
+              </a:spcAft>
+              <a:buNone/>
+            </a:pPr>
+            <a:r>
+              <a:rPr lang="en-US" sz="1600" dirty="0">
+                <a:solidFill>
+                  <a:srgbClr val="1A1A1A"/>
                 </a:solidFill>
                 <a:latin typeface="Calibri" pitchFamily="34" charset="0"/>
                 <a:ea typeface="Calibri" pitchFamily="34" charset="-122"/>
                 <a:cs typeface="Calibri" pitchFamily="34" charset="-120"/>
               </a:rPr>
-              <a:t>El título es negativo y la bajada del propio medio no lo es.</a:t>
-            </a:r>
-            <a:endParaRPr lang="en-US" sz="1400" dirty="0"/>
-          </a:p>
-        </p:txBody>
-      </p:sp>
-      <p:sp>
-        <p:nvSpPr>
-          <p:cNvPr id="8" name="ejemplo-0"/>
-          <p:cNvSpPr/>
-          <p:nvPr/>
-        </p:nvSpPr>
-        <p:spPr>
-          <a:xfrm>
-            <a:off x="4937760" y="2011680"/>
-            <a:ext cx="6702552" cy="1143000"/>
-          </a:xfrm>
-          <a:prstGeom prst="roundRect">
-            <a:avLst>
-              <a:gd name="adj" fmla="val 6400"/>
-            </a:avLst>
-          </a:prstGeom>
-          <a:solidFill>
-            <a:srgbClr val="F2F2F0"/>
-          </a:solidFill>
-          <a:ln w="12700">
-            <a:solidFill>
-              <a:srgbClr val="F2F2F0"/>
-            </a:solidFill>
-            <a:prstDash val="solid"/>
-          </a:ln>
-        </p:spPr>
-      </p:sp>
-      <p:sp>
-        <p:nvSpPr>
-          <p:cNvPr id="9" name="Text 6"/>
-          <p:cNvSpPr txBox="1"/>
-          <p:nvPr/>
-        </p:nvSpPr>
-        <p:spPr>
-          <a:xfrm>
-            <a:off x="5212080" y="2148840"/>
-            <a:ext cx="6217920" cy="868680"/>
-          </a:xfrm>
-          <a:prstGeom prst="rect">
-            <a:avLst/>
-          </a:prstGeom>
-          <a:noFill/>
-          <a:ln/>
-        </p:spPr>
-        <p:txBody>
-          <a:bodyPr wrap="square" lIns="0" tIns="0" rIns="0" bIns="0" rtlCol="0" anchor="ctr"/>
-          <a:lstStyle/>
-          <a:p>
-            <a:pPr indent="0" marL="0">
-              <a:buNone/>
-            </a:pPr>
-            <a:r>
-              <a:rPr lang="en-US" sz="1600" i="1" dirty="0">
+              <a:t>% de notas negativas de las últimas 24 h (calmo, moderado, tenso, muy tenso).</a:t>
+            </a:r>
+            <a:endParaRPr lang="en-US" sz="1600" dirty="0"/>
+          </a:p>
+          <a:p>
+            <a:pPr indent="0" marL="0">
+              <a:spcAft>
+                <a:spcPts val="600"/>
+              </a:spcAft>
+              <a:buNone/>
+            </a:pPr>
+            <a:r>
+              <a:rPr lang="en-US" sz="1600" b="1" dirty="0">
                 <a:solidFill>
                   <a:srgbClr val="1A1A1A"/>
                 </a:solidFill>
@@ -5315,77 +5595,16 @@
                 <a:ea typeface="Calibri" pitchFamily="34" charset="-122"/>
                 <a:cs typeface="Calibri" pitchFamily="34" charset="-120"/>
               </a:rPr>
-              <a:t>"El dramático relato…" → bajada: datos del vuelo y los pasajeros</a:t>
-            </a:r>
-            <a:endParaRPr lang="en-US" sz="1600" dirty="0"/>
-          </a:p>
-        </p:txBody>
-      </p:sp>
-      <p:sp>
-        <p:nvSpPr>
-          <p:cNvPr id="10" name="Text 7"/>
-          <p:cNvSpPr txBox="1"/>
-          <p:nvPr/>
-        </p:nvSpPr>
-        <p:spPr>
-          <a:xfrm>
-            <a:off x="548640" y="3383280"/>
-            <a:ext cx="640080" cy="914400"/>
-          </a:xfrm>
-          <a:prstGeom prst="rect">
-            <a:avLst/>
-          </a:prstGeom>
-          <a:noFill/>
-          <a:ln/>
-        </p:spPr>
-        <p:txBody>
-          <a:bodyPr wrap="square" lIns="0" tIns="0" rIns="0" bIns="0" rtlCol="0" anchor="t"/>
-          <a:lstStyle/>
-          <a:p>
-            <a:pPr indent="0" marL="0">
-              <a:buNone/>
-            </a:pPr>
-            <a:r>
-              <a:rPr lang="en-US" sz="4800" b="1" dirty="0">
-                <a:solidFill>
-                  <a:srgbClr val="C8102E"/>
-                </a:solidFill>
-                <a:latin typeface="Cambria" pitchFamily="34" charset="0"/>
-                <a:ea typeface="Cambria" pitchFamily="34" charset="-122"/>
-                <a:cs typeface="Cambria" pitchFamily="34" charset="-120"/>
-              </a:rPr>
-              <a:t>2</a:t>
-            </a:r>
-            <a:endParaRPr lang="en-US" sz="4800" dirty="0"/>
-          </a:p>
-        </p:txBody>
-      </p:sp>
-      <p:sp>
-        <p:nvSpPr>
-          <p:cNvPr id="11" name="Text 8"/>
-          <p:cNvSpPr txBox="1"/>
-          <p:nvPr/>
-        </p:nvSpPr>
-        <p:spPr>
-          <a:xfrm>
-            <a:off x="1371600" y="3429000"/>
-            <a:ext cx="3108960" cy="457200"/>
-          </a:xfrm>
-          <a:prstGeom prst="rect">
-            <a:avLst/>
-          </a:prstGeom>
-          <a:noFill/>
-          <a:ln/>
-        </p:spPr>
-        <p:txBody>
-          <a:bodyPr wrap="square" lIns="0" tIns="0" rIns="0" bIns="0" rtlCol="0" anchor="t"/>
-          <a:lstStyle/>
-          <a:p>
-            <a:pPr indent="0" marL="0">
-              <a:buNone/>
-            </a:pPr>
-            <a:r>
-              <a:rPr lang="en-US" sz="2200" b="1" dirty="0">
+              <a:t>Resumen: </a:t>
+            </a:r>
+            <a:pPr indent="0" marL="0">
+              <a:spcAft>
+                <a:spcPts val="600"/>
+              </a:spcAft>
+              <a:buNone/>
+            </a:pPr>
+            <a:r>
+              <a:rPr lang="en-US" sz="1600" dirty="0">
                 <a:solidFill>
                   <a:srgbClr val="1A1A1A"/>
                 </a:solidFill>
@@ -5393,295 +5612,7 @@
                 <a:ea typeface="Calibri" pitchFamily="34" charset="-122"/>
                 <a:cs typeface="Calibri" pitchFamily="34" charset="-120"/>
               </a:rPr>
-              <a:t>Cebo (clickbait)</a:t>
-            </a:r>
-            <a:endParaRPr lang="en-US" sz="2200" dirty="0"/>
-          </a:p>
-        </p:txBody>
-      </p:sp>
-      <p:sp>
-        <p:nvSpPr>
-          <p:cNvPr id="12" name="Text 9"/>
-          <p:cNvSpPr txBox="1"/>
-          <p:nvPr/>
-        </p:nvSpPr>
-        <p:spPr>
-          <a:xfrm>
-            <a:off x="1371600" y="3931920"/>
-            <a:ext cx="3291840" cy="731520"/>
-          </a:xfrm>
-          <a:prstGeom prst="rect">
-            <a:avLst/>
-          </a:prstGeom>
-          <a:noFill/>
-          <a:ln/>
-        </p:spPr>
-        <p:txBody>
-          <a:bodyPr wrap="square" lIns="0" tIns="0" rIns="0" bIns="0" rtlCol="0" anchor="t"/>
-          <a:lstStyle/>
-          <a:p>
-            <a:pPr indent="0" marL="0">
-              <a:buNone/>
-            </a:pPr>
-            <a:r>
-              <a:rPr lang="en-US" sz="1400" dirty="0">
-                <a:solidFill>
-                  <a:srgbClr val="6B6B6B"/>
-                </a:solidFill>
-                <a:latin typeface="Calibri" pitchFamily="34" charset="0"/>
-                <a:ea typeface="Calibri" pitchFamily="34" charset="-122"/>
-                <a:cs typeface="Calibri" pitchFamily="34" charset="-120"/>
-              </a:rPr>
-              <a:t>Preguntas, exclamaciones, adjetivos exagerados, intriga, segunda persona, listas.</a:t>
-            </a:r>
-            <a:endParaRPr lang="en-US" sz="1400" dirty="0"/>
-          </a:p>
-        </p:txBody>
-      </p:sp>
-      <p:sp>
-        <p:nvSpPr>
-          <p:cNvPr id="13" name="ejemplo-1"/>
-          <p:cNvSpPr/>
-          <p:nvPr/>
-        </p:nvSpPr>
-        <p:spPr>
-          <a:xfrm>
-            <a:off x="4937760" y="3383280"/>
-            <a:ext cx="6702552" cy="1143000"/>
-          </a:xfrm>
-          <a:prstGeom prst="roundRect">
-            <a:avLst>
-              <a:gd name="adj" fmla="val 6400"/>
-            </a:avLst>
-          </a:prstGeom>
-          <a:solidFill>
-            <a:srgbClr val="F2F2F0"/>
-          </a:solidFill>
-          <a:ln w="12700">
-            <a:solidFill>
-              <a:srgbClr val="F2F2F0"/>
-            </a:solidFill>
-            <a:prstDash val="solid"/>
-          </a:ln>
-        </p:spPr>
-      </p:sp>
-      <p:sp>
-        <p:nvSpPr>
-          <p:cNvPr id="14" name="Text 11"/>
-          <p:cNvSpPr txBox="1"/>
-          <p:nvPr/>
-        </p:nvSpPr>
-        <p:spPr>
-          <a:xfrm>
-            <a:off x="5212080" y="3520440"/>
-            <a:ext cx="6217920" cy="868680"/>
-          </a:xfrm>
-          <a:prstGeom prst="rect">
-            <a:avLst/>
-          </a:prstGeom>
-          <a:noFill/>
-          <a:ln/>
-        </p:spPr>
-        <p:txBody>
-          <a:bodyPr wrap="square" lIns="0" tIns="0" rIns="0" bIns="0" rtlCol="0" anchor="ctr"/>
-          <a:lstStyle/>
-          <a:p>
-            <a:pPr indent="0" marL="0">
-              <a:buNone/>
-            </a:pPr>
-            <a:r>
-              <a:rPr lang="en-US" sz="1600" i="1" dirty="0">
-                <a:solidFill>
-                  <a:srgbClr val="1A1A1A"/>
-                </a:solidFill>
-                <a:latin typeface="Calibri" pitchFamily="34" charset="0"/>
-                <a:ea typeface="Calibri" pitchFamily="34" charset="-122"/>
-                <a:cs typeface="Calibri" pitchFamily="34" charset="-120"/>
-              </a:rPr>
-              <a:t>"¡Escándalo! Aseguran que…" · "El truco viral para…"</a:t>
-            </a:r>
-            <a:endParaRPr lang="en-US" sz="1600" dirty="0"/>
-          </a:p>
-        </p:txBody>
-      </p:sp>
-      <p:sp>
-        <p:nvSpPr>
-          <p:cNvPr id="15" name="Text 12"/>
-          <p:cNvSpPr txBox="1"/>
-          <p:nvPr/>
-        </p:nvSpPr>
-        <p:spPr>
-          <a:xfrm>
-            <a:off x="548640" y="4754880"/>
-            <a:ext cx="640080" cy="914400"/>
-          </a:xfrm>
-          <a:prstGeom prst="rect">
-            <a:avLst/>
-          </a:prstGeom>
-          <a:noFill/>
-          <a:ln/>
-        </p:spPr>
-        <p:txBody>
-          <a:bodyPr wrap="square" lIns="0" tIns="0" rIns="0" bIns="0" rtlCol="0" anchor="t"/>
-          <a:lstStyle/>
-          <a:p>
-            <a:pPr indent="0" marL="0">
-              <a:buNone/>
-            </a:pPr>
-            <a:r>
-              <a:rPr lang="en-US" sz="4800" b="1" dirty="0">
-                <a:solidFill>
-                  <a:srgbClr val="C8102E"/>
-                </a:solidFill>
-                <a:latin typeface="Cambria" pitchFamily="34" charset="0"/>
-                <a:ea typeface="Cambria" pitchFamily="34" charset="-122"/>
-                <a:cs typeface="Cambria" pitchFamily="34" charset="-120"/>
-              </a:rPr>
-              <a:t>3</a:t>
-            </a:r>
-            <a:endParaRPr lang="en-US" sz="4800" dirty="0"/>
-          </a:p>
-        </p:txBody>
-      </p:sp>
-      <p:sp>
-        <p:nvSpPr>
-          <p:cNvPr id="16" name="Text 13"/>
-          <p:cNvSpPr txBox="1"/>
-          <p:nvPr/>
-        </p:nvSpPr>
-        <p:spPr>
-          <a:xfrm>
-            <a:off x="1371600" y="4800600"/>
-            <a:ext cx="3108960" cy="457200"/>
-          </a:xfrm>
-          <a:prstGeom prst="rect">
-            <a:avLst/>
-          </a:prstGeom>
-          <a:noFill/>
-          <a:ln/>
-        </p:spPr>
-        <p:txBody>
-          <a:bodyPr wrap="square" lIns="0" tIns="0" rIns="0" bIns="0" rtlCol="0" anchor="t"/>
-          <a:lstStyle/>
-          <a:p>
-            <a:pPr indent="0" marL="0">
-              <a:buNone/>
-            </a:pPr>
-            <a:r>
-              <a:rPr lang="en-US" sz="2200" b="1" dirty="0">
-                <a:solidFill>
-                  <a:srgbClr val="1A1A1A"/>
-                </a:solidFill>
-                <a:latin typeface="Calibri" pitchFamily="34" charset="0"/>
-                <a:ea typeface="Calibri" pitchFamily="34" charset="-122"/>
-                <a:cs typeface="Calibri" pitchFamily="34" charset="-120"/>
-              </a:rPr>
-              <a:t>Transparencia</a:t>
-            </a:r>
-            <a:endParaRPr lang="en-US" sz="2200" dirty="0"/>
-          </a:p>
-        </p:txBody>
-      </p:sp>
-      <p:sp>
-        <p:nvSpPr>
-          <p:cNvPr id="17" name="Text 14"/>
-          <p:cNvSpPr txBox="1"/>
-          <p:nvPr/>
-        </p:nvSpPr>
-        <p:spPr>
-          <a:xfrm>
-            <a:off x="1371600" y="5303520"/>
-            <a:ext cx="3291840" cy="731520"/>
-          </a:xfrm>
-          <a:prstGeom prst="rect">
-            <a:avLst/>
-          </a:prstGeom>
-          <a:noFill/>
-          <a:ln/>
-        </p:spPr>
-        <p:txBody>
-          <a:bodyPr wrap="square" lIns="0" tIns="0" rIns="0" bIns="0" rtlCol="0" anchor="t"/>
-          <a:lstStyle/>
-          <a:p>
-            <a:pPr indent="0" marL="0">
-              <a:buNone/>
-            </a:pPr>
-            <a:r>
-              <a:rPr lang="en-US" sz="1400" dirty="0">
-                <a:solidFill>
-                  <a:srgbClr val="6B6B6B"/>
-                </a:solidFill>
-                <a:latin typeface="Calibri" pitchFamily="34" charset="0"/>
-                <a:ea typeface="Calibri" pitchFamily="34" charset="-122"/>
-                <a:cs typeface="Calibri" pitchFamily="34" charset="-120"/>
-              </a:rPr>
-              <a:t>Notas firmadas por un periodista, según los datos estructurados de la nota.</a:t>
-            </a:r>
-            <a:endParaRPr lang="en-US" sz="1400" dirty="0"/>
-          </a:p>
-        </p:txBody>
-      </p:sp>
-      <p:sp>
-        <p:nvSpPr>
-          <p:cNvPr id="18" name="ejemplo-2"/>
-          <p:cNvSpPr/>
-          <p:nvPr/>
-        </p:nvSpPr>
-        <p:spPr>
-          <a:xfrm>
-            <a:off x="4937760" y="4754880"/>
-            <a:ext cx="6702552" cy="1143000"/>
-          </a:xfrm>
-          <a:prstGeom prst="roundRect">
-            <a:avLst>
-              <a:gd name="adj" fmla="val 6400"/>
-            </a:avLst>
-          </a:prstGeom>
-          <a:solidFill>
-            <a:srgbClr val="F2F2F0"/>
-          </a:solidFill>
-          <a:ln w="12700">
-            <a:solidFill>
-              <a:srgbClr val="F2F2F0"/>
-            </a:solidFill>
-            <a:prstDash val="solid"/>
-          </a:ln>
-        </p:spPr>
-      </p:sp>
-      <p:sp>
-        <p:nvSpPr>
-          <p:cNvPr id="19" name="Text 16"/>
-          <p:cNvSpPr txBox="1"/>
-          <p:nvPr/>
-        </p:nvSpPr>
-        <p:spPr>
-          <a:xfrm>
-            <a:off x="5212080" y="4892040"/>
-            <a:ext cx="6217920" cy="868680"/>
-          </a:xfrm>
-          <a:prstGeom prst="rect">
-            <a:avLst/>
-          </a:prstGeom>
-          <a:noFill/>
-          <a:ln/>
-        </p:spPr>
-        <p:txBody>
-          <a:bodyPr wrap="square" lIns="0" tIns="0" rIns="0" bIns="0" rtlCol="0" anchor="ctr"/>
-          <a:lstStyle/>
-          <a:p>
-            <a:pPr indent="0" marL="0">
-              <a:buNone/>
-            </a:pPr>
-            <a:r>
-              <a:rPr lang="en-US" sz="1600" i="1" dirty="0">
-                <a:solidFill>
-                  <a:srgbClr val="1A1A1A"/>
-                </a:solidFill>
-                <a:latin typeface="Calibri" pitchFamily="34" charset="0"/>
-                <a:ea typeface="Calibri" pitchFamily="34" charset="-122"/>
-                <a:cs typeface="Calibri" pitchFamily="34" charset="-120"/>
-              </a:rPr>
-              <a:t>"Redacción" o el nombre del medio no cuentan como firma</a:t>
+              <a:t>redactado con plantillas a partir de los datos del día; sin modelo de lenguaje, reproducible.</a:t>
             </a:r>
             <a:endParaRPr lang="en-US" sz="1600" dirty="0"/>
           </a:p>
@@ -5789,7 +5720,7 @@
                   <a:schemeClr val="accent1"/>
                 </a:solidFill>
               </a:rPr>
-              <a:t>CEBO</a:t>
+              <a:t>CÓMO TITULA CADA MEDIO</a:t>
             </a:r>
             <a:endParaRPr lang="en-US" sz="1200" dirty="0"/>
           </a:p>
@@ -5830,42 +5761,143 @@
                 <a:ea typeface="Cambria" pitchFamily="34" charset="-122"/>
                 <a:cs typeface="Cambria" pitchFamily="34" charset="-120"/>
               </a:rPr>
-              <a:t>A24 y El Trece usan recursos de cebo en 1 de cada 5 títulos</a:t>
+              <a:t>Tres indicadores para medir el estilo, no solo el contenido</a:t>
             </a:r>
             <a:endParaRPr lang="en-US" sz="3200" dirty="0"/>
           </a:p>
         </p:txBody>
       </p:sp>
-      <p:graphicFrame>
-        <p:nvGraphicFramePr>
-          <p:cNvPr id="5" name="grafico" descr=""/>
-          <p:cNvGraphicFramePr/>
-          <p:nvPr/>
-        </p:nvGraphicFramePr>
-        <p:xfrm>
-          <a:off x="457200" y="1874520"/>
-          <a:ext cx="7132320" cy="4343400"/>
-        </p:xfrm>
-        <a:graphic xmlns:a="http://schemas.openxmlformats.org/drawingml/2006/main">
-          <a:graphicData uri="http://schemas.openxmlformats.org/drawingml/2006/chart">
-            <c:chart xmlns:c="http://schemas.openxmlformats.org/drawingml/2006/chart" r:id="rId1"/>
-          </a:graphicData>
-        </a:graphic>
-      </p:graphicFrame>
-      <p:sp>
-        <p:nvSpPr>
-          <p:cNvPr id="6" name="extremo"/>
+      <p:sp>
+        <p:nvSpPr>
+          <p:cNvPr id="5" name="Text 2"/>
+          <p:cNvSpPr txBox="1"/>
+          <p:nvPr/>
+        </p:nvSpPr>
+        <p:spPr>
+          <a:xfrm>
+            <a:off x="548640" y="2011680"/>
+            <a:ext cx="640080" cy="914400"/>
+          </a:xfrm>
+          <a:prstGeom prst="rect">
+            <a:avLst/>
+          </a:prstGeom>
+          <a:noFill/>
+          <a:ln/>
+        </p:spPr>
+        <p:txBody>
+          <a:bodyPr wrap="square" lIns="0" tIns="0" rIns="0" bIns="0" rtlCol="0" anchor="t"/>
+          <a:lstStyle/>
+          <a:p>
+            <a:pPr indent="0" marL="0">
+              <a:buNone/>
+            </a:pPr>
+            <a:r>
+              <a:rPr lang="en-US" sz="4800" b="1" dirty="0">
+                <a:solidFill>
+                  <a:srgbClr val="C8102E"/>
+                </a:solidFill>
+                <a:latin typeface="Cambria" pitchFamily="34" charset="0"/>
+                <a:ea typeface="Cambria" pitchFamily="34" charset="-122"/>
+                <a:cs typeface="Cambria" pitchFamily="34" charset="-120"/>
+              </a:rPr>
+              <a:t>1</a:t>
+            </a:r>
+            <a:endParaRPr lang="en-US" sz="4800" dirty="0"/>
+          </a:p>
+        </p:txBody>
+      </p:sp>
+      <p:sp>
+        <p:nvSpPr>
+          <p:cNvPr id="6" name="Text 3"/>
+          <p:cNvSpPr txBox="1"/>
+          <p:nvPr/>
+        </p:nvSpPr>
+        <p:spPr>
+          <a:xfrm>
+            <a:off x="1371600" y="2057400"/>
+            <a:ext cx="3108960" cy="457200"/>
+          </a:xfrm>
+          <a:prstGeom prst="rect">
+            <a:avLst/>
+          </a:prstGeom>
+          <a:noFill/>
+          <a:ln/>
+        </p:spPr>
+        <p:txBody>
+          <a:bodyPr wrap="square" lIns="0" tIns="0" rIns="0" bIns="0" rtlCol="0" anchor="t"/>
+          <a:lstStyle/>
+          <a:p>
+            <a:pPr indent="0" marL="0">
+              <a:buNone/>
+            </a:pPr>
+            <a:r>
+              <a:rPr lang="en-US" sz="2200" b="1" dirty="0">
+                <a:solidFill>
+                  <a:srgbClr val="1A1A1A"/>
+                </a:solidFill>
+                <a:latin typeface="Calibri" pitchFamily="34" charset="0"/>
+                <a:ea typeface="Calibri" pitchFamily="34" charset="-122"/>
+                <a:cs typeface="Calibri" pitchFamily="34" charset="-120"/>
+              </a:rPr>
+              <a:t>Exageración</a:t>
+            </a:r>
+            <a:endParaRPr lang="en-US" sz="2200" dirty="0"/>
+          </a:p>
+        </p:txBody>
+      </p:sp>
+      <p:sp>
+        <p:nvSpPr>
+          <p:cNvPr id="7" name="Text 4"/>
+          <p:cNvSpPr txBox="1"/>
+          <p:nvPr/>
+        </p:nvSpPr>
+        <p:spPr>
+          <a:xfrm>
+            <a:off x="1371600" y="2560320"/>
+            <a:ext cx="3291840" cy="731520"/>
+          </a:xfrm>
+          <a:prstGeom prst="rect">
+            <a:avLst/>
+          </a:prstGeom>
+          <a:noFill/>
+          <a:ln/>
+        </p:spPr>
+        <p:txBody>
+          <a:bodyPr wrap="square" lIns="0" tIns="0" rIns="0" bIns="0" rtlCol="0" anchor="t"/>
+          <a:lstStyle/>
+          <a:p>
+            <a:pPr indent="0" marL="0">
+              <a:buNone/>
+            </a:pPr>
+            <a:r>
+              <a:rPr lang="en-US" sz="1400" dirty="0">
+                <a:solidFill>
+                  <a:srgbClr val="6B6B6B"/>
+                </a:solidFill>
+                <a:latin typeface="Calibri" pitchFamily="34" charset="0"/>
+                <a:ea typeface="Calibri" pitchFamily="34" charset="-122"/>
+                <a:cs typeface="Calibri" pitchFamily="34" charset="-120"/>
+              </a:rPr>
+              <a:t>El título es negativo y la bajada del propio medio no lo es.</a:t>
+            </a:r>
+            <a:endParaRPr lang="en-US" sz="1400" dirty="0"/>
+          </a:p>
+        </p:txBody>
+      </p:sp>
+      <p:sp>
+        <p:nvSpPr>
+          <p:cNvPr id="8" name="ejemplo-0"/>
           <p:cNvSpPr/>
           <p:nvPr/>
         </p:nvSpPr>
         <p:spPr>
           <a:xfrm>
-            <a:off x="8046720" y="2011680"/>
-            <a:ext cx="3593592" cy="3931920"/>
+            <a:off x="4937760" y="2011680"/>
+            <a:ext cx="6702552" cy="1143000"/>
           </a:xfrm>
           <a:prstGeom prst="roundRect">
             <a:avLst>
-              <a:gd name="adj" fmla="val 2036"/>
+              <a:gd name="adj" fmla="val 6400"/>
             </a:avLst>
           </a:prstGeom>
           <a:solidFill>
@@ -5881,30 +5913,30 @@
       </p:sp>
       <p:sp>
         <p:nvSpPr>
-          <p:cNvPr id="7" name="Text 3"/>
+          <p:cNvPr id="9" name="Text 6"/>
           <p:cNvSpPr txBox="1"/>
           <p:nvPr/>
         </p:nvSpPr>
         <p:spPr>
           <a:xfrm>
-            <a:off x="8321040" y="2240280"/>
-            <a:ext cx="3108960" cy="411480"/>
-          </a:xfrm>
-          <a:prstGeom prst="rect">
-            <a:avLst/>
-          </a:prstGeom>
-          <a:noFill/>
-          <a:ln/>
-        </p:spPr>
-        <p:txBody>
-          <a:bodyPr wrap="square" lIns="0" tIns="0" rIns="0" bIns="0" rtlCol="0" anchor="t"/>
-          <a:lstStyle/>
-          <a:p>
-            <a:pPr indent="0" marL="0">
-              <a:buNone/>
-            </a:pPr>
-            <a:r>
-              <a:rPr lang="en-US" sz="1800" b="1" dirty="0">
+            <a:off x="5212080" y="2148840"/>
+            <a:ext cx="6217920" cy="868680"/>
+          </a:xfrm>
+          <a:prstGeom prst="rect">
+            <a:avLst/>
+          </a:prstGeom>
+          <a:noFill/>
+          <a:ln/>
+        </p:spPr>
+        <p:txBody>
+          <a:bodyPr wrap="square" lIns="0" tIns="0" rIns="0" bIns="0" rtlCol="0" anchor="ctr"/>
+          <a:lstStyle/>
+          <a:p>
+            <a:pPr indent="0" marL="0">
+              <a:buNone/>
+            </a:pPr>
+            <a:r>
+              <a:rPr lang="en-US" sz="1600" i="1" dirty="0">
                 <a:solidFill>
                   <a:srgbClr val="1A1A1A"/>
                 </a:solidFill>
@@ -5912,22 +5944,22 @@
                 <a:ea typeface="Calibri" pitchFamily="34" charset="-122"/>
                 <a:cs typeface="Calibri" pitchFamily="34" charset="-120"/>
               </a:rPr>
-              <a:t>En el otro extremo</a:t>
-            </a:r>
-            <a:endParaRPr lang="en-US" sz="1800" dirty="0"/>
-          </a:p>
-        </p:txBody>
-      </p:sp>
-      <p:sp>
-        <p:nvSpPr>
-          <p:cNvPr id="8" name="Text 4"/>
+              <a:t>"El dramático relato…" → bajada: datos del vuelo y los pasajeros</a:t>
+            </a:r>
+            <a:endParaRPr lang="en-US" sz="1600" dirty="0"/>
+          </a:p>
+        </p:txBody>
+      </p:sp>
+      <p:sp>
+        <p:nvSpPr>
+          <p:cNvPr id="10" name="Text 7"/>
           <p:cNvSpPr txBox="1"/>
           <p:nvPr/>
         </p:nvSpPr>
         <p:spPr>
           <a:xfrm>
-            <a:off x="8321040" y="2788920"/>
-            <a:ext cx="3108960" cy="1828800"/>
+            <a:off x="548640" y="3383280"/>
+            <a:ext cx="640080" cy="914400"/>
           </a:xfrm>
           <a:prstGeom prst="rect">
             <a:avLst/>
@@ -5939,15 +5971,50 @@
           <a:bodyPr wrap="square" lIns="0" tIns="0" rIns="0" bIns="0" rtlCol="0" anchor="t"/>
           <a:lstStyle/>
           <a:p>
-            <a:pPr marL="342900" indent="-342900">
-              <a:spcAft>
-                <a:spcPts val="800"/>
-              </a:spcAft>
-              <a:buSzPct val="100000"/>
-              <a:buChar char="•"/>
-            </a:pPr>
-            <a:r>
-              <a:rPr lang="en-US" sz="1600" dirty="0">
+            <a:pPr indent="0" marL="0">
+              <a:buNone/>
+            </a:pPr>
+            <a:r>
+              <a:rPr lang="en-US" sz="4800" b="1" dirty="0">
+                <a:solidFill>
+                  <a:srgbClr val="C8102E"/>
+                </a:solidFill>
+                <a:latin typeface="Cambria" pitchFamily="34" charset="0"/>
+                <a:ea typeface="Cambria" pitchFamily="34" charset="-122"/>
+                <a:cs typeface="Cambria" pitchFamily="34" charset="-120"/>
+              </a:rPr>
+              <a:t>2</a:t>
+            </a:r>
+            <a:endParaRPr lang="en-US" sz="4800" dirty="0"/>
+          </a:p>
+        </p:txBody>
+      </p:sp>
+      <p:sp>
+        <p:nvSpPr>
+          <p:cNvPr id="11" name="Text 8"/>
+          <p:cNvSpPr txBox="1"/>
+          <p:nvPr/>
+        </p:nvSpPr>
+        <p:spPr>
+          <a:xfrm>
+            <a:off x="1371600" y="3429000"/>
+            <a:ext cx="3108960" cy="457200"/>
+          </a:xfrm>
+          <a:prstGeom prst="rect">
+            <a:avLst/>
+          </a:prstGeom>
+          <a:noFill/>
+          <a:ln/>
+        </p:spPr>
+        <p:txBody>
+          <a:bodyPr wrap="square" lIns="0" tIns="0" rIns="0" bIns="0" rtlCol="0" anchor="t"/>
+          <a:lstStyle/>
+          <a:p>
+            <a:pPr indent="0" marL="0">
+              <a:buNone/>
+            </a:pPr>
+            <a:r>
+              <a:rPr lang="en-US" sz="2200" b="1" dirty="0">
                 <a:solidFill>
                   <a:srgbClr val="1A1A1A"/>
                 </a:solidFill>
@@ -5955,41 +6022,104 @@
                 <a:ea typeface="Calibri" pitchFamily="34" charset="-122"/>
                 <a:cs typeface="Calibri" pitchFamily="34" charset="-120"/>
               </a:rPr>
-              <a:t>La Capital: 1%</a:t>
-            </a:r>
-            <a:endParaRPr lang="en-US" sz="1600" dirty="0"/>
-          </a:p>
-          <a:p>
-            <a:pPr marL="342900" indent="-342900">
-              <a:spcAft>
-                <a:spcPts val="800"/>
-              </a:spcAft>
-              <a:buSzPct val="100000"/>
-              <a:buChar char="•"/>
-            </a:pPr>
-            <a:r>
-              <a:rPr lang="en-US" sz="1600" dirty="0">
-                <a:solidFill>
-                  <a:srgbClr val="1A1A1A"/>
+              <a:t>Cebo (clickbait)</a:t>
+            </a:r>
+            <a:endParaRPr lang="en-US" sz="2200" dirty="0"/>
+          </a:p>
+        </p:txBody>
+      </p:sp>
+      <p:sp>
+        <p:nvSpPr>
+          <p:cNvPr id="12" name="Text 9"/>
+          <p:cNvSpPr txBox="1"/>
+          <p:nvPr/>
+        </p:nvSpPr>
+        <p:spPr>
+          <a:xfrm>
+            <a:off x="1371600" y="3931920"/>
+            <a:ext cx="3291840" cy="731520"/>
+          </a:xfrm>
+          <a:prstGeom prst="rect">
+            <a:avLst/>
+          </a:prstGeom>
+          <a:noFill/>
+          <a:ln/>
+        </p:spPr>
+        <p:txBody>
+          <a:bodyPr wrap="square" lIns="0" tIns="0" rIns="0" bIns="0" rtlCol="0" anchor="t"/>
+          <a:lstStyle/>
+          <a:p>
+            <a:pPr indent="0" marL="0">
+              <a:buNone/>
+            </a:pPr>
+            <a:r>
+              <a:rPr lang="en-US" sz="1400" dirty="0">
+                <a:solidFill>
+                  <a:srgbClr val="6B6B6B"/>
                 </a:solidFill>
                 <a:latin typeface="Calibri" pitchFamily="34" charset="0"/>
                 <a:ea typeface="Calibri" pitchFamily="34" charset="-122"/>
                 <a:cs typeface="Calibri" pitchFamily="34" charset="-120"/>
               </a:rPr>
-              <a:t>Perfil: 1,7%</a:t>
-            </a:r>
-            <a:endParaRPr lang="en-US" sz="1600" dirty="0"/>
-          </a:p>
-          <a:p>
-            <a:pPr marL="342900" indent="-342900">
-              <a:spcAft>
-                <a:spcPts val="800"/>
-              </a:spcAft>
-              <a:buSzPct val="100000"/>
-              <a:buChar char="•"/>
-            </a:pPr>
-            <a:r>
-              <a:rPr lang="en-US" sz="1600" dirty="0">
+              <a:t>Preguntas, exclamaciones, adjetivos exagerados, intriga, segunda persona, listas.</a:t>
+            </a:r>
+            <a:endParaRPr lang="en-US" sz="1400" dirty="0"/>
+          </a:p>
+        </p:txBody>
+      </p:sp>
+      <p:sp>
+        <p:nvSpPr>
+          <p:cNvPr id="13" name="ejemplo-1"/>
+          <p:cNvSpPr/>
+          <p:nvPr/>
+        </p:nvSpPr>
+        <p:spPr>
+          <a:xfrm>
+            <a:off x="4937760" y="3383280"/>
+            <a:ext cx="6702552" cy="1143000"/>
+          </a:xfrm>
+          <a:prstGeom prst="roundRect">
+            <a:avLst>
+              <a:gd name="adj" fmla="val 6400"/>
+            </a:avLst>
+          </a:prstGeom>
+          <a:solidFill>
+            <a:srgbClr val="F2F2F0"/>
+          </a:solidFill>
+          <a:ln w="12700">
+            <a:solidFill>
+              <a:srgbClr val="F2F2F0"/>
+            </a:solidFill>
+            <a:prstDash val="solid"/>
+          </a:ln>
+        </p:spPr>
+      </p:sp>
+      <p:sp>
+        <p:nvSpPr>
+          <p:cNvPr id="14" name="Text 11"/>
+          <p:cNvSpPr txBox="1"/>
+          <p:nvPr/>
+        </p:nvSpPr>
+        <p:spPr>
+          <a:xfrm>
+            <a:off x="5212080" y="3520440"/>
+            <a:ext cx="6217920" cy="868680"/>
+          </a:xfrm>
+          <a:prstGeom prst="rect">
+            <a:avLst/>
+          </a:prstGeom>
+          <a:noFill/>
+          <a:ln/>
+        </p:spPr>
+        <p:txBody>
+          <a:bodyPr wrap="square" lIns="0" tIns="0" rIns="0" bIns="0" rtlCol="0" anchor="ctr"/>
+          <a:lstStyle/>
+          <a:p>
+            <a:pPr indent="0" marL="0">
+              <a:buNone/>
+            </a:pPr>
+            <a:r>
+              <a:rPr lang="en-US" sz="1600" i="1" dirty="0">
                 <a:solidFill>
                   <a:srgbClr val="1A1A1A"/>
                 </a:solidFill>
@@ -5997,20 +6127,77 @@
                 <a:ea typeface="Calibri" pitchFamily="34" charset="-122"/>
                 <a:cs typeface="Calibri" pitchFamily="34" charset="-120"/>
               </a:rPr>
-              <a:t>El Chubut: 1,9%</a:t>
+              <a:t>"¡Escándalo! Aseguran que…" · "El truco viral para…"</a:t>
             </a:r>
             <a:endParaRPr lang="en-US" sz="1600" dirty="0"/>
           </a:p>
-          <a:p>
-            <a:pPr marL="342900" indent="-342900">
-              <a:spcAft>
-                <a:spcPts val="800"/>
-              </a:spcAft>
-              <a:buSzPct val="100000"/>
-              <a:buChar char="•"/>
-            </a:pPr>
-            <a:r>
-              <a:rPr lang="en-US" sz="1600" dirty="0">
+        </p:txBody>
+      </p:sp>
+      <p:sp>
+        <p:nvSpPr>
+          <p:cNvPr id="15" name="Text 12"/>
+          <p:cNvSpPr txBox="1"/>
+          <p:nvPr/>
+        </p:nvSpPr>
+        <p:spPr>
+          <a:xfrm>
+            <a:off x="548640" y="4754880"/>
+            <a:ext cx="640080" cy="914400"/>
+          </a:xfrm>
+          <a:prstGeom prst="rect">
+            <a:avLst/>
+          </a:prstGeom>
+          <a:noFill/>
+          <a:ln/>
+        </p:spPr>
+        <p:txBody>
+          <a:bodyPr wrap="square" lIns="0" tIns="0" rIns="0" bIns="0" rtlCol="0" anchor="t"/>
+          <a:lstStyle/>
+          <a:p>
+            <a:pPr indent="0" marL="0">
+              <a:buNone/>
+            </a:pPr>
+            <a:r>
+              <a:rPr lang="en-US" sz="4800" b="1" dirty="0">
+                <a:solidFill>
+                  <a:srgbClr val="C8102E"/>
+                </a:solidFill>
+                <a:latin typeface="Cambria" pitchFamily="34" charset="0"/>
+                <a:ea typeface="Cambria" pitchFamily="34" charset="-122"/>
+                <a:cs typeface="Cambria" pitchFamily="34" charset="-120"/>
+              </a:rPr>
+              <a:t>3</a:t>
+            </a:r>
+            <a:endParaRPr lang="en-US" sz="4800" dirty="0"/>
+          </a:p>
+        </p:txBody>
+      </p:sp>
+      <p:sp>
+        <p:nvSpPr>
+          <p:cNvPr id="16" name="Text 13"/>
+          <p:cNvSpPr txBox="1"/>
+          <p:nvPr/>
+        </p:nvSpPr>
+        <p:spPr>
+          <a:xfrm>
+            <a:off x="1371600" y="4800600"/>
+            <a:ext cx="3108960" cy="457200"/>
+          </a:xfrm>
+          <a:prstGeom prst="rect">
+            <a:avLst/>
+          </a:prstGeom>
+          <a:noFill/>
+          <a:ln/>
+        </p:spPr>
+        <p:txBody>
+          <a:bodyPr wrap="square" lIns="0" tIns="0" rIns="0" bIns="0" rtlCol="0" anchor="t"/>
+          <a:lstStyle/>
+          <a:p>
+            <a:pPr indent="0" marL="0">
+              <a:buNone/>
+            </a:pPr>
+            <a:r>
+              <a:rPr lang="en-US" sz="2200" b="1" dirty="0">
                 <a:solidFill>
                   <a:srgbClr val="1A1A1A"/>
                 </a:solidFill>
@@ -6018,22 +6205,22 @@
                 <a:ea typeface="Calibri" pitchFamily="34" charset="-122"/>
                 <a:cs typeface="Calibri" pitchFamily="34" charset="-120"/>
               </a:rPr>
-              <a:t>Rosario Nuestro: 2,4%</a:t>
-            </a:r>
-            <a:endParaRPr lang="en-US" sz="1600" dirty="0"/>
-          </a:p>
-        </p:txBody>
-      </p:sp>
-      <p:sp>
-        <p:nvSpPr>
-          <p:cNvPr id="9" name="Text 5"/>
+              <a:t>Transparencia</a:t>
+            </a:r>
+            <a:endParaRPr lang="en-US" sz="2200" dirty="0"/>
+          </a:p>
+        </p:txBody>
+      </p:sp>
+      <p:sp>
+        <p:nvSpPr>
+          <p:cNvPr id="17" name="Text 14"/>
           <p:cNvSpPr txBox="1"/>
           <p:nvPr/>
         </p:nvSpPr>
         <p:spPr>
           <a:xfrm>
-            <a:off x="8321040" y="4846320"/>
-            <a:ext cx="3108960" cy="914400"/>
+            <a:off x="1371600" y="5303520"/>
+            <a:ext cx="3291840" cy="731520"/>
           </a:xfrm>
           <a:prstGeom prst="rect">
             <a:avLst/>
@@ -6049,7 +6236,7 @@
               <a:buNone/>
             </a:pPr>
             <a:r>
-              <a:rPr lang="en-US" sz="1200" dirty="0">
+              <a:rPr lang="en-US" sz="1400" dirty="0">
                 <a:solidFill>
                   <a:srgbClr val="6B6B6B"/>
                 </a:solidFill>
@@ -6057,9 +6244,75 @@
                 <a:ea typeface="Calibri" pitchFamily="34" charset="-122"/>
                 <a:cs typeface="Calibri" pitchFamily="34" charset="-120"/>
               </a:rPr>
-              <a:t>Porcentaje de títulos con al menos un recurso de cebo; medios con 40 notas o más.</a:t>
-            </a:r>
-            <a:endParaRPr lang="en-US" sz="1200" dirty="0"/>
+              <a:t>Notas firmadas por un periodista, según los datos estructurados de la nota.</a:t>
+            </a:r>
+            <a:endParaRPr lang="en-US" sz="1400" dirty="0"/>
+          </a:p>
+        </p:txBody>
+      </p:sp>
+      <p:sp>
+        <p:nvSpPr>
+          <p:cNvPr id="18" name="ejemplo-2"/>
+          <p:cNvSpPr/>
+          <p:nvPr/>
+        </p:nvSpPr>
+        <p:spPr>
+          <a:xfrm>
+            <a:off x="4937760" y="4754880"/>
+            <a:ext cx="6702552" cy="1143000"/>
+          </a:xfrm>
+          <a:prstGeom prst="roundRect">
+            <a:avLst>
+              <a:gd name="adj" fmla="val 6400"/>
+            </a:avLst>
+          </a:prstGeom>
+          <a:solidFill>
+            <a:srgbClr val="F2F2F0"/>
+          </a:solidFill>
+          <a:ln w="12700">
+            <a:solidFill>
+              <a:srgbClr val="F2F2F0"/>
+            </a:solidFill>
+            <a:prstDash val="solid"/>
+          </a:ln>
+        </p:spPr>
+      </p:sp>
+      <p:sp>
+        <p:nvSpPr>
+          <p:cNvPr id="19" name="Text 16"/>
+          <p:cNvSpPr txBox="1"/>
+          <p:nvPr/>
+        </p:nvSpPr>
+        <p:spPr>
+          <a:xfrm>
+            <a:off x="5212080" y="4892040"/>
+            <a:ext cx="6217920" cy="868680"/>
+          </a:xfrm>
+          <a:prstGeom prst="rect">
+            <a:avLst/>
+          </a:prstGeom>
+          <a:noFill/>
+          <a:ln/>
+        </p:spPr>
+        <p:txBody>
+          <a:bodyPr wrap="square" lIns="0" tIns="0" rIns="0" bIns="0" rtlCol="0" anchor="ctr"/>
+          <a:lstStyle/>
+          <a:p>
+            <a:pPr indent="0" marL="0">
+              <a:buNone/>
+            </a:pPr>
+            <a:r>
+              <a:rPr lang="en-US" sz="1600" i="1" dirty="0">
+                <a:solidFill>
+                  <a:srgbClr val="1A1A1A"/>
+                </a:solidFill>
+                <a:latin typeface="Calibri" pitchFamily="34" charset="0"/>
+                <a:ea typeface="Calibri" pitchFamily="34" charset="-122"/>
+                <a:cs typeface="Calibri" pitchFamily="34" charset="-120"/>
+              </a:rPr>
+              <a:t>"Redacción" o el nombre del medio no cuentan como firma</a:t>
+            </a:r>
+            <a:endParaRPr lang="en-US" sz="1600" dirty="0"/>
           </a:p>
         </p:txBody>
       </p:sp>
@@ -6165,7 +6418,7 @@
                   <a:schemeClr val="accent1"/>
                 </a:solidFill>
               </a:rPr>
-              <a:t>SENSACIONALISMO</a:t>
+              <a:t>CEBO</a:t>
             </a:r>
             <a:endParaRPr lang="en-US" sz="1200" dirty="0"/>
           </a:p>
@@ -6206,50 +6459,42 @@
                 <a:ea typeface="Cambria" pitchFamily="34" charset="-122"/>
                 <a:cs typeface="Cambria" pitchFamily="34" charset="-120"/>
               </a:rPr>
-              <a:t>El mapa: quién exagera y quién busca el clic</a:t>
+              <a:t>A24 y El Destape usan recursos de cebo en casi 1 de cada 5 títulos</a:t>
             </a:r>
             <a:endParaRPr lang="en-US" sz="3200" dirty="0"/>
           </a:p>
         </p:txBody>
       </p:sp>
-      <p:pic>
-        <p:nvPicPr>
-          <p:cNvPr id="5" name="mapa" descr="C:\Users\SBI\Documents\Martin Ceriotti Personales\Master Data Science\webmining\Web-Mining\docs\_fuentes\img\mapa-sensacionalismo.png">    </p:cNvPr>
-          <p:cNvPicPr>
-            <a:picLocks noChangeAspect="1"/>
-          </p:cNvPicPr>
-          <p:nvPr/>
-        </p:nvPicPr>
-        <p:blipFill>
-          <a:blip r:embed="rId1"/>
-          <a:stretch>
-            <a:fillRect/>
-          </a:stretch>
-        </p:blipFill>
-        <p:spPr>
-          <a:xfrm>
-            <a:off x="548640" y="1920240"/>
-            <a:ext cx="8229600" cy="3684181"/>
-          </a:xfrm>
-          <a:prstGeom prst="rect">
-            <a:avLst/>
-          </a:prstGeom>
-        </p:spPr>
-      </p:pic>
-      <p:sp>
-        <p:nvSpPr>
-          <p:cNvPr id="6" name="lectura"/>
+      <p:graphicFrame>
+        <p:nvGraphicFramePr>
+          <p:cNvPr id="5" name="grafico" descr=""/>
+          <p:cNvGraphicFramePr/>
+          <p:nvPr/>
+        </p:nvGraphicFramePr>
+        <p:xfrm>
+          <a:off x="457200" y="1874520"/>
+          <a:ext cx="7132320" cy="4343400"/>
+        </p:xfrm>
+        <a:graphic xmlns:a="http://schemas.openxmlformats.org/drawingml/2006/main">
+          <a:graphicData uri="http://schemas.openxmlformats.org/drawingml/2006/chart">
+            <c:chart xmlns:c="http://schemas.openxmlformats.org/drawingml/2006/chart" r:id="rId1"/>
+          </a:graphicData>
+        </a:graphic>
+      </p:graphicFrame>
+      <p:sp>
+        <p:nvSpPr>
+          <p:cNvPr id="6" name="extremo"/>
           <p:cNvSpPr/>
           <p:nvPr/>
         </p:nvSpPr>
         <p:spPr>
           <a:xfrm>
-            <a:off x="9052560" y="1920240"/>
-            <a:ext cx="2587752" cy="3657600"/>
+            <a:off x="8046720" y="2011680"/>
+            <a:ext cx="3593592" cy="3931920"/>
           </a:xfrm>
           <a:prstGeom prst="roundRect">
             <a:avLst>
-              <a:gd name="adj" fmla="val 2827"/>
+              <a:gd name="adj" fmla="val 2036"/>
             </a:avLst>
           </a:prstGeom>
           <a:solidFill>
@@ -6271,8 +6516,8 @@
         </p:nvSpPr>
         <p:spPr>
           <a:xfrm>
-            <a:off x="9281160" y="2148840"/>
-            <a:ext cx="2194560" cy="411480"/>
+            <a:off x="8321040" y="2240280"/>
+            <a:ext cx="3108960" cy="411480"/>
           </a:xfrm>
           <a:prstGeom prst="rect">
             <a:avLst/>
@@ -6288,7 +6533,7 @@
               <a:buNone/>
             </a:pPr>
             <a:r>
-              <a:rPr lang="en-US" sz="1700" b="1" dirty="0">
+              <a:rPr lang="en-US" sz="1800" b="1" dirty="0">
                 <a:solidFill>
                   <a:srgbClr val="1A1A1A"/>
                 </a:solidFill>
@@ -6296,9 +6541,9 @@
                 <a:ea typeface="Calibri" pitchFamily="34" charset="-122"/>
                 <a:cs typeface="Calibri" pitchFamily="34" charset="-120"/>
               </a:rPr>
-              <a:t>Cómo leerlo</a:t>
-            </a:r>
-            <a:endParaRPr lang="en-US" sz="1700" dirty="0"/>
+              <a:t>En el otro extremo</a:t>
+            </a:r>
+            <a:endParaRPr lang="en-US" sz="1800" dirty="0"/>
           </a:p>
         </p:txBody>
       </p:sp>
@@ -6310,8 +6555,8 @@
         </p:nvSpPr>
         <p:spPr>
           <a:xfrm>
-            <a:off x="9281160" y="2651760"/>
-            <a:ext cx="2194560" cy="2743200"/>
+            <a:off x="8321040" y="2788920"/>
+            <a:ext cx="3108960" cy="1828800"/>
           </a:xfrm>
           <a:prstGeom prst="rect">
             <a:avLst/>
@@ -6323,14 +6568,15 @@
           <a:bodyPr wrap="square" lIns="0" tIns="0" rIns="0" bIns="0" rtlCol="0" anchor="t"/>
           <a:lstStyle/>
           <a:p>
-            <a:pPr indent="0" marL="0">
+            <a:pPr marL="342900" indent="-342900">
               <a:spcAft>
-                <a:spcPts val="1000"/>
+                <a:spcPts val="800"/>
               </a:spcAft>
-              <a:buNone/>
-            </a:pPr>
-            <a:r>
-              <a:rPr lang="en-US" sz="1400" b="1" dirty="0">
+              <a:buSzPct val="100000"/>
+              <a:buChar char="•"/>
+            </a:pPr>
+            <a:r>
+              <a:rPr lang="en-US" sz="1600" dirty="0">
                 <a:solidFill>
                   <a:srgbClr val="1A1A1A"/>
                 </a:solidFill>
@@ -6338,16 +6584,20 @@
                 <a:ea typeface="Calibri" pitchFamily="34" charset="-122"/>
                 <a:cs typeface="Calibri" pitchFamily="34" charset="-120"/>
               </a:rPr>
-              <a:t>Arriba a la derecha: </a:t>
-            </a:r>
-            <a:pPr indent="0" marL="0">
+              <a:t>Perfil: 1,6%</a:t>
+            </a:r>
+            <a:endParaRPr lang="en-US" sz="1600" dirty="0"/>
+          </a:p>
+          <a:p>
+            <a:pPr marL="342900" indent="-342900">
               <a:spcAft>
-                <a:spcPts val="1000"/>
+                <a:spcPts val="800"/>
               </a:spcAft>
-              <a:buNone/>
-            </a:pPr>
-            <a:r>
-              <a:rPr lang="en-US" sz="1400" dirty="0">
+              <a:buSzPct val="100000"/>
+              <a:buChar char="•"/>
+            </a:pPr>
+            <a:r>
+              <a:rPr lang="en-US" sz="1600" dirty="0">
                 <a:solidFill>
                   <a:srgbClr val="1A1A1A"/>
                 </a:solidFill>
@@ -6355,19 +6605,20 @@
                 <a:ea typeface="Calibri" pitchFamily="34" charset="-122"/>
                 <a:cs typeface="Calibri" pitchFamily="34" charset="-120"/>
               </a:rPr>
-              <a:t>títulos con cebo que además exageran.</a:t>
-            </a:r>
-            <a:endParaRPr lang="en-US" sz="1400" dirty="0"/>
-          </a:p>
-          <a:p>
-            <a:pPr indent="0" marL="0">
+              <a:t>El Chubut: 1,8%</a:t>
+            </a:r>
+            <a:endParaRPr lang="en-US" sz="1600" dirty="0"/>
+          </a:p>
+          <a:p>
+            <a:pPr marL="342900" indent="-342900">
               <a:spcAft>
-                <a:spcPts val="1000"/>
+                <a:spcPts val="800"/>
               </a:spcAft>
-              <a:buNone/>
-            </a:pPr>
-            <a:r>
-              <a:rPr lang="en-US" sz="1400" b="1" dirty="0">
+              <a:buSzPct val="100000"/>
+              <a:buChar char="•"/>
+            </a:pPr>
+            <a:r>
+              <a:rPr lang="en-US" sz="1600" dirty="0">
                 <a:solidFill>
                   <a:srgbClr val="1A1A1A"/>
                 </a:solidFill>
@@ -6375,16 +6626,20 @@
                 <a:ea typeface="Calibri" pitchFamily="34" charset="-122"/>
                 <a:cs typeface="Calibri" pitchFamily="34" charset="-120"/>
               </a:rPr>
-              <a:t>Abajo a la izquierda: </a:t>
-            </a:r>
-            <a:pPr indent="0" marL="0">
+              <a:t>Rosario Nuestro: 2,4%</a:t>
+            </a:r>
+            <a:endParaRPr lang="en-US" sz="1600" dirty="0"/>
+          </a:p>
+          <a:p>
+            <a:pPr marL="342900" indent="-342900">
               <a:spcAft>
-                <a:spcPts val="1000"/>
+                <a:spcPts val="800"/>
               </a:spcAft>
-              <a:buNone/>
-            </a:pPr>
-            <a:r>
-              <a:rPr lang="en-US" sz="1400" dirty="0">
+              <a:buSzPct val="100000"/>
+              <a:buChar char="•"/>
+            </a:pPr>
+            <a:r>
+              <a:rPr lang="en-US" sz="1600" dirty="0">
                 <a:solidFill>
                   <a:srgbClr val="1A1A1A"/>
                 </a:solidFill>
@@ -6392,9 +6647,48 @@
                 <a:ea typeface="Calibri" pitchFamily="34" charset="-122"/>
                 <a:cs typeface="Calibri" pitchFamily="34" charset="-120"/>
               </a:rPr>
-              <a:t>títulos sobrios y fieles a su bajada.</a:t>
-            </a:r>
-            <a:endParaRPr lang="en-US" sz="1400" dirty="0"/>
+              <a:t>La Capital: 2,7%</a:t>
+            </a:r>
+            <a:endParaRPr lang="en-US" sz="1600" dirty="0"/>
+          </a:p>
+        </p:txBody>
+      </p:sp>
+      <p:sp>
+        <p:nvSpPr>
+          <p:cNvPr id="9" name="Text 5"/>
+          <p:cNvSpPr txBox="1"/>
+          <p:nvPr/>
+        </p:nvSpPr>
+        <p:spPr>
+          <a:xfrm>
+            <a:off x="8321040" y="4846320"/>
+            <a:ext cx="3108960" cy="914400"/>
+          </a:xfrm>
+          <a:prstGeom prst="rect">
+            <a:avLst/>
+          </a:prstGeom>
+          <a:noFill/>
+          <a:ln/>
+        </p:spPr>
+        <p:txBody>
+          <a:bodyPr wrap="square" lIns="0" tIns="0" rIns="0" bIns="0" rtlCol="0" anchor="t"/>
+          <a:lstStyle/>
+          <a:p>
+            <a:pPr indent="0" marL="0">
+              <a:buNone/>
+            </a:pPr>
+            <a:r>
+              <a:rPr lang="en-US" sz="1200" dirty="0">
+                <a:solidFill>
+                  <a:srgbClr val="6B6B6B"/>
+                </a:solidFill>
+                <a:latin typeface="Calibri" pitchFamily="34" charset="0"/>
+                <a:ea typeface="Calibri" pitchFamily="34" charset="-122"/>
+                <a:cs typeface="Calibri" pitchFamily="34" charset="-120"/>
+              </a:rPr>
+              <a:t>Porcentaje de títulos con al menos un recurso de cebo; medios con 40 notas o más.</a:t>
+            </a:r>
+            <a:endParaRPr lang="en-US" sz="1200" dirty="0"/>
           </a:p>
         </p:txBody>
       </p:sp>
@@ -6500,7 +6794,7 @@
                   <a:schemeClr val="accent1"/>
                 </a:solidFill>
               </a:rPr>
-              <a:t>TONO</a:t>
+              <a:t>SENSACIONALISMO</a:t>
             </a:r>
             <a:endParaRPr lang="en-US" sz="1200" dirty="0"/>
           </a:p>
@@ -6541,42 +6835,50 @@
                 <a:ea typeface="Cambria" pitchFamily="34" charset="-122"/>
                 <a:cs typeface="Cambria" pitchFamily="34" charset="-120"/>
               </a:rPr>
-              <a:t>En Diario Chaco, 1 de cada 2 notas es negativa; en El Chubut, 1 de cada 5</a:t>
+              <a:t>El mapa: quién exagera y quién busca el clic</a:t>
             </a:r>
             <a:endParaRPr lang="en-US" sz="3200" dirty="0"/>
           </a:p>
         </p:txBody>
       </p:sp>
-      <p:graphicFrame>
-        <p:nvGraphicFramePr>
-          <p:cNvPr id="5" name="grafico" descr=""/>
-          <p:cNvGraphicFramePr/>
-          <p:nvPr/>
-        </p:nvGraphicFramePr>
-        <p:xfrm>
-          <a:off x="457200" y="1874520"/>
-          <a:ext cx="7315200" cy="4343400"/>
-        </p:xfrm>
-        <a:graphic xmlns:a="http://schemas.openxmlformats.org/drawingml/2006/main">
-          <a:graphicData uri="http://schemas.openxmlformats.org/drawingml/2006/chart">
-            <c:chart xmlns:c="http://schemas.openxmlformats.org/drawingml/2006/chart" r:id="rId1"/>
-          </a:graphicData>
-        </a:graphic>
-      </p:graphicFrame>
-      <p:sp>
-        <p:nvSpPr>
-          <p:cNvPr id="6" name="tono-total"/>
+      <p:pic>
+        <p:nvPicPr>
+          <p:cNvPr id="5" name="mapa" descr="C:\Users\SBI\Documents\Martin Ceriotti Personales\Master Data Science\webmining\Web-Mining\docs\_fuentes\img\mapa-sensacionalismo.png">    </p:cNvPr>
+          <p:cNvPicPr>
+            <a:picLocks noChangeAspect="1"/>
+          </p:cNvPicPr>
+          <p:nvPr/>
+        </p:nvPicPr>
+        <p:blipFill>
+          <a:blip r:embed="rId1"/>
+          <a:stretch>
+            <a:fillRect/>
+          </a:stretch>
+        </p:blipFill>
+        <p:spPr>
+          <a:xfrm>
+            <a:off x="548640" y="1920240"/>
+            <a:ext cx="8229600" cy="3684181"/>
+          </a:xfrm>
+          <a:prstGeom prst="rect">
+            <a:avLst/>
+          </a:prstGeom>
+        </p:spPr>
+      </p:pic>
+      <p:sp>
+        <p:nvSpPr>
+          <p:cNvPr id="6" name="lectura"/>
           <p:cNvSpPr/>
           <p:nvPr/>
         </p:nvSpPr>
         <p:spPr>
           <a:xfrm>
-            <a:off x="8229600" y="2011680"/>
-            <a:ext cx="3410712" cy="3931920"/>
+            <a:off x="9052560" y="1920240"/>
+            <a:ext cx="2587752" cy="3657600"/>
           </a:xfrm>
           <a:prstGeom prst="roundRect">
             <a:avLst>
-              <a:gd name="adj" fmla="val 2145"/>
+              <a:gd name="adj" fmla="val 2827"/>
             </a:avLst>
           </a:prstGeom>
           <a:solidFill>
@@ -6598,8 +6900,8 @@
         </p:nvSpPr>
         <p:spPr>
           <a:xfrm>
-            <a:off x="8503920" y="2240280"/>
-            <a:ext cx="2926080" cy="411480"/>
+            <a:off x="9281160" y="2148840"/>
+            <a:ext cx="2194560" cy="411480"/>
           </a:xfrm>
           <a:prstGeom prst="rect">
             <a:avLst/>
@@ -6615,7 +6917,7 @@
               <a:buNone/>
             </a:pPr>
             <a:r>
-              <a:rPr lang="en-US" sz="1800" b="1" dirty="0">
+              <a:rPr lang="en-US" sz="1700" b="1" dirty="0">
                 <a:solidFill>
                   <a:srgbClr val="1A1A1A"/>
                 </a:solidFill>
@@ -6623,9 +6925,9 @@
                 <a:ea typeface="Calibri" pitchFamily="34" charset="-122"/>
                 <a:cs typeface="Calibri" pitchFamily="34" charset="-120"/>
               </a:rPr>
-              <a:t>En toda la base</a:t>
-            </a:r>
-            <a:endParaRPr lang="en-US" sz="1800" dirty="0"/>
+              <a:t>Cómo leerlo</a:t>
+            </a:r>
+            <a:endParaRPr lang="en-US" sz="1700" dirty="0"/>
           </a:p>
         </p:txBody>
       </p:sp>
@@ -6637,8 +6939,8 @@
         </p:nvSpPr>
         <p:spPr>
           <a:xfrm>
-            <a:off x="8503920" y="2788920"/>
-            <a:ext cx="1463040" cy="685800"/>
+            <a:off x="9281160" y="2651760"/>
+            <a:ext cx="2194560" cy="2743200"/>
           </a:xfrm>
           <a:prstGeom prst="rect">
             <a:avLst/>
@@ -6651,49 +6953,13 @@
           <a:lstStyle/>
           <a:p>
             <a:pPr indent="0" marL="0">
-              <a:buNone/>
-            </a:pPr>
-            <a:r>
-              <a:rPr lang="en-US" sz="3600" b="1" dirty="0">
-                <a:solidFill>
-                  <a:srgbClr val="C8102E"/>
-                </a:solidFill>
-                <a:latin typeface="Cambria" pitchFamily="34" charset="0"/>
-                <a:ea typeface="Cambria" pitchFamily="34" charset="-122"/>
-                <a:cs typeface="Cambria" pitchFamily="34" charset="-120"/>
-              </a:rPr>
-              <a:t>39%</a:t>
-            </a:r>
-            <a:endParaRPr lang="en-US" sz="3600" dirty="0"/>
-          </a:p>
-        </p:txBody>
-      </p:sp>
-      <p:sp>
-        <p:nvSpPr>
-          <p:cNvPr id="9" name="Text 5"/>
-          <p:cNvSpPr txBox="1"/>
-          <p:nvPr/>
-        </p:nvSpPr>
-        <p:spPr>
-          <a:xfrm>
-            <a:off x="10012680" y="2971800"/>
-            <a:ext cx="1463040" cy="411480"/>
-          </a:xfrm>
-          <a:prstGeom prst="rect">
-            <a:avLst/>
-          </a:prstGeom>
-          <a:noFill/>
-          <a:ln/>
-        </p:spPr>
-        <p:txBody>
-          <a:bodyPr wrap="square" lIns="0" tIns="0" rIns="0" bIns="0" rtlCol="0" anchor="t"/>
-          <a:lstStyle/>
-          <a:p>
-            <a:pPr indent="0" marL="0">
-              <a:buNone/>
-            </a:pPr>
-            <a:r>
-              <a:rPr lang="en-US" sz="1600" dirty="0">
+              <a:spcAft>
+                <a:spcPts val="1000"/>
+              </a:spcAft>
+              <a:buNone/>
+            </a:pPr>
+            <a:r>
+              <a:rPr lang="en-US" sz="1400" b="1" dirty="0">
                 <a:solidFill>
                   <a:srgbClr val="1A1A1A"/>
                 </a:solidFill>
@@ -6701,77 +6967,16 @@
                 <a:ea typeface="Calibri" pitchFamily="34" charset="-122"/>
                 <a:cs typeface="Calibri" pitchFamily="34" charset="-120"/>
               </a:rPr>
-              <a:t>Negativo</a:t>
-            </a:r>
-            <a:endParaRPr lang="en-US" sz="1600" dirty="0"/>
-          </a:p>
-        </p:txBody>
-      </p:sp>
-      <p:sp>
-        <p:nvSpPr>
-          <p:cNvPr id="10" name="Text 6"/>
-          <p:cNvSpPr txBox="1"/>
-          <p:nvPr/>
-        </p:nvSpPr>
-        <p:spPr>
-          <a:xfrm>
-            <a:off x="8503920" y="3749040"/>
-            <a:ext cx="1463040" cy="685800"/>
-          </a:xfrm>
-          <a:prstGeom prst="rect">
-            <a:avLst/>
-          </a:prstGeom>
-          <a:noFill/>
-          <a:ln/>
-        </p:spPr>
-        <p:txBody>
-          <a:bodyPr wrap="square" lIns="0" tIns="0" rIns="0" bIns="0" rtlCol="0" anchor="t"/>
-          <a:lstStyle/>
-          <a:p>
-            <a:pPr indent="0" marL="0">
-              <a:buNone/>
-            </a:pPr>
-            <a:r>
-              <a:rPr lang="en-US" sz="3600" b="1" dirty="0">
-                <a:solidFill>
-                  <a:srgbClr val="6B6B6B"/>
-                </a:solidFill>
-                <a:latin typeface="Cambria" pitchFamily="34" charset="0"/>
-                <a:ea typeface="Cambria" pitchFamily="34" charset="-122"/>
-                <a:cs typeface="Cambria" pitchFamily="34" charset="-120"/>
-              </a:rPr>
-              <a:t>50%</a:t>
-            </a:r>
-            <a:endParaRPr lang="en-US" sz="3600" dirty="0"/>
-          </a:p>
-        </p:txBody>
-      </p:sp>
-      <p:sp>
-        <p:nvSpPr>
-          <p:cNvPr id="11" name="Text 7"/>
-          <p:cNvSpPr txBox="1"/>
-          <p:nvPr/>
-        </p:nvSpPr>
-        <p:spPr>
-          <a:xfrm>
-            <a:off x="10012680" y="3931920"/>
-            <a:ext cx="1463040" cy="411480"/>
-          </a:xfrm>
-          <a:prstGeom prst="rect">
-            <a:avLst/>
-          </a:prstGeom>
-          <a:noFill/>
-          <a:ln/>
-        </p:spPr>
-        <p:txBody>
-          <a:bodyPr wrap="square" lIns="0" tIns="0" rIns="0" bIns="0" rtlCol="0" anchor="t"/>
-          <a:lstStyle/>
-          <a:p>
-            <a:pPr indent="0" marL="0">
-              <a:buNone/>
-            </a:pPr>
-            <a:r>
-              <a:rPr lang="en-US" sz="1600" dirty="0">
+              <a:t>Arriba a la derecha: </a:t>
+            </a:r>
+            <a:pPr indent="0" marL="0">
+              <a:spcAft>
+                <a:spcPts val="1000"/>
+              </a:spcAft>
+              <a:buNone/>
+            </a:pPr>
+            <a:r>
+              <a:rPr lang="en-US" sz="1400" dirty="0">
                 <a:solidFill>
                   <a:srgbClr val="1A1A1A"/>
                 </a:solidFill>
@@ -6779,77 +6984,19 @@
                 <a:ea typeface="Calibri" pitchFamily="34" charset="-122"/>
                 <a:cs typeface="Calibri" pitchFamily="34" charset="-120"/>
               </a:rPr>
-              <a:t>Neutro</a:t>
-            </a:r>
-            <a:endParaRPr lang="en-US" sz="1600" dirty="0"/>
-          </a:p>
-        </p:txBody>
-      </p:sp>
-      <p:sp>
-        <p:nvSpPr>
-          <p:cNvPr id="12" name="Text 8"/>
-          <p:cNvSpPr txBox="1"/>
-          <p:nvPr/>
-        </p:nvSpPr>
-        <p:spPr>
-          <a:xfrm>
-            <a:off x="8503920" y="4709160"/>
-            <a:ext cx="1463040" cy="685800"/>
-          </a:xfrm>
-          <a:prstGeom prst="rect">
-            <a:avLst/>
-          </a:prstGeom>
-          <a:noFill/>
-          <a:ln/>
-        </p:spPr>
-        <p:txBody>
-          <a:bodyPr wrap="square" lIns="0" tIns="0" rIns="0" bIns="0" rtlCol="0" anchor="t"/>
-          <a:lstStyle/>
-          <a:p>
-            <a:pPr indent="0" marL="0">
-              <a:buNone/>
-            </a:pPr>
-            <a:r>
-              <a:rPr lang="en-US" sz="3600" b="1" dirty="0">
-                <a:solidFill>
-                  <a:srgbClr val="3D8A5A"/>
-                </a:solidFill>
-                <a:latin typeface="Cambria" pitchFamily="34" charset="0"/>
-                <a:ea typeface="Cambria" pitchFamily="34" charset="-122"/>
-                <a:cs typeface="Cambria" pitchFamily="34" charset="-120"/>
-              </a:rPr>
-              <a:t>12%</a:t>
-            </a:r>
-            <a:endParaRPr lang="en-US" sz="3600" dirty="0"/>
-          </a:p>
-        </p:txBody>
-      </p:sp>
-      <p:sp>
-        <p:nvSpPr>
-          <p:cNvPr id="13" name="Text 9"/>
-          <p:cNvSpPr txBox="1"/>
-          <p:nvPr/>
-        </p:nvSpPr>
-        <p:spPr>
-          <a:xfrm>
-            <a:off x="10012680" y="4892040"/>
-            <a:ext cx="1463040" cy="411480"/>
-          </a:xfrm>
-          <a:prstGeom prst="rect">
-            <a:avLst/>
-          </a:prstGeom>
-          <a:noFill/>
-          <a:ln/>
-        </p:spPr>
-        <p:txBody>
-          <a:bodyPr wrap="square" lIns="0" tIns="0" rIns="0" bIns="0" rtlCol="0" anchor="t"/>
-          <a:lstStyle/>
-          <a:p>
-            <a:pPr indent="0" marL="0">
-              <a:buNone/>
-            </a:pPr>
-            <a:r>
-              <a:rPr lang="en-US" sz="1600" dirty="0">
+              <a:t>títulos con cebo que además exageran.</a:t>
+            </a:r>
+            <a:endParaRPr lang="en-US" sz="1400" dirty="0"/>
+          </a:p>
+          <a:p>
+            <a:pPr indent="0" marL="0">
+              <a:spcAft>
+                <a:spcPts val="1000"/>
+              </a:spcAft>
+              <a:buNone/>
+            </a:pPr>
+            <a:r>
+              <a:rPr lang="en-US" sz="1400" b="1" dirty="0">
                 <a:solidFill>
                   <a:srgbClr val="1A1A1A"/>
                 </a:solidFill>
@@ -6857,9 +7004,26 @@
                 <a:ea typeface="Calibri" pitchFamily="34" charset="-122"/>
                 <a:cs typeface="Calibri" pitchFamily="34" charset="-120"/>
               </a:rPr>
-              <a:t>Positivo</a:t>
-            </a:r>
-            <a:endParaRPr lang="en-US" sz="1600" dirty="0"/>
+              <a:t>Abajo a la izquierda: </a:t>
+            </a:r>
+            <a:pPr indent="0" marL="0">
+              <a:spcAft>
+                <a:spcPts val="1000"/>
+              </a:spcAft>
+              <a:buNone/>
+            </a:pPr>
+            <a:r>
+              <a:rPr lang="en-US" sz="1400" dirty="0">
+                <a:solidFill>
+                  <a:srgbClr val="1A1A1A"/>
+                </a:solidFill>
+                <a:latin typeface="Calibri" pitchFamily="34" charset="0"/>
+                <a:ea typeface="Calibri" pitchFamily="34" charset="-122"/>
+                <a:cs typeface="Calibri" pitchFamily="34" charset="-120"/>
+              </a:rPr>
+              <a:t>títulos sobrios y fieles a su bajada.</a:t>
+            </a:r>
+            <a:endParaRPr lang="en-US" sz="1400" dirty="0"/>
           </a:p>
         </p:txBody>
       </p:sp>
@@ -6965,7 +7129,7 @@
                   <a:schemeClr val="accent1"/>
                 </a:solidFill>
               </a:rPr>
-              <a:t>TRANSPARENCIA</a:t>
+              <a:t>TONO</a:t>
             </a:r>
             <a:endParaRPr lang="en-US" sz="1200" dirty="0"/>
           </a:p>
@@ -7006,7 +7170,7 @@
                 <a:ea typeface="Cambria" pitchFamily="34" charset="-122"/>
                 <a:cs typeface="Cambria" pitchFamily="34" charset="-120"/>
               </a:rPr>
-              <a:t>Perfil firma el 91% de sus notas; Radio Mitre y Rosario3, ninguna</a:t>
+              <a:t>En Diario Chaco, 1 de cada 2 notas es negativa; en El Chubut, 1 de cada 5</a:t>
             </a:r>
             <a:endParaRPr lang="en-US" sz="3200" dirty="0"/>
           </a:p>
@@ -7020,7 +7184,7 @@
         </p:nvGraphicFramePr>
         <p:xfrm>
           <a:off x="457200" y="1874520"/>
-          <a:ext cx="7132320" cy="4343400"/>
+          <a:ext cx="7315200" cy="4343400"/>
         </p:xfrm>
         <a:graphic xmlns:a="http://schemas.openxmlformats.org/drawingml/2006/main">
           <a:graphicData uri="http://schemas.openxmlformats.org/drawingml/2006/chart">
@@ -7030,18 +7194,18 @@
       </p:graphicFrame>
       <p:sp>
         <p:nvSpPr>
-          <p:cNvPr id="6" name="sin-firma"/>
+          <p:cNvPr id="6" name="tono-total"/>
           <p:cNvSpPr/>
           <p:nvPr/>
         </p:nvSpPr>
         <p:spPr>
           <a:xfrm>
-            <a:off x="8046720" y="2011680"/>
-            <a:ext cx="3593592" cy="3931920"/>
+            <a:off x="8229600" y="2011680"/>
+            <a:ext cx="3410712" cy="3931920"/>
           </a:xfrm>
           <a:prstGeom prst="roundRect">
             <a:avLst>
-              <a:gd name="adj" fmla="val 2036"/>
+              <a:gd name="adj" fmla="val 2145"/>
             </a:avLst>
           </a:prstGeom>
           <a:solidFill>
@@ -7063,8 +7227,8 @@
         </p:nvSpPr>
         <p:spPr>
           <a:xfrm>
-            <a:off x="8321040" y="2240280"/>
-            <a:ext cx="3108960" cy="411480"/>
+            <a:off x="8503920" y="2240280"/>
+            <a:ext cx="2926080" cy="411480"/>
           </a:xfrm>
           <a:prstGeom prst="rect">
             <a:avLst/>
@@ -7088,7 +7252,7 @@
                 <a:ea typeface="Calibri" pitchFamily="34" charset="-122"/>
                 <a:cs typeface="Calibri" pitchFamily="34" charset="-120"/>
               </a:rPr>
-              <a:t>Sin ninguna nota firmada</a:t>
+              <a:t>En toda la base</a:t>
             </a:r>
             <a:endParaRPr lang="en-US" sz="1800" dirty="0"/>
           </a:p>
@@ -7102,8 +7266,8 @@
         </p:nvSpPr>
         <p:spPr>
           <a:xfrm>
-            <a:off x="8321040" y="2788920"/>
-            <a:ext cx="3108960" cy="2926080"/>
+            <a:off x="8503920" y="2788920"/>
+            <a:ext cx="1463040" cy="685800"/>
           </a:xfrm>
           <a:prstGeom prst="rect">
             <a:avLst/>
@@ -7115,12 +7279,47 @@
           <a:bodyPr wrap="square" lIns="0" tIns="0" rIns="0" bIns="0" rtlCol="0" anchor="t"/>
           <a:lstStyle/>
           <a:p>
-            <a:pPr marL="342900" indent="-342900">
-              <a:spcAft>
-                <a:spcPts val="600"/>
-              </a:spcAft>
-              <a:buSzPct val="100000"/>
-              <a:buChar char="•"/>
+            <a:pPr indent="0" marL="0">
+              <a:buNone/>
+            </a:pPr>
+            <a:r>
+              <a:rPr lang="en-US" sz="3600" b="1" dirty="0">
+                <a:solidFill>
+                  <a:srgbClr val="C8102E"/>
+                </a:solidFill>
+                <a:latin typeface="Cambria" pitchFamily="34" charset="0"/>
+                <a:ea typeface="Cambria" pitchFamily="34" charset="-122"/>
+                <a:cs typeface="Cambria" pitchFamily="34" charset="-120"/>
+              </a:rPr>
+              <a:t>39%</a:t>
+            </a:r>
+            <a:endParaRPr lang="en-US" sz="3600" dirty="0"/>
+          </a:p>
+        </p:txBody>
+      </p:sp>
+      <p:sp>
+        <p:nvSpPr>
+          <p:cNvPr id="9" name="Text 5"/>
+          <p:cNvSpPr txBox="1"/>
+          <p:nvPr/>
+        </p:nvSpPr>
+        <p:spPr>
+          <a:xfrm>
+            <a:off x="10012680" y="2971800"/>
+            <a:ext cx="1463040" cy="411480"/>
+          </a:xfrm>
+          <a:prstGeom prst="rect">
+            <a:avLst/>
+          </a:prstGeom>
+          <a:noFill/>
+          <a:ln/>
+        </p:spPr>
+        <p:txBody>
+          <a:bodyPr wrap="square" lIns="0" tIns="0" rIns="0" bIns="0" rtlCol="0" anchor="t"/>
+          <a:lstStyle/>
+          <a:p>
+            <a:pPr indent="0" marL="0">
+              <a:buNone/>
             </a:pPr>
             <a:r>
               <a:rPr lang="en-US" sz="1600" dirty="0">
@@ -7131,17 +7330,74 @@
                 <a:ea typeface="Calibri" pitchFamily="34" charset="-122"/>
                 <a:cs typeface="Calibri" pitchFamily="34" charset="-120"/>
               </a:rPr>
-              <a:t>Elonce</a:t>
+              <a:t>Negativo</a:t>
             </a:r>
             <a:endParaRPr lang="en-US" sz="1600" dirty="0"/>
           </a:p>
-          <a:p>
-            <a:pPr marL="342900" indent="-342900">
-              <a:spcAft>
-                <a:spcPts val="600"/>
-              </a:spcAft>
-              <a:buSzPct val="100000"/>
-              <a:buChar char="•"/>
+        </p:txBody>
+      </p:sp>
+      <p:sp>
+        <p:nvSpPr>
+          <p:cNvPr id="10" name="Text 6"/>
+          <p:cNvSpPr txBox="1"/>
+          <p:nvPr/>
+        </p:nvSpPr>
+        <p:spPr>
+          <a:xfrm>
+            <a:off x="8503920" y="3749040"/>
+            <a:ext cx="1463040" cy="685800"/>
+          </a:xfrm>
+          <a:prstGeom prst="rect">
+            <a:avLst/>
+          </a:prstGeom>
+          <a:noFill/>
+          <a:ln/>
+        </p:spPr>
+        <p:txBody>
+          <a:bodyPr wrap="square" lIns="0" tIns="0" rIns="0" bIns="0" rtlCol="0" anchor="t"/>
+          <a:lstStyle/>
+          <a:p>
+            <a:pPr indent="0" marL="0">
+              <a:buNone/>
+            </a:pPr>
+            <a:r>
+              <a:rPr lang="en-US" sz="3600" b="1" dirty="0">
+                <a:solidFill>
+                  <a:srgbClr val="6B6B6B"/>
+                </a:solidFill>
+                <a:latin typeface="Cambria" pitchFamily="34" charset="0"/>
+                <a:ea typeface="Cambria" pitchFamily="34" charset="-122"/>
+                <a:cs typeface="Cambria" pitchFamily="34" charset="-120"/>
+              </a:rPr>
+              <a:t>49%</a:t>
+            </a:r>
+            <a:endParaRPr lang="en-US" sz="3600" dirty="0"/>
+          </a:p>
+        </p:txBody>
+      </p:sp>
+      <p:sp>
+        <p:nvSpPr>
+          <p:cNvPr id="11" name="Text 7"/>
+          <p:cNvSpPr txBox="1"/>
+          <p:nvPr/>
+        </p:nvSpPr>
+        <p:spPr>
+          <a:xfrm>
+            <a:off x="10012680" y="3931920"/>
+            <a:ext cx="1463040" cy="411480"/>
+          </a:xfrm>
+          <a:prstGeom prst="rect">
+            <a:avLst/>
+          </a:prstGeom>
+          <a:noFill/>
+          <a:ln/>
+        </p:spPr>
+        <p:txBody>
+          <a:bodyPr wrap="square" lIns="0" tIns="0" rIns="0" bIns="0" rtlCol="0" anchor="t"/>
+          <a:lstStyle/>
+          <a:p>
+            <a:pPr indent="0" marL="0">
+              <a:buNone/>
             </a:pPr>
             <a:r>
               <a:rPr lang="en-US" sz="1600" dirty="0">
@@ -7152,17 +7408,74 @@
                 <a:ea typeface="Calibri" pitchFamily="34" charset="-122"/>
                 <a:cs typeface="Calibri" pitchFamily="34" charset="-120"/>
               </a:rPr>
-              <a:t>La Capital (Mar del Plata)</a:t>
+              <a:t>Neutro</a:t>
             </a:r>
             <a:endParaRPr lang="en-US" sz="1600" dirty="0"/>
           </a:p>
-          <a:p>
-            <a:pPr marL="342900" indent="-342900">
-              <a:spcAft>
-                <a:spcPts val="600"/>
-              </a:spcAft>
-              <a:buSzPct val="100000"/>
-              <a:buChar char="•"/>
+        </p:txBody>
+      </p:sp>
+      <p:sp>
+        <p:nvSpPr>
+          <p:cNvPr id="12" name="Text 8"/>
+          <p:cNvSpPr txBox="1"/>
+          <p:nvPr/>
+        </p:nvSpPr>
+        <p:spPr>
+          <a:xfrm>
+            <a:off x="8503920" y="4709160"/>
+            <a:ext cx="1463040" cy="685800"/>
+          </a:xfrm>
+          <a:prstGeom prst="rect">
+            <a:avLst/>
+          </a:prstGeom>
+          <a:noFill/>
+          <a:ln/>
+        </p:spPr>
+        <p:txBody>
+          <a:bodyPr wrap="square" lIns="0" tIns="0" rIns="0" bIns="0" rtlCol="0" anchor="t"/>
+          <a:lstStyle/>
+          <a:p>
+            <a:pPr indent="0" marL="0">
+              <a:buNone/>
+            </a:pPr>
+            <a:r>
+              <a:rPr lang="en-US" sz="3600" b="1" dirty="0">
+                <a:solidFill>
+                  <a:srgbClr val="3D8A5A"/>
+                </a:solidFill>
+                <a:latin typeface="Cambria" pitchFamily="34" charset="0"/>
+                <a:ea typeface="Cambria" pitchFamily="34" charset="-122"/>
+                <a:cs typeface="Cambria" pitchFamily="34" charset="-120"/>
+              </a:rPr>
+              <a:t>13%</a:t>
+            </a:r>
+            <a:endParaRPr lang="en-US" sz="3600" dirty="0"/>
+          </a:p>
+        </p:txBody>
+      </p:sp>
+      <p:sp>
+        <p:nvSpPr>
+          <p:cNvPr id="13" name="Text 9"/>
+          <p:cNvSpPr txBox="1"/>
+          <p:nvPr/>
+        </p:nvSpPr>
+        <p:spPr>
+          <a:xfrm>
+            <a:off x="10012680" y="4892040"/>
+            <a:ext cx="1463040" cy="411480"/>
+          </a:xfrm>
+          <a:prstGeom prst="rect">
+            <a:avLst/>
+          </a:prstGeom>
+          <a:noFill/>
+          <a:ln/>
+        </p:spPr>
+        <p:txBody>
+          <a:bodyPr wrap="square" lIns="0" tIns="0" rIns="0" bIns="0" rtlCol="0" anchor="t"/>
+          <a:lstStyle/>
+          <a:p>
+            <a:pPr indent="0" marL="0">
+              <a:buNone/>
             </a:pPr>
             <a:r>
               <a:rPr lang="en-US" sz="1600" dirty="0">
@@ -7173,70 +7486,7 @@
                 <a:ea typeface="Calibri" pitchFamily="34" charset="-122"/>
                 <a:cs typeface="Calibri" pitchFamily="34" charset="-120"/>
               </a:rPr>
-              <a:t>Radio Continental</a:t>
-            </a:r>
-            <a:endParaRPr lang="en-US" sz="1600" dirty="0"/>
-          </a:p>
-          <a:p>
-            <a:pPr marL="342900" indent="-342900">
-              <a:spcAft>
-                <a:spcPts val="600"/>
-              </a:spcAft>
-              <a:buSzPct val="100000"/>
-              <a:buChar char="•"/>
-            </a:pPr>
-            <a:r>
-              <a:rPr lang="en-US" sz="1600" dirty="0">
-                <a:solidFill>
-                  <a:srgbClr val="1A1A1A"/>
-                </a:solidFill>
-                <a:latin typeface="Calibri" pitchFamily="34" charset="0"/>
-                <a:ea typeface="Calibri" pitchFamily="34" charset="-122"/>
-                <a:cs typeface="Calibri" pitchFamily="34" charset="-120"/>
-              </a:rPr>
-              <a:t>Radio Mitre</a:t>
-            </a:r>
-            <a:endParaRPr lang="en-US" sz="1600" dirty="0"/>
-          </a:p>
-          <a:p>
-            <a:pPr marL="342900" indent="-342900">
-              <a:spcAft>
-                <a:spcPts val="600"/>
-              </a:spcAft>
-              <a:buSzPct val="100000"/>
-              <a:buChar char="•"/>
-            </a:pPr>
-            <a:r>
-              <a:rPr lang="en-US" sz="1600" dirty="0">
-                <a:solidFill>
-                  <a:srgbClr val="1A1A1A"/>
-                </a:solidFill>
-                <a:latin typeface="Calibri" pitchFamily="34" charset="0"/>
-                <a:ea typeface="Calibri" pitchFamily="34" charset="-122"/>
-                <a:cs typeface="Calibri" pitchFamily="34" charset="-120"/>
-              </a:rPr>
-              <a:t>Rosario Nuestro</a:t>
-            </a:r>
-            <a:endParaRPr lang="en-US" sz="1600" dirty="0"/>
-          </a:p>
-          <a:p>
-            <a:pPr marL="342900" indent="-342900">
-              <a:spcAft>
-                <a:spcPts val="600"/>
-              </a:spcAft>
-              <a:buSzPct val="100000"/>
-              <a:buChar char="•"/>
-            </a:pPr>
-            <a:r>
-              <a:rPr lang="en-US" sz="1600" dirty="0">
-                <a:solidFill>
-                  <a:srgbClr val="1A1A1A"/>
-                </a:solidFill>
-                <a:latin typeface="Calibri" pitchFamily="34" charset="0"/>
-                <a:ea typeface="Calibri" pitchFamily="34" charset="-122"/>
-                <a:cs typeface="Calibri" pitchFamily="34" charset="-120"/>
-              </a:rPr>
-              <a:t>Rosario3</a:t>
+              <a:t>Positivo</a:t>
             </a:r>
             <a:endParaRPr lang="en-US" sz="1600" dirty="0"/>
           </a:p>
@@ -7344,7 +7594,7 @@
                   <a:schemeClr val="accent1"/>
                 </a:solidFill>
               </a:rPr>
-              <a:t>EL TABLERO</a:t>
+              <a:t>TRANSPARENCIA</a:t>
             </a:r>
             <a:endParaRPr lang="en-US" sz="1200" dirty="0"/>
           </a:p>
@@ -7385,53 +7635,50 @@
                 <a:ea typeface="Cambria" pitchFamily="34" charset="-122"/>
                 <a:cs typeface="Cambria" pitchFamily="34" charset="-120"/>
               </a:rPr>
-              <a:t>Todo esto, en un tablero público que se actualiza solo</a:t>
+              <a:t>Perfil firma el 92% de sus notas; Radio Mitre y Rosario3, ninguna</a:t>
             </a:r>
             <a:endParaRPr lang="en-US" sz="3200" dirty="0"/>
           </a:p>
         </p:txBody>
       </p:sp>
-      <p:pic>
-        <p:nvPicPr>
-          <p:cNvPr id="5" name="captura" descr="C:\Users\SBI\Documents\Martin Ceriotti Personales\Master Data Science\webmining\Web-Mining\docs\_fuentes\img\tablero-resumen.png">    </p:cNvPr>
-          <p:cNvPicPr>
-            <a:picLocks noChangeAspect="1"/>
-          </p:cNvPicPr>
-          <p:nvPr/>
-        </p:nvPicPr>
-        <p:blipFill>
-          <a:blip r:embed="rId1"/>
-          <a:stretch>
-            <a:fillRect/>
-          </a:stretch>
-        </p:blipFill>
-        <p:spPr>
-          <a:xfrm>
-            <a:off x="548640" y="1874520"/>
-            <a:ext cx="6583680" cy="4114800"/>
-          </a:xfrm>
-          <a:prstGeom prst="rect">
-            <a:avLst/>
-          </a:prstGeom>
-        </p:spPr>
-      </p:pic>
-      <p:sp>
-        <p:nvSpPr>
-          <p:cNvPr id="6" name="marco"/>
+      <p:graphicFrame>
+        <p:nvGraphicFramePr>
+          <p:cNvPr id="5" name="grafico" descr=""/>
+          <p:cNvGraphicFramePr/>
+          <p:nvPr/>
+        </p:nvGraphicFramePr>
+        <p:xfrm>
+          <a:off x="457200" y="1874520"/>
+          <a:ext cx="7132320" cy="4343400"/>
+        </p:xfrm>
+        <a:graphic xmlns:a="http://schemas.openxmlformats.org/drawingml/2006/main">
+          <a:graphicData uri="http://schemas.openxmlformats.org/drawingml/2006/chart">
+            <c:chart xmlns:c="http://schemas.openxmlformats.org/drawingml/2006/chart" r:id="rId1"/>
+          </a:graphicData>
+        </a:graphic>
+      </p:graphicFrame>
+      <p:sp>
+        <p:nvSpPr>
+          <p:cNvPr id="6" name="sin-firma"/>
           <p:cNvSpPr/>
           <p:nvPr/>
         </p:nvSpPr>
         <p:spPr>
           <a:xfrm>
-            <a:off x="548640" y="1874520"/>
-            <a:ext cx="6583680" cy="4114800"/>
-          </a:xfrm>
-          <a:prstGeom prst="rect">
-            <a:avLst/>
-          </a:prstGeom>
+            <a:off x="8046720" y="2011680"/>
+            <a:ext cx="3593592" cy="3931920"/>
+          </a:xfrm>
+          <a:prstGeom prst="roundRect">
+            <a:avLst>
+              <a:gd name="adj" fmla="val 2036"/>
+            </a:avLst>
+          </a:prstGeom>
+          <a:solidFill>
+            <a:srgbClr val="F2F2F0"/>
+          </a:solidFill>
           <a:ln w="12700">
             <a:solidFill>
-              <a:srgbClr val="D9D9D6"/>
+              <a:srgbClr val="F2F2F0"/>
             </a:solidFill>
             <a:prstDash val="solid"/>
           </a:ln>
@@ -7445,8 +7692,8 @@
         </p:nvSpPr>
         <p:spPr>
           <a:xfrm>
-            <a:off x="7498080" y="1920240"/>
-            <a:ext cx="4114800" cy="640080"/>
+            <a:off x="8321040" y="2240280"/>
+            <a:ext cx="3108960" cy="411480"/>
           </a:xfrm>
           <a:prstGeom prst="rect">
             <a:avLst/>
@@ -7462,7 +7709,7 @@
               <a:buNone/>
             </a:pPr>
             <a:r>
-              <a:rPr lang="en-US" sz="1500" b="1" dirty="0">
+              <a:rPr lang="en-US" sz="1800" b="1" dirty="0">
                 <a:solidFill>
                   <a:srgbClr val="1A1A1A"/>
                 </a:solidFill>
@@ -7470,55 +7717,63 @@
                 <a:ea typeface="Calibri" pitchFamily="34" charset="-122"/>
                 <a:cs typeface="Calibri" pitchFamily="34" charset="-120"/>
               </a:rPr>
-              <a:t>Resumen</a:t>
-            </a:r>
-            <a:endParaRPr lang="en-US" sz="1500" dirty="0"/>
-          </a:p>
-          <a:p>
-            <a:pPr indent="0" marL="0">
-              <a:buNone/>
-            </a:pPr>
-            <a:r>
-              <a:rPr lang="en-US" sz="1500" dirty="0">
-                <a:solidFill>
-                  <a:srgbClr val="6B6B6B"/>
+              <a:t>Sin ninguna nota firmada</a:t>
+            </a:r>
+            <a:endParaRPr lang="en-US" sz="1800" dirty="0"/>
+          </a:p>
+        </p:txBody>
+      </p:sp>
+      <p:sp>
+        <p:nvSpPr>
+          <p:cNvPr id="8" name="Text 4"/>
+          <p:cNvSpPr txBox="1"/>
+          <p:nvPr/>
+        </p:nvSpPr>
+        <p:spPr>
+          <a:xfrm>
+            <a:off x="8321040" y="2788920"/>
+            <a:ext cx="3108960" cy="2926080"/>
+          </a:xfrm>
+          <a:prstGeom prst="rect">
+            <a:avLst/>
+          </a:prstGeom>
+          <a:noFill/>
+          <a:ln/>
+        </p:spPr>
+        <p:txBody>
+          <a:bodyPr wrap="square" lIns="0" tIns="0" rIns="0" bIns="0" rtlCol="0" anchor="t"/>
+          <a:lstStyle/>
+          <a:p>
+            <a:pPr marL="342900" indent="-342900">
+              <a:spcAft>
+                <a:spcPts val="600"/>
+              </a:spcAft>
+              <a:buSzPct val="100000"/>
+              <a:buChar char="•"/>
+            </a:pPr>
+            <a:r>
+              <a:rPr lang="en-US" sz="1600" dirty="0">
+                <a:solidFill>
+                  <a:srgbClr val="1A1A1A"/>
                 </a:solidFill>
                 <a:latin typeface="Calibri" pitchFamily="34" charset="0"/>
                 <a:ea typeface="Calibri" pitchFamily="34" charset="-122"/>
                 <a:cs typeface="Calibri" pitchFamily="34" charset="-120"/>
               </a:rPr>
-              <a:t>temas, entidades y noticias compartidas</a:t>
-            </a:r>
-            <a:endParaRPr lang="en-US" sz="1500" dirty="0"/>
-          </a:p>
-        </p:txBody>
-      </p:sp>
-      <p:sp>
-        <p:nvSpPr>
-          <p:cNvPr id="8" name="Text 4"/>
-          <p:cNvSpPr txBox="1"/>
-          <p:nvPr/>
-        </p:nvSpPr>
-        <p:spPr>
-          <a:xfrm>
-            <a:off x="7498080" y="2606040"/>
-            <a:ext cx="4114800" cy="640080"/>
-          </a:xfrm>
-          <a:prstGeom prst="rect">
-            <a:avLst/>
-          </a:prstGeom>
-          <a:noFill/>
-          <a:ln/>
-        </p:spPr>
-        <p:txBody>
-          <a:bodyPr wrap="square" lIns="0" tIns="0" rIns="0" bIns="0" rtlCol="0" anchor="t"/>
-          <a:lstStyle/>
-          <a:p>
-            <a:pPr indent="0" marL="0">
-              <a:buNone/>
-            </a:pPr>
-            <a:r>
-              <a:rPr lang="en-US" sz="1500" b="1" dirty="0">
+              <a:t>Elonce</a:t>
+            </a:r>
+            <a:endParaRPr lang="en-US" sz="1600" dirty="0"/>
+          </a:p>
+          <a:p>
+            <a:pPr marL="342900" indent="-342900">
+              <a:spcAft>
+                <a:spcPts val="600"/>
+              </a:spcAft>
+              <a:buSzPct val="100000"/>
+              <a:buChar char="•"/>
+            </a:pPr>
+            <a:r>
+              <a:rPr lang="en-US" sz="1600" dirty="0">
                 <a:solidFill>
                   <a:srgbClr val="1A1A1A"/>
                 </a:solidFill>
@@ -7526,55 +7781,41 @@
                 <a:ea typeface="Calibri" pitchFamily="34" charset="-122"/>
                 <a:cs typeface="Calibri" pitchFamily="34" charset="-120"/>
               </a:rPr>
-              <a:t>Titulares</a:t>
-            </a:r>
-            <a:endParaRPr lang="en-US" sz="1500" dirty="0"/>
-          </a:p>
-          <a:p>
-            <a:pPr indent="0" marL="0">
-              <a:buNone/>
-            </a:pPr>
-            <a:r>
-              <a:rPr lang="en-US" sz="1500" dirty="0">
-                <a:solidFill>
-                  <a:srgbClr val="6B6B6B"/>
+              <a:t>La Capital (Mar del Plata)</a:t>
+            </a:r>
+            <a:endParaRPr lang="en-US" sz="1600" dirty="0"/>
+          </a:p>
+          <a:p>
+            <a:pPr marL="342900" indent="-342900">
+              <a:spcAft>
+                <a:spcPts val="600"/>
+              </a:spcAft>
+              <a:buSzPct val="100000"/>
+              <a:buChar char="•"/>
+            </a:pPr>
+            <a:r>
+              <a:rPr lang="en-US" sz="1600" dirty="0">
+                <a:solidFill>
+                  <a:srgbClr val="1A1A1A"/>
                 </a:solidFill>
                 <a:latin typeface="Calibri" pitchFamily="34" charset="0"/>
                 <a:ea typeface="Calibri" pitchFamily="34" charset="-122"/>
                 <a:cs typeface="Calibri" pitchFamily="34" charset="-120"/>
               </a:rPr>
-              <a:t>buscador y filtros por medio y tema</a:t>
-            </a:r>
-            <a:endParaRPr lang="en-US" sz="1500" dirty="0"/>
-          </a:p>
-        </p:txBody>
-      </p:sp>
-      <p:sp>
-        <p:nvSpPr>
-          <p:cNvPr id="9" name="Text 5"/>
-          <p:cNvSpPr txBox="1"/>
-          <p:nvPr/>
-        </p:nvSpPr>
-        <p:spPr>
-          <a:xfrm>
-            <a:off x="7498080" y="3291840"/>
-            <a:ext cx="4114800" cy="640080"/>
-          </a:xfrm>
-          <a:prstGeom prst="rect">
-            <a:avLst/>
-          </a:prstGeom>
-          <a:noFill/>
-          <a:ln/>
-        </p:spPr>
-        <p:txBody>
-          <a:bodyPr wrap="square" lIns="0" tIns="0" rIns="0" bIns="0" rtlCol="0" anchor="t"/>
-          <a:lstStyle/>
-          <a:p>
-            <a:pPr indent="0" marL="0">
-              <a:buNone/>
-            </a:pPr>
-            <a:r>
-              <a:rPr lang="en-US" sz="1500" b="1" dirty="0">
+              <a:t>Radio Continental</a:t>
+            </a:r>
+            <a:endParaRPr lang="en-US" sz="1600" dirty="0"/>
+          </a:p>
+          <a:p>
+            <a:pPr marL="342900" indent="-342900">
+              <a:spcAft>
+                <a:spcPts val="600"/>
+              </a:spcAft>
+              <a:buSzPct val="100000"/>
+              <a:buChar char="•"/>
+            </a:pPr>
+            <a:r>
+              <a:rPr lang="en-US" sz="1600" dirty="0">
                 <a:solidFill>
                   <a:srgbClr val="1A1A1A"/>
                 </a:solidFill>
@@ -7582,55 +7823,41 @@
                 <a:ea typeface="Calibri" pitchFamily="34" charset="-122"/>
                 <a:cs typeface="Calibri" pitchFamily="34" charset="-120"/>
               </a:rPr>
-              <a:t>Monitor</a:t>
-            </a:r>
-            <a:endParaRPr lang="en-US" sz="1500" dirty="0"/>
-          </a:p>
-          <a:p>
-            <a:pPr indent="0" marL="0">
-              <a:buNone/>
-            </a:pPr>
-            <a:r>
-              <a:rPr lang="en-US" sz="1500" dirty="0">
-                <a:solidFill>
-                  <a:srgbClr val="6B6B6B"/>
+              <a:t>Radio Mitre</a:t>
+            </a:r>
+            <a:endParaRPr lang="en-US" sz="1600" dirty="0"/>
+          </a:p>
+          <a:p>
+            <a:pPr marL="342900" indent="-342900">
+              <a:spcAft>
+                <a:spcPts val="600"/>
+              </a:spcAft>
+              <a:buSzPct val="100000"/>
+              <a:buChar char="•"/>
+            </a:pPr>
+            <a:r>
+              <a:rPr lang="en-US" sz="1600" dirty="0">
+                <a:solidFill>
+                  <a:srgbClr val="1A1A1A"/>
                 </a:solidFill>
                 <a:latin typeface="Calibri" pitchFamily="34" charset="0"/>
                 <a:ea typeface="Calibri" pitchFamily="34" charset="-122"/>
                 <a:cs typeface="Calibri" pitchFamily="34" charset="-120"/>
               </a:rPr>
-              <a:t>seguir una persona o marca</a:t>
-            </a:r>
-            <a:endParaRPr lang="en-US" sz="1500" dirty="0"/>
-          </a:p>
-        </p:txBody>
-      </p:sp>
-      <p:sp>
-        <p:nvSpPr>
-          <p:cNvPr id="10" name="Text 6"/>
-          <p:cNvSpPr txBox="1"/>
-          <p:nvPr/>
-        </p:nvSpPr>
-        <p:spPr>
-          <a:xfrm>
-            <a:off x="7498080" y="3977640"/>
-            <a:ext cx="4114800" cy="640080"/>
-          </a:xfrm>
-          <a:prstGeom prst="rect">
-            <a:avLst/>
-          </a:prstGeom>
-          <a:noFill/>
-          <a:ln/>
-        </p:spPr>
-        <p:txBody>
-          <a:bodyPr wrap="square" lIns="0" tIns="0" rIns="0" bIns="0" rtlCol="0" anchor="t"/>
-          <a:lstStyle/>
-          <a:p>
-            <a:pPr indent="0" marL="0">
-              <a:buNone/>
-            </a:pPr>
-            <a:r>
-              <a:rPr lang="en-US" sz="1500" b="1" dirty="0">
+              <a:t>Rosario Nuestro</a:t>
+            </a:r>
+            <a:endParaRPr lang="en-US" sz="1600" dirty="0"/>
+          </a:p>
+          <a:p>
+            <a:pPr marL="342900" indent="-342900">
+              <a:spcAft>
+                <a:spcPts val="600"/>
+              </a:spcAft>
+              <a:buSzPct val="100000"/>
+              <a:buChar char="•"/>
+            </a:pPr>
+            <a:r>
+              <a:rPr lang="en-US" sz="1600" dirty="0">
                 <a:solidFill>
                   <a:srgbClr val="1A1A1A"/>
                 </a:solidFill>
@@ -7638,138 +7865,9 @@
                 <a:ea typeface="Calibri" pitchFamily="34" charset="-122"/>
                 <a:cs typeface="Calibri" pitchFamily="34" charset="-120"/>
               </a:rPr>
-              <a:t>Cómo titulan</a:t>
-            </a:r>
-            <a:endParaRPr lang="en-US" sz="1500" dirty="0"/>
-          </a:p>
-          <a:p>
-            <a:pPr indent="0" marL="0">
-              <a:buNone/>
-            </a:pPr>
-            <a:r>
-              <a:rPr lang="en-US" sz="1500" dirty="0">
-                <a:solidFill>
-                  <a:srgbClr val="6B6B6B"/>
-                </a:solidFill>
-                <a:latin typeface="Calibri" pitchFamily="34" charset="0"/>
-                <a:ea typeface="Calibri" pitchFamily="34" charset="-122"/>
-                <a:cs typeface="Calibri" pitchFamily="34" charset="-120"/>
-              </a:rPr>
-              <a:t>mapa, rankings y ejemplos</a:t>
-            </a:r>
-            <a:endParaRPr lang="en-US" sz="1500" dirty="0"/>
-          </a:p>
-        </p:txBody>
-      </p:sp>
-      <p:sp>
-        <p:nvSpPr>
-          <p:cNvPr id="11" name="Text 7"/>
-          <p:cNvSpPr txBox="1"/>
-          <p:nvPr/>
-        </p:nvSpPr>
-        <p:spPr>
-          <a:xfrm>
-            <a:off x="7498080" y="4663440"/>
-            <a:ext cx="4114800" cy="640080"/>
-          </a:xfrm>
-          <a:prstGeom prst="rect">
-            <a:avLst/>
-          </a:prstGeom>
-          <a:noFill/>
-          <a:ln/>
-        </p:spPr>
-        <p:txBody>
-          <a:bodyPr wrap="square" lIns="0" tIns="0" rIns="0" bIns="0" rtlCol="0" anchor="t"/>
-          <a:lstStyle/>
-          <a:p>
-            <a:pPr indent="0" marL="0">
-              <a:buNone/>
-            </a:pPr>
-            <a:r>
-              <a:rPr lang="en-US" sz="1500" b="1" dirty="0">
-                <a:solidFill>
-                  <a:srgbClr val="1A1A1A"/>
-                </a:solidFill>
-                <a:latin typeface="Calibri" pitchFamily="34" charset="0"/>
-                <a:ea typeface="Calibri" pitchFamily="34" charset="-122"/>
-                <a:cs typeface="Calibri" pitchFamily="34" charset="-120"/>
-              </a:rPr>
-              <a:t>Tendencias</a:t>
-            </a:r>
-            <a:endParaRPr lang="en-US" sz="1500" dirty="0"/>
-          </a:p>
-          <a:p>
-            <a:pPr indent="0" marL="0">
-              <a:buNone/>
-            </a:pPr>
-            <a:r>
-              <a:rPr lang="en-US" sz="1500" dirty="0">
-                <a:solidFill>
-                  <a:srgbClr val="6B6B6B"/>
-                </a:solidFill>
-                <a:latin typeface="Calibri" pitchFamily="34" charset="0"/>
-                <a:ea typeface="Calibri" pitchFamily="34" charset="-122"/>
-                <a:cs typeface="Calibri" pitchFamily="34" charset="-120"/>
-              </a:rPr>
-              <a:t>alertas y notas por hora</a:t>
-            </a:r>
-            <a:endParaRPr lang="en-US" sz="1500" dirty="0"/>
-          </a:p>
-        </p:txBody>
-      </p:sp>
-      <p:sp>
-        <p:nvSpPr>
-          <p:cNvPr id="12" name="Text 8"/>
-          <p:cNvSpPr txBox="1"/>
-          <p:nvPr/>
-        </p:nvSpPr>
-        <p:spPr>
-          <a:xfrm>
-            <a:off x="7498080" y="5349240"/>
-            <a:ext cx="4114800" cy="640080"/>
-          </a:xfrm>
-          <a:prstGeom prst="rect">
-            <a:avLst/>
-          </a:prstGeom>
-          <a:noFill/>
-          <a:ln/>
-        </p:spPr>
-        <p:txBody>
-          <a:bodyPr wrap="square" lIns="0" tIns="0" rIns="0" bIns="0" rtlCol="0" anchor="t"/>
-          <a:lstStyle/>
-          <a:p>
-            <a:pPr indent="0" marL="0">
-              <a:buNone/>
-            </a:pPr>
-            <a:r>
-              <a:rPr lang="en-US" sz="1500" b="1" dirty="0">
-                <a:solidFill>
-                  <a:srgbClr val="1A1A1A"/>
-                </a:solidFill>
-                <a:latin typeface="Calibri" pitchFamily="34" charset="0"/>
-                <a:ea typeface="Calibri" pitchFamily="34" charset="-122"/>
-                <a:cs typeface="Calibri" pitchFamily="34" charset="-120"/>
-              </a:rPr>
-              <a:t>Salud de datos</a:t>
-            </a:r>
-            <a:endParaRPr lang="en-US" sz="1500" dirty="0"/>
-          </a:p>
-          <a:p>
-            <a:pPr indent="0" marL="0">
-              <a:buNone/>
-            </a:pPr>
-            <a:r>
-              <a:rPr lang="en-US" sz="1500" dirty="0">
-                <a:solidFill>
-                  <a:srgbClr val="6B6B6B"/>
-                </a:solidFill>
-                <a:latin typeface="Calibri" pitchFamily="34" charset="0"/>
-                <a:ea typeface="Calibri" pitchFamily="34" charset="-122"/>
-                <a:cs typeface="Calibri" pitchFamily="34" charset="-120"/>
-              </a:rPr>
-              <a:t>fuentes y scraping</a:t>
-            </a:r>
-            <a:endParaRPr lang="en-US" sz="1500" dirty="0"/>
+              <a:t>Rosario3</a:t>
+            </a:r>
+            <a:endParaRPr lang="en-US" sz="1600" dirty="0"/>
           </a:p>
         </p:txBody>
       </p:sp>
@@ -7875,7 +7973,7 @@
                   <a:schemeClr val="accent1"/>
                 </a:solidFill>
               </a:rPr>
-              <a:t>DEMO EN VIVO</a:t>
+              <a:t>ENCUADRE</a:t>
             </a:r>
             <a:endParaRPr lang="en-US" sz="1200" dirty="0"/>
           </a:p>
@@ -7916,26 +8014,50 @@
                 <a:ea typeface="Cambria" pitchFamily="34" charset="-122"/>
                 <a:cs typeface="Cambria" pitchFamily="34" charset="-120"/>
               </a:rPr>
-              <a:t>La base se consulta con SQL desde el navegador</a:t>
+              <a:t>Una noticia, muchos encuadres</a:t>
             </a:r>
             <a:endParaRPr lang="en-US" sz="3200" dirty="0"/>
           </a:p>
         </p:txBody>
       </p:sp>
-      <p:sp>
-        <p:nvSpPr>
-          <p:cNvPr id="5" name="sql"/>
+      <p:pic>
+        <p:nvPicPr>
+          <p:cNvPr id="5" name="encuadre" descr="C:\Users\SBI\Documents\Martin Ceriotti Personales\Master Data Science\webmining\Web-Mining\docs\_fuentes\img\encuadre.png">    </p:cNvPr>
+          <p:cNvPicPr>
+            <a:picLocks noChangeAspect="1"/>
+          </p:cNvPicPr>
+          <p:nvPr/>
+        </p:nvPicPr>
+        <p:blipFill>
+          <a:blip r:embed="rId1"/>
+          <a:stretch>
+            <a:fillRect/>
+          </a:stretch>
+        </p:blipFill>
+        <p:spPr>
+          <a:xfrm>
+            <a:off x="548640" y="1874520"/>
+            <a:ext cx="6949440" cy="4528849"/>
+          </a:xfrm>
+          <a:prstGeom prst="rect">
+            <a:avLst/>
+          </a:prstGeom>
+        </p:spPr>
+      </p:pic>
+      <p:sp>
+        <p:nvSpPr>
+          <p:cNvPr id="6" name="primicia"/>
           <p:cNvSpPr/>
           <p:nvPr/>
         </p:nvSpPr>
         <p:spPr>
           <a:xfrm>
-            <a:off x="548640" y="2011680"/>
-            <a:ext cx="6400800" cy="3931920"/>
+            <a:off x="7863840" y="1874520"/>
+            <a:ext cx="3776472" cy="4160520"/>
           </a:xfrm>
           <a:prstGeom prst="roundRect">
             <a:avLst>
-              <a:gd name="adj" fmla="val 1860"/>
+              <a:gd name="adj" fmla="val 1937"/>
             </a:avLst>
           </a:prstGeom>
           <a:solidFill>
@@ -7951,14 +8073,14 @@
       </p:sp>
       <p:sp>
         <p:nvSpPr>
-          <p:cNvPr id="6" name="Text 3"/>
+          <p:cNvPr id="7" name="Text 3"/>
           <p:cNvSpPr txBox="1"/>
           <p:nvPr/>
         </p:nvSpPr>
         <p:spPr>
           <a:xfrm>
-            <a:off x="868680" y="2331720"/>
-            <a:ext cx="5852160" cy="3383280"/>
+            <a:off x="8138160" y="2103120"/>
+            <a:ext cx="3291840" cy="411480"/>
           </a:xfrm>
           <a:prstGeom prst="rect">
             <a:avLst/>
@@ -7974,132 +8096,30 @@
               <a:buNone/>
             </a:pPr>
             <a:r>
-              <a:rPr lang="en-US" sz="1800" dirty="0">
+              <a:rPr lang="en-US" sz="1800" b="1" dirty="0">
                 <a:solidFill>
                   <a:srgbClr val="1A1A1A"/>
                 </a:solidFill>
-                <a:latin typeface="Courier New" pitchFamily="34" charset="0"/>
-                <a:ea typeface="Courier New" pitchFamily="34" charset="-122"/>
-                <a:cs typeface="Courier New" pitchFamily="34" charset="-120"/>
-              </a:rPr>
-              <a:t>SELECT medio,</a:t>
+                <a:latin typeface="Calibri" pitchFamily="34" charset="0"/>
+                <a:ea typeface="Calibri" pitchFamily="34" charset="-122"/>
+                <a:cs typeface="Calibri" pitchFamily="34" charset="-120"/>
+              </a:rPr>
+              <a:t>Quién llega primero</a:t>
             </a:r>
             <a:endParaRPr lang="en-US" sz="1800" dirty="0"/>
           </a:p>
-          <a:p>
-            <a:pPr indent="0" marL="0">
-              <a:buNone/>
-            </a:pPr>
-            <a:r>
-              <a:rPr lang="en-US" sz="1800" dirty="0">
-                <a:solidFill>
-                  <a:srgbClr val="1A1A1A"/>
-                </a:solidFill>
-                <a:latin typeface="Courier New" pitchFamily="34" charset="0"/>
-                <a:ea typeface="Courier New" pitchFamily="34" charset="-122"/>
-                <a:cs typeface="Courier New" pitchFamily="34" charset="-120"/>
-              </a:rPr>
-              <a:t>  ROUND(100*AVG(cebo&gt;=1), 1) AS cebo,</a:t>
-            </a:r>
-            <a:endParaRPr lang="en-US" sz="1800" dirty="0"/>
-          </a:p>
-          <a:p>
-            <a:pPr indent="0" marL="0">
-              <a:buNone/>
-            </a:pPr>
-            <a:r>
-              <a:rPr lang="en-US" sz="1800" dirty="0">
-                <a:solidFill>
-                  <a:srgbClr val="1A1A1A"/>
-                </a:solidFill>
-                <a:latin typeface="Courier New" pitchFamily="34" charset="0"/>
-                <a:ea typeface="Courier New" pitchFamily="34" charset="-122"/>
-                <a:cs typeface="Courier New" pitchFamily="34" charset="-120"/>
-              </a:rPr>
-              <a:t>  ROUND(100*AVG(tono_auto='n'), 1) AS neg</a:t>
-            </a:r>
-            <a:endParaRPr lang="en-US" sz="1800" dirty="0"/>
-          </a:p>
-          <a:p>
-            <a:pPr indent="0" marL="0">
-              <a:buNone/>
-            </a:pPr>
-            <a:r>
-              <a:rPr lang="en-US" sz="1800" dirty="0">
-                <a:solidFill>
-                  <a:srgbClr val="1A1A1A"/>
-                </a:solidFill>
-                <a:latin typeface="Courier New" pitchFamily="34" charset="0"/>
-                <a:ea typeface="Courier New" pitchFamily="34" charset="-122"/>
-                <a:cs typeface="Courier New" pitchFamily="34" charset="-120"/>
-              </a:rPr>
-              <a:t>FROM items</a:t>
-            </a:r>
-            <a:endParaRPr lang="en-US" sz="1800" dirty="0"/>
-          </a:p>
-          <a:p>
-            <a:pPr indent="0" marL="0">
-              <a:buNone/>
-            </a:pPr>
-            <a:r>
-              <a:rPr lang="en-US" sz="1800" dirty="0">
-                <a:solidFill>
-                  <a:srgbClr val="1A1A1A"/>
-                </a:solidFill>
-                <a:latin typeface="Courier New" pitchFamily="34" charset="0"/>
-                <a:ea typeface="Courier New" pitchFamily="34" charset="-122"/>
-                <a:cs typeface="Courier New" pitchFamily="34" charset="-120"/>
-              </a:rPr>
-              <a:t>GROUP BY medio</a:t>
-            </a:r>
-            <a:endParaRPr lang="en-US" sz="1800" dirty="0"/>
-          </a:p>
-          <a:p>
-            <a:pPr indent="0" marL="0">
-              <a:buNone/>
-            </a:pPr>
-            <a:r>
-              <a:rPr lang="en-US" sz="1800" dirty="0">
-                <a:solidFill>
-                  <a:srgbClr val="1A1A1A"/>
-                </a:solidFill>
-                <a:latin typeface="Courier New" pitchFamily="34" charset="0"/>
-                <a:ea typeface="Courier New" pitchFamily="34" charset="-122"/>
-                <a:cs typeface="Courier New" pitchFamily="34" charset="-120"/>
-              </a:rPr>
-              <a:t>HAVING COUNT(*) &gt;= 50</a:t>
-            </a:r>
-            <a:endParaRPr lang="en-US" sz="1800" dirty="0"/>
-          </a:p>
-          <a:p>
-            <a:pPr indent="0" marL="0">
-              <a:buNone/>
-            </a:pPr>
-            <a:r>
-              <a:rPr lang="en-US" sz="1800" dirty="0">
-                <a:solidFill>
-                  <a:srgbClr val="1A1A1A"/>
-                </a:solidFill>
-                <a:latin typeface="Courier New" pitchFamily="34" charset="0"/>
-                <a:ea typeface="Courier New" pitchFamily="34" charset="-122"/>
-                <a:cs typeface="Courier New" pitchFamily="34" charset="-120"/>
-              </a:rPr>
-              <a:t>ORDER BY cebo DESC;</a:t>
-            </a:r>
-            <a:endParaRPr lang="en-US" sz="1800" dirty="0"/>
-          </a:p>
-        </p:txBody>
-      </p:sp>
-      <p:sp>
-        <p:nvSpPr>
-          <p:cNvPr id="7" name="Text 4"/>
+        </p:txBody>
+      </p:sp>
+      <p:sp>
+        <p:nvSpPr>
+          <p:cNvPr id="8" name="Text 4"/>
           <p:cNvSpPr txBox="1"/>
           <p:nvPr/>
         </p:nvSpPr>
         <p:spPr>
           <a:xfrm>
-            <a:off x="7406640" y="2057400"/>
-            <a:ext cx="548640" cy="640080"/>
+            <a:off x="8138160" y="2606040"/>
+            <a:ext cx="3291840" cy="822960"/>
           </a:xfrm>
           <a:prstGeom prst="rect">
             <a:avLst/>
@@ -8115,7 +8135,46 @@
               <a:buNone/>
             </a:pPr>
             <a:r>
-              <a:rPr lang="en-US" sz="3200" b="1" dirty="0">
+              <a:rPr lang="en-US" sz="1400" dirty="0">
+                <a:solidFill>
+                  <a:srgbClr val="6B6B6B"/>
+                </a:solidFill>
+                <a:latin typeface="Calibri" pitchFamily="34" charset="0"/>
+                <a:ea typeface="Calibri" pitchFamily="34" charset="-122"/>
+                <a:cs typeface="Calibri" pitchFamily="34" charset="-120"/>
+              </a:rPr>
+              <a:t>Medio que más veces publicó primero una historia que después cubrieron otros:</a:t>
+            </a:r>
+            <a:endParaRPr lang="en-US" sz="1400" dirty="0"/>
+          </a:p>
+        </p:txBody>
+      </p:sp>
+      <p:sp>
+        <p:nvSpPr>
+          <p:cNvPr id="9" name="Text 5"/>
+          <p:cNvSpPr txBox="1"/>
+          <p:nvPr/>
+        </p:nvSpPr>
+        <p:spPr>
+          <a:xfrm>
+            <a:off x="8138160" y="3474720"/>
+            <a:ext cx="3291840" cy="731520"/>
+          </a:xfrm>
+          <a:prstGeom prst="rect">
+            <a:avLst/>
+          </a:prstGeom>
+          <a:noFill/>
+          <a:ln/>
+        </p:spPr>
+        <p:txBody>
+          <a:bodyPr wrap="square" lIns="0" tIns="0" rIns="0" bIns="0" rtlCol="0" anchor="t"/>
+          <a:lstStyle/>
+          <a:p>
+            <a:pPr indent="0" marL="0">
+              <a:buNone/>
+            </a:pPr>
+            <a:r>
+              <a:rPr lang="en-US" sz="4000" b="1" dirty="0">
                 <a:solidFill>
                   <a:srgbClr val="C8102E"/>
                 </a:solidFill>
@@ -8123,22 +8182,22 @@
                 <a:ea typeface="Cambria" pitchFamily="34" charset="-122"/>
                 <a:cs typeface="Cambria" pitchFamily="34" charset="-120"/>
               </a:rPr>
-              <a:t>1</a:t>
-            </a:r>
-            <a:endParaRPr lang="en-US" sz="3200" dirty="0"/>
-          </a:p>
-        </p:txBody>
-      </p:sp>
-      <p:sp>
-        <p:nvSpPr>
-          <p:cNvPr id="8" name="Text 5"/>
+              <a:t>Eldoce</a:t>
+            </a:r>
+            <a:endParaRPr lang="en-US" sz="4000" dirty="0"/>
+          </a:p>
+        </p:txBody>
+      </p:sp>
+      <p:sp>
+        <p:nvSpPr>
+          <p:cNvPr id="10" name="Text 6"/>
           <p:cNvSpPr txBox="1"/>
           <p:nvPr/>
         </p:nvSpPr>
         <p:spPr>
           <a:xfrm>
-            <a:off x="8046720" y="2194560"/>
-            <a:ext cx="3566160" cy="548640"/>
+            <a:off x="8138160" y="4343400"/>
+            <a:ext cx="3291840" cy="1463040"/>
           </a:xfrm>
           <a:prstGeom prst="rect">
             <a:avLst/>
@@ -8154,7 +8213,7 @@
               <a:buNone/>
             </a:pPr>
             <a:r>
-              <a:rPr lang="en-US" sz="1700" dirty="0">
+              <a:rPr lang="en-US" sz="1400" dirty="0">
                 <a:solidFill>
                   <a:srgbClr val="1A1A1A"/>
                 </a:solidFill>
@@ -8162,243 +8221,9 @@
                 <a:ea typeface="Calibri" pitchFamily="34" charset="-122"/>
                 <a:cs typeface="Calibri" pitchFamily="34" charset="-120"/>
               </a:rPr>
-              <a:t>Abrir el tablero (QR al final)</a:t>
-            </a:r>
-            <a:endParaRPr lang="en-US" sz="1700" dirty="0"/>
-          </a:p>
-        </p:txBody>
-      </p:sp>
-      <p:sp>
-        <p:nvSpPr>
-          <p:cNvPr id="9" name="Text 6"/>
-          <p:cNvSpPr txBox="1"/>
-          <p:nvPr/>
-        </p:nvSpPr>
-        <p:spPr>
-          <a:xfrm>
-            <a:off x="7406640" y="2971800"/>
-            <a:ext cx="548640" cy="640080"/>
-          </a:xfrm>
-          <a:prstGeom prst="rect">
-            <a:avLst/>
-          </a:prstGeom>
-          <a:noFill/>
-          <a:ln/>
-        </p:spPr>
-        <p:txBody>
-          <a:bodyPr wrap="square" lIns="0" tIns="0" rIns="0" bIns="0" rtlCol="0" anchor="t"/>
-          <a:lstStyle/>
-          <a:p>
-            <a:pPr indent="0" marL="0">
-              <a:buNone/>
-            </a:pPr>
-            <a:r>
-              <a:rPr lang="en-US" sz="3200" b="1" dirty="0">
-                <a:solidFill>
-                  <a:srgbClr val="C8102E"/>
-                </a:solidFill>
-                <a:latin typeface="Cambria" pitchFamily="34" charset="0"/>
-                <a:ea typeface="Cambria" pitchFamily="34" charset="-122"/>
-                <a:cs typeface="Cambria" pitchFamily="34" charset="-120"/>
-              </a:rPr>
-              <a:t>2</a:t>
-            </a:r>
-            <a:endParaRPr lang="en-US" sz="3200" dirty="0"/>
-          </a:p>
-        </p:txBody>
-      </p:sp>
-      <p:sp>
-        <p:nvSpPr>
-          <p:cNvPr id="10" name="Text 7"/>
-          <p:cNvSpPr txBox="1"/>
-          <p:nvPr/>
-        </p:nvSpPr>
-        <p:spPr>
-          <a:xfrm>
-            <a:off x="8046720" y="3108960"/>
-            <a:ext cx="3566160" cy="548640"/>
-          </a:xfrm>
-          <a:prstGeom prst="rect">
-            <a:avLst/>
-          </a:prstGeom>
-          <a:noFill/>
-          <a:ln/>
-        </p:spPr>
-        <p:txBody>
-          <a:bodyPr wrap="square" lIns="0" tIns="0" rIns="0" bIns="0" rtlCol="0" anchor="t"/>
-          <a:lstStyle/>
-          <a:p>
-            <a:pPr indent="0" marL="0">
-              <a:buNone/>
-            </a:pPr>
-            <a:r>
-              <a:rPr lang="en-US" sz="1700" dirty="0">
-                <a:solidFill>
-                  <a:srgbClr val="1A1A1A"/>
-                </a:solidFill>
-                <a:latin typeface="Calibri" pitchFamily="34" charset="0"/>
-                <a:ea typeface="Calibri" pitchFamily="34" charset="-122"/>
-                <a:cs typeface="Calibri" pitchFamily="34" charset="-120"/>
-              </a:rPr>
-              <a:t>Tocar "Explorar la base (SQL)"</a:t>
-            </a:r>
-            <a:endParaRPr lang="en-US" sz="1700" dirty="0"/>
-          </a:p>
-        </p:txBody>
-      </p:sp>
-      <p:sp>
-        <p:nvSpPr>
-          <p:cNvPr id="11" name="Text 8"/>
-          <p:cNvSpPr txBox="1"/>
-          <p:nvPr/>
-        </p:nvSpPr>
-        <p:spPr>
-          <a:xfrm>
-            <a:off x="7406640" y="3886200"/>
-            <a:ext cx="548640" cy="640080"/>
-          </a:xfrm>
-          <a:prstGeom prst="rect">
-            <a:avLst/>
-          </a:prstGeom>
-          <a:noFill/>
-          <a:ln/>
-        </p:spPr>
-        <p:txBody>
-          <a:bodyPr wrap="square" lIns="0" tIns="0" rIns="0" bIns="0" rtlCol="0" anchor="t"/>
-          <a:lstStyle/>
-          <a:p>
-            <a:pPr indent="0" marL="0">
-              <a:buNone/>
-            </a:pPr>
-            <a:r>
-              <a:rPr lang="en-US" sz="3200" b="1" dirty="0">
-                <a:solidFill>
-                  <a:srgbClr val="C8102E"/>
-                </a:solidFill>
-                <a:latin typeface="Cambria" pitchFamily="34" charset="0"/>
-                <a:ea typeface="Cambria" pitchFamily="34" charset="-122"/>
-                <a:cs typeface="Cambria" pitchFamily="34" charset="-120"/>
-              </a:rPr>
-              <a:t>3</a:t>
-            </a:r>
-            <a:endParaRPr lang="en-US" sz="3200" dirty="0"/>
-          </a:p>
-        </p:txBody>
-      </p:sp>
-      <p:sp>
-        <p:nvSpPr>
-          <p:cNvPr id="12" name="Text 9"/>
-          <p:cNvSpPr txBox="1"/>
-          <p:nvPr/>
-        </p:nvSpPr>
-        <p:spPr>
-          <a:xfrm>
-            <a:off x="8046720" y="4023360"/>
-            <a:ext cx="3566160" cy="548640"/>
-          </a:xfrm>
-          <a:prstGeom prst="rect">
-            <a:avLst/>
-          </a:prstGeom>
-          <a:noFill/>
-          <a:ln/>
-        </p:spPr>
-        <p:txBody>
-          <a:bodyPr wrap="square" lIns="0" tIns="0" rIns="0" bIns="0" rtlCol="0" anchor="t"/>
-          <a:lstStyle/>
-          <a:p>
-            <a:pPr indent="0" marL="0">
-              <a:buNone/>
-            </a:pPr>
-            <a:r>
-              <a:rPr lang="en-US" sz="1700" dirty="0">
-                <a:solidFill>
-                  <a:srgbClr val="1A1A1A"/>
-                </a:solidFill>
-                <a:latin typeface="Calibri" pitchFamily="34" charset="0"/>
-                <a:ea typeface="Calibri" pitchFamily="34" charset="-122"/>
-                <a:cs typeface="Calibri" pitchFamily="34" charset="-120"/>
-              </a:rPr>
-              <a:t>Elegir la tabla items o escribir una consulta</a:t>
-            </a:r>
-            <a:endParaRPr lang="en-US" sz="1700" dirty="0"/>
-          </a:p>
-        </p:txBody>
-      </p:sp>
-      <p:sp>
-        <p:nvSpPr>
-          <p:cNvPr id="13" name="Text 10"/>
-          <p:cNvSpPr txBox="1"/>
-          <p:nvPr/>
-        </p:nvSpPr>
-        <p:spPr>
-          <a:xfrm>
-            <a:off x="7406640" y="4800600"/>
-            <a:ext cx="548640" cy="640080"/>
-          </a:xfrm>
-          <a:prstGeom prst="rect">
-            <a:avLst/>
-          </a:prstGeom>
-          <a:noFill/>
-          <a:ln/>
-        </p:spPr>
-        <p:txBody>
-          <a:bodyPr wrap="square" lIns="0" tIns="0" rIns="0" bIns="0" rtlCol="0" anchor="t"/>
-          <a:lstStyle/>
-          <a:p>
-            <a:pPr indent="0" marL="0">
-              <a:buNone/>
-            </a:pPr>
-            <a:r>
-              <a:rPr lang="en-US" sz="3200" b="1" dirty="0">
-                <a:solidFill>
-                  <a:srgbClr val="C8102E"/>
-                </a:solidFill>
-                <a:latin typeface="Cambria" pitchFamily="34" charset="0"/>
-                <a:ea typeface="Cambria" pitchFamily="34" charset="-122"/>
-                <a:cs typeface="Cambria" pitchFamily="34" charset="-120"/>
-              </a:rPr>
-              <a:t>4</a:t>
-            </a:r>
-            <a:endParaRPr lang="en-US" sz="3200" dirty="0"/>
-          </a:p>
-        </p:txBody>
-      </p:sp>
-      <p:sp>
-        <p:nvSpPr>
-          <p:cNvPr id="14" name="Text 11"/>
-          <p:cNvSpPr txBox="1"/>
-          <p:nvPr/>
-        </p:nvSpPr>
-        <p:spPr>
-          <a:xfrm>
-            <a:off x="8046720" y="4937760"/>
-            <a:ext cx="3566160" cy="548640"/>
-          </a:xfrm>
-          <a:prstGeom prst="rect">
-            <a:avLst/>
-          </a:prstGeom>
-          <a:noFill/>
-          <a:ln/>
-        </p:spPr>
-        <p:txBody>
-          <a:bodyPr wrap="square" lIns="0" tIns="0" rIns="0" bIns="0" rtlCol="0" anchor="t"/>
-          <a:lstStyle/>
-          <a:p>
-            <a:pPr indent="0" marL="0">
-              <a:buNone/>
-            </a:pPr>
-            <a:r>
-              <a:rPr lang="en-US" sz="1700" dirty="0">
-                <a:solidFill>
-                  <a:srgbClr val="1A1A1A"/>
-                </a:solidFill>
-                <a:latin typeface="Calibri" pitchFamily="34" charset="0"/>
-                <a:ea typeface="Calibri" pitchFamily="34" charset="-122"/>
-                <a:cs typeface="Calibri" pitchFamily="34" charset="-120"/>
-              </a:rPr>
-              <a:t>Descargar la base o el CSV si se quiere</a:t>
-            </a:r>
-            <a:endParaRPr lang="en-US" sz="1700" dirty="0"/>
+              <a:t>Cada tarjeta muestra el tono del título, sus recursos de cebo y los minutos de demora respecto del primero.</a:t>
+            </a:r>
+            <a:endParaRPr lang="en-US" sz="1400" dirty="0"/>
           </a:p>
         </p:txBody>
       </p:sp>
@@ -8504,7 +8329,7 @@
                   <a:schemeClr val="accent1"/>
                 </a:solidFill>
               </a:rPr>
-              <a:t>HERRAMIENTAS</a:t>
+              <a:t>TONO POR FIGURA</a:t>
             </a:r>
             <a:endParaRPr lang="en-US" sz="1200" dirty="0"/>
           </a:p>
@@ -8545,26 +8370,50 @@
                 <a:ea typeface="Cambria" pitchFamily="34" charset="-122"/>
                 <a:cs typeface="Cambria" pitchFamily="34" charset="-120"/>
               </a:rPr>
-              <a:t>Un stack simple, gratuito y reproducible</a:t>
+              <a:t>Cómo trata cada medio a cada figura</a:t>
             </a:r>
             <a:endParaRPr lang="en-US" sz="3200" dirty="0"/>
           </a:p>
         </p:txBody>
       </p:sp>
-      <p:sp>
-        <p:nvSpPr>
-          <p:cNvPr id="5" name="stack-0"/>
+      <p:pic>
+        <p:nvPicPr>
+          <p:cNvPr id="5" name="figuras" descr="C:\Users\SBI\Documents\Martin Ceriotti Personales\Master Data Science\webmining\Web-Mining\docs\_fuentes\img\figuras.png">    </p:cNvPr>
+          <p:cNvPicPr>
+            <a:picLocks noChangeAspect="1"/>
+          </p:cNvPicPr>
+          <p:nvPr/>
+        </p:nvPicPr>
+        <p:blipFill>
+          <a:blip r:embed="rId1"/>
+          <a:stretch>
+            <a:fillRect/>
+          </a:stretch>
+        </p:blipFill>
+        <p:spPr>
+          <a:xfrm>
+            <a:off x="548640" y="1874520"/>
+            <a:ext cx="8412480" cy="2315795"/>
+          </a:xfrm>
+          <a:prstGeom prst="rect">
+            <a:avLst/>
+          </a:prstGeom>
+        </p:spPr>
+      </p:pic>
+      <p:sp>
+        <p:nvSpPr>
+          <p:cNvPr id="6" name="figuras-lectura"/>
           <p:cNvSpPr/>
           <p:nvPr/>
         </p:nvSpPr>
         <p:spPr>
           <a:xfrm>
-            <a:off x="548640" y="2011680"/>
-            <a:ext cx="5394960" cy="1143000"/>
+            <a:off x="9235440" y="1874520"/>
+            <a:ext cx="2404872" cy="3566160"/>
           </a:xfrm>
           <a:prstGeom prst="roundRect">
             <a:avLst>
-              <a:gd name="adj" fmla="val 6400"/>
+              <a:gd name="adj" fmla="val 3042"/>
             </a:avLst>
           </a:prstGeom>
           <a:solidFill>
@@ -8580,14 +8429,14 @@
       </p:sp>
       <p:sp>
         <p:nvSpPr>
-          <p:cNvPr id="6" name="Text 3"/>
+          <p:cNvPr id="7" name="Text 3"/>
           <p:cNvSpPr txBox="1"/>
           <p:nvPr/>
         </p:nvSpPr>
         <p:spPr>
           <a:xfrm>
-            <a:off x="822960" y="2148840"/>
-            <a:ext cx="4846320" cy="365760"/>
+            <a:off x="9464040" y="2103120"/>
+            <a:ext cx="2011680" cy="3200400"/>
           </a:xfrm>
           <a:prstGeom prst="rect">
             <a:avLst/>
@@ -8600,10 +8449,13 @@
           <a:lstStyle/>
           <a:p>
             <a:pPr indent="0" marL="0">
-              <a:buNone/>
-            </a:pPr>
-            <a:r>
-              <a:rPr lang="en-US" sz="1700" b="1" dirty="0">
+              <a:spcAft>
+                <a:spcPts val="800"/>
+              </a:spcAft>
+              <a:buNone/>
+            </a:pPr>
+            <a:r>
+              <a:rPr lang="en-US" sz="1400" b="1" dirty="0">
                 <a:solidFill>
                   <a:srgbClr val="C8102E"/>
                 </a:solidFill>
@@ -8611,38 +8463,16 @@
                 <a:ea typeface="Calibri" pitchFamily="34" charset="-122"/>
                 <a:cs typeface="Calibri" pitchFamily="34" charset="-120"/>
               </a:rPr>
-              <a:t>Recolección</a:t>
-            </a:r>
-            <a:endParaRPr lang="en-US" sz="1700" dirty="0"/>
-          </a:p>
-        </p:txBody>
-      </p:sp>
-      <p:sp>
-        <p:nvSpPr>
-          <p:cNvPr id="7" name="Text 4"/>
-          <p:cNvSpPr txBox="1"/>
-          <p:nvPr/>
-        </p:nvSpPr>
-        <p:spPr>
-          <a:xfrm>
-            <a:off x="822960" y="2542032"/>
-            <a:ext cx="4937760" cy="548640"/>
-          </a:xfrm>
-          <a:prstGeom prst="rect">
-            <a:avLst/>
-          </a:prstGeom>
-          <a:noFill/>
-          <a:ln/>
-        </p:spPr>
-        <p:txBody>
-          <a:bodyPr wrap="square" lIns="0" tIns="0" rIns="0" bIns="0" rtlCol="0" anchor="t"/>
-          <a:lstStyle/>
-          <a:p>
-            <a:pPr indent="0" marL="0">
-              <a:buNone/>
-            </a:pPr>
-            <a:r>
-              <a:rPr lang="en-US" sz="1500" dirty="0">
+              <a:t>Rojo: </a:t>
+            </a:r>
+            <a:pPr indent="0" marL="0">
+              <a:spcAft>
+                <a:spcPts val="800"/>
+              </a:spcAft>
+              <a:buNone/>
+            </a:pPr>
+            <a:r>
+              <a:rPr lang="en-US" sz="1400" dirty="0">
                 <a:solidFill>
                   <a:srgbClr val="1A1A1A"/>
                 </a:solidFill>
@@ -8650,104 +8480,36 @@
                 <a:ea typeface="Calibri" pitchFamily="34" charset="-122"/>
                 <a:cs typeface="Calibri" pitchFamily="34" charset="-120"/>
               </a:rPr>
-              <a:t>requests · feedparser · googlenewsdecoder · urllib.robotparser</a:t>
-            </a:r>
-            <a:endParaRPr lang="en-US" sz="1500" dirty="0"/>
-          </a:p>
-        </p:txBody>
-      </p:sp>
-      <p:sp>
-        <p:nvSpPr>
-          <p:cNvPr id="8" name="stack-1"/>
-          <p:cNvSpPr/>
-          <p:nvPr/>
-        </p:nvSpPr>
-        <p:spPr>
-          <a:xfrm>
-            <a:off x="6217920" y="2011680"/>
-            <a:ext cx="5394960" cy="1143000"/>
-          </a:xfrm>
-          <a:prstGeom prst="roundRect">
-            <a:avLst>
-              <a:gd name="adj" fmla="val 6400"/>
-            </a:avLst>
-          </a:prstGeom>
-          <a:solidFill>
-            <a:srgbClr val="F2F2F0"/>
-          </a:solidFill>
-          <a:ln w="12700">
-            <a:solidFill>
-              <a:srgbClr val="F2F2F0"/>
-            </a:solidFill>
-            <a:prstDash val="solid"/>
-          </a:ln>
-        </p:spPr>
-      </p:sp>
-      <p:sp>
-        <p:nvSpPr>
-          <p:cNvPr id="9" name="Text 6"/>
-          <p:cNvSpPr txBox="1"/>
-          <p:nvPr/>
-        </p:nvSpPr>
-        <p:spPr>
-          <a:xfrm>
-            <a:off x="6492240" y="2148840"/>
-            <a:ext cx="4846320" cy="365760"/>
-          </a:xfrm>
-          <a:prstGeom prst="rect">
-            <a:avLst/>
-          </a:prstGeom>
-          <a:noFill/>
-          <a:ln/>
-        </p:spPr>
-        <p:txBody>
-          <a:bodyPr wrap="square" lIns="0" tIns="0" rIns="0" bIns="0" rtlCol="0" anchor="t"/>
-          <a:lstStyle/>
-          <a:p>
-            <a:pPr indent="0" marL="0">
-              <a:buNone/>
-            </a:pPr>
-            <a:r>
-              <a:rPr lang="en-US" sz="1700" b="1" dirty="0">
-                <a:solidFill>
-                  <a:srgbClr val="C8102E"/>
+              <a:t>más negativo que el promedio de los medios con esa figura.</a:t>
+            </a:r>
+            <a:endParaRPr lang="en-US" sz="1400" dirty="0"/>
+          </a:p>
+          <a:p>
+            <a:pPr indent="0" marL="0">
+              <a:spcAft>
+                <a:spcPts val="800"/>
+              </a:spcAft>
+              <a:buNone/>
+            </a:pPr>
+            <a:r>
+              <a:rPr lang="en-US" sz="1400" b="1" dirty="0">
+                <a:solidFill>
+                  <a:srgbClr val="3D8A5A"/>
                 </a:solidFill>
                 <a:latin typeface="Calibri" pitchFamily="34" charset="0"/>
                 <a:ea typeface="Calibri" pitchFamily="34" charset="-122"/>
                 <a:cs typeface="Calibri" pitchFamily="34" charset="-120"/>
               </a:rPr>
-              <a:t>Extracción</a:t>
-            </a:r>
-            <a:endParaRPr lang="en-US" sz="1700" dirty="0"/>
-          </a:p>
-        </p:txBody>
-      </p:sp>
-      <p:sp>
-        <p:nvSpPr>
-          <p:cNvPr id="10" name="Text 7"/>
-          <p:cNvSpPr txBox="1"/>
-          <p:nvPr/>
-        </p:nvSpPr>
-        <p:spPr>
-          <a:xfrm>
-            <a:off x="6492240" y="2542032"/>
-            <a:ext cx="4937760" cy="548640"/>
-          </a:xfrm>
-          <a:prstGeom prst="rect">
-            <a:avLst/>
-          </a:prstGeom>
-          <a:noFill/>
-          <a:ln/>
-        </p:spPr>
-        <p:txBody>
-          <a:bodyPr wrap="square" lIns="0" tIns="0" rIns="0" bIns="0" rtlCol="0" anchor="t"/>
-          <a:lstStyle/>
-          <a:p>
-            <a:pPr indent="0" marL="0">
-              <a:buNone/>
-            </a:pPr>
-            <a:r>
-              <a:rPr lang="en-US" sz="1500" dirty="0">
+              <a:t>Verde: </a:t>
+            </a:r>
+            <a:pPr indent="0" marL="0">
+              <a:spcAft>
+                <a:spcPts val="800"/>
+              </a:spcAft>
+              <a:buNone/>
+            </a:pPr>
+            <a:r>
+              <a:rPr lang="en-US" sz="1400" dirty="0">
                 <a:solidFill>
                   <a:srgbClr val="1A1A1A"/>
                 </a:solidFill>
@@ -8755,429 +8517,29 @@
                 <a:ea typeface="Calibri" pitchFamily="34" charset="-122"/>
                 <a:cs typeface="Calibri" pitchFamily="34" charset="-120"/>
               </a:rPr>
-              <a:t>expresiones regulares · JSON-LD (schema.org) · HTML</a:t>
-            </a:r>
-            <a:endParaRPr lang="en-US" sz="1500" dirty="0"/>
-          </a:p>
-        </p:txBody>
-      </p:sp>
-      <p:sp>
-        <p:nvSpPr>
-          <p:cNvPr id="11" name="stack-2"/>
-          <p:cNvSpPr/>
-          <p:nvPr/>
-        </p:nvSpPr>
-        <p:spPr>
-          <a:xfrm>
-            <a:off x="548640" y="3337560"/>
-            <a:ext cx="5394960" cy="1143000"/>
-          </a:xfrm>
-          <a:prstGeom prst="roundRect">
-            <a:avLst>
-              <a:gd name="adj" fmla="val 6400"/>
-            </a:avLst>
-          </a:prstGeom>
-          <a:solidFill>
-            <a:srgbClr val="F2F2F0"/>
-          </a:solidFill>
-          <a:ln w="12700">
-            <a:solidFill>
-              <a:srgbClr val="F2F2F0"/>
-            </a:solidFill>
-            <a:prstDash val="solid"/>
-          </a:ln>
-        </p:spPr>
-      </p:sp>
-      <p:sp>
-        <p:nvSpPr>
-          <p:cNvPr id="12" name="Text 9"/>
-          <p:cNvSpPr txBox="1"/>
-          <p:nvPr/>
-        </p:nvSpPr>
-        <p:spPr>
-          <a:xfrm>
-            <a:off x="822960" y="3474720"/>
-            <a:ext cx="4846320" cy="365760"/>
-          </a:xfrm>
-          <a:prstGeom prst="rect">
-            <a:avLst/>
-          </a:prstGeom>
-          <a:noFill/>
-          <a:ln/>
-        </p:spPr>
-        <p:txBody>
-          <a:bodyPr wrap="square" lIns="0" tIns="0" rIns="0" bIns="0" rtlCol="0" anchor="t"/>
-          <a:lstStyle/>
-          <a:p>
-            <a:pPr indent="0" marL="0">
-              <a:buNone/>
-            </a:pPr>
-            <a:r>
-              <a:rPr lang="en-US" sz="1700" b="1" dirty="0">
-                <a:solidFill>
-                  <a:srgbClr val="C8102E"/>
+              <a:t>menos negativo.</a:t>
+            </a:r>
+            <a:endParaRPr lang="en-US" sz="1400" dirty="0"/>
+          </a:p>
+          <a:p>
+            <a:pPr indent="0" marL="0">
+              <a:spcAft>
+                <a:spcPts val="800"/>
+              </a:spcAft>
+              <a:buNone/>
+            </a:pPr>
+            <a:r>
+              <a:rPr lang="en-US" sz="1400" dirty="0">
+                <a:solidFill>
+                  <a:srgbClr val="1A1A1A"/>
                 </a:solidFill>
                 <a:latin typeface="Calibri" pitchFamily="34" charset="0"/>
                 <a:ea typeface="Calibri" pitchFamily="34" charset="-122"/>
                 <a:cs typeface="Calibri" pitchFamily="34" charset="-120"/>
               </a:rPr>
-              <a:t>Lenguaje</a:t>
-            </a:r>
-            <a:endParaRPr lang="en-US" sz="1700" dirty="0"/>
-          </a:p>
-        </p:txBody>
-      </p:sp>
-      <p:sp>
-        <p:nvSpPr>
-          <p:cNvPr id="13" name="Text 10"/>
-          <p:cNvSpPr txBox="1"/>
-          <p:nvPr/>
-        </p:nvSpPr>
-        <p:spPr>
-          <a:xfrm>
-            <a:off x="822960" y="3867912"/>
-            <a:ext cx="4937760" cy="548640"/>
-          </a:xfrm>
-          <a:prstGeom prst="rect">
-            <a:avLst/>
-          </a:prstGeom>
-          <a:noFill/>
-          <a:ln/>
-        </p:spPr>
-        <p:txBody>
-          <a:bodyPr wrap="square" lIns="0" tIns="0" rIns="0" bIns="0" rtlCol="0" anchor="t"/>
-          <a:lstStyle/>
-          <a:p>
-            <a:pPr indent="0" marL="0">
-              <a:buNone/>
-            </a:pPr>
-            <a:r>
-              <a:rPr lang="en-US" sz="1500" dirty="0">
-                <a:solidFill>
-                  <a:srgbClr val="1A1A1A"/>
-                </a:solidFill>
-                <a:latin typeface="Calibri" pitchFamily="34" charset="0"/>
-                <a:ea typeface="Calibri" pitchFamily="34" charset="-122"/>
-                <a:cs typeface="Calibri" pitchFamily="34" charset="-120"/>
-              </a:rPr>
-              <a:t>bolsa de palabras · Naive Bayes · regresión logística · XLM-RoBERTa (PyTorch, transformers)</a:t>
-            </a:r>
-            <a:endParaRPr lang="en-US" sz="1500" dirty="0"/>
-          </a:p>
-        </p:txBody>
-      </p:sp>
-      <p:sp>
-        <p:nvSpPr>
-          <p:cNvPr id="14" name="stack-3"/>
-          <p:cNvSpPr/>
-          <p:nvPr/>
-        </p:nvSpPr>
-        <p:spPr>
-          <a:xfrm>
-            <a:off x="6217920" y="3337560"/>
-            <a:ext cx="5394960" cy="1143000"/>
-          </a:xfrm>
-          <a:prstGeom prst="roundRect">
-            <a:avLst>
-              <a:gd name="adj" fmla="val 6400"/>
-            </a:avLst>
-          </a:prstGeom>
-          <a:solidFill>
-            <a:srgbClr val="F2F2F0"/>
-          </a:solidFill>
-          <a:ln w="12700">
-            <a:solidFill>
-              <a:srgbClr val="F2F2F0"/>
-            </a:solidFill>
-            <a:prstDash val="solid"/>
-          </a:ln>
-        </p:spPr>
-      </p:sp>
-      <p:sp>
-        <p:nvSpPr>
-          <p:cNvPr id="15" name="Text 12"/>
-          <p:cNvSpPr txBox="1"/>
-          <p:nvPr/>
-        </p:nvSpPr>
-        <p:spPr>
-          <a:xfrm>
-            <a:off x="6492240" y="3474720"/>
-            <a:ext cx="4846320" cy="365760"/>
-          </a:xfrm>
-          <a:prstGeom prst="rect">
-            <a:avLst/>
-          </a:prstGeom>
-          <a:noFill/>
-          <a:ln/>
-        </p:spPr>
-        <p:txBody>
-          <a:bodyPr wrap="square" lIns="0" tIns="0" rIns="0" bIns="0" rtlCol="0" anchor="t"/>
-          <a:lstStyle/>
-          <a:p>
-            <a:pPr indent="0" marL="0">
-              <a:buNone/>
-            </a:pPr>
-            <a:r>
-              <a:rPr lang="en-US" sz="1700" b="1" dirty="0">
-                <a:solidFill>
-                  <a:srgbClr val="C8102E"/>
-                </a:solidFill>
-                <a:latin typeface="Calibri" pitchFamily="34" charset="0"/>
-                <a:ea typeface="Calibri" pitchFamily="34" charset="-122"/>
-                <a:cs typeface="Calibri" pitchFamily="34" charset="-120"/>
-              </a:rPr>
-              <a:t>Datos</a:t>
-            </a:r>
-            <a:endParaRPr lang="en-US" sz="1700" dirty="0"/>
-          </a:p>
-        </p:txBody>
-      </p:sp>
-      <p:sp>
-        <p:nvSpPr>
-          <p:cNvPr id="16" name="Text 13"/>
-          <p:cNvSpPr txBox="1"/>
-          <p:nvPr/>
-        </p:nvSpPr>
-        <p:spPr>
-          <a:xfrm>
-            <a:off x="6492240" y="3867912"/>
-            <a:ext cx="4937760" cy="548640"/>
-          </a:xfrm>
-          <a:prstGeom prst="rect">
-            <a:avLst/>
-          </a:prstGeom>
-          <a:noFill/>
-          <a:ln/>
-        </p:spPr>
-        <p:txBody>
-          <a:bodyPr wrap="square" lIns="0" tIns="0" rIns="0" bIns="0" rtlCol="0" anchor="t"/>
-          <a:lstStyle/>
-          <a:p>
-            <a:pPr indent="0" marL="0">
-              <a:buNone/>
-            </a:pPr>
-            <a:r>
-              <a:rPr lang="en-US" sz="1500" dirty="0">
-                <a:solidFill>
-                  <a:srgbClr val="1A1A1A"/>
-                </a:solidFill>
-                <a:latin typeface="Calibri" pitchFamily="34" charset="0"/>
-                <a:ea typeface="Calibri" pitchFamily="34" charset="-122"/>
-                <a:cs typeface="Calibri" pitchFamily="34" charset="-120"/>
-              </a:rPr>
-              <a:t>SQLite · CSV · Datasette Lite</a:t>
-            </a:r>
-            <a:endParaRPr lang="en-US" sz="1500" dirty="0"/>
-          </a:p>
-        </p:txBody>
-      </p:sp>
-      <p:sp>
-        <p:nvSpPr>
-          <p:cNvPr id="17" name="stack-4"/>
-          <p:cNvSpPr/>
-          <p:nvPr/>
-        </p:nvSpPr>
-        <p:spPr>
-          <a:xfrm>
-            <a:off x="548640" y="4663440"/>
-            <a:ext cx="5394960" cy="1143000"/>
-          </a:xfrm>
-          <a:prstGeom prst="roundRect">
-            <a:avLst>
-              <a:gd name="adj" fmla="val 6400"/>
-            </a:avLst>
-          </a:prstGeom>
-          <a:solidFill>
-            <a:srgbClr val="F2F2F0"/>
-          </a:solidFill>
-          <a:ln w="12700">
-            <a:solidFill>
-              <a:srgbClr val="F2F2F0"/>
-            </a:solidFill>
-            <a:prstDash val="solid"/>
-          </a:ln>
-        </p:spPr>
-      </p:sp>
-      <p:sp>
-        <p:nvSpPr>
-          <p:cNvPr id="18" name="Text 15"/>
-          <p:cNvSpPr txBox="1"/>
-          <p:nvPr/>
-        </p:nvSpPr>
-        <p:spPr>
-          <a:xfrm>
-            <a:off x="822960" y="4800600"/>
-            <a:ext cx="4846320" cy="365760"/>
-          </a:xfrm>
-          <a:prstGeom prst="rect">
-            <a:avLst/>
-          </a:prstGeom>
-          <a:noFill/>
-          <a:ln/>
-        </p:spPr>
-        <p:txBody>
-          <a:bodyPr wrap="square" lIns="0" tIns="0" rIns="0" bIns="0" rtlCol="0" anchor="t"/>
-          <a:lstStyle/>
-          <a:p>
-            <a:pPr indent="0" marL="0">
-              <a:buNone/>
-            </a:pPr>
-            <a:r>
-              <a:rPr lang="en-US" sz="1700" b="1" dirty="0">
-                <a:solidFill>
-                  <a:srgbClr val="C8102E"/>
-                </a:solidFill>
-                <a:latin typeface="Calibri" pitchFamily="34" charset="0"/>
-                <a:ea typeface="Calibri" pitchFamily="34" charset="-122"/>
-                <a:cs typeface="Calibri" pitchFamily="34" charset="-120"/>
-              </a:rPr>
-              <a:t>Automatización</a:t>
-            </a:r>
-            <a:endParaRPr lang="en-US" sz="1700" dirty="0"/>
-          </a:p>
-        </p:txBody>
-      </p:sp>
-      <p:sp>
-        <p:nvSpPr>
-          <p:cNvPr id="19" name="Text 16"/>
-          <p:cNvSpPr txBox="1"/>
-          <p:nvPr/>
-        </p:nvSpPr>
-        <p:spPr>
-          <a:xfrm>
-            <a:off x="822960" y="5193792"/>
-            <a:ext cx="4937760" cy="548640"/>
-          </a:xfrm>
-          <a:prstGeom prst="rect">
-            <a:avLst/>
-          </a:prstGeom>
-          <a:noFill/>
-          <a:ln/>
-        </p:spPr>
-        <p:txBody>
-          <a:bodyPr wrap="square" lIns="0" tIns="0" rIns="0" bIns="0" rtlCol="0" anchor="t"/>
-          <a:lstStyle/>
-          <a:p>
-            <a:pPr indent="0" marL="0">
-              <a:buNone/>
-            </a:pPr>
-            <a:r>
-              <a:rPr lang="en-US" sz="1500" dirty="0">
-                <a:solidFill>
-                  <a:srgbClr val="1A1A1A"/>
-                </a:solidFill>
-                <a:latin typeface="Calibri" pitchFamily="34" charset="0"/>
-                <a:ea typeface="Calibri" pitchFamily="34" charset="-122"/>
-                <a:cs typeface="Calibri" pitchFamily="34" charset="-120"/>
-              </a:rPr>
-              <a:t>GitHub Actions (cada hora) · rama de datos</a:t>
-            </a:r>
-            <a:endParaRPr lang="en-US" sz="1500" dirty="0"/>
-          </a:p>
-        </p:txBody>
-      </p:sp>
-      <p:sp>
-        <p:nvSpPr>
-          <p:cNvPr id="20" name="stack-5"/>
-          <p:cNvSpPr/>
-          <p:nvPr/>
-        </p:nvSpPr>
-        <p:spPr>
-          <a:xfrm>
-            <a:off x="6217920" y="4663440"/>
-            <a:ext cx="5394960" cy="1143000"/>
-          </a:xfrm>
-          <a:prstGeom prst="roundRect">
-            <a:avLst>
-              <a:gd name="adj" fmla="val 6400"/>
-            </a:avLst>
-          </a:prstGeom>
-          <a:solidFill>
-            <a:srgbClr val="F2F2F0"/>
-          </a:solidFill>
-          <a:ln w="12700">
-            <a:solidFill>
-              <a:srgbClr val="F2F2F0"/>
-            </a:solidFill>
-            <a:prstDash val="solid"/>
-          </a:ln>
-        </p:spPr>
-      </p:sp>
-      <p:sp>
-        <p:nvSpPr>
-          <p:cNvPr id="21" name="Text 18"/>
-          <p:cNvSpPr txBox="1"/>
-          <p:nvPr/>
-        </p:nvSpPr>
-        <p:spPr>
-          <a:xfrm>
-            <a:off x="6492240" y="4800600"/>
-            <a:ext cx="4846320" cy="365760"/>
-          </a:xfrm>
-          <a:prstGeom prst="rect">
-            <a:avLst/>
-          </a:prstGeom>
-          <a:noFill/>
-          <a:ln/>
-        </p:spPr>
-        <p:txBody>
-          <a:bodyPr wrap="square" lIns="0" tIns="0" rIns="0" bIns="0" rtlCol="0" anchor="t"/>
-          <a:lstStyle/>
-          <a:p>
-            <a:pPr indent="0" marL="0">
-              <a:buNone/>
-            </a:pPr>
-            <a:r>
-              <a:rPr lang="en-US" sz="1700" b="1" dirty="0">
-                <a:solidFill>
-                  <a:srgbClr val="C8102E"/>
-                </a:solidFill>
-                <a:latin typeface="Calibri" pitchFamily="34" charset="0"/>
-                <a:ea typeface="Calibri" pitchFamily="34" charset="-122"/>
-                <a:cs typeface="Calibri" pitchFamily="34" charset="-120"/>
-              </a:rPr>
-              <a:t>Visualización</a:t>
-            </a:r>
-            <a:endParaRPr lang="en-US" sz="1700" dirty="0"/>
-          </a:p>
-        </p:txBody>
-      </p:sp>
-      <p:sp>
-        <p:nvSpPr>
-          <p:cNvPr id="22" name="Text 19"/>
-          <p:cNvSpPr txBox="1"/>
-          <p:nvPr/>
-        </p:nvSpPr>
-        <p:spPr>
-          <a:xfrm>
-            <a:off x="6492240" y="5193792"/>
-            <a:ext cx="4937760" cy="548640"/>
-          </a:xfrm>
-          <a:prstGeom prst="rect">
-            <a:avLst/>
-          </a:prstGeom>
-          <a:noFill/>
-          <a:ln/>
-        </p:spPr>
-        <p:txBody>
-          <a:bodyPr wrap="square" lIns="0" tIns="0" rIns="0" bIns="0" rtlCol="0" anchor="t"/>
-          <a:lstStyle/>
-          <a:p>
-            <a:pPr indent="0" marL="0">
-              <a:buNone/>
-            </a:pPr>
-            <a:r>
-              <a:rPr lang="en-US" sz="1500" dirty="0">
-                <a:solidFill>
-                  <a:srgbClr val="1A1A1A"/>
-                </a:solidFill>
-                <a:latin typeface="Calibri" pitchFamily="34" charset="0"/>
-                <a:ea typeface="Calibri" pitchFamily="34" charset="-122"/>
-                <a:cs typeface="Calibri" pitchFamily="34" charset="-120"/>
-              </a:rPr>
-              <a:t>HTML, CSS y JavaScript sin frameworks · GitHub Pages</a:t>
-            </a:r>
-            <a:endParaRPr lang="en-US" sz="1500" dirty="0"/>
+              <a:t>Entre paréntesis, la cantidad de notas.</a:t>
+            </a:r>
+            <a:endParaRPr lang="en-US" sz="1400" dirty="0"/>
           </a:p>
         </p:txBody>
       </p:sp>
@@ -9283,7 +8645,7 @@
                   <a:schemeClr val="accent1"/>
                 </a:solidFill>
               </a:rPr>
-              <a:t>LO QUE SIGUE</a:t>
+              <a:t>MINERÍA DE ESTRUCTURA</a:t>
             </a:r>
             <a:endParaRPr lang="en-US" sz="1200" dirty="0"/>
           </a:p>
@@ -9324,26 +8686,50 @@
                 <a:ea typeface="Cambria" pitchFamily="34" charset="-122"/>
                 <a:cs typeface="Cambria" pitchFamily="34" charset="-120"/>
               </a:rPr>
-              <a:t>Limitaciones honestas y próximos pasos</a:t>
+              <a:t>El mapa de medios: quién comparte agenda con quién</a:t>
             </a:r>
             <a:endParaRPr lang="en-US" sz="3200" dirty="0"/>
           </a:p>
         </p:txBody>
       </p:sp>
-      <p:sp>
-        <p:nvSpPr>
-          <p:cNvPr id="5" name="cierre-0"/>
+      <p:pic>
+        <p:nvPicPr>
+          <p:cNvPr id="5" name="grafo" descr="C:\Users\SBI\Documents\Martin Ceriotti Personales\Master Data Science\webmining\Web-Mining\docs\_fuentes\img\grafo.png">    </p:cNvPr>
+          <p:cNvPicPr>
+            <a:picLocks noChangeAspect="1"/>
+          </p:cNvPicPr>
+          <p:nvPr/>
+        </p:nvPicPr>
+        <p:blipFill>
+          <a:blip r:embed="rId1"/>
+          <a:stretch>
+            <a:fillRect/>
+          </a:stretch>
+        </p:blipFill>
+        <p:spPr>
+          <a:xfrm>
+            <a:off x="548640" y="1828800"/>
+            <a:ext cx="6675120" cy="4087573"/>
+          </a:xfrm>
+          <a:prstGeom prst="rect">
+            <a:avLst/>
+          </a:prstGeom>
+        </p:spPr>
+      </p:pic>
+      <p:sp>
+        <p:nvSpPr>
+          <p:cNvPr id="6" name="grafo-lectura"/>
           <p:cNvSpPr/>
           <p:nvPr/>
         </p:nvSpPr>
         <p:spPr>
           <a:xfrm>
-            <a:off x="548640" y="2011680"/>
-            <a:ext cx="5394960" cy="3931920"/>
+            <a:off x="7589520" y="1874520"/>
+            <a:ext cx="4050792" cy="4160520"/>
           </a:xfrm>
           <a:prstGeom prst="roundRect">
             <a:avLst>
-              <a:gd name="adj" fmla="val 1860"/>
+              <a:gd name="adj" fmla="val 1806"/>
             </a:avLst>
           </a:prstGeom>
           <a:solidFill>
@@ -9357,30 +8743,6 @@
           </a:ln>
         </p:spPr>
       </p:sp>
-      <p:pic>
-        <p:nvPicPr>
-          <p:cNvPr id="6" name="Image 0" descr="preencoded.png">    </p:cNvPr>
-          <p:cNvPicPr>
-            <a:picLocks noChangeAspect="1"/>
-          </p:cNvPicPr>
-          <p:nvPr/>
-        </p:nvPicPr>
-        <p:blipFill>
-          <a:blip r:embed="rId1"/>
-          <a:stretch>
-            <a:fillRect/>
-          </a:stretch>
-        </p:blipFill>
-        <p:spPr>
-          <a:xfrm>
-            <a:off x="868680" y="2286000"/>
-            <a:ext cx="411480" cy="411480"/>
-          </a:xfrm>
-          <a:prstGeom prst="rect">
-            <a:avLst/>
-          </a:prstGeom>
-        </p:spPr>
-      </p:pic>
       <p:sp>
         <p:nvSpPr>
           <p:cNvPr id="7" name="Text 3"/>
@@ -9389,24 +8751,24 @@
         </p:nvSpPr>
         <p:spPr>
           <a:xfrm>
-            <a:off x="1463040" y="2286000"/>
-            <a:ext cx="4114800" cy="411480"/>
-          </a:xfrm>
-          <a:prstGeom prst="rect">
-            <a:avLst/>
-          </a:prstGeom>
-          <a:noFill/>
-          <a:ln/>
-        </p:spPr>
-        <p:txBody>
-          <a:bodyPr wrap="square" lIns="0" tIns="0" rIns="0" bIns="0" rtlCol="0" anchor="ctr"/>
-          <a:lstStyle/>
-          <a:p>
-            <a:pPr indent="0" marL="0">
-              <a:buNone/>
-            </a:pPr>
-            <a:r>
-              <a:rPr lang="en-US" sz="2200" b="1" dirty="0">
+            <a:off x="7863840" y="2103120"/>
+            <a:ext cx="3566160" cy="411480"/>
+          </a:xfrm>
+          <a:prstGeom prst="rect">
+            <a:avLst/>
+          </a:prstGeom>
+          <a:noFill/>
+          <a:ln/>
+        </p:spPr>
+        <p:txBody>
+          <a:bodyPr wrap="square" lIns="0" tIns="0" rIns="0" bIns="0" rtlCol="0" anchor="t"/>
+          <a:lstStyle/>
+          <a:p>
+            <a:pPr indent="0" marL="0">
+              <a:buNone/>
+            </a:pPr>
+            <a:r>
+              <a:rPr lang="en-US" sz="1800" b="1" dirty="0">
                 <a:solidFill>
                   <a:srgbClr val="1A1A1A"/>
                 </a:solidFill>
@@ -9414,9 +8776,9 @@
                 <a:ea typeface="Calibri" pitchFamily="34" charset="-122"/>
                 <a:cs typeface="Calibri" pitchFamily="34" charset="-120"/>
               </a:rPr>
-              <a:t>Limitaciones</a:t>
-            </a:r>
-            <a:endParaRPr lang="en-US" sz="2200" dirty="0"/>
+              <a:t>Cómo se arma</a:t>
+            </a:r>
+            <a:endParaRPr lang="en-US" sz="1800" dirty="0"/>
           </a:p>
         </p:txBody>
       </p:sp>
@@ -9428,8 +8790,8 @@
         </p:nvSpPr>
         <p:spPr>
           <a:xfrm>
-            <a:off x="868680" y="2971800"/>
-            <a:ext cx="4800600" cy="2743200"/>
+            <a:off x="7863840" y="2651760"/>
+            <a:ext cx="3611880" cy="3200400"/>
           </a:xfrm>
           <a:prstGeom prst="rect">
             <a:avLst/>
@@ -9443,13 +8805,13 @@
           <a:p>
             <a:pPr marL="342900" indent="-342900">
               <a:spcAft>
-                <a:spcPts val="1000"/>
+                <a:spcPts val="800"/>
               </a:spcAft>
               <a:buSzPct val="100000"/>
               <a:buChar char="•"/>
             </a:pPr>
             <a:r>
-              <a:rPr lang="en-US" sz="1600" dirty="0">
+              <a:rPr lang="en-US" sz="1500" dirty="0">
                 <a:solidFill>
                   <a:srgbClr val="1A1A1A"/>
                 </a:solidFill>
@@ -9457,20 +8819,20 @@
                 <a:ea typeface="Calibri" pitchFamily="34" charset="-122"/>
                 <a:cs typeface="Calibri" pitchFamily="34" charset="-120"/>
               </a:rPr>
-              <a:t>Tono del título y la bajada, no de la nota completa</a:t>
-            </a:r>
-            <a:endParaRPr lang="en-US" sz="1600" dirty="0"/>
+              <a:t>Nodos: medios; tamaño según historias compartidas</a:t>
+            </a:r>
+            <a:endParaRPr lang="en-US" sz="1500" dirty="0"/>
           </a:p>
           <a:p>
             <a:pPr marL="342900" indent="-342900">
               <a:spcAft>
-                <a:spcPts val="1000"/>
+                <a:spcPts val="800"/>
               </a:spcAft>
               <a:buSzPct val="100000"/>
               <a:buChar char="•"/>
             </a:pPr>
             <a:r>
-              <a:rPr lang="en-US" sz="1600" dirty="0">
+              <a:rPr lang="en-US" sz="1500" dirty="0">
                 <a:solidFill>
                   <a:srgbClr val="1A1A1A"/>
                 </a:solidFill>
@@ -9478,20 +8840,20 @@
                 <a:ea typeface="Calibri" pitchFamily="34" charset="-122"/>
                 <a:cs typeface="Calibri" pitchFamily="34" charset="-120"/>
               </a:rPr>
-              <a:t>77% de acierto con 340 etiquetas de un solo criterio</a:t>
-            </a:r>
-            <a:endParaRPr lang="en-US" sz="1600" dirty="0"/>
+              <a:t>Aristas: cubren las mismas historias</a:t>
+            </a:r>
+            <a:endParaRPr lang="en-US" sz="1500" dirty="0"/>
           </a:p>
           <a:p>
             <a:pPr marL="342900" indent="-342900">
               <a:spcAft>
-                <a:spcPts val="1000"/>
+                <a:spcPts val="800"/>
               </a:spcAft>
               <a:buSzPct val="100000"/>
               <a:buChar char="•"/>
             </a:pPr>
             <a:r>
-              <a:rPr lang="en-US" sz="1600" dirty="0">
+              <a:rPr lang="en-US" sz="1500" dirty="0">
                 <a:solidFill>
                   <a:srgbClr val="1A1A1A"/>
                 </a:solidFill>
@@ -9499,20 +8861,20 @@
                 <a:ea typeface="Calibri" pitchFamily="34" charset="-122"/>
                 <a:cs typeface="Calibri" pitchFamily="34" charset="-120"/>
               </a:rPr>
-              <a:t>Pocos días de histórico: los rankings se estabilizan con semanas</a:t>
-            </a:r>
-            <a:endParaRPr lang="en-US" sz="1600" dirty="0"/>
+              <a:t>Colores: comunidades detectadas por propagación de etiquetas</a:t>
+            </a:r>
+            <a:endParaRPr lang="en-US" sz="1500" dirty="0"/>
           </a:p>
           <a:p>
             <a:pPr marL="342900" indent="-342900">
               <a:spcAft>
-                <a:spcPts val="1000"/>
+                <a:spcPts val="800"/>
               </a:spcAft>
               <a:buSzPct val="100000"/>
               <a:buChar char="•"/>
             </a:pPr>
             <a:r>
-              <a:rPr lang="en-US" sz="1600" dirty="0">
+              <a:rPr lang="en-US" sz="1500" dirty="0">
                 <a:solidFill>
                   <a:srgbClr val="1A1A1A"/>
                 </a:solidFill>
@@ -9520,205 +8882,9 @@
                 <a:ea typeface="Calibri" pitchFamily="34" charset="-122"/>
                 <a:cs typeface="Calibri" pitchFamily="34" charset="-120"/>
               </a:rPr>
-              <a:t>Temas y entidades por diccionario requieren mantenimiento</a:t>
-            </a:r>
-            <a:endParaRPr lang="en-US" sz="1600" dirty="0"/>
-          </a:p>
-        </p:txBody>
-      </p:sp>
-      <p:sp>
-        <p:nvSpPr>
-          <p:cNvPr id="9" name="cierre-1"/>
-          <p:cNvSpPr/>
-          <p:nvPr/>
-        </p:nvSpPr>
-        <p:spPr>
-          <a:xfrm>
-            <a:off x="6217920" y="2011680"/>
-            <a:ext cx="5394960" cy="3931920"/>
-          </a:xfrm>
-          <a:prstGeom prst="roundRect">
-            <a:avLst>
-              <a:gd name="adj" fmla="val 1860"/>
-            </a:avLst>
-          </a:prstGeom>
-          <a:solidFill>
-            <a:srgbClr val="F2F2F0"/>
-          </a:solidFill>
-          <a:ln w="12700">
-            <a:solidFill>
-              <a:srgbClr val="F2F2F0"/>
-            </a:solidFill>
-            <a:prstDash val="solid"/>
-          </a:ln>
-        </p:spPr>
-      </p:sp>
-      <p:pic>
-        <p:nvPicPr>
-          <p:cNvPr id="10" name="Image 1" descr="preencoded.png">    </p:cNvPr>
-          <p:cNvPicPr>
-            <a:picLocks noChangeAspect="1"/>
-          </p:cNvPicPr>
-          <p:nvPr/>
-        </p:nvPicPr>
-        <p:blipFill>
-          <a:blip r:embed="rId2"/>
-          <a:stretch>
-            <a:fillRect/>
-          </a:stretch>
-        </p:blipFill>
-        <p:spPr>
-          <a:xfrm>
-            <a:off x="6537960" y="2286000"/>
-            <a:ext cx="411480" cy="411480"/>
-          </a:xfrm>
-          <a:prstGeom prst="rect">
-            <a:avLst/>
-          </a:prstGeom>
-        </p:spPr>
-      </p:pic>
-      <p:sp>
-        <p:nvSpPr>
-          <p:cNvPr id="11" name="Text 6"/>
-          <p:cNvSpPr txBox="1"/>
-          <p:nvPr/>
-        </p:nvSpPr>
-        <p:spPr>
-          <a:xfrm>
-            <a:off x="7132320" y="2286000"/>
-            <a:ext cx="4114800" cy="411480"/>
-          </a:xfrm>
-          <a:prstGeom prst="rect">
-            <a:avLst/>
-          </a:prstGeom>
-          <a:noFill/>
-          <a:ln/>
-        </p:spPr>
-        <p:txBody>
-          <a:bodyPr wrap="square" lIns="0" tIns="0" rIns="0" bIns="0" rtlCol="0" anchor="ctr"/>
-          <a:lstStyle/>
-          <a:p>
-            <a:pPr indent="0" marL="0">
-              <a:buNone/>
-            </a:pPr>
-            <a:r>
-              <a:rPr lang="en-US" sz="2200" b="1" dirty="0">
-                <a:solidFill>
-                  <a:srgbClr val="1A1A1A"/>
-                </a:solidFill>
-                <a:latin typeface="Calibri" pitchFamily="34" charset="0"/>
-                <a:ea typeface="Calibri" pitchFamily="34" charset="-122"/>
-                <a:cs typeface="Calibri" pitchFamily="34" charset="-120"/>
-              </a:rPr>
-              <a:t>Próximos pasos</a:t>
-            </a:r>
-            <a:endParaRPr lang="en-US" sz="2200" dirty="0"/>
-          </a:p>
-        </p:txBody>
-      </p:sp>
-      <p:sp>
-        <p:nvSpPr>
-          <p:cNvPr id="12" name="Text 7"/>
-          <p:cNvSpPr txBox="1"/>
-          <p:nvPr/>
-        </p:nvSpPr>
-        <p:spPr>
-          <a:xfrm>
-            <a:off x="6537960" y="2971800"/>
-            <a:ext cx="4800600" cy="2743200"/>
-          </a:xfrm>
-          <a:prstGeom prst="rect">
-            <a:avLst/>
-          </a:prstGeom>
-          <a:noFill/>
-          <a:ln/>
-        </p:spPr>
-        <p:txBody>
-          <a:bodyPr wrap="square" lIns="0" tIns="0" rIns="0" bIns="0" rtlCol="0" anchor="t"/>
-          <a:lstStyle/>
-          <a:p>
-            <a:pPr marL="342900" indent="-342900">
-              <a:spcAft>
-                <a:spcPts val="1000"/>
-              </a:spcAft>
-              <a:buSzPct val="100000"/>
-              <a:buChar char="•"/>
-            </a:pPr>
-            <a:r>
-              <a:rPr lang="en-US" sz="1600" dirty="0">
-                <a:solidFill>
-                  <a:srgbClr val="1A1A1A"/>
-                </a:solidFill>
-                <a:latin typeface="Calibri" pitchFamily="34" charset="0"/>
-                <a:ea typeface="Calibri" pitchFamily="34" charset="-122"/>
-                <a:cs typeface="Calibri" pitchFamily="34" charset="-120"/>
-              </a:rPr>
-              <a:t>Entidades con spaCy (NER) para descubrir figuras nuevas</a:t>
-            </a:r>
-            <a:endParaRPr lang="en-US" sz="1600" dirty="0"/>
-          </a:p>
-          <a:p>
-            <a:pPr marL="342900" indent="-342900">
-              <a:spcAft>
-                <a:spcPts val="1000"/>
-              </a:spcAft>
-              <a:buSzPct val="100000"/>
-              <a:buChar char="•"/>
-            </a:pPr>
-            <a:r>
-              <a:rPr lang="en-US" sz="1600" dirty="0">
-                <a:solidFill>
-                  <a:srgbClr val="1A1A1A"/>
-                </a:solidFill>
-                <a:latin typeface="Calibri" pitchFamily="34" charset="0"/>
-                <a:ea typeface="Calibri" pitchFamily="34" charset="-122"/>
-                <a:cs typeface="Calibri" pitchFamily="34" charset="-120"/>
-              </a:rPr>
-              <a:t>Sesgo de agenda y tono por entidad y medio</a:t>
-            </a:r>
-            <a:endParaRPr lang="en-US" sz="1600" dirty="0"/>
-          </a:p>
-          <a:p>
-            <a:pPr marL="342900" indent="-342900">
-              <a:spcAft>
-                <a:spcPts val="1000"/>
-              </a:spcAft>
-              <a:buSzPct val="100000"/>
-              <a:buChar char="•"/>
-            </a:pPr>
-            <a:r>
-              <a:rPr lang="en-US" sz="1600" dirty="0">
-                <a:solidFill>
-                  <a:srgbClr val="1A1A1A"/>
-                </a:solidFill>
-                <a:latin typeface="Calibri" pitchFamily="34" charset="0"/>
-                <a:ea typeface="Calibri" pitchFamily="34" charset="-122"/>
-                <a:cs typeface="Calibri" pitchFamily="34" charset="-120"/>
-              </a:rPr>
-              <a:t>Mapa de medios como grafo de historias compartidas</a:t>
-            </a:r>
-            <a:endParaRPr lang="en-US" sz="1600" dirty="0"/>
-          </a:p>
-          <a:p>
-            <a:pPr marL="342900" indent="-342900">
-              <a:spcAft>
-                <a:spcPts val="1000"/>
-              </a:spcAft>
-              <a:buSzPct val="100000"/>
-              <a:buChar char="•"/>
-            </a:pPr>
-            <a:r>
-              <a:rPr lang="en-US" sz="1600" dirty="0">
-                <a:solidFill>
-                  <a:srgbClr val="1A1A1A"/>
-                </a:solidFill>
-                <a:latin typeface="Calibri" pitchFamily="34" charset="0"/>
-                <a:ea typeface="Calibri" pitchFamily="34" charset="-122"/>
-                <a:cs typeface="Calibri" pitchFamily="34" charset="-120"/>
-              </a:rPr>
-              <a:t>Primicia: quién publica primero cada historia</a:t>
-            </a:r>
-            <a:endParaRPr lang="en-US" sz="1600" dirty="0"/>
+              <a:t>Disposición por fuerzas, animada en el tablero</a:t>
+            </a:r>
+            <a:endParaRPr lang="en-US" sz="1500" dirty="0"/>
           </a:p>
         </p:txBody>
       </p:sp>
@@ -10535,6 +9701,2486 @@
         </p:nvSpPr>
         <p:spPr>
           <a:xfrm>
+            <a:off x="548640" y="365760"/>
+            <a:ext cx="8229600" cy="320040"/>
+          </a:xfrm>
+          <a:prstGeom prst="rect">
+            <a:avLst/>
+          </a:prstGeom>
+          <a:noFill/>
+          <a:ln/>
+        </p:spPr>
+        <p:txBody>
+          <a:bodyPr wrap="square" lIns="0" tIns="0" rIns="0" bIns="0" rtlCol="0"/>
+          <a:lstStyle/>
+          <a:p>
+            <a:pPr indent="0" marL="0">
+              <a:buNone/>
+            </a:pPr>
+            <a:r>
+              <a:rPr lang="en-US" sz="1200" b="1" spc="200" kern="0" dirty="0">
+                <a:solidFill>
+                  <a:schemeClr val="accent1"/>
+                </a:solidFill>
+              </a:rPr>
+              <a:t>EL TABLERO</a:t>
+            </a:r>
+            <a:endParaRPr lang="en-US" sz="1200" dirty="0"/>
+          </a:p>
+        </p:txBody>
+      </p:sp>
+      <p:sp>
+        <p:nvSpPr>
+          <p:cNvPr id="3" name="Text 0"/>
+          <p:cNvSpPr/>
+          <p:nvPr>
+            <p:ph idx="101" type="title" hasCustomPrompt="1"/>
+          </p:nvPr>
+        </p:nvSpPr>
+        <p:spPr>
+          <a:xfrm>
+            <a:off x="548640" y="685800"/>
+            <a:ext cx="11094415" cy="1051560"/>
+          </a:xfrm>
+          <a:prstGeom prst="rect">
+            <a:avLst/>
+          </a:prstGeom>
+          <a:noFill/>
+          <a:ln/>
+        </p:spPr>
+        <p:txBody>
+          <a:bodyPr wrap="square" lIns="0" tIns="0" rIns="0" bIns="0" rtlCol="0" anchor="t"/>
+          <a:lstStyle/>
+          <a:p>
+            <a:pPr algn="l" indent="0" marL="0">
+              <a:buNone/>
+            </a:pPr>
+            <a:r>
+              <a:rPr lang="en-US" sz="3200" b="1" dirty="0">
+                <a:solidFill>
+                  <a:schemeClr val="tx1"/>
+                </a:solidFill>
+                <a:latin typeface="Cambria" pitchFamily="34" charset="0"/>
+                <a:ea typeface="Cambria" pitchFamily="34" charset="-122"/>
+                <a:cs typeface="Cambria" pitchFamily="34" charset="-120"/>
+              </a:rPr>
+              <a:t>Todo esto, en un tablero público que se actualiza solo</a:t>
+            </a:r>
+            <a:endParaRPr lang="en-US" sz="3200" dirty="0"/>
+          </a:p>
+        </p:txBody>
+      </p:sp>
+      <p:pic>
+        <p:nvPicPr>
+          <p:cNvPr id="5" name="captura" descr="C:\Users\SBI\Documents\Martin Ceriotti Personales\Master Data Science\webmining\Web-Mining\docs\_fuentes\img\tablero-resumen.png">    </p:cNvPr>
+          <p:cNvPicPr>
+            <a:picLocks noChangeAspect="1"/>
+          </p:cNvPicPr>
+          <p:nvPr/>
+        </p:nvPicPr>
+        <p:blipFill>
+          <a:blip r:embed="rId1"/>
+          <a:stretch>
+            <a:fillRect/>
+          </a:stretch>
+        </p:blipFill>
+        <p:spPr>
+          <a:xfrm>
+            <a:off x="548640" y="1874520"/>
+            <a:ext cx="6583680" cy="4114800"/>
+          </a:xfrm>
+          <a:prstGeom prst="rect">
+            <a:avLst/>
+          </a:prstGeom>
+        </p:spPr>
+      </p:pic>
+      <p:sp>
+        <p:nvSpPr>
+          <p:cNvPr id="6" name="marco"/>
+          <p:cNvSpPr/>
+          <p:nvPr/>
+        </p:nvSpPr>
+        <p:spPr>
+          <a:xfrm>
+            <a:off x="548640" y="1874520"/>
+            <a:ext cx="6583680" cy="4114800"/>
+          </a:xfrm>
+          <a:prstGeom prst="rect">
+            <a:avLst/>
+          </a:prstGeom>
+          <a:ln w="12700">
+            <a:solidFill>
+              <a:srgbClr val="D9D9D6"/>
+            </a:solidFill>
+            <a:prstDash val="solid"/>
+          </a:ln>
+        </p:spPr>
+      </p:sp>
+      <p:sp>
+        <p:nvSpPr>
+          <p:cNvPr id="7" name="Text 3"/>
+          <p:cNvSpPr txBox="1"/>
+          <p:nvPr/>
+        </p:nvSpPr>
+        <p:spPr>
+          <a:xfrm>
+            <a:off x="7498080" y="1920240"/>
+            <a:ext cx="4114800" cy="566928"/>
+          </a:xfrm>
+          <a:prstGeom prst="rect">
+            <a:avLst/>
+          </a:prstGeom>
+          <a:noFill/>
+          <a:ln/>
+        </p:spPr>
+        <p:txBody>
+          <a:bodyPr wrap="square" lIns="0" tIns="0" rIns="0" bIns="0" rtlCol="0" anchor="t"/>
+          <a:lstStyle/>
+          <a:p>
+            <a:pPr indent="0" marL="0">
+              <a:buNone/>
+            </a:pPr>
+            <a:r>
+              <a:rPr lang="en-US" sz="1400" b="1" dirty="0">
+                <a:solidFill>
+                  <a:srgbClr val="1A1A1A"/>
+                </a:solidFill>
+                <a:latin typeface="Calibri" pitchFamily="34" charset="0"/>
+                <a:ea typeface="Calibri" pitchFamily="34" charset="-122"/>
+                <a:cs typeface="Calibri" pitchFamily="34" charset="-120"/>
+              </a:rPr>
+              <a:t>Resumen</a:t>
+            </a:r>
+            <a:endParaRPr lang="en-US" sz="1400" dirty="0"/>
+          </a:p>
+          <a:p>
+            <a:pPr indent="0" marL="0">
+              <a:buNone/>
+            </a:pPr>
+            <a:r>
+              <a:rPr lang="en-US" sz="1400" dirty="0">
+                <a:solidFill>
+                  <a:srgbClr val="6B6B6B"/>
+                </a:solidFill>
+                <a:latin typeface="Calibri" pitchFamily="34" charset="0"/>
+                <a:ea typeface="Calibri" pitchFamily="34" charset="-122"/>
+                <a:cs typeface="Calibri" pitchFamily="34" charset="-120"/>
+              </a:rPr>
+              <a:t>termómetro, resumen del día y noticias compartidas</a:t>
+            </a:r>
+            <a:endParaRPr lang="en-US" sz="1400" dirty="0"/>
+          </a:p>
+        </p:txBody>
+      </p:sp>
+      <p:sp>
+        <p:nvSpPr>
+          <p:cNvPr id="8" name="Text 4"/>
+          <p:cNvSpPr txBox="1"/>
+          <p:nvPr/>
+        </p:nvSpPr>
+        <p:spPr>
+          <a:xfrm>
+            <a:off x="7498080" y="2505456"/>
+            <a:ext cx="4114800" cy="566928"/>
+          </a:xfrm>
+          <a:prstGeom prst="rect">
+            <a:avLst/>
+          </a:prstGeom>
+          <a:noFill/>
+          <a:ln/>
+        </p:spPr>
+        <p:txBody>
+          <a:bodyPr wrap="square" lIns="0" tIns="0" rIns="0" bIns="0" rtlCol="0" anchor="t"/>
+          <a:lstStyle/>
+          <a:p>
+            <a:pPr indent="0" marL="0">
+              <a:buNone/>
+            </a:pPr>
+            <a:r>
+              <a:rPr lang="en-US" sz="1400" b="1" dirty="0">
+                <a:solidFill>
+                  <a:srgbClr val="1A1A1A"/>
+                </a:solidFill>
+                <a:latin typeface="Calibri" pitchFamily="34" charset="0"/>
+                <a:ea typeface="Calibri" pitchFamily="34" charset="-122"/>
+                <a:cs typeface="Calibri" pitchFamily="34" charset="-120"/>
+              </a:rPr>
+              <a:t>Titulares</a:t>
+            </a:r>
+            <a:endParaRPr lang="en-US" sz="1400" dirty="0"/>
+          </a:p>
+          <a:p>
+            <a:pPr indent="0" marL="0">
+              <a:buNone/>
+            </a:pPr>
+            <a:r>
+              <a:rPr lang="en-US" sz="1400" dirty="0">
+                <a:solidFill>
+                  <a:srgbClr val="6B6B6B"/>
+                </a:solidFill>
+                <a:latin typeface="Calibri" pitchFamily="34" charset="0"/>
+                <a:ea typeface="Calibri" pitchFamily="34" charset="-122"/>
+                <a:cs typeface="Calibri" pitchFamily="34" charset="-120"/>
+              </a:rPr>
+              <a:t>buscador y filtros por medio y tema</a:t>
+            </a:r>
+            <a:endParaRPr lang="en-US" sz="1400" dirty="0"/>
+          </a:p>
+        </p:txBody>
+      </p:sp>
+      <p:sp>
+        <p:nvSpPr>
+          <p:cNvPr id="9" name="Text 5"/>
+          <p:cNvSpPr txBox="1"/>
+          <p:nvPr/>
+        </p:nvSpPr>
+        <p:spPr>
+          <a:xfrm>
+            <a:off x="7498080" y="3090672"/>
+            <a:ext cx="4114800" cy="566928"/>
+          </a:xfrm>
+          <a:prstGeom prst="rect">
+            <a:avLst/>
+          </a:prstGeom>
+          <a:noFill/>
+          <a:ln/>
+        </p:spPr>
+        <p:txBody>
+          <a:bodyPr wrap="square" lIns="0" tIns="0" rIns="0" bIns="0" rtlCol="0" anchor="t"/>
+          <a:lstStyle/>
+          <a:p>
+            <a:pPr indent="0" marL="0">
+              <a:buNone/>
+            </a:pPr>
+            <a:r>
+              <a:rPr lang="en-US" sz="1400" b="1" dirty="0">
+                <a:solidFill>
+                  <a:srgbClr val="1A1A1A"/>
+                </a:solidFill>
+                <a:latin typeface="Calibri" pitchFamily="34" charset="0"/>
+                <a:ea typeface="Calibri" pitchFamily="34" charset="-122"/>
+                <a:cs typeface="Calibri" pitchFamily="34" charset="-120"/>
+              </a:rPr>
+              <a:t>Monitor</a:t>
+            </a:r>
+            <a:endParaRPr lang="en-US" sz="1400" dirty="0"/>
+          </a:p>
+          <a:p>
+            <a:pPr indent="0" marL="0">
+              <a:buNone/>
+            </a:pPr>
+            <a:r>
+              <a:rPr lang="en-US" sz="1400" dirty="0">
+                <a:solidFill>
+                  <a:srgbClr val="6B6B6B"/>
+                </a:solidFill>
+                <a:latin typeface="Calibri" pitchFamily="34" charset="0"/>
+                <a:ea typeface="Calibri" pitchFamily="34" charset="-122"/>
+                <a:cs typeface="Calibri" pitchFamily="34" charset="-120"/>
+              </a:rPr>
+              <a:t>seguir una persona o marca</a:t>
+            </a:r>
+            <a:endParaRPr lang="en-US" sz="1400" dirty="0"/>
+          </a:p>
+        </p:txBody>
+      </p:sp>
+      <p:sp>
+        <p:nvSpPr>
+          <p:cNvPr id="10" name="Text 6"/>
+          <p:cNvSpPr txBox="1"/>
+          <p:nvPr/>
+        </p:nvSpPr>
+        <p:spPr>
+          <a:xfrm>
+            <a:off x="7498080" y="3675888"/>
+            <a:ext cx="4114800" cy="566928"/>
+          </a:xfrm>
+          <a:prstGeom prst="rect">
+            <a:avLst/>
+          </a:prstGeom>
+          <a:noFill/>
+          <a:ln/>
+        </p:spPr>
+        <p:txBody>
+          <a:bodyPr wrap="square" lIns="0" tIns="0" rIns="0" bIns="0" rtlCol="0" anchor="t"/>
+          <a:lstStyle/>
+          <a:p>
+            <a:pPr indent="0" marL="0">
+              <a:buNone/>
+            </a:pPr>
+            <a:r>
+              <a:rPr lang="en-US" sz="1400" b="1" dirty="0">
+                <a:solidFill>
+                  <a:srgbClr val="1A1A1A"/>
+                </a:solidFill>
+                <a:latin typeface="Calibri" pitchFamily="34" charset="0"/>
+                <a:ea typeface="Calibri" pitchFamily="34" charset="-122"/>
+                <a:cs typeface="Calibri" pitchFamily="34" charset="-120"/>
+              </a:rPr>
+              <a:t>Análisis</a:t>
+            </a:r>
+            <a:endParaRPr lang="en-US" sz="1400" dirty="0"/>
+          </a:p>
+          <a:p>
+            <a:pPr indent="0" marL="0">
+              <a:buNone/>
+            </a:pPr>
+            <a:r>
+              <a:rPr lang="en-US" sz="1400" dirty="0">
+                <a:solidFill>
+                  <a:srgbClr val="6B6B6B"/>
+                </a:solidFill>
+                <a:latin typeface="Calibri" pitchFamily="34" charset="0"/>
+                <a:ea typeface="Calibri" pitchFamily="34" charset="-122"/>
+                <a:cs typeface="Calibri" pitchFamily="34" charset="-120"/>
+              </a:rPr>
+              <a:t>filtros, agenda, encuadre y mapa de medios</a:t>
+            </a:r>
+            <a:endParaRPr lang="en-US" sz="1400" dirty="0"/>
+          </a:p>
+        </p:txBody>
+      </p:sp>
+      <p:sp>
+        <p:nvSpPr>
+          <p:cNvPr id="11" name="Text 7"/>
+          <p:cNvSpPr txBox="1"/>
+          <p:nvPr/>
+        </p:nvSpPr>
+        <p:spPr>
+          <a:xfrm>
+            <a:off x="7498080" y="4261104"/>
+            <a:ext cx="4114800" cy="566928"/>
+          </a:xfrm>
+          <a:prstGeom prst="rect">
+            <a:avLst/>
+          </a:prstGeom>
+          <a:noFill/>
+          <a:ln/>
+        </p:spPr>
+        <p:txBody>
+          <a:bodyPr wrap="square" lIns="0" tIns="0" rIns="0" bIns="0" rtlCol="0" anchor="t"/>
+          <a:lstStyle/>
+          <a:p>
+            <a:pPr indent="0" marL="0">
+              <a:buNone/>
+            </a:pPr>
+            <a:r>
+              <a:rPr lang="en-US" sz="1400" b="1" dirty="0">
+                <a:solidFill>
+                  <a:srgbClr val="1A1A1A"/>
+                </a:solidFill>
+                <a:latin typeface="Calibri" pitchFamily="34" charset="0"/>
+                <a:ea typeface="Calibri" pitchFamily="34" charset="-122"/>
+                <a:cs typeface="Calibri" pitchFamily="34" charset="-120"/>
+              </a:rPr>
+              <a:t>Cómo titulan</a:t>
+            </a:r>
+            <a:endParaRPr lang="en-US" sz="1400" dirty="0"/>
+          </a:p>
+          <a:p>
+            <a:pPr indent="0" marL="0">
+              <a:buNone/>
+            </a:pPr>
+            <a:r>
+              <a:rPr lang="en-US" sz="1400" dirty="0">
+                <a:solidFill>
+                  <a:srgbClr val="6B6B6B"/>
+                </a:solidFill>
+                <a:latin typeface="Calibri" pitchFamily="34" charset="0"/>
+                <a:ea typeface="Calibri" pitchFamily="34" charset="-122"/>
+                <a:cs typeface="Calibri" pitchFamily="34" charset="-120"/>
+              </a:rPr>
+              <a:t>mapa, rankings y ejemplos</a:t>
+            </a:r>
+            <a:endParaRPr lang="en-US" sz="1400" dirty="0"/>
+          </a:p>
+        </p:txBody>
+      </p:sp>
+      <p:sp>
+        <p:nvSpPr>
+          <p:cNvPr id="12" name="Text 8"/>
+          <p:cNvSpPr txBox="1"/>
+          <p:nvPr/>
+        </p:nvSpPr>
+        <p:spPr>
+          <a:xfrm>
+            <a:off x="7498080" y="4846320"/>
+            <a:ext cx="4114800" cy="566928"/>
+          </a:xfrm>
+          <a:prstGeom prst="rect">
+            <a:avLst/>
+          </a:prstGeom>
+          <a:noFill/>
+          <a:ln/>
+        </p:spPr>
+        <p:txBody>
+          <a:bodyPr wrap="square" lIns="0" tIns="0" rIns="0" bIns="0" rtlCol="0" anchor="t"/>
+          <a:lstStyle/>
+          <a:p>
+            <a:pPr indent="0" marL="0">
+              <a:buNone/>
+            </a:pPr>
+            <a:r>
+              <a:rPr lang="en-US" sz="1400" b="1" dirty="0">
+                <a:solidFill>
+                  <a:srgbClr val="1A1A1A"/>
+                </a:solidFill>
+                <a:latin typeface="Calibri" pitchFamily="34" charset="0"/>
+                <a:ea typeface="Calibri" pitchFamily="34" charset="-122"/>
+                <a:cs typeface="Calibri" pitchFamily="34" charset="-120"/>
+              </a:rPr>
+              <a:t>Salud de datos</a:t>
+            </a:r>
+            <a:endParaRPr lang="en-US" sz="1400" dirty="0"/>
+          </a:p>
+          <a:p>
+            <a:pPr indent="0" marL="0">
+              <a:buNone/>
+            </a:pPr>
+            <a:r>
+              <a:rPr lang="en-US" sz="1400" dirty="0">
+                <a:solidFill>
+                  <a:srgbClr val="6B6B6B"/>
+                </a:solidFill>
+                <a:latin typeface="Calibri" pitchFamily="34" charset="0"/>
+                <a:ea typeface="Calibri" pitchFamily="34" charset="-122"/>
+                <a:cs typeface="Calibri" pitchFamily="34" charset="-120"/>
+              </a:rPr>
+              <a:t>fuentes y scraping</a:t>
+            </a:r>
+            <a:endParaRPr lang="en-US" sz="1400" dirty="0"/>
+          </a:p>
+        </p:txBody>
+      </p:sp>
+      <p:sp>
+        <p:nvSpPr>
+          <p:cNvPr id="25" name="Slide Number Placeholder 0"/>
+          <p:cNvSpPr>
+            <a:spLocks noGrp="1"/>
+          </p:cNvSpPr>
+          <p:nvPr>
+            <p:ph type="sldNum" sz="quarter" idx="4294967295"/>
+          </p:nvPr>
+        </p:nvSpPr>
+        <p:spPr>
+          <a:xfrm>
+            <a:off x="11094415" y="6400800"/>
+            <a:ext cx="548640" cy="274320"/>
+          </a:xfrm>
+          <a:prstGeom prst="rect">
+            <a:avLst/>
+          </a:prstGeom>
+          <a:extLst>
+            <a:ext uri="{C572A759-6A51-4108-AA02-DFA0A04FC94B}">
+              <ma14:wrappingTextBoxFlag xmlns:ma14="http://schemas.microsoft.com/office/mac/drawingml/2011/main" val="0"/>
+            </a:ext>
+          </a:extLst>
+        </p:spPr>
+        <p:txBody>
+          <a:bodyPr/>
+          <a:lstStyle>
+            <a:lvl1pPr>
+              <a:defRPr sz="1000">
+                <a:solidFill>
+                  <a:srgbClr val="6B6B6B"/>
+                </a:solidFill>
+              </a:defRPr>
+            </a:lvl1pPr>
+          </a:lstStyle>
+          <a:p>
+            <a:pPr algn="r"/>
+            <a:fld id="{F7021451-1387-4CA6-816F-3879F97B5CBC}" type="slidenum">
+              <a:rPr b="0" lang="en-US"/>
+              <a:t>20</a:t>
+            </a:fld>
+            <a:endParaRPr lang="en-US"/>
+          </a:p>
+        </p:txBody>
+      </p:sp>
+    </p:spTree>
+  </p:cSld>
+  <p:clrMapOvr>
+    <a:masterClrMapping/>
+  </p:clrMapOvr>
+</p:sld>
+</file>
+
+<file path=ppt/slides/slide21.xml><?xml version="1.0" encoding="utf-8"?>
+<p:sld xmlns:a="http://schemas.openxmlformats.org/drawingml/2006/main" xmlns:r="http://schemas.openxmlformats.org/officeDocument/2006/relationships" xmlns:p="http://schemas.openxmlformats.org/presentationml/2006/main">
+  <p:cSld name="Slide 21">
+    <p:spTree>
+      <p:nvGrpSpPr>
+        <p:cNvPr id="1" name=""/>
+        <p:cNvGrpSpPr/>
+        <p:nvPr/>
+      </p:nvGrpSpPr>
+      <p:grpSpPr>
+        <a:xfrm>
+          <a:off x="0" y="0"/>
+          <a:ext cx="0" cy="0"/>
+          <a:chOff x="0" y="0"/>
+          <a:chExt cx="0" cy="0"/>
+        </a:xfrm>
+      </p:grpSpPr>
+      <p:sp>
+        <p:nvSpPr>
+          <p:cNvPr id="2" name="Text 0"/>
+          <p:cNvSpPr/>
+          <p:nvPr>
+            <p:ph idx="100" type="body" hasCustomPrompt="1"/>
+          </p:nvPr>
+        </p:nvSpPr>
+        <p:spPr>
+          <a:xfrm>
+            <a:off x="548640" y="365760"/>
+            <a:ext cx="8229600" cy="320040"/>
+          </a:xfrm>
+          <a:prstGeom prst="rect">
+            <a:avLst/>
+          </a:prstGeom>
+          <a:noFill/>
+          <a:ln/>
+        </p:spPr>
+        <p:txBody>
+          <a:bodyPr wrap="square" lIns="0" tIns="0" rIns="0" bIns="0" rtlCol="0"/>
+          <a:lstStyle/>
+          <a:p>
+            <a:pPr indent="0" marL="0">
+              <a:buNone/>
+            </a:pPr>
+            <a:r>
+              <a:rPr lang="en-US" sz="1200" b="1" spc="200" kern="0" dirty="0">
+                <a:solidFill>
+                  <a:schemeClr val="accent1"/>
+                </a:solidFill>
+              </a:rPr>
+              <a:t>DEMO EN VIVO</a:t>
+            </a:r>
+            <a:endParaRPr lang="en-US" sz="1200" dirty="0"/>
+          </a:p>
+        </p:txBody>
+      </p:sp>
+      <p:sp>
+        <p:nvSpPr>
+          <p:cNvPr id="3" name="Text 0"/>
+          <p:cNvSpPr/>
+          <p:nvPr>
+            <p:ph idx="101" type="title" hasCustomPrompt="1"/>
+          </p:nvPr>
+        </p:nvSpPr>
+        <p:spPr>
+          <a:xfrm>
+            <a:off x="548640" y="685800"/>
+            <a:ext cx="11094415" cy="1051560"/>
+          </a:xfrm>
+          <a:prstGeom prst="rect">
+            <a:avLst/>
+          </a:prstGeom>
+          <a:noFill/>
+          <a:ln/>
+        </p:spPr>
+        <p:txBody>
+          <a:bodyPr wrap="square" lIns="0" tIns="0" rIns="0" bIns="0" rtlCol="0" anchor="t"/>
+          <a:lstStyle/>
+          <a:p>
+            <a:pPr algn="l" indent="0" marL="0">
+              <a:buNone/>
+            </a:pPr>
+            <a:r>
+              <a:rPr lang="en-US" sz="3200" b="1" dirty="0">
+                <a:solidFill>
+                  <a:schemeClr val="tx1"/>
+                </a:solidFill>
+                <a:latin typeface="Cambria" pitchFamily="34" charset="0"/>
+                <a:ea typeface="Cambria" pitchFamily="34" charset="-122"/>
+                <a:cs typeface="Cambria" pitchFamily="34" charset="-120"/>
+              </a:rPr>
+              <a:t>La base se consulta con SQL desde el navegador</a:t>
+            </a:r>
+            <a:endParaRPr lang="en-US" sz="3200" dirty="0"/>
+          </a:p>
+        </p:txBody>
+      </p:sp>
+      <p:sp>
+        <p:nvSpPr>
+          <p:cNvPr id="5" name="sql"/>
+          <p:cNvSpPr/>
+          <p:nvPr/>
+        </p:nvSpPr>
+        <p:spPr>
+          <a:xfrm>
+            <a:off x="548640" y="2011680"/>
+            <a:ext cx="6400800" cy="3931920"/>
+          </a:xfrm>
+          <a:prstGeom prst="roundRect">
+            <a:avLst>
+              <a:gd name="adj" fmla="val 1860"/>
+            </a:avLst>
+          </a:prstGeom>
+          <a:solidFill>
+            <a:srgbClr val="F2F2F0"/>
+          </a:solidFill>
+          <a:ln w="12700">
+            <a:solidFill>
+              <a:srgbClr val="F2F2F0"/>
+            </a:solidFill>
+            <a:prstDash val="solid"/>
+          </a:ln>
+        </p:spPr>
+      </p:sp>
+      <p:sp>
+        <p:nvSpPr>
+          <p:cNvPr id="6" name="Text 3"/>
+          <p:cNvSpPr txBox="1"/>
+          <p:nvPr/>
+        </p:nvSpPr>
+        <p:spPr>
+          <a:xfrm>
+            <a:off x="868680" y="2331720"/>
+            <a:ext cx="5852160" cy="3383280"/>
+          </a:xfrm>
+          <a:prstGeom prst="rect">
+            <a:avLst/>
+          </a:prstGeom>
+          <a:noFill/>
+          <a:ln/>
+        </p:spPr>
+        <p:txBody>
+          <a:bodyPr wrap="square" lIns="0" tIns="0" rIns="0" bIns="0" rtlCol="0" anchor="t"/>
+          <a:lstStyle/>
+          <a:p>
+            <a:pPr indent="0" marL="0">
+              <a:buNone/>
+            </a:pPr>
+            <a:r>
+              <a:rPr lang="en-US" sz="1800" dirty="0">
+                <a:solidFill>
+                  <a:srgbClr val="1A1A1A"/>
+                </a:solidFill>
+                <a:latin typeface="Courier New" pitchFamily="34" charset="0"/>
+                <a:ea typeface="Courier New" pitchFamily="34" charset="-122"/>
+                <a:cs typeface="Courier New" pitchFamily="34" charset="-120"/>
+              </a:rPr>
+              <a:t>SELECT medio,</a:t>
+            </a:r>
+            <a:endParaRPr lang="en-US" sz="1800" dirty="0"/>
+          </a:p>
+          <a:p>
+            <a:pPr indent="0" marL="0">
+              <a:buNone/>
+            </a:pPr>
+            <a:r>
+              <a:rPr lang="en-US" sz="1800" dirty="0">
+                <a:solidFill>
+                  <a:srgbClr val="1A1A1A"/>
+                </a:solidFill>
+                <a:latin typeface="Courier New" pitchFamily="34" charset="0"/>
+                <a:ea typeface="Courier New" pitchFamily="34" charset="-122"/>
+                <a:cs typeface="Courier New" pitchFamily="34" charset="-120"/>
+              </a:rPr>
+              <a:t>  ROUND(100*AVG(cebo&gt;=1), 1) AS cebo,</a:t>
+            </a:r>
+            <a:endParaRPr lang="en-US" sz="1800" dirty="0"/>
+          </a:p>
+          <a:p>
+            <a:pPr indent="0" marL="0">
+              <a:buNone/>
+            </a:pPr>
+            <a:r>
+              <a:rPr lang="en-US" sz="1800" dirty="0">
+                <a:solidFill>
+                  <a:srgbClr val="1A1A1A"/>
+                </a:solidFill>
+                <a:latin typeface="Courier New" pitchFamily="34" charset="0"/>
+                <a:ea typeface="Courier New" pitchFamily="34" charset="-122"/>
+                <a:cs typeface="Courier New" pitchFamily="34" charset="-120"/>
+              </a:rPr>
+              <a:t>  ROUND(100*AVG(tono_auto='n'), 1) AS neg</a:t>
+            </a:r>
+            <a:endParaRPr lang="en-US" sz="1800" dirty="0"/>
+          </a:p>
+          <a:p>
+            <a:pPr indent="0" marL="0">
+              <a:buNone/>
+            </a:pPr>
+            <a:r>
+              <a:rPr lang="en-US" sz="1800" dirty="0">
+                <a:solidFill>
+                  <a:srgbClr val="1A1A1A"/>
+                </a:solidFill>
+                <a:latin typeface="Courier New" pitchFamily="34" charset="0"/>
+                <a:ea typeface="Courier New" pitchFamily="34" charset="-122"/>
+                <a:cs typeface="Courier New" pitchFamily="34" charset="-120"/>
+              </a:rPr>
+              <a:t>FROM items</a:t>
+            </a:r>
+            <a:endParaRPr lang="en-US" sz="1800" dirty="0"/>
+          </a:p>
+          <a:p>
+            <a:pPr indent="0" marL="0">
+              <a:buNone/>
+            </a:pPr>
+            <a:r>
+              <a:rPr lang="en-US" sz="1800" dirty="0">
+                <a:solidFill>
+                  <a:srgbClr val="1A1A1A"/>
+                </a:solidFill>
+                <a:latin typeface="Courier New" pitchFamily="34" charset="0"/>
+                <a:ea typeface="Courier New" pitchFamily="34" charset="-122"/>
+                <a:cs typeface="Courier New" pitchFamily="34" charset="-120"/>
+              </a:rPr>
+              <a:t>GROUP BY medio</a:t>
+            </a:r>
+            <a:endParaRPr lang="en-US" sz="1800" dirty="0"/>
+          </a:p>
+          <a:p>
+            <a:pPr indent="0" marL="0">
+              <a:buNone/>
+            </a:pPr>
+            <a:r>
+              <a:rPr lang="en-US" sz="1800" dirty="0">
+                <a:solidFill>
+                  <a:srgbClr val="1A1A1A"/>
+                </a:solidFill>
+                <a:latin typeface="Courier New" pitchFamily="34" charset="0"/>
+                <a:ea typeface="Courier New" pitchFamily="34" charset="-122"/>
+                <a:cs typeface="Courier New" pitchFamily="34" charset="-120"/>
+              </a:rPr>
+              <a:t>HAVING COUNT(*) &gt;= 50</a:t>
+            </a:r>
+            <a:endParaRPr lang="en-US" sz="1800" dirty="0"/>
+          </a:p>
+          <a:p>
+            <a:pPr indent="0" marL="0">
+              <a:buNone/>
+            </a:pPr>
+            <a:r>
+              <a:rPr lang="en-US" sz="1800" dirty="0">
+                <a:solidFill>
+                  <a:srgbClr val="1A1A1A"/>
+                </a:solidFill>
+                <a:latin typeface="Courier New" pitchFamily="34" charset="0"/>
+                <a:ea typeface="Courier New" pitchFamily="34" charset="-122"/>
+                <a:cs typeface="Courier New" pitchFamily="34" charset="-120"/>
+              </a:rPr>
+              <a:t>ORDER BY cebo DESC;</a:t>
+            </a:r>
+            <a:endParaRPr lang="en-US" sz="1800" dirty="0"/>
+          </a:p>
+        </p:txBody>
+      </p:sp>
+      <p:sp>
+        <p:nvSpPr>
+          <p:cNvPr id="7" name="Text 4"/>
+          <p:cNvSpPr txBox="1"/>
+          <p:nvPr/>
+        </p:nvSpPr>
+        <p:spPr>
+          <a:xfrm>
+            <a:off x="7406640" y="2057400"/>
+            <a:ext cx="548640" cy="640080"/>
+          </a:xfrm>
+          <a:prstGeom prst="rect">
+            <a:avLst/>
+          </a:prstGeom>
+          <a:noFill/>
+          <a:ln/>
+        </p:spPr>
+        <p:txBody>
+          <a:bodyPr wrap="square" lIns="0" tIns="0" rIns="0" bIns="0" rtlCol="0" anchor="t"/>
+          <a:lstStyle/>
+          <a:p>
+            <a:pPr indent="0" marL="0">
+              <a:buNone/>
+            </a:pPr>
+            <a:r>
+              <a:rPr lang="en-US" sz="3200" b="1" dirty="0">
+                <a:solidFill>
+                  <a:srgbClr val="C8102E"/>
+                </a:solidFill>
+                <a:latin typeface="Cambria" pitchFamily="34" charset="0"/>
+                <a:ea typeface="Cambria" pitchFamily="34" charset="-122"/>
+                <a:cs typeface="Cambria" pitchFamily="34" charset="-120"/>
+              </a:rPr>
+              <a:t>1</a:t>
+            </a:r>
+            <a:endParaRPr lang="en-US" sz="3200" dirty="0"/>
+          </a:p>
+        </p:txBody>
+      </p:sp>
+      <p:sp>
+        <p:nvSpPr>
+          <p:cNvPr id="8" name="Text 5"/>
+          <p:cNvSpPr txBox="1"/>
+          <p:nvPr/>
+        </p:nvSpPr>
+        <p:spPr>
+          <a:xfrm>
+            <a:off x="8046720" y="2194560"/>
+            <a:ext cx="3566160" cy="548640"/>
+          </a:xfrm>
+          <a:prstGeom prst="rect">
+            <a:avLst/>
+          </a:prstGeom>
+          <a:noFill/>
+          <a:ln/>
+        </p:spPr>
+        <p:txBody>
+          <a:bodyPr wrap="square" lIns="0" tIns="0" rIns="0" bIns="0" rtlCol="0" anchor="t"/>
+          <a:lstStyle/>
+          <a:p>
+            <a:pPr indent="0" marL="0">
+              <a:buNone/>
+            </a:pPr>
+            <a:r>
+              <a:rPr lang="en-US" sz="1700" dirty="0">
+                <a:solidFill>
+                  <a:srgbClr val="1A1A1A"/>
+                </a:solidFill>
+                <a:latin typeface="Calibri" pitchFamily="34" charset="0"/>
+                <a:ea typeface="Calibri" pitchFamily="34" charset="-122"/>
+                <a:cs typeface="Calibri" pitchFamily="34" charset="-120"/>
+              </a:rPr>
+              <a:t>Abrir el tablero (QR al final)</a:t>
+            </a:r>
+            <a:endParaRPr lang="en-US" sz="1700" dirty="0"/>
+          </a:p>
+        </p:txBody>
+      </p:sp>
+      <p:sp>
+        <p:nvSpPr>
+          <p:cNvPr id="9" name="Text 6"/>
+          <p:cNvSpPr txBox="1"/>
+          <p:nvPr/>
+        </p:nvSpPr>
+        <p:spPr>
+          <a:xfrm>
+            <a:off x="7406640" y="2971800"/>
+            <a:ext cx="548640" cy="640080"/>
+          </a:xfrm>
+          <a:prstGeom prst="rect">
+            <a:avLst/>
+          </a:prstGeom>
+          <a:noFill/>
+          <a:ln/>
+        </p:spPr>
+        <p:txBody>
+          <a:bodyPr wrap="square" lIns="0" tIns="0" rIns="0" bIns="0" rtlCol="0" anchor="t"/>
+          <a:lstStyle/>
+          <a:p>
+            <a:pPr indent="0" marL="0">
+              <a:buNone/>
+            </a:pPr>
+            <a:r>
+              <a:rPr lang="en-US" sz="3200" b="1" dirty="0">
+                <a:solidFill>
+                  <a:srgbClr val="C8102E"/>
+                </a:solidFill>
+                <a:latin typeface="Cambria" pitchFamily="34" charset="0"/>
+                <a:ea typeface="Cambria" pitchFamily="34" charset="-122"/>
+                <a:cs typeface="Cambria" pitchFamily="34" charset="-120"/>
+              </a:rPr>
+              <a:t>2</a:t>
+            </a:r>
+            <a:endParaRPr lang="en-US" sz="3200" dirty="0"/>
+          </a:p>
+        </p:txBody>
+      </p:sp>
+      <p:sp>
+        <p:nvSpPr>
+          <p:cNvPr id="10" name="Text 7"/>
+          <p:cNvSpPr txBox="1"/>
+          <p:nvPr/>
+        </p:nvSpPr>
+        <p:spPr>
+          <a:xfrm>
+            <a:off x="8046720" y="3108960"/>
+            <a:ext cx="3566160" cy="548640"/>
+          </a:xfrm>
+          <a:prstGeom prst="rect">
+            <a:avLst/>
+          </a:prstGeom>
+          <a:noFill/>
+          <a:ln/>
+        </p:spPr>
+        <p:txBody>
+          <a:bodyPr wrap="square" lIns="0" tIns="0" rIns="0" bIns="0" rtlCol="0" anchor="t"/>
+          <a:lstStyle/>
+          <a:p>
+            <a:pPr indent="0" marL="0">
+              <a:buNone/>
+            </a:pPr>
+            <a:r>
+              <a:rPr lang="en-US" sz="1700" dirty="0">
+                <a:solidFill>
+                  <a:srgbClr val="1A1A1A"/>
+                </a:solidFill>
+                <a:latin typeface="Calibri" pitchFamily="34" charset="0"/>
+                <a:ea typeface="Calibri" pitchFamily="34" charset="-122"/>
+                <a:cs typeface="Calibri" pitchFamily="34" charset="-120"/>
+              </a:rPr>
+              <a:t>Tocar "Explorar la base (SQL)"</a:t>
+            </a:r>
+            <a:endParaRPr lang="en-US" sz="1700" dirty="0"/>
+          </a:p>
+        </p:txBody>
+      </p:sp>
+      <p:sp>
+        <p:nvSpPr>
+          <p:cNvPr id="11" name="Text 8"/>
+          <p:cNvSpPr txBox="1"/>
+          <p:nvPr/>
+        </p:nvSpPr>
+        <p:spPr>
+          <a:xfrm>
+            <a:off x="7406640" y="3886200"/>
+            <a:ext cx="548640" cy="640080"/>
+          </a:xfrm>
+          <a:prstGeom prst="rect">
+            <a:avLst/>
+          </a:prstGeom>
+          <a:noFill/>
+          <a:ln/>
+        </p:spPr>
+        <p:txBody>
+          <a:bodyPr wrap="square" lIns="0" tIns="0" rIns="0" bIns="0" rtlCol="0" anchor="t"/>
+          <a:lstStyle/>
+          <a:p>
+            <a:pPr indent="0" marL="0">
+              <a:buNone/>
+            </a:pPr>
+            <a:r>
+              <a:rPr lang="en-US" sz="3200" b="1" dirty="0">
+                <a:solidFill>
+                  <a:srgbClr val="C8102E"/>
+                </a:solidFill>
+                <a:latin typeface="Cambria" pitchFamily="34" charset="0"/>
+                <a:ea typeface="Cambria" pitchFamily="34" charset="-122"/>
+                <a:cs typeface="Cambria" pitchFamily="34" charset="-120"/>
+              </a:rPr>
+              <a:t>3</a:t>
+            </a:r>
+            <a:endParaRPr lang="en-US" sz="3200" dirty="0"/>
+          </a:p>
+        </p:txBody>
+      </p:sp>
+      <p:sp>
+        <p:nvSpPr>
+          <p:cNvPr id="12" name="Text 9"/>
+          <p:cNvSpPr txBox="1"/>
+          <p:nvPr/>
+        </p:nvSpPr>
+        <p:spPr>
+          <a:xfrm>
+            <a:off x="8046720" y="4023360"/>
+            <a:ext cx="3566160" cy="548640"/>
+          </a:xfrm>
+          <a:prstGeom prst="rect">
+            <a:avLst/>
+          </a:prstGeom>
+          <a:noFill/>
+          <a:ln/>
+        </p:spPr>
+        <p:txBody>
+          <a:bodyPr wrap="square" lIns="0" tIns="0" rIns="0" bIns="0" rtlCol="0" anchor="t"/>
+          <a:lstStyle/>
+          <a:p>
+            <a:pPr indent="0" marL="0">
+              <a:buNone/>
+            </a:pPr>
+            <a:r>
+              <a:rPr lang="en-US" sz="1700" dirty="0">
+                <a:solidFill>
+                  <a:srgbClr val="1A1A1A"/>
+                </a:solidFill>
+                <a:latin typeface="Calibri" pitchFamily="34" charset="0"/>
+                <a:ea typeface="Calibri" pitchFamily="34" charset="-122"/>
+                <a:cs typeface="Calibri" pitchFamily="34" charset="-120"/>
+              </a:rPr>
+              <a:t>Elegir la tabla items o escribir una consulta</a:t>
+            </a:r>
+            <a:endParaRPr lang="en-US" sz="1700" dirty="0"/>
+          </a:p>
+        </p:txBody>
+      </p:sp>
+      <p:sp>
+        <p:nvSpPr>
+          <p:cNvPr id="13" name="Text 10"/>
+          <p:cNvSpPr txBox="1"/>
+          <p:nvPr/>
+        </p:nvSpPr>
+        <p:spPr>
+          <a:xfrm>
+            <a:off x="7406640" y="4800600"/>
+            <a:ext cx="548640" cy="640080"/>
+          </a:xfrm>
+          <a:prstGeom prst="rect">
+            <a:avLst/>
+          </a:prstGeom>
+          <a:noFill/>
+          <a:ln/>
+        </p:spPr>
+        <p:txBody>
+          <a:bodyPr wrap="square" lIns="0" tIns="0" rIns="0" bIns="0" rtlCol="0" anchor="t"/>
+          <a:lstStyle/>
+          <a:p>
+            <a:pPr indent="0" marL="0">
+              <a:buNone/>
+            </a:pPr>
+            <a:r>
+              <a:rPr lang="en-US" sz="3200" b="1" dirty="0">
+                <a:solidFill>
+                  <a:srgbClr val="C8102E"/>
+                </a:solidFill>
+                <a:latin typeface="Cambria" pitchFamily="34" charset="0"/>
+                <a:ea typeface="Cambria" pitchFamily="34" charset="-122"/>
+                <a:cs typeface="Cambria" pitchFamily="34" charset="-120"/>
+              </a:rPr>
+              <a:t>4</a:t>
+            </a:r>
+            <a:endParaRPr lang="en-US" sz="3200" dirty="0"/>
+          </a:p>
+        </p:txBody>
+      </p:sp>
+      <p:sp>
+        <p:nvSpPr>
+          <p:cNvPr id="14" name="Text 11"/>
+          <p:cNvSpPr txBox="1"/>
+          <p:nvPr/>
+        </p:nvSpPr>
+        <p:spPr>
+          <a:xfrm>
+            <a:off x="8046720" y="4937760"/>
+            <a:ext cx="3566160" cy="548640"/>
+          </a:xfrm>
+          <a:prstGeom prst="rect">
+            <a:avLst/>
+          </a:prstGeom>
+          <a:noFill/>
+          <a:ln/>
+        </p:spPr>
+        <p:txBody>
+          <a:bodyPr wrap="square" lIns="0" tIns="0" rIns="0" bIns="0" rtlCol="0" anchor="t"/>
+          <a:lstStyle/>
+          <a:p>
+            <a:pPr indent="0" marL="0">
+              <a:buNone/>
+            </a:pPr>
+            <a:r>
+              <a:rPr lang="en-US" sz="1700" dirty="0">
+                <a:solidFill>
+                  <a:srgbClr val="1A1A1A"/>
+                </a:solidFill>
+                <a:latin typeface="Calibri" pitchFamily="34" charset="0"/>
+                <a:ea typeface="Calibri" pitchFamily="34" charset="-122"/>
+                <a:cs typeface="Calibri" pitchFamily="34" charset="-120"/>
+              </a:rPr>
+              <a:t>Descargar la base o el CSV si se quiere</a:t>
+            </a:r>
+            <a:endParaRPr lang="en-US" sz="1700" dirty="0"/>
+          </a:p>
+        </p:txBody>
+      </p:sp>
+      <p:sp>
+        <p:nvSpPr>
+          <p:cNvPr id="25" name="Slide Number Placeholder 0"/>
+          <p:cNvSpPr>
+            <a:spLocks noGrp="1"/>
+          </p:cNvSpPr>
+          <p:nvPr>
+            <p:ph type="sldNum" sz="quarter" idx="4294967295"/>
+          </p:nvPr>
+        </p:nvSpPr>
+        <p:spPr>
+          <a:xfrm>
+            <a:off x="11094415" y="6400800"/>
+            <a:ext cx="548640" cy="274320"/>
+          </a:xfrm>
+          <a:prstGeom prst="rect">
+            <a:avLst/>
+          </a:prstGeom>
+          <a:extLst>
+            <a:ext uri="{C572A759-6A51-4108-AA02-DFA0A04FC94B}">
+              <ma14:wrappingTextBoxFlag xmlns:ma14="http://schemas.microsoft.com/office/mac/drawingml/2011/main" val="0"/>
+            </a:ext>
+          </a:extLst>
+        </p:spPr>
+        <p:txBody>
+          <a:bodyPr/>
+          <a:lstStyle>
+            <a:lvl1pPr>
+              <a:defRPr sz="1000">
+                <a:solidFill>
+                  <a:srgbClr val="6B6B6B"/>
+                </a:solidFill>
+              </a:defRPr>
+            </a:lvl1pPr>
+          </a:lstStyle>
+          <a:p>
+            <a:pPr algn="r"/>
+            <a:fld id="{F7021451-1387-4CA6-816F-3879F97B5CBC}" type="slidenum">
+              <a:rPr b="0" lang="en-US"/>
+              <a:t>21</a:t>
+            </a:fld>
+            <a:endParaRPr lang="en-US"/>
+          </a:p>
+        </p:txBody>
+      </p:sp>
+    </p:spTree>
+  </p:cSld>
+  <p:clrMapOvr>
+    <a:masterClrMapping/>
+  </p:clrMapOvr>
+</p:sld>
+</file>
+
+<file path=ppt/slides/slide22.xml><?xml version="1.0" encoding="utf-8"?>
+<p:sld xmlns:a="http://schemas.openxmlformats.org/drawingml/2006/main" xmlns:r="http://schemas.openxmlformats.org/officeDocument/2006/relationships" xmlns:p="http://schemas.openxmlformats.org/presentationml/2006/main">
+  <p:cSld name="Slide 22">
+    <p:spTree>
+      <p:nvGrpSpPr>
+        <p:cNvPr id="1" name=""/>
+        <p:cNvGrpSpPr/>
+        <p:nvPr/>
+      </p:nvGrpSpPr>
+      <p:grpSpPr>
+        <a:xfrm>
+          <a:off x="0" y="0"/>
+          <a:ext cx="0" cy="0"/>
+          <a:chOff x="0" y="0"/>
+          <a:chExt cx="0" cy="0"/>
+        </a:xfrm>
+      </p:grpSpPr>
+      <p:sp>
+        <p:nvSpPr>
+          <p:cNvPr id="2" name="Text 0"/>
+          <p:cNvSpPr/>
+          <p:nvPr>
+            <p:ph idx="100" type="body" hasCustomPrompt="1"/>
+          </p:nvPr>
+        </p:nvSpPr>
+        <p:spPr>
+          <a:xfrm>
+            <a:off x="548640" y="365760"/>
+            <a:ext cx="8229600" cy="320040"/>
+          </a:xfrm>
+          <a:prstGeom prst="rect">
+            <a:avLst/>
+          </a:prstGeom>
+          <a:noFill/>
+          <a:ln/>
+        </p:spPr>
+        <p:txBody>
+          <a:bodyPr wrap="square" lIns="0" tIns="0" rIns="0" bIns="0" rtlCol="0"/>
+          <a:lstStyle/>
+          <a:p>
+            <a:pPr indent="0" marL="0">
+              <a:buNone/>
+            </a:pPr>
+            <a:r>
+              <a:rPr lang="en-US" sz="1200" b="1" spc="200" kern="0" dirty="0">
+                <a:solidFill>
+                  <a:schemeClr val="accent1"/>
+                </a:solidFill>
+              </a:rPr>
+              <a:t>HERRAMIENTAS</a:t>
+            </a:r>
+            <a:endParaRPr lang="en-US" sz="1200" dirty="0"/>
+          </a:p>
+        </p:txBody>
+      </p:sp>
+      <p:sp>
+        <p:nvSpPr>
+          <p:cNvPr id="3" name="Text 0"/>
+          <p:cNvSpPr/>
+          <p:nvPr>
+            <p:ph idx="101" type="title" hasCustomPrompt="1"/>
+          </p:nvPr>
+        </p:nvSpPr>
+        <p:spPr>
+          <a:xfrm>
+            <a:off x="548640" y="685800"/>
+            <a:ext cx="11094415" cy="1051560"/>
+          </a:xfrm>
+          <a:prstGeom prst="rect">
+            <a:avLst/>
+          </a:prstGeom>
+          <a:noFill/>
+          <a:ln/>
+        </p:spPr>
+        <p:txBody>
+          <a:bodyPr wrap="square" lIns="0" tIns="0" rIns="0" bIns="0" rtlCol="0" anchor="t"/>
+          <a:lstStyle/>
+          <a:p>
+            <a:pPr algn="l" indent="0" marL="0">
+              <a:buNone/>
+            </a:pPr>
+            <a:r>
+              <a:rPr lang="en-US" sz="3200" b="1" dirty="0">
+                <a:solidFill>
+                  <a:schemeClr val="tx1"/>
+                </a:solidFill>
+                <a:latin typeface="Cambria" pitchFamily="34" charset="0"/>
+                <a:ea typeface="Cambria" pitchFamily="34" charset="-122"/>
+                <a:cs typeface="Cambria" pitchFamily="34" charset="-120"/>
+              </a:rPr>
+              <a:t>Un stack simple, gratuito y reproducible</a:t>
+            </a:r>
+            <a:endParaRPr lang="en-US" sz="3200" dirty="0"/>
+          </a:p>
+        </p:txBody>
+      </p:sp>
+      <p:sp>
+        <p:nvSpPr>
+          <p:cNvPr id="5" name="stack-0"/>
+          <p:cNvSpPr/>
+          <p:nvPr/>
+        </p:nvSpPr>
+        <p:spPr>
+          <a:xfrm>
+            <a:off x="548640" y="2011680"/>
+            <a:ext cx="5394960" cy="1143000"/>
+          </a:xfrm>
+          <a:prstGeom prst="roundRect">
+            <a:avLst>
+              <a:gd name="adj" fmla="val 6400"/>
+            </a:avLst>
+          </a:prstGeom>
+          <a:solidFill>
+            <a:srgbClr val="F2F2F0"/>
+          </a:solidFill>
+          <a:ln w="12700">
+            <a:solidFill>
+              <a:srgbClr val="F2F2F0"/>
+            </a:solidFill>
+            <a:prstDash val="solid"/>
+          </a:ln>
+        </p:spPr>
+      </p:sp>
+      <p:sp>
+        <p:nvSpPr>
+          <p:cNvPr id="6" name="Text 3"/>
+          <p:cNvSpPr txBox="1"/>
+          <p:nvPr/>
+        </p:nvSpPr>
+        <p:spPr>
+          <a:xfrm>
+            <a:off x="822960" y="2148840"/>
+            <a:ext cx="4846320" cy="365760"/>
+          </a:xfrm>
+          <a:prstGeom prst="rect">
+            <a:avLst/>
+          </a:prstGeom>
+          <a:noFill/>
+          <a:ln/>
+        </p:spPr>
+        <p:txBody>
+          <a:bodyPr wrap="square" lIns="0" tIns="0" rIns="0" bIns="0" rtlCol="0" anchor="t"/>
+          <a:lstStyle/>
+          <a:p>
+            <a:pPr indent="0" marL="0">
+              <a:buNone/>
+            </a:pPr>
+            <a:r>
+              <a:rPr lang="en-US" sz="1700" b="1" dirty="0">
+                <a:solidFill>
+                  <a:srgbClr val="C8102E"/>
+                </a:solidFill>
+                <a:latin typeface="Calibri" pitchFamily="34" charset="0"/>
+                <a:ea typeface="Calibri" pitchFamily="34" charset="-122"/>
+                <a:cs typeface="Calibri" pitchFamily="34" charset="-120"/>
+              </a:rPr>
+              <a:t>Recolección</a:t>
+            </a:r>
+            <a:endParaRPr lang="en-US" sz="1700" dirty="0"/>
+          </a:p>
+        </p:txBody>
+      </p:sp>
+      <p:sp>
+        <p:nvSpPr>
+          <p:cNvPr id="7" name="Text 4"/>
+          <p:cNvSpPr txBox="1"/>
+          <p:nvPr/>
+        </p:nvSpPr>
+        <p:spPr>
+          <a:xfrm>
+            <a:off x="822960" y="2542032"/>
+            <a:ext cx="4937760" cy="548640"/>
+          </a:xfrm>
+          <a:prstGeom prst="rect">
+            <a:avLst/>
+          </a:prstGeom>
+          <a:noFill/>
+          <a:ln/>
+        </p:spPr>
+        <p:txBody>
+          <a:bodyPr wrap="square" lIns="0" tIns="0" rIns="0" bIns="0" rtlCol="0" anchor="t"/>
+          <a:lstStyle/>
+          <a:p>
+            <a:pPr indent="0" marL="0">
+              <a:buNone/>
+            </a:pPr>
+            <a:r>
+              <a:rPr lang="en-US" sz="1500" dirty="0">
+                <a:solidFill>
+                  <a:srgbClr val="1A1A1A"/>
+                </a:solidFill>
+                <a:latin typeface="Calibri" pitchFamily="34" charset="0"/>
+                <a:ea typeface="Calibri" pitchFamily="34" charset="-122"/>
+                <a:cs typeface="Calibri" pitchFamily="34" charset="-120"/>
+              </a:rPr>
+              <a:t>requests · feedparser · googlenewsdecoder · urllib.robotparser</a:t>
+            </a:r>
+            <a:endParaRPr lang="en-US" sz="1500" dirty="0"/>
+          </a:p>
+        </p:txBody>
+      </p:sp>
+      <p:sp>
+        <p:nvSpPr>
+          <p:cNvPr id="8" name="stack-1"/>
+          <p:cNvSpPr/>
+          <p:nvPr/>
+        </p:nvSpPr>
+        <p:spPr>
+          <a:xfrm>
+            <a:off x="6217920" y="2011680"/>
+            <a:ext cx="5394960" cy="1143000"/>
+          </a:xfrm>
+          <a:prstGeom prst="roundRect">
+            <a:avLst>
+              <a:gd name="adj" fmla="val 6400"/>
+            </a:avLst>
+          </a:prstGeom>
+          <a:solidFill>
+            <a:srgbClr val="F2F2F0"/>
+          </a:solidFill>
+          <a:ln w="12700">
+            <a:solidFill>
+              <a:srgbClr val="F2F2F0"/>
+            </a:solidFill>
+            <a:prstDash val="solid"/>
+          </a:ln>
+        </p:spPr>
+      </p:sp>
+      <p:sp>
+        <p:nvSpPr>
+          <p:cNvPr id="9" name="Text 6"/>
+          <p:cNvSpPr txBox="1"/>
+          <p:nvPr/>
+        </p:nvSpPr>
+        <p:spPr>
+          <a:xfrm>
+            <a:off x="6492240" y="2148840"/>
+            <a:ext cx="4846320" cy="365760"/>
+          </a:xfrm>
+          <a:prstGeom prst="rect">
+            <a:avLst/>
+          </a:prstGeom>
+          <a:noFill/>
+          <a:ln/>
+        </p:spPr>
+        <p:txBody>
+          <a:bodyPr wrap="square" lIns="0" tIns="0" rIns="0" bIns="0" rtlCol="0" anchor="t"/>
+          <a:lstStyle/>
+          <a:p>
+            <a:pPr indent="0" marL="0">
+              <a:buNone/>
+            </a:pPr>
+            <a:r>
+              <a:rPr lang="en-US" sz="1700" b="1" dirty="0">
+                <a:solidFill>
+                  <a:srgbClr val="C8102E"/>
+                </a:solidFill>
+                <a:latin typeface="Calibri" pitchFamily="34" charset="0"/>
+                <a:ea typeface="Calibri" pitchFamily="34" charset="-122"/>
+                <a:cs typeface="Calibri" pitchFamily="34" charset="-120"/>
+              </a:rPr>
+              <a:t>Extracción</a:t>
+            </a:r>
+            <a:endParaRPr lang="en-US" sz="1700" dirty="0"/>
+          </a:p>
+        </p:txBody>
+      </p:sp>
+      <p:sp>
+        <p:nvSpPr>
+          <p:cNvPr id="10" name="Text 7"/>
+          <p:cNvSpPr txBox="1"/>
+          <p:nvPr/>
+        </p:nvSpPr>
+        <p:spPr>
+          <a:xfrm>
+            <a:off x="6492240" y="2542032"/>
+            <a:ext cx="4937760" cy="548640"/>
+          </a:xfrm>
+          <a:prstGeom prst="rect">
+            <a:avLst/>
+          </a:prstGeom>
+          <a:noFill/>
+          <a:ln/>
+        </p:spPr>
+        <p:txBody>
+          <a:bodyPr wrap="square" lIns="0" tIns="0" rIns="0" bIns="0" rtlCol="0" anchor="t"/>
+          <a:lstStyle/>
+          <a:p>
+            <a:pPr indent="0" marL="0">
+              <a:buNone/>
+            </a:pPr>
+            <a:r>
+              <a:rPr lang="en-US" sz="1500" dirty="0">
+                <a:solidFill>
+                  <a:srgbClr val="1A1A1A"/>
+                </a:solidFill>
+                <a:latin typeface="Calibri" pitchFamily="34" charset="0"/>
+                <a:ea typeface="Calibri" pitchFamily="34" charset="-122"/>
+                <a:cs typeface="Calibri" pitchFamily="34" charset="-120"/>
+              </a:rPr>
+              <a:t>expresiones regulares · JSON-LD (schema.org) · HTML</a:t>
+            </a:r>
+            <a:endParaRPr lang="en-US" sz="1500" dirty="0"/>
+          </a:p>
+        </p:txBody>
+      </p:sp>
+      <p:sp>
+        <p:nvSpPr>
+          <p:cNvPr id="11" name="stack-2"/>
+          <p:cNvSpPr/>
+          <p:nvPr/>
+        </p:nvSpPr>
+        <p:spPr>
+          <a:xfrm>
+            <a:off x="548640" y="3337560"/>
+            <a:ext cx="5394960" cy="1143000"/>
+          </a:xfrm>
+          <a:prstGeom prst="roundRect">
+            <a:avLst>
+              <a:gd name="adj" fmla="val 6400"/>
+            </a:avLst>
+          </a:prstGeom>
+          <a:solidFill>
+            <a:srgbClr val="F2F2F0"/>
+          </a:solidFill>
+          <a:ln w="12700">
+            <a:solidFill>
+              <a:srgbClr val="F2F2F0"/>
+            </a:solidFill>
+            <a:prstDash val="solid"/>
+          </a:ln>
+        </p:spPr>
+      </p:sp>
+      <p:sp>
+        <p:nvSpPr>
+          <p:cNvPr id="12" name="Text 9"/>
+          <p:cNvSpPr txBox="1"/>
+          <p:nvPr/>
+        </p:nvSpPr>
+        <p:spPr>
+          <a:xfrm>
+            <a:off x="822960" y="3474720"/>
+            <a:ext cx="4846320" cy="365760"/>
+          </a:xfrm>
+          <a:prstGeom prst="rect">
+            <a:avLst/>
+          </a:prstGeom>
+          <a:noFill/>
+          <a:ln/>
+        </p:spPr>
+        <p:txBody>
+          <a:bodyPr wrap="square" lIns="0" tIns="0" rIns="0" bIns="0" rtlCol="0" anchor="t"/>
+          <a:lstStyle/>
+          <a:p>
+            <a:pPr indent="0" marL="0">
+              <a:buNone/>
+            </a:pPr>
+            <a:r>
+              <a:rPr lang="en-US" sz="1700" b="1" dirty="0">
+                <a:solidFill>
+                  <a:srgbClr val="C8102E"/>
+                </a:solidFill>
+                <a:latin typeface="Calibri" pitchFamily="34" charset="0"/>
+                <a:ea typeface="Calibri" pitchFamily="34" charset="-122"/>
+                <a:cs typeface="Calibri" pitchFamily="34" charset="-120"/>
+              </a:rPr>
+              <a:t>Lenguaje</a:t>
+            </a:r>
+            <a:endParaRPr lang="en-US" sz="1700" dirty="0"/>
+          </a:p>
+        </p:txBody>
+      </p:sp>
+      <p:sp>
+        <p:nvSpPr>
+          <p:cNvPr id="13" name="Text 10"/>
+          <p:cNvSpPr txBox="1"/>
+          <p:nvPr/>
+        </p:nvSpPr>
+        <p:spPr>
+          <a:xfrm>
+            <a:off x="822960" y="3867912"/>
+            <a:ext cx="4937760" cy="548640"/>
+          </a:xfrm>
+          <a:prstGeom prst="rect">
+            <a:avLst/>
+          </a:prstGeom>
+          <a:noFill/>
+          <a:ln/>
+        </p:spPr>
+        <p:txBody>
+          <a:bodyPr wrap="square" lIns="0" tIns="0" rIns="0" bIns="0" rtlCol="0" anchor="t"/>
+          <a:lstStyle/>
+          <a:p>
+            <a:pPr indent="0" marL="0">
+              <a:buNone/>
+            </a:pPr>
+            <a:r>
+              <a:rPr lang="en-US" sz="1500" dirty="0">
+                <a:solidFill>
+                  <a:srgbClr val="1A1A1A"/>
+                </a:solidFill>
+                <a:latin typeface="Calibri" pitchFamily="34" charset="0"/>
+                <a:ea typeface="Calibri" pitchFamily="34" charset="-122"/>
+                <a:cs typeface="Calibri" pitchFamily="34" charset="-120"/>
+              </a:rPr>
+              <a:t>bolsa de palabras · Naive Bayes · regresión logística · XLM-RoBERTa (PyTorch, transformers)</a:t>
+            </a:r>
+            <a:endParaRPr lang="en-US" sz="1500" dirty="0"/>
+          </a:p>
+        </p:txBody>
+      </p:sp>
+      <p:sp>
+        <p:nvSpPr>
+          <p:cNvPr id="14" name="stack-3"/>
+          <p:cNvSpPr/>
+          <p:nvPr/>
+        </p:nvSpPr>
+        <p:spPr>
+          <a:xfrm>
+            <a:off x="6217920" y="3337560"/>
+            <a:ext cx="5394960" cy="1143000"/>
+          </a:xfrm>
+          <a:prstGeom prst="roundRect">
+            <a:avLst>
+              <a:gd name="adj" fmla="val 6400"/>
+            </a:avLst>
+          </a:prstGeom>
+          <a:solidFill>
+            <a:srgbClr val="F2F2F0"/>
+          </a:solidFill>
+          <a:ln w="12700">
+            <a:solidFill>
+              <a:srgbClr val="F2F2F0"/>
+            </a:solidFill>
+            <a:prstDash val="solid"/>
+          </a:ln>
+        </p:spPr>
+      </p:sp>
+      <p:sp>
+        <p:nvSpPr>
+          <p:cNvPr id="15" name="Text 12"/>
+          <p:cNvSpPr txBox="1"/>
+          <p:nvPr/>
+        </p:nvSpPr>
+        <p:spPr>
+          <a:xfrm>
+            <a:off x="6492240" y="3474720"/>
+            <a:ext cx="4846320" cy="365760"/>
+          </a:xfrm>
+          <a:prstGeom prst="rect">
+            <a:avLst/>
+          </a:prstGeom>
+          <a:noFill/>
+          <a:ln/>
+        </p:spPr>
+        <p:txBody>
+          <a:bodyPr wrap="square" lIns="0" tIns="0" rIns="0" bIns="0" rtlCol="0" anchor="t"/>
+          <a:lstStyle/>
+          <a:p>
+            <a:pPr indent="0" marL="0">
+              <a:buNone/>
+            </a:pPr>
+            <a:r>
+              <a:rPr lang="en-US" sz="1700" b="1" dirty="0">
+                <a:solidFill>
+                  <a:srgbClr val="C8102E"/>
+                </a:solidFill>
+                <a:latin typeface="Calibri" pitchFamily="34" charset="0"/>
+                <a:ea typeface="Calibri" pitchFamily="34" charset="-122"/>
+                <a:cs typeface="Calibri" pitchFamily="34" charset="-120"/>
+              </a:rPr>
+              <a:t>Datos</a:t>
+            </a:r>
+            <a:endParaRPr lang="en-US" sz="1700" dirty="0"/>
+          </a:p>
+        </p:txBody>
+      </p:sp>
+      <p:sp>
+        <p:nvSpPr>
+          <p:cNvPr id="16" name="Text 13"/>
+          <p:cNvSpPr txBox="1"/>
+          <p:nvPr/>
+        </p:nvSpPr>
+        <p:spPr>
+          <a:xfrm>
+            <a:off x="6492240" y="3867912"/>
+            <a:ext cx="4937760" cy="548640"/>
+          </a:xfrm>
+          <a:prstGeom prst="rect">
+            <a:avLst/>
+          </a:prstGeom>
+          <a:noFill/>
+          <a:ln/>
+        </p:spPr>
+        <p:txBody>
+          <a:bodyPr wrap="square" lIns="0" tIns="0" rIns="0" bIns="0" rtlCol="0" anchor="t"/>
+          <a:lstStyle/>
+          <a:p>
+            <a:pPr indent="0" marL="0">
+              <a:buNone/>
+            </a:pPr>
+            <a:r>
+              <a:rPr lang="en-US" sz="1500" dirty="0">
+                <a:solidFill>
+                  <a:srgbClr val="1A1A1A"/>
+                </a:solidFill>
+                <a:latin typeface="Calibri" pitchFamily="34" charset="0"/>
+                <a:ea typeface="Calibri" pitchFamily="34" charset="-122"/>
+                <a:cs typeface="Calibri" pitchFamily="34" charset="-120"/>
+              </a:rPr>
+              <a:t>SQLite · CSV · Datasette Lite · notebook con pandas</a:t>
+            </a:r>
+            <a:endParaRPr lang="en-US" sz="1500" dirty="0"/>
+          </a:p>
+        </p:txBody>
+      </p:sp>
+      <p:sp>
+        <p:nvSpPr>
+          <p:cNvPr id="17" name="stack-4"/>
+          <p:cNvSpPr/>
+          <p:nvPr/>
+        </p:nvSpPr>
+        <p:spPr>
+          <a:xfrm>
+            <a:off x="548640" y="4663440"/>
+            <a:ext cx="5394960" cy="1143000"/>
+          </a:xfrm>
+          <a:prstGeom prst="roundRect">
+            <a:avLst>
+              <a:gd name="adj" fmla="val 6400"/>
+            </a:avLst>
+          </a:prstGeom>
+          <a:solidFill>
+            <a:srgbClr val="F2F2F0"/>
+          </a:solidFill>
+          <a:ln w="12700">
+            <a:solidFill>
+              <a:srgbClr val="F2F2F0"/>
+            </a:solidFill>
+            <a:prstDash val="solid"/>
+          </a:ln>
+        </p:spPr>
+      </p:sp>
+      <p:sp>
+        <p:nvSpPr>
+          <p:cNvPr id="18" name="Text 15"/>
+          <p:cNvSpPr txBox="1"/>
+          <p:nvPr/>
+        </p:nvSpPr>
+        <p:spPr>
+          <a:xfrm>
+            <a:off x="822960" y="4800600"/>
+            <a:ext cx="4846320" cy="365760"/>
+          </a:xfrm>
+          <a:prstGeom prst="rect">
+            <a:avLst/>
+          </a:prstGeom>
+          <a:noFill/>
+          <a:ln/>
+        </p:spPr>
+        <p:txBody>
+          <a:bodyPr wrap="square" lIns="0" tIns="0" rIns="0" bIns="0" rtlCol="0" anchor="t"/>
+          <a:lstStyle/>
+          <a:p>
+            <a:pPr indent="0" marL="0">
+              <a:buNone/>
+            </a:pPr>
+            <a:r>
+              <a:rPr lang="en-US" sz="1700" b="1" dirty="0">
+                <a:solidFill>
+                  <a:srgbClr val="C8102E"/>
+                </a:solidFill>
+                <a:latin typeface="Calibri" pitchFamily="34" charset="0"/>
+                <a:ea typeface="Calibri" pitchFamily="34" charset="-122"/>
+                <a:cs typeface="Calibri" pitchFamily="34" charset="-120"/>
+              </a:rPr>
+              <a:t>Automatización</a:t>
+            </a:r>
+            <a:endParaRPr lang="en-US" sz="1700" dirty="0"/>
+          </a:p>
+        </p:txBody>
+      </p:sp>
+      <p:sp>
+        <p:nvSpPr>
+          <p:cNvPr id="19" name="Text 16"/>
+          <p:cNvSpPr txBox="1"/>
+          <p:nvPr/>
+        </p:nvSpPr>
+        <p:spPr>
+          <a:xfrm>
+            <a:off x="822960" y="5193792"/>
+            <a:ext cx="4937760" cy="548640"/>
+          </a:xfrm>
+          <a:prstGeom prst="rect">
+            <a:avLst/>
+          </a:prstGeom>
+          <a:noFill/>
+          <a:ln/>
+        </p:spPr>
+        <p:txBody>
+          <a:bodyPr wrap="square" lIns="0" tIns="0" rIns="0" bIns="0" rtlCol="0" anchor="t"/>
+          <a:lstStyle/>
+          <a:p>
+            <a:pPr indent="0" marL="0">
+              <a:buNone/>
+            </a:pPr>
+            <a:r>
+              <a:rPr lang="en-US" sz="1500" dirty="0">
+                <a:solidFill>
+                  <a:srgbClr val="1A1A1A"/>
+                </a:solidFill>
+                <a:latin typeface="Calibri" pitchFamily="34" charset="0"/>
+                <a:ea typeface="Calibri" pitchFamily="34" charset="-122"/>
+                <a:cs typeface="Calibri" pitchFamily="34" charset="-120"/>
+              </a:rPr>
+              <a:t>GitHub Actions (cada hora) · rama de datos</a:t>
+            </a:r>
+            <a:endParaRPr lang="en-US" sz="1500" dirty="0"/>
+          </a:p>
+        </p:txBody>
+      </p:sp>
+      <p:sp>
+        <p:nvSpPr>
+          <p:cNvPr id="20" name="stack-5"/>
+          <p:cNvSpPr/>
+          <p:nvPr/>
+        </p:nvSpPr>
+        <p:spPr>
+          <a:xfrm>
+            <a:off x="6217920" y="4663440"/>
+            <a:ext cx="5394960" cy="1143000"/>
+          </a:xfrm>
+          <a:prstGeom prst="roundRect">
+            <a:avLst>
+              <a:gd name="adj" fmla="val 6400"/>
+            </a:avLst>
+          </a:prstGeom>
+          <a:solidFill>
+            <a:srgbClr val="F2F2F0"/>
+          </a:solidFill>
+          <a:ln w="12700">
+            <a:solidFill>
+              <a:srgbClr val="F2F2F0"/>
+            </a:solidFill>
+            <a:prstDash val="solid"/>
+          </a:ln>
+        </p:spPr>
+      </p:sp>
+      <p:sp>
+        <p:nvSpPr>
+          <p:cNvPr id="21" name="Text 18"/>
+          <p:cNvSpPr txBox="1"/>
+          <p:nvPr/>
+        </p:nvSpPr>
+        <p:spPr>
+          <a:xfrm>
+            <a:off x="6492240" y="4800600"/>
+            <a:ext cx="4846320" cy="365760"/>
+          </a:xfrm>
+          <a:prstGeom prst="rect">
+            <a:avLst/>
+          </a:prstGeom>
+          <a:noFill/>
+          <a:ln/>
+        </p:spPr>
+        <p:txBody>
+          <a:bodyPr wrap="square" lIns="0" tIns="0" rIns="0" bIns="0" rtlCol="0" anchor="t"/>
+          <a:lstStyle/>
+          <a:p>
+            <a:pPr indent="0" marL="0">
+              <a:buNone/>
+            </a:pPr>
+            <a:r>
+              <a:rPr lang="en-US" sz="1700" b="1" dirty="0">
+                <a:solidFill>
+                  <a:srgbClr val="C8102E"/>
+                </a:solidFill>
+                <a:latin typeface="Calibri" pitchFamily="34" charset="0"/>
+                <a:ea typeface="Calibri" pitchFamily="34" charset="-122"/>
+                <a:cs typeface="Calibri" pitchFamily="34" charset="-120"/>
+              </a:rPr>
+              <a:t>Visualización</a:t>
+            </a:r>
+            <a:endParaRPr lang="en-US" sz="1700" dirty="0"/>
+          </a:p>
+        </p:txBody>
+      </p:sp>
+      <p:sp>
+        <p:nvSpPr>
+          <p:cNvPr id="22" name="Text 19"/>
+          <p:cNvSpPr txBox="1"/>
+          <p:nvPr/>
+        </p:nvSpPr>
+        <p:spPr>
+          <a:xfrm>
+            <a:off x="6492240" y="5193792"/>
+            <a:ext cx="4937760" cy="548640"/>
+          </a:xfrm>
+          <a:prstGeom prst="rect">
+            <a:avLst/>
+          </a:prstGeom>
+          <a:noFill/>
+          <a:ln/>
+        </p:spPr>
+        <p:txBody>
+          <a:bodyPr wrap="square" lIns="0" tIns="0" rIns="0" bIns="0" rtlCol="0" anchor="t"/>
+          <a:lstStyle/>
+          <a:p>
+            <a:pPr indent="0" marL="0">
+              <a:buNone/>
+            </a:pPr>
+            <a:r>
+              <a:rPr lang="en-US" sz="1500" dirty="0">
+                <a:solidFill>
+                  <a:srgbClr val="1A1A1A"/>
+                </a:solidFill>
+                <a:latin typeface="Calibri" pitchFamily="34" charset="0"/>
+                <a:ea typeface="Calibri" pitchFamily="34" charset="-122"/>
+                <a:cs typeface="Calibri" pitchFamily="34" charset="-120"/>
+              </a:rPr>
+              <a:t>HTML, CSS y JavaScript sin frameworks · GitHub Pages</a:t>
+            </a:r>
+            <a:endParaRPr lang="en-US" sz="1500" dirty="0"/>
+          </a:p>
+        </p:txBody>
+      </p:sp>
+      <p:sp>
+        <p:nvSpPr>
+          <p:cNvPr id="25" name="Slide Number Placeholder 0"/>
+          <p:cNvSpPr>
+            <a:spLocks noGrp="1"/>
+          </p:cNvSpPr>
+          <p:nvPr>
+            <p:ph type="sldNum" sz="quarter" idx="4294967295"/>
+          </p:nvPr>
+        </p:nvSpPr>
+        <p:spPr>
+          <a:xfrm>
+            <a:off x="11094415" y="6400800"/>
+            <a:ext cx="548640" cy="274320"/>
+          </a:xfrm>
+          <a:prstGeom prst="rect">
+            <a:avLst/>
+          </a:prstGeom>
+          <a:extLst>
+            <a:ext uri="{C572A759-6A51-4108-AA02-DFA0A04FC94B}">
+              <ma14:wrappingTextBoxFlag xmlns:ma14="http://schemas.microsoft.com/office/mac/drawingml/2011/main" val="0"/>
+            </a:ext>
+          </a:extLst>
+        </p:spPr>
+        <p:txBody>
+          <a:bodyPr/>
+          <a:lstStyle>
+            <a:lvl1pPr>
+              <a:defRPr sz="1000">
+                <a:solidFill>
+                  <a:srgbClr val="6B6B6B"/>
+                </a:solidFill>
+              </a:defRPr>
+            </a:lvl1pPr>
+          </a:lstStyle>
+          <a:p>
+            <a:pPr algn="r"/>
+            <a:fld id="{F7021451-1387-4CA6-816F-3879F97B5CBC}" type="slidenum">
+              <a:rPr b="0" lang="en-US"/>
+              <a:t>22</a:t>
+            </a:fld>
+            <a:endParaRPr lang="en-US"/>
+          </a:p>
+        </p:txBody>
+      </p:sp>
+    </p:spTree>
+  </p:cSld>
+  <p:clrMapOvr>
+    <a:masterClrMapping/>
+  </p:clrMapOvr>
+</p:sld>
+</file>
+
+<file path=ppt/slides/slide23.xml><?xml version="1.0" encoding="utf-8"?>
+<p:sld xmlns:a="http://schemas.openxmlformats.org/drawingml/2006/main" xmlns:r="http://schemas.openxmlformats.org/officeDocument/2006/relationships" xmlns:p="http://schemas.openxmlformats.org/presentationml/2006/main">
+  <p:cSld name="Slide 23">
+    <p:spTree>
+      <p:nvGrpSpPr>
+        <p:cNvPr id="1" name=""/>
+        <p:cNvGrpSpPr/>
+        <p:nvPr/>
+      </p:nvGrpSpPr>
+      <p:grpSpPr>
+        <a:xfrm>
+          <a:off x="0" y="0"/>
+          <a:ext cx="0" cy="0"/>
+          <a:chOff x="0" y="0"/>
+          <a:chExt cx="0" cy="0"/>
+        </a:xfrm>
+      </p:grpSpPr>
+      <p:sp>
+        <p:nvSpPr>
+          <p:cNvPr id="2" name="Text 0"/>
+          <p:cNvSpPr/>
+          <p:nvPr>
+            <p:ph idx="100" type="body" hasCustomPrompt="1"/>
+          </p:nvPr>
+        </p:nvSpPr>
+        <p:spPr>
+          <a:xfrm>
+            <a:off x="548640" y="365760"/>
+            <a:ext cx="8229600" cy="320040"/>
+          </a:xfrm>
+          <a:prstGeom prst="rect">
+            <a:avLst/>
+          </a:prstGeom>
+          <a:noFill/>
+          <a:ln/>
+        </p:spPr>
+        <p:txBody>
+          <a:bodyPr wrap="square" lIns="0" tIns="0" rIns="0" bIns="0" rtlCol="0"/>
+          <a:lstStyle/>
+          <a:p>
+            <a:pPr indent="0" marL="0">
+              <a:buNone/>
+            </a:pPr>
+            <a:r>
+              <a:rPr lang="en-US" sz="1200" b="1" spc="200" kern="0" dirty="0">
+                <a:solidFill>
+                  <a:schemeClr val="accent1"/>
+                </a:solidFill>
+              </a:rPr>
+              <a:t>LO QUE SIGUE</a:t>
+            </a:r>
+            <a:endParaRPr lang="en-US" sz="1200" dirty="0"/>
+          </a:p>
+        </p:txBody>
+      </p:sp>
+      <p:sp>
+        <p:nvSpPr>
+          <p:cNvPr id="3" name="Text 0"/>
+          <p:cNvSpPr/>
+          <p:nvPr>
+            <p:ph idx="101" type="title" hasCustomPrompt="1"/>
+          </p:nvPr>
+        </p:nvSpPr>
+        <p:spPr>
+          <a:xfrm>
+            <a:off x="548640" y="685800"/>
+            <a:ext cx="11094415" cy="1051560"/>
+          </a:xfrm>
+          <a:prstGeom prst="rect">
+            <a:avLst/>
+          </a:prstGeom>
+          <a:noFill/>
+          <a:ln/>
+        </p:spPr>
+        <p:txBody>
+          <a:bodyPr wrap="square" lIns="0" tIns="0" rIns="0" bIns="0" rtlCol="0" anchor="t"/>
+          <a:lstStyle/>
+          <a:p>
+            <a:pPr algn="l" indent="0" marL="0">
+              <a:buNone/>
+            </a:pPr>
+            <a:r>
+              <a:rPr lang="en-US" sz="3200" b="1" dirty="0">
+                <a:solidFill>
+                  <a:schemeClr val="tx1"/>
+                </a:solidFill>
+                <a:latin typeface="Cambria" pitchFamily="34" charset="0"/>
+                <a:ea typeface="Cambria" pitchFamily="34" charset="-122"/>
+                <a:cs typeface="Cambria" pitchFamily="34" charset="-120"/>
+              </a:rPr>
+              <a:t>Limitaciones honestas y próximos pasos</a:t>
+            </a:r>
+            <a:endParaRPr lang="en-US" sz="3200" dirty="0"/>
+          </a:p>
+        </p:txBody>
+      </p:sp>
+      <p:sp>
+        <p:nvSpPr>
+          <p:cNvPr id="5" name="cierre-0"/>
+          <p:cNvSpPr/>
+          <p:nvPr/>
+        </p:nvSpPr>
+        <p:spPr>
+          <a:xfrm>
+            <a:off x="548640" y="2011680"/>
+            <a:ext cx="5394960" cy="3931920"/>
+          </a:xfrm>
+          <a:prstGeom prst="roundRect">
+            <a:avLst>
+              <a:gd name="adj" fmla="val 1860"/>
+            </a:avLst>
+          </a:prstGeom>
+          <a:solidFill>
+            <a:srgbClr val="F2F2F0"/>
+          </a:solidFill>
+          <a:ln w="12700">
+            <a:solidFill>
+              <a:srgbClr val="F2F2F0"/>
+            </a:solidFill>
+            <a:prstDash val="solid"/>
+          </a:ln>
+        </p:spPr>
+      </p:sp>
+      <p:pic>
+        <p:nvPicPr>
+          <p:cNvPr id="6" name="Image 0" descr="preencoded.png">    </p:cNvPr>
+          <p:cNvPicPr>
+            <a:picLocks noChangeAspect="1"/>
+          </p:cNvPicPr>
+          <p:nvPr/>
+        </p:nvPicPr>
+        <p:blipFill>
+          <a:blip r:embed="rId1"/>
+          <a:stretch>
+            <a:fillRect/>
+          </a:stretch>
+        </p:blipFill>
+        <p:spPr>
+          <a:xfrm>
+            <a:off x="868680" y="2286000"/>
+            <a:ext cx="411480" cy="411480"/>
+          </a:xfrm>
+          <a:prstGeom prst="rect">
+            <a:avLst/>
+          </a:prstGeom>
+        </p:spPr>
+      </p:pic>
+      <p:sp>
+        <p:nvSpPr>
+          <p:cNvPr id="7" name="Text 3"/>
+          <p:cNvSpPr txBox="1"/>
+          <p:nvPr/>
+        </p:nvSpPr>
+        <p:spPr>
+          <a:xfrm>
+            <a:off x="1463040" y="2286000"/>
+            <a:ext cx="4114800" cy="411480"/>
+          </a:xfrm>
+          <a:prstGeom prst="rect">
+            <a:avLst/>
+          </a:prstGeom>
+          <a:noFill/>
+          <a:ln/>
+        </p:spPr>
+        <p:txBody>
+          <a:bodyPr wrap="square" lIns="0" tIns="0" rIns="0" bIns="0" rtlCol="0" anchor="ctr"/>
+          <a:lstStyle/>
+          <a:p>
+            <a:pPr indent="0" marL="0">
+              <a:buNone/>
+            </a:pPr>
+            <a:r>
+              <a:rPr lang="en-US" sz="2200" b="1" dirty="0">
+                <a:solidFill>
+                  <a:srgbClr val="1A1A1A"/>
+                </a:solidFill>
+                <a:latin typeface="Calibri" pitchFamily="34" charset="0"/>
+                <a:ea typeface="Calibri" pitchFamily="34" charset="-122"/>
+                <a:cs typeface="Calibri" pitchFamily="34" charset="-120"/>
+              </a:rPr>
+              <a:t>Limitaciones</a:t>
+            </a:r>
+            <a:endParaRPr lang="en-US" sz="2200" dirty="0"/>
+          </a:p>
+        </p:txBody>
+      </p:sp>
+      <p:sp>
+        <p:nvSpPr>
+          <p:cNvPr id="8" name="Text 4"/>
+          <p:cNvSpPr txBox="1"/>
+          <p:nvPr/>
+        </p:nvSpPr>
+        <p:spPr>
+          <a:xfrm>
+            <a:off x="868680" y="2971800"/>
+            <a:ext cx="4800600" cy="2743200"/>
+          </a:xfrm>
+          <a:prstGeom prst="rect">
+            <a:avLst/>
+          </a:prstGeom>
+          <a:noFill/>
+          <a:ln/>
+        </p:spPr>
+        <p:txBody>
+          <a:bodyPr wrap="square" lIns="0" tIns="0" rIns="0" bIns="0" rtlCol="0" anchor="t"/>
+          <a:lstStyle/>
+          <a:p>
+            <a:pPr marL="342900" indent="-342900">
+              <a:spcAft>
+                <a:spcPts val="1000"/>
+              </a:spcAft>
+              <a:buSzPct val="100000"/>
+              <a:buChar char="•"/>
+            </a:pPr>
+            <a:r>
+              <a:rPr lang="en-US" sz="1600" dirty="0">
+                <a:solidFill>
+                  <a:srgbClr val="1A1A1A"/>
+                </a:solidFill>
+                <a:latin typeface="Calibri" pitchFamily="34" charset="0"/>
+                <a:ea typeface="Calibri" pitchFamily="34" charset="-122"/>
+                <a:cs typeface="Calibri" pitchFamily="34" charset="-120"/>
+              </a:rPr>
+              <a:t>Tono del título y la bajada, no de la nota completa</a:t>
+            </a:r>
+            <a:endParaRPr lang="en-US" sz="1600" dirty="0"/>
+          </a:p>
+          <a:p>
+            <a:pPr marL="342900" indent="-342900">
+              <a:spcAft>
+                <a:spcPts val="1000"/>
+              </a:spcAft>
+              <a:buSzPct val="100000"/>
+              <a:buChar char="•"/>
+            </a:pPr>
+            <a:r>
+              <a:rPr lang="en-US" sz="1600" dirty="0">
+                <a:solidFill>
+                  <a:srgbClr val="1A1A1A"/>
+                </a:solidFill>
+                <a:latin typeface="Calibri" pitchFamily="34" charset="0"/>
+                <a:ea typeface="Calibri" pitchFamily="34" charset="-122"/>
+                <a:cs typeface="Calibri" pitchFamily="34" charset="-120"/>
+              </a:rPr>
+              <a:t>77% de acierto con 340 etiquetas de un solo criterio</a:t>
+            </a:r>
+            <a:endParaRPr lang="en-US" sz="1600" dirty="0"/>
+          </a:p>
+          <a:p>
+            <a:pPr marL="342900" indent="-342900">
+              <a:spcAft>
+                <a:spcPts val="1000"/>
+              </a:spcAft>
+              <a:buSzPct val="100000"/>
+              <a:buChar char="•"/>
+            </a:pPr>
+            <a:r>
+              <a:rPr lang="en-US" sz="1600" dirty="0">
+                <a:solidFill>
+                  <a:srgbClr val="1A1A1A"/>
+                </a:solidFill>
+                <a:latin typeface="Calibri" pitchFamily="34" charset="0"/>
+                <a:ea typeface="Calibri" pitchFamily="34" charset="-122"/>
+                <a:cs typeface="Calibri" pitchFamily="34" charset="-120"/>
+              </a:rPr>
+              <a:t>Pocos días de histórico: los rankings se estabilizan con semanas</a:t>
+            </a:r>
+            <a:endParaRPr lang="en-US" sz="1600" dirty="0"/>
+          </a:p>
+          <a:p>
+            <a:pPr marL="342900" indent="-342900">
+              <a:spcAft>
+                <a:spcPts val="1000"/>
+              </a:spcAft>
+              <a:buSzPct val="100000"/>
+              <a:buChar char="•"/>
+            </a:pPr>
+            <a:r>
+              <a:rPr lang="en-US" sz="1600" dirty="0">
+                <a:solidFill>
+                  <a:srgbClr val="1A1A1A"/>
+                </a:solidFill>
+                <a:latin typeface="Calibri" pitchFamily="34" charset="0"/>
+                <a:ea typeface="Calibri" pitchFamily="34" charset="-122"/>
+                <a:cs typeface="Calibri" pitchFamily="34" charset="-120"/>
+              </a:rPr>
+              <a:t>Temas y entidades por diccionario requieren mantenimiento</a:t>
+            </a:r>
+            <a:endParaRPr lang="en-US" sz="1600" dirty="0"/>
+          </a:p>
+        </p:txBody>
+      </p:sp>
+      <p:sp>
+        <p:nvSpPr>
+          <p:cNvPr id="9" name="cierre-1"/>
+          <p:cNvSpPr/>
+          <p:nvPr/>
+        </p:nvSpPr>
+        <p:spPr>
+          <a:xfrm>
+            <a:off x="6217920" y="2011680"/>
+            <a:ext cx="5394960" cy="3931920"/>
+          </a:xfrm>
+          <a:prstGeom prst="roundRect">
+            <a:avLst>
+              <a:gd name="adj" fmla="val 1860"/>
+            </a:avLst>
+          </a:prstGeom>
+          <a:solidFill>
+            <a:srgbClr val="F2F2F0"/>
+          </a:solidFill>
+          <a:ln w="12700">
+            <a:solidFill>
+              <a:srgbClr val="F2F2F0"/>
+            </a:solidFill>
+            <a:prstDash val="solid"/>
+          </a:ln>
+        </p:spPr>
+      </p:sp>
+      <p:pic>
+        <p:nvPicPr>
+          <p:cNvPr id="10" name="Image 1" descr="preencoded.png">    </p:cNvPr>
+          <p:cNvPicPr>
+            <a:picLocks noChangeAspect="1"/>
+          </p:cNvPicPr>
+          <p:nvPr/>
+        </p:nvPicPr>
+        <p:blipFill>
+          <a:blip r:embed="rId2"/>
+          <a:stretch>
+            <a:fillRect/>
+          </a:stretch>
+        </p:blipFill>
+        <p:spPr>
+          <a:xfrm>
+            <a:off x="6537960" y="2286000"/>
+            <a:ext cx="411480" cy="411480"/>
+          </a:xfrm>
+          <a:prstGeom prst="rect">
+            <a:avLst/>
+          </a:prstGeom>
+        </p:spPr>
+      </p:pic>
+      <p:sp>
+        <p:nvSpPr>
+          <p:cNvPr id="11" name="Text 6"/>
+          <p:cNvSpPr txBox="1"/>
+          <p:nvPr/>
+        </p:nvSpPr>
+        <p:spPr>
+          <a:xfrm>
+            <a:off x="7132320" y="2286000"/>
+            <a:ext cx="4114800" cy="411480"/>
+          </a:xfrm>
+          <a:prstGeom prst="rect">
+            <a:avLst/>
+          </a:prstGeom>
+          <a:noFill/>
+          <a:ln/>
+        </p:spPr>
+        <p:txBody>
+          <a:bodyPr wrap="square" lIns="0" tIns="0" rIns="0" bIns="0" rtlCol="0" anchor="ctr"/>
+          <a:lstStyle/>
+          <a:p>
+            <a:pPr indent="0" marL="0">
+              <a:buNone/>
+            </a:pPr>
+            <a:r>
+              <a:rPr lang="en-US" sz="2200" b="1" dirty="0">
+                <a:solidFill>
+                  <a:srgbClr val="1A1A1A"/>
+                </a:solidFill>
+                <a:latin typeface="Calibri" pitchFamily="34" charset="0"/>
+                <a:ea typeface="Calibri" pitchFamily="34" charset="-122"/>
+                <a:cs typeface="Calibri" pitchFamily="34" charset="-120"/>
+              </a:rPr>
+              <a:t>Próximos pasos</a:t>
+            </a:r>
+            <a:endParaRPr lang="en-US" sz="2200" dirty="0"/>
+          </a:p>
+        </p:txBody>
+      </p:sp>
+      <p:sp>
+        <p:nvSpPr>
+          <p:cNvPr id="12" name="Text 7"/>
+          <p:cNvSpPr txBox="1"/>
+          <p:nvPr/>
+        </p:nvSpPr>
+        <p:spPr>
+          <a:xfrm>
+            <a:off x="6537960" y="2971800"/>
+            <a:ext cx="4800600" cy="2743200"/>
+          </a:xfrm>
+          <a:prstGeom prst="rect">
+            <a:avLst/>
+          </a:prstGeom>
+          <a:noFill/>
+          <a:ln/>
+        </p:spPr>
+        <p:txBody>
+          <a:bodyPr wrap="square" lIns="0" tIns="0" rIns="0" bIns="0" rtlCol="0" anchor="t"/>
+          <a:lstStyle/>
+          <a:p>
+            <a:pPr marL="342900" indent="-342900">
+              <a:spcAft>
+                <a:spcPts val="1000"/>
+              </a:spcAft>
+              <a:buSzPct val="100000"/>
+              <a:buChar char="•"/>
+            </a:pPr>
+            <a:r>
+              <a:rPr lang="en-US" sz="1600" dirty="0">
+                <a:solidFill>
+                  <a:srgbClr val="1A1A1A"/>
+                </a:solidFill>
+                <a:latin typeface="Calibri" pitchFamily="34" charset="0"/>
+                <a:ea typeface="Calibri" pitchFamily="34" charset="-122"/>
+                <a:cs typeface="Calibri" pitchFamily="34" charset="-120"/>
+              </a:rPr>
+              <a:t>Entidades con spaCy (NER) para descubrir figuras nuevas</a:t>
+            </a:r>
+            <a:endParaRPr lang="en-US" sz="1600" dirty="0"/>
+          </a:p>
+          <a:p>
+            <a:pPr marL="342900" indent="-342900">
+              <a:spcAft>
+                <a:spcPts val="1000"/>
+              </a:spcAft>
+              <a:buSzPct val="100000"/>
+              <a:buChar char="•"/>
+            </a:pPr>
+            <a:r>
+              <a:rPr lang="en-US" sz="1600" dirty="0">
+                <a:solidFill>
+                  <a:srgbClr val="1A1A1A"/>
+                </a:solidFill>
+                <a:latin typeface="Calibri" pitchFamily="34" charset="0"/>
+                <a:ea typeface="Calibri" pitchFamily="34" charset="-122"/>
+                <a:cs typeface="Calibri" pitchFamily="34" charset="-120"/>
+              </a:rPr>
+              <a:t>Evolución de las comunidades a lo largo de las semanas</a:t>
+            </a:r>
+            <a:endParaRPr lang="en-US" sz="1600" dirty="0"/>
+          </a:p>
+          <a:p>
+            <a:pPr marL="342900" indent="-342900">
+              <a:spcAft>
+                <a:spcPts val="1000"/>
+              </a:spcAft>
+              <a:buSzPct val="100000"/>
+              <a:buChar char="•"/>
+            </a:pPr>
+            <a:r>
+              <a:rPr lang="en-US" sz="1600" dirty="0">
+                <a:solidFill>
+                  <a:srgbClr val="1A1A1A"/>
+                </a:solidFill>
+                <a:latin typeface="Calibri" pitchFamily="34" charset="0"/>
+                <a:ea typeface="Calibri" pitchFamily="34" charset="-122"/>
+                <a:cs typeface="Calibri" pitchFamily="34" charset="-120"/>
+              </a:rPr>
+              <a:t>Cruzar el termómetro con el dólar y otros datos</a:t>
+            </a:r>
+            <a:endParaRPr lang="en-US" sz="1600" dirty="0"/>
+          </a:p>
+          <a:p>
+            <a:pPr marL="342900" indent="-342900">
+              <a:spcAft>
+                <a:spcPts val="1000"/>
+              </a:spcAft>
+              <a:buSzPct val="100000"/>
+              <a:buChar char="•"/>
+            </a:pPr>
+            <a:r>
+              <a:rPr lang="en-US" sz="1600" dirty="0">
+                <a:solidFill>
+                  <a:srgbClr val="1A1A1A"/>
+                </a:solidFill>
+                <a:latin typeface="Calibri" pitchFamily="34" charset="0"/>
+                <a:ea typeface="Calibri" pitchFamily="34" charset="-122"/>
+                <a:cs typeface="Calibri" pitchFamily="34" charset="-120"/>
+              </a:rPr>
+              <a:t>Más etiquetas manuales, con varios anotadores</a:t>
+            </a:r>
+            <a:endParaRPr lang="en-US" sz="1600" dirty="0"/>
+          </a:p>
+        </p:txBody>
+      </p:sp>
+      <p:sp>
+        <p:nvSpPr>
+          <p:cNvPr id="25" name="Slide Number Placeholder 0"/>
+          <p:cNvSpPr>
+            <a:spLocks noGrp="1"/>
+          </p:cNvSpPr>
+          <p:nvPr>
+            <p:ph type="sldNum" sz="quarter" idx="4294967295"/>
+          </p:nvPr>
+        </p:nvSpPr>
+        <p:spPr>
+          <a:xfrm>
+            <a:off x="11094415" y="6400800"/>
+            <a:ext cx="548640" cy="274320"/>
+          </a:xfrm>
+          <a:prstGeom prst="rect">
+            <a:avLst/>
+          </a:prstGeom>
+          <a:extLst>
+            <a:ext uri="{C572A759-6A51-4108-AA02-DFA0A04FC94B}">
+              <ma14:wrappingTextBoxFlag xmlns:ma14="http://schemas.microsoft.com/office/mac/drawingml/2011/main" val="0"/>
+            </a:ext>
+          </a:extLst>
+        </p:spPr>
+        <p:txBody>
+          <a:bodyPr/>
+          <a:lstStyle>
+            <a:lvl1pPr>
+              <a:defRPr sz="1000">
+                <a:solidFill>
+                  <a:srgbClr val="6B6B6B"/>
+                </a:solidFill>
+              </a:defRPr>
+            </a:lvl1pPr>
+          </a:lstStyle>
+          <a:p>
+            <a:pPr algn="r"/>
+            <a:fld id="{F7021451-1387-4CA6-816F-3879F97B5CBC}" type="slidenum">
+              <a:rPr b="0" lang="en-US"/>
+              <a:t>23</a:t>
+            </a:fld>
+            <a:endParaRPr lang="en-US"/>
+          </a:p>
+        </p:txBody>
+      </p:sp>
+    </p:spTree>
+  </p:cSld>
+  <p:clrMapOvr>
+    <a:masterClrMapping/>
+  </p:clrMapOvr>
+</p:sld>
+</file>
+
+<file path=ppt/slides/slide24.xml><?xml version="1.0" encoding="utf-8"?>
+<p:sld xmlns:a="http://schemas.openxmlformats.org/drawingml/2006/main" xmlns:r="http://schemas.openxmlformats.org/officeDocument/2006/relationships" xmlns:p="http://schemas.openxmlformats.org/presentationml/2006/main">
+  <p:cSld name="Slide 24">
+    <p:spTree>
+      <p:nvGrpSpPr>
+        <p:cNvPr id="1" name=""/>
+        <p:cNvGrpSpPr/>
+        <p:nvPr/>
+      </p:nvGrpSpPr>
+      <p:grpSpPr>
+        <a:xfrm>
+          <a:off x="0" y="0"/>
+          <a:ext cx="0" cy="0"/>
+          <a:chOff x="0" y="0"/>
+          <a:chExt cx="0" cy="0"/>
+        </a:xfrm>
+      </p:grpSpPr>
+      <p:sp>
+        <p:nvSpPr>
+          <p:cNvPr id="2" name="Text 0"/>
+          <p:cNvSpPr/>
+          <p:nvPr>
+            <p:ph idx="100" type="body" hasCustomPrompt="1"/>
+          </p:nvPr>
+        </p:nvSpPr>
+        <p:spPr>
+          <a:xfrm>
             <a:off x="548640" y="1463040"/>
             <a:ext cx="8229600" cy="365760"/>
           </a:xfrm>
@@ -10959,7 +12605,7 @@
                 <a:ea typeface="Cambria" pitchFamily="34" charset="-122"/>
                 <a:cs typeface="Cambria" pitchFamily="34" charset="-120"/>
               </a:rPr>
-              <a:t>4.386</a:t>
+              <a:t>5.302</a:t>
             </a:r>
             <a:endParaRPr lang="en-US" sz="6000" dirty="0"/>
           </a:p>
@@ -12958,7 +14604,7 @@
                 <a:ea typeface="Calibri" pitchFamily="34" charset="-122"/>
                 <a:cs typeface="Calibri" pitchFamily="34" charset="-120"/>
               </a:rPr>
-              <a:t>3.237 de 4.386 notas </a:t>
+              <a:t>3.724 de 5.302 notas </a:t>
             </a:r>
             <a:pPr indent="0" marL="0">
               <a:buNone/>
@@ -14031,7 +15677,7 @@
                 <a:ea typeface="Calibri" pitchFamily="34" charset="-122"/>
                 <a:cs typeface="Calibri" pitchFamily="34" charset="-120"/>
               </a:rPr>
-              <a:t>Se lee por dominio antes de pedir una nota. 0 bloqueos en 4.606 pedidos.</a:t>
+              <a:t>Se lee por dominio antes de pedir una nota. 0 bloqueos en 5.548 pedidos.</a:t>
             </a:r>
             <a:endParaRPr lang="en-US" sz="1500" dirty="0"/>
           </a:p>

--- a/docs/presentacion-tp.pptx
+++ b/docs/presentacion-tp.pptx
@@ -29,9 +29,10 @@
     <p:sldId id="277" r:id="rId23"/>
     <p:sldId id="278" r:id="rId24"/>
     <p:sldId id="279" r:id="rId25"/>
+    <p:sldId id="280" r:id="rId26"/>
   </p:sldIdLst>
   <p:notesMasterIdLst>
-    <p:notesMasterId r:id="rId26"/>
+    <p:notesMasterId r:id="rId27"/>
   </p:notesMasterIdLst>
   <p:sldSz cx="12192000" cy="6858000"/>
   <p:notesSz cx="6858000" cy="12192000"/>
@@ -130,18 +131,18 @@
   <p:extLst>
     <p:ext uri="{521415D9-36F7-43E2-AB2F-B90AF26B5E84}">
       <p14:sectionLst xmlns:p14="http://schemas.microsoft.com/office/powerpoint/2010/main">
-        <p14:section name="Apertura" id="{aed83583-f080-3388-af1c-c8a63796cb9b}">
+        <p14:section name="Apertura" id="{586e4289-a590-1a03-14f0-58b980e8dec4}">
           <p14:sldIdLst>
             <p14:sldId id="256"/>
           </p14:sldIdLst>
         </p14:section>
-        <p14:section name="Problema" id="{6703e7c6-aa73-e162-d096-5a16ca3546b8}">
+        <p14:section name="Problema" id="{94062e0d-5809-ccfd-df4e-0fb88bb95b34}">
           <p14:sldIdLst>
             <p14:sldId id="257"/>
             <p14:sldId id="258"/>
           </p14:sldIdLst>
         </p14:section>
-        <p14:section name="Cómo funciona" id="{cc5fb68c-a4e4-d506-f171-38cf32582641}">
+        <p14:section name="Cómo funciona" id="{3c75d1b5-bc39-1f71-8f4d-bbcc376c0521}">
           <p14:sldIdLst>
             <p14:sldId id="259"/>
             <p14:sldId id="260"/>
@@ -150,11 +151,11 @@
             <p14:sldId id="263"/>
             <p14:sldId id="264"/>
             <p14:sldId id="265"/>
+            <p14:sldId id="266"/>
           </p14:sldIdLst>
         </p14:section>
-        <p14:section name="Qué encontramos" id="{cae65273-5069-643a-d7cc-a44225b685a5}">
+        <p14:section name="Qué encontramos" id="{cb945d4d-aabb-fd22-1340-9a83886991e7}">
           <p14:sldIdLst>
-            <p14:sldId id="266"/>
             <p14:sldId id="267"/>
             <p14:sldId id="268"/>
             <p14:sldId id="269"/>
@@ -163,15 +164,16 @@
             <p14:sldId id="272"/>
             <p14:sldId id="273"/>
             <p14:sldId id="274"/>
+            <p14:sldId id="275"/>
           </p14:sldIdLst>
         </p14:section>
-        <p14:section name="Cierre" id="{84f43752-3cec-ae88-033a-d8b5f60c0181}">
+        <p14:section name="Cierre" id="{f179b449-c666-7ace-ccdd-480431db7851}">
           <p14:sldIdLst>
-            <p14:sldId id="275"/>
             <p14:sldId id="276"/>
             <p14:sldId id="277"/>
             <p14:sldId id="278"/>
             <p14:sldId id="279"/>
+            <p14:sldId id="280"/>
           </p14:sldIdLst>
         </p14:section>
       </p14:sectionLst>
@@ -2310,7 +2312,7 @@
           <a:p>
             <a:r>
               <a:rPr lang="en-US" dirty="0"/>
-              <a:t>El termómetro es el porcentaje estimado de notas negativas de las últimas 24 horas, de 0 a 100, con bandas y la comparación contra los días anteriores. El resumen lo arma el tablero con plantillas a partir de los datos: tema más cubierto, noticia más compartida y quién la publicó primero, figura más mencionada, medio más y menos negativo. No usa un modelo de lenguaje: es reproducible y gratis.</a:t>
+              <a:t>Tres técnicas para que el sistema no dependa solo de listas fijas. NER con spaCy descubre figuras nuevas, como Fundación Faro o Gonzalo Belloso. Los embeddings de oraciones encuentran la misma noticia contada con otras palabras y permiten buscar por significado desde el navegador. El aprendizaje activo elige los titulares donde el modelo de tono duda para que los etiquetemos a mano: el modelo pide ayuda donde más la necesita.</a:t>
             </a:r>
             <a:endParaRPr lang="en-US" dirty="0"/>
           </a:p>
@@ -2398,7 +2400,7 @@
           <a:p>
             <a:r>
               <a:rPr lang="en-US" dirty="0"/>
-              <a:t>Exageración: comparamos el tono del título con el de la bajada, que es el resumen escrito por el propio medio. Cebo: rasgos de clickbait. Transparencia: notas firmadas por una persona según el JSON-LD.</a:t>
+              <a:t>El termómetro es el porcentaje estimado de notas negativas de las últimas 24 horas, de 0 a 100, con bandas y la comparación contra los días anteriores. El resumen lo arma el tablero con plantillas a partir de los datos: tema más cubierto, noticia más compartida y quién la publicó primero, figura más mencionada, medio más y menos negativo. No usa un modelo de lenguaje: es reproducible y gratis.</a:t>
             </a:r>
             <a:endParaRPr lang="en-US" dirty="0"/>
           </a:p>
@@ -2486,7 +2488,7 @@
           <a:p>
             <a:r>
               <a:rPr lang="en-US" dirty="0"/>
-              <a:t>Porcentaje de títulos con al menos un recurso de cebo. En el otro extremo, Rosario Nuestro, El Chubut, Perfil están por debajo del 3%.</a:t>
+              <a:t>Exageración: comparamos el tono del título con el de la bajada, que es el resumen escrito por el propio medio. Cebo: rasgos de clickbait. Transparencia: notas firmadas por una persona según el JSON-LD.</a:t>
             </a:r>
             <a:endParaRPr lang="en-US" dirty="0"/>
           </a:p>
@@ -2574,7 +2576,7 @@
           <a:p>
             <a:r>
               <a:rPr lang="en-US" dirty="0"/>
-              <a:t>Cada punto es un medio. Eje horizontal: cebo. Eje vertical: exageración respecto de la propia bajada. Las líneas son las medianas y dividen en cuatro estilos. A24, El Trece, Radio Mitre y TN quedan como sensacionalistas; Elonce y El Chubut como sobrios. Es una medición automática con error conocido: comparar medios, no juzgar uno.</a:t>
+              <a:t>Porcentaje de títulos con al menos un recurso de cebo. En el otro extremo, Rosario Nuestro, El Chubut, Perfil están por debajo del 3%.</a:t>
             </a:r>
             <a:endParaRPr lang="en-US" dirty="0"/>
           </a:p>
@@ -2662,7 +2664,7 @@
           <a:p>
             <a:r>
               <a:rPr lang="en-US" dirty="0"/>
-              <a:t>Proporción de notas con tono negativo según el modelo combinado, medios con 60 notas o más. Muestra los 5 más negativos y los 5 menos negativos. El tono mide el hecho, no la postura del medio: un medio con más policiales tiene más negativas.</a:t>
+              <a:t>Cada punto es un medio. Eje horizontal: cebo. Eje vertical: exageración respecto de la propia bajada. Las líneas son las medianas y dividen en cuatro estilos. A24, El Trece, Radio Mitre y TN quedan como sensacionalistas; Elonce y El Chubut como sobrios. Es una medición automática con error conocido: comparar medios, no juzgar uno.</a:t>
             </a:r>
             <a:endParaRPr lang="en-US" dirty="0"/>
           </a:p>
@@ -2750,7 +2752,7 @@
           <a:p>
             <a:r>
               <a:rPr lang="en-US" dirty="0"/>
-              <a:t>Proporción de notas firmadas por una persona, según el autor declarado en el JSON-LD de cada nota. Medios con 40 notas o más con datos estructurados.</a:t>
+              <a:t>Proporción de notas con tono negativo según el modelo combinado, medios con 60 notas o más. Muestra los 5 más negativos y los 5 menos negativos. El tono mide el hecho, no la postura del medio: un medio con más policiales tiene más negativas.</a:t>
             </a:r>
             <a:endParaRPr lang="en-US" dirty="0"/>
           </a:p>
@@ -2838,7 +2840,7 @@
           <a:p>
             <a:r>
               <a:rPr lang="en-US" dirty="0"/>
-              <a:t>El sistema agrupa las notas que cuentan lo mismo (TF-IDF y similitud coseno) y muestra el título de cada medio en orden de publicación, con su tono y sus recursos de cebo. Ejemplo: el sobreseimiento de Milei en la causa Libra lo cubrieron 12 medios; la publicó primero El Cronista y el último llegó 8 horas después. Con eso también medimos quién llega primero.</a:t>
+              <a:t>Proporción de notas firmadas por una persona, según el autor declarado en el JSON-LD de cada nota. Medios con 40 notas o más con datos estructurados.</a:t>
             </a:r>
             <a:endParaRPr lang="en-US" dirty="0"/>
           </a:p>
@@ -2926,7 +2928,7 @@
           <a:p>
             <a:r>
               <a:rPr lang="en-US" dirty="0"/>
-              <a:t>Matriz medio por figura: porcentaje de notas negativas cuando el medio menciona a esa figura. Rojo: más negativo que el promedio de los medios; verde: menos. Solo celdas con 3 notas o más. Con pocos días de datos los valores son ilustrativos: muestran el método.</a:t>
+              <a:t>El sistema agrupa las notas que cuentan lo mismo (TF-IDF y similitud coseno) y muestra el título de cada medio en orden de publicación, con su tono y sus recursos de cebo. Ejemplo: el sobreseimiento de Milei en la causa Libra lo cubrieron 12 medios; la publicó primero El Cronista y el último llegó 8 horas después. Con eso también medimos quién llega primero.</a:t>
             </a:r>
             <a:endParaRPr lang="en-US" dirty="0"/>
           </a:p>
@@ -3014,7 +3016,7 @@
           <a:p>
             <a:r>
               <a:rPr lang="en-US" dirty="0"/>
-              <a:t>Grafo de medios: una arista une a dos medios que cubren las mismas historias, ponderada por historias compartidas sobre las del medio más chico; cada medio conserva sus 3 vínculos más fuertes. Las comunidades salen de propagación de etiquetas y el dibujo es una disposición por fuerzas. Es la rama de minería de estructura de la teoría, aplicada a la cobertura y no a los links.</a:t>
+              <a:t>Matriz medio por figura: porcentaje de notas negativas cuando el medio menciona a esa figura. Rojo: más negativo que el promedio de los medios; verde: menos. Solo celdas con 3 notas o más. Con pocos días de datos los valores son ilustrativos: muestran el método.</a:t>
             </a:r>
             <a:endParaRPr lang="en-US" dirty="0"/>
           </a:p>
@@ -3190,7 +3192,7 @@
           <a:p>
             <a:r>
               <a:rPr lang="en-US" dirty="0"/>
-              <a:t>Mostrar el tablero en vivo. Recorrer Resumen, Titulares (con buscador), Monitor (seguir una persona), Cómo titulan y Salud de datos. Es una página estática en GitHub Pages: funciona también en el celular.</a:t>
+              <a:t>Grafo de medios: una arista une a dos medios que cubren las mismas historias, ponderada por historias compartidas sobre las del medio más chico; cada medio conserva sus 3 vínculos más fuertes. Las comunidades salen de propagación de etiquetas y el dibujo es una disposición por fuerzas. Es la rama de minería de estructura de la teoría, aplicada a la cobertura y no a los links.</a:t>
             </a:r>
             <a:endParaRPr lang="en-US" dirty="0"/>
           </a:p>
@@ -3278,7 +3280,7 @@
           <a:p>
             <a:r>
               <a:rPr lang="en-US" dirty="0"/>
-              <a:t>Abrir el tablero, tocar Explorar la base (SQL). Datasette Lite corre SQLite en el navegador con WebAssembly: no hay que instalar nada. Correr esta consulta y después una propuesta por la clase.</a:t>
+              <a:t>Mostrar el tablero en vivo. Recorrer Resumen, Titulares (con buscador), Monitor (seguir una persona), Cómo titulan y Salud de datos. Es una página estática en GitHub Pages: funciona también en el celular.</a:t>
             </a:r>
             <a:endParaRPr lang="en-US" dirty="0"/>
           </a:p>
@@ -3366,7 +3368,7 @@
           <a:p>
             <a:r>
               <a:rPr lang="en-US" dirty="0"/>
-              <a:t>Sin servidores ni costos: todo corre en GitHub. SQLite simplifica la operación y se puede abrir en el navegador.</a:t>
+              <a:t>Abrir el tablero, tocar Explorar la base (SQL). Datasette Lite corre SQLite en el navegador con WebAssembly: no hay que instalar nada. Correr esta consulta y después una propuesta por la clase.</a:t>
             </a:r>
             <a:endParaRPr lang="en-US" dirty="0"/>
           </a:p>
@@ -3454,7 +3456,7 @@
           <a:p>
             <a:r>
               <a:rPr lang="en-US" dirty="0"/>
-              <a:t>Ser claros con los límites: el tono es del título, 77% de acierto, 340 etiquetas de un criterio. El histórico es corto. Próximos pasos: NER con spaCy, evolución de comunidades, cruce con datos económicos y más etiquetas manuales.</a:t>
+              <a:t>Sin servidores ni costos: todo corre en GitHub. SQLite simplifica la operación y se puede abrir en el navegador.</a:t>
             </a:r>
             <a:endParaRPr lang="en-US" dirty="0"/>
           </a:p>
@@ -3542,7 +3544,7 @@
           <a:p>
             <a:r>
               <a:rPr lang="en-US" dirty="0"/>
-              <a:t>Cierre con la invitación a probarlo en vivo. Preguntas.</a:t>
+              <a:t>Ser claros con los límites: el tono es del título, 77% de acierto, 340 etiquetas de un criterio. El histórico es corto. Próximos pasos: NER con spaCy, evolución de comunidades, cruce con datos económicos y más etiquetas manuales.</a:t>
             </a:r>
             <a:endParaRPr lang="en-US" dirty="0"/>
           </a:p>
@@ -3566,6 +3568,94 @@
             <a:fld id="{F7021451-1387-4CA6-816F-3879F97B5CBC}" type="slidenum">
               <a:rPr lang="en-US"/>
               <a:t>24</a:t>
+            </a:fld>
+            <a:endParaRPr lang="en-US"/>
+          </a:p>
+        </p:txBody>
+      </p:sp>
+    </p:spTree>
+    <p:extLst>
+      <p:ext uri="{BB962C8B-B14F-4D97-AF65-F5344CB8AC3E}">
+        <p14:creationId xmlns:p14="http://schemas.microsoft.com/office/powerpoint/2010/main" val="1024086991"/>
+      </p:ext>
+    </p:extLst>
+  </p:cSld>
+  <p:clrMapOvr>
+    <a:masterClrMapping/>
+  </p:clrMapOvr>
+</p:notes>
+</file>
+
+<file path=ppt/notesSlides/notesSlide25.xml><?xml version="1.0" encoding="utf-8"?>
+<p:notes xmlns:a="http://schemas.openxmlformats.org/drawingml/2006/main" xmlns:r="http://schemas.openxmlformats.org/officeDocument/2006/relationships" xmlns:p="http://schemas.openxmlformats.org/presentationml/2006/main">
+  <p:cSld>
+    <p:spTree>
+      <p:nvGrpSpPr>
+        <p:cNvPr id="1" name=""/>
+        <p:cNvGrpSpPr/>
+        <p:nvPr/>
+      </p:nvGrpSpPr>
+      <p:grpSpPr>
+        <a:xfrm>
+          <a:off x="0" y="0"/>
+          <a:ext cx="0" cy="0"/>
+          <a:chOff x="0" y="0"/>
+          <a:chExt cx="0" cy="0"/>
+        </a:xfrm>
+      </p:grpSpPr>
+      <p:sp>
+        <p:nvSpPr>
+          <p:cNvPr id="2" name="Slide Image Placeholder 1"/>
+          <p:cNvSpPr>
+            <a:spLocks noGrp="1" noRot="1" noChangeAspect="1"/>
+          </p:cNvSpPr>
+          <p:nvPr>
+            <p:ph type="sldImg"/>
+          </p:nvPr>
+        </p:nvSpPr>
+        <p:spPr/>
+      </p:sp>
+      <p:sp>
+        <p:nvSpPr>
+          <p:cNvPr id="3" name="Notes Placeholder 2"/>
+          <p:cNvSpPr>
+            <a:spLocks noGrp="1"/>
+          </p:cNvSpPr>
+          <p:nvPr>
+            <p:ph type="body" idx="1"/>
+          </p:nvPr>
+        </p:nvSpPr>
+        <p:spPr/>
+        <p:txBody>
+          <a:bodyPr/>
+          <a:lstStyle/>
+          <a:p>
+            <a:r>
+              <a:rPr lang="en-US" dirty="0"/>
+              <a:t>Cierre con la invitación a probarlo en vivo. Preguntas.</a:t>
+            </a:r>
+            <a:endParaRPr lang="en-US" dirty="0"/>
+          </a:p>
+        </p:txBody>
+      </p:sp>
+      <p:sp>
+        <p:nvSpPr>
+          <p:cNvPr id="4" name="Slide Number Placeholder 3"/>
+          <p:cNvSpPr>
+            <a:spLocks noGrp="1"/>
+          </p:cNvSpPr>
+          <p:nvPr>
+            <p:ph type="sldNum" sz="quarter" idx="10"/>
+          </p:nvPr>
+        </p:nvSpPr>
+        <p:spPr/>
+        <p:txBody>
+          <a:bodyPr/>
+          <a:lstStyle/>
+          <a:p>
+            <a:fld id="{F7021451-1387-4CA6-816F-3879F97B5CBC}" type="slidenum">
+              <a:rPr lang="en-US"/>
+              <a:t>25</a:t>
             </a:fld>
             <a:endParaRPr lang="en-US"/>
           </a:p>
@@ -5451,7 +5541,7 @@
                   <a:schemeClr val="accent1"/>
                 </a:solidFill>
               </a:rPr>
-              <a:t>EL DÍA EN UN NÚMERO</a:t>
+              <a:t>MÁS ALLÁ DEL DICCIONARIO</a:t>
             </a:r>
             <a:endParaRPr lang="en-US" sz="1200" dirty="0"/>
           </a:p>
@@ -5492,15 +5582,42 @@
                 <a:ea typeface="Cambria" pitchFamily="34" charset="-122"/>
                 <a:cs typeface="Cambria" pitchFamily="34" charset="-120"/>
               </a:rPr>
-              <a:t>Un termómetro y un resumen que se escriben solos</a:t>
+              <a:t>El sistema aprende lo que no le enseñamos</a:t>
             </a:r>
             <a:endParaRPr lang="en-US" sz="3200" dirty="0"/>
           </a:p>
         </p:txBody>
+      </p:sp>
+      <p:sp>
+        <p:nvSpPr>
+          <p:cNvPr id="5" name="mas-0"/>
+          <p:cNvSpPr/>
+          <p:nvPr/>
+        </p:nvSpPr>
+        <p:spPr>
+          <a:xfrm>
+            <a:off x="548640" y="2011680"/>
+            <a:ext cx="3520440" cy="3931920"/>
+          </a:xfrm>
+          <a:prstGeom prst="roundRect">
+            <a:avLst>
+              <a:gd name="adj" fmla="val 2078"/>
+            </a:avLst>
+          </a:prstGeom>
+          <a:solidFill>
+            <a:srgbClr val="F2F2F0"/>
+          </a:solidFill>
+          <a:ln w="12700">
+            <a:solidFill>
+              <a:srgbClr val="F2F2F0"/>
+            </a:solidFill>
+            <a:prstDash val="solid"/>
+          </a:ln>
+        </p:spPr>
       </p:sp>
       <p:pic>
         <p:nvPicPr>
-          <p:cNvPr id="5" name="termometro" descr="C:\Users\SBI\Documents\Martin Ceriotti Personales\Master Data Science\webmining\Web-Mining\docs\_fuentes\img\termo.png">    </p:cNvPr>
+          <p:cNvPr id="6" name="Image 0" descr="preencoded.png">    </p:cNvPr>
           <p:cNvPicPr>
             <a:picLocks noChangeAspect="1"/>
           </p:cNvPicPr>
@@ -5514,8 +5631,8 @@
         </p:blipFill>
         <p:spPr>
           <a:xfrm>
-            <a:off x="548640" y="2011680"/>
-            <a:ext cx="11094415" cy="2804768"/>
+            <a:off x="868680" y="2286000"/>
+            <a:ext cx="502920" cy="502920"/>
           </a:xfrm>
           <a:prstGeom prst="rect">
             <a:avLst/>
@@ -5524,14 +5641,14 @@
       </p:pic>
       <p:sp>
         <p:nvSpPr>
-          <p:cNvPr id="6" name="Text 2"/>
+          <p:cNvPr id="7" name="Text 3"/>
           <p:cNvSpPr txBox="1"/>
           <p:nvPr/>
         </p:nvSpPr>
         <p:spPr>
           <a:xfrm>
-            <a:off x="548640" y="5120640"/>
-            <a:ext cx="11094415" cy="914400"/>
+            <a:off x="868680" y="2926080"/>
+            <a:ext cx="2926080" cy="457200"/>
           </a:xfrm>
           <a:prstGeom prst="rect">
             <a:avLst/>
@@ -5544,13 +5661,10 @@
           <a:lstStyle/>
           <a:p>
             <a:pPr indent="0" marL="0">
-              <a:spcAft>
-                <a:spcPts val="600"/>
-              </a:spcAft>
-              <a:buNone/>
-            </a:pPr>
-            <a:r>
-              <a:rPr lang="en-US" sz="1600" b="1" dirty="0">
+              <a:buNone/>
+            </a:pPr>
+            <a:r>
+              <a:rPr lang="en-US" sz="2000" b="1" dirty="0">
                 <a:solidFill>
                   <a:srgbClr val="1A1A1A"/>
                 </a:solidFill>
@@ -5558,53 +5672,167 @@
                 <a:ea typeface="Calibri" pitchFamily="34" charset="-122"/>
                 <a:cs typeface="Calibri" pitchFamily="34" charset="-120"/>
               </a:rPr>
-              <a:t>Termómetro: </a:t>
-            </a:r>
-            <a:pPr indent="0" marL="0">
-              <a:spcAft>
-                <a:spcPts val="600"/>
-              </a:spcAft>
-              <a:buNone/>
-            </a:pPr>
-            <a:r>
-              <a:rPr lang="en-US" sz="1600" dirty="0">
-                <a:solidFill>
-                  <a:srgbClr val="1A1A1A"/>
+              <a:t>Figuras nuevas (NER)</a:t>
+            </a:r>
+            <a:endParaRPr lang="en-US" sz="2000" dirty="0"/>
+          </a:p>
+        </p:txBody>
+      </p:sp>
+      <p:sp>
+        <p:nvSpPr>
+          <p:cNvPr id="8" name="Text 4"/>
+          <p:cNvSpPr txBox="1"/>
+          <p:nvPr/>
+        </p:nvSpPr>
+        <p:spPr>
+          <a:xfrm>
+            <a:off x="868680" y="3429000"/>
+            <a:ext cx="2926080" cy="1645920"/>
+          </a:xfrm>
+          <a:prstGeom prst="rect">
+            <a:avLst/>
+          </a:prstGeom>
+          <a:noFill/>
+          <a:ln/>
+        </p:spPr>
+        <p:txBody>
+          <a:bodyPr wrap="square" lIns="0" tIns="0" rIns="0" bIns="0" rtlCol="0" anchor="t"/>
+          <a:lstStyle/>
+          <a:p>
+            <a:pPr indent="0" marL="0">
+              <a:buNone/>
+            </a:pPr>
+            <a:r>
+              <a:rPr lang="en-US" sz="1500" dirty="0">
+                <a:solidFill>
+                  <a:srgbClr val="6B6B6B"/>
                 </a:solidFill>
                 <a:latin typeface="Calibri" pitchFamily="34" charset="0"/>
                 <a:ea typeface="Calibri" pitchFamily="34" charset="-122"/>
                 <a:cs typeface="Calibri" pitchFamily="34" charset="-120"/>
               </a:rPr>
-              <a:t>% de notas negativas de las últimas 24 h (calmo, moderado, tenso, muy tenso).</a:t>
-            </a:r>
-            <a:endParaRPr lang="en-US" sz="1600" dirty="0"/>
-          </a:p>
-          <a:p>
-            <a:pPr indent="0" marL="0">
-              <a:spcAft>
-                <a:spcPts val="600"/>
-              </a:spcAft>
-              <a:buNone/>
-            </a:pPr>
-            <a:r>
-              <a:rPr lang="en-US" sz="1600" b="1" dirty="0">
-                <a:solidFill>
-                  <a:srgbClr val="1A1A1A"/>
+              <a:t>spaCy detecta personas e instituciones que no están en el diccionario y marca las que irrumpen hoy en la agenda.</a:t>
+            </a:r>
+            <a:endParaRPr lang="en-US" sz="1500" dirty="0"/>
+          </a:p>
+        </p:txBody>
+      </p:sp>
+      <p:sp>
+        <p:nvSpPr>
+          <p:cNvPr id="9" name="Text 5"/>
+          <p:cNvSpPr txBox="1"/>
+          <p:nvPr/>
+        </p:nvSpPr>
+        <p:spPr>
+          <a:xfrm>
+            <a:off x="868680" y="5166360"/>
+            <a:ext cx="2926080" cy="548640"/>
+          </a:xfrm>
+          <a:prstGeom prst="rect">
+            <a:avLst/>
+          </a:prstGeom>
+          <a:noFill/>
+          <a:ln/>
+        </p:spPr>
+        <p:txBody>
+          <a:bodyPr wrap="square" lIns="0" tIns="0" rIns="0" bIns="0" rtlCol="0" anchor="t"/>
+          <a:lstStyle/>
+          <a:p>
+            <a:pPr indent="0" marL="0">
+              <a:buNone/>
+            </a:pPr>
+            <a:r>
+              <a:rPr lang="en-US" sz="1400" b="1" dirty="0">
+                <a:solidFill>
+                  <a:srgbClr val="1F5F8B"/>
                 </a:solidFill>
                 <a:latin typeface="Calibri" pitchFamily="34" charset="0"/>
                 <a:ea typeface="Calibri" pitchFamily="34" charset="-122"/>
                 <a:cs typeface="Calibri" pitchFamily="34" charset="-120"/>
               </a:rPr>
-              <a:t>Resumen: </a:t>
-            </a:r>
-            <a:pPr indent="0" marL="0">
-              <a:spcAft>
-                <a:spcPts val="600"/>
-              </a:spcAft>
-              <a:buNone/>
-            </a:pPr>
-            <a:r>
-              <a:rPr lang="en-US" sz="1600" dirty="0">
+              <a:t>Ej.: Fundación Faro, Gonzalo Belloso</a:t>
+            </a:r>
+            <a:endParaRPr lang="en-US" sz="1400" dirty="0"/>
+          </a:p>
+        </p:txBody>
+      </p:sp>
+      <p:sp>
+        <p:nvSpPr>
+          <p:cNvPr id="10" name="mas-1"/>
+          <p:cNvSpPr/>
+          <p:nvPr/>
+        </p:nvSpPr>
+        <p:spPr>
+          <a:xfrm>
+            <a:off x="4297680" y="2011680"/>
+            <a:ext cx="3520440" cy="3931920"/>
+          </a:xfrm>
+          <a:prstGeom prst="roundRect">
+            <a:avLst>
+              <a:gd name="adj" fmla="val 2078"/>
+            </a:avLst>
+          </a:prstGeom>
+          <a:solidFill>
+            <a:srgbClr val="F2F2F0"/>
+          </a:solidFill>
+          <a:ln w="12700">
+            <a:solidFill>
+              <a:srgbClr val="F2F2F0"/>
+            </a:solidFill>
+            <a:prstDash val="solid"/>
+          </a:ln>
+        </p:spPr>
+      </p:sp>
+      <p:pic>
+        <p:nvPicPr>
+          <p:cNvPr id="11" name="Image 1" descr="preencoded.png">    </p:cNvPr>
+          <p:cNvPicPr>
+            <a:picLocks noChangeAspect="1"/>
+          </p:cNvPicPr>
+          <p:nvPr/>
+        </p:nvPicPr>
+        <p:blipFill>
+          <a:blip r:embed="rId2"/>
+          <a:stretch>
+            <a:fillRect/>
+          </a:stretch>
+        </p:blipFill>
+        <p:spPr>
+          <a:xfrm>
+            <a:off x="4617720" y="2286000"/>
+            <a:ext cx="502920" cy="502920"/>
+          </a:xfrm>
+          <a:prstGeom prst="rect">
+            <a:avLst/>
+          </a:prstGeom>
+        </p:spPr>
+      </p:pic>
+      <p:sp>
+        <p:nvSpPr>
+          <p:cNvPr id="12" name="Text 7"/>
+          <p:cNvSpPr txBox="1"/>
+          <p:nvPr/>
+        </p:nvSpPr>
+        <p:spPr>
+          <a:xfrm>
+            <a:off x="4617720" y="2926080"/>
+            <a:ext cx="2926080" cy="457200"/>
+          </a:xfrm>
+          <a:prstGeom prst="rect">
+            <a:avLst/>
+          </a:prstGeom>
+          <a:noFill/>
+          <a:ln/>
+        </p:spPr>
+        <p:txBody>
+          <a:bodyPr wrap="square" lIns="0" tIns="0" rIns="0" bIns="0" rtlCol="0" anchor="t"/>
+          <a:lstStyle/>
+          <a:p>
+            <a:pPr indent="0" marL="0">
+              <a:buNone/>
+            </a:pPr>
+            <a:r>
+              <a:rPr lang="en-US" sz="2000" b="1" dirty="0">
                 <a:solidFill>
                   <a:srgbClr val="1A1A1A"/>
                 </a:solidFill>
@@ -5612,9 +5840,255 @@
                 <a:ea typeface="Calibri" pitchFamily="34" charset="-122"/>
                 <a:cs typeface="Calibri" pitchFamily="34" charset="-120"/>
               </a:rPr>
-              <a:t>redactado con plantillas a partir de los datos del día; sin modelo de lenguaje, reproducible.</a:t>
-            </a:r>
-            <a:endParaRPr lang="en-US" sz="1600" dirty="0"/>
+              <a:t>Búsqueda por significado</a:t>
+            </a:r>
+            <a:endParaRPr lang="en-US" sz="2000" dirty="0"/>
+          </a:p>
+        </p:txBody>
+      </p:sp>
+      <p:sp>
+        <p:nvSpPr>
+          <p:cNvPr id="13" name="Text 8"/>
+          <p:cNvSpPr txBox="1"/>
+          <p:nvPr/>
+        </p:nvSpPr>
+        <p:spPr>
+          <a:xfrm>
+            <a:off x="4617720" y="3429000"/>
+            <a:ext cx="2926080" cy="1645920"/>
+          </a:xfrm>
+          <a:prstGeom prst="rect">
+            <a:avLst/>
+          </a:prstGeom>
+          <a:noFill/>
+          <a:ln/>
+        </p:spPr>
+        <p:txBody>
+          <a:bodyPr wrap="square" lIns="0" tIns="0" rIns="0" bIns="0" rtlCol="0" anchor="t"/>
+          <a:lstStyle/>
+          <a:p>
+            <a:pPr indent="0" marL="0">
+              <a:buNone/>
+            </a:pPr>
+            <a:r>
+              <a:rPr lang="en-US" sz="1500" dirty="0">
+                <a:solidFill>
+                  <a:srgbClr val="6B6B6B"/>
+                </a:solidFill>
+                <a:latin typeface="Calibri" pitchFamily="34" charset="0"/>
+                <a:ea typeface="Calibri" pitchFamily="34" charset="-122"/>
+                <a:cs typeface="Calibri" pitchFamily="34" charset="-120"/>
+              </a:rPr>
+              <a:t>Embeddings MiniLM: notas parecidas de otros medios aunque no compartan palabras, y búsqueda semántica en el navegador.</a:t>
+            </a:r>
+            <a:endParaRPr lang="en-US" sz="1500" dirty="0"/>
+          </a:p>
+        </p:txBody>
+      </p:sp>
+      <p:sp>
+        <p:nvSpPr>
+          <p:cNvPr id="14" name="Text 9"/>
+          <p:cNvSpPr txBox="1"/>
+          <p:nvPr/>
+        </p:nvSpPr>
+        <p:spPr>
+          <a:xfrm>
+            <a:off x="4617720" y="5166360"/>
+            <a:ext cx="2926080" cy="548640"/>
+          </a:xfrm>
+          <a:prstGeom prst="rect">
+            <a:avLst/>
+          </a:prstGeom>
+          <a:noFill/>
+          <a:ln/>
+        </p:spPr>
+        <p:txBody>
+          <a:bodyPr wrap="square" lIns="0" tIns="0" rIns="0" bIns="0" rtlCol="0" anchor="t"/>
+          <a:lstStyle/>
+          <a:p>
+            <a:pPr indent="0" marL="0">
+              <a:buNone/>
+            </a:pPr>
+            <a:r>
+              <a:rPr lang="en-US" sz="1400" b="1" dirty="0">
+                <a:solidFill>
+                  <a:srgbClr val="1F5F8B"/>
+                </a:solidFill>
+                <a:latin typeface="Calibri" pitchFamily="34" charset="0"/>
+                <a:ea typeface="Calibri" pitchFamily="34" charset="-122"/>
+                <a:cs typeface="Calibri" pitchFamily="34" charset="-120"/>
+              </a:rPr>
+              <a:t>"Murió una joven embarazada…" ↔ La Voz: 0,85</a:t>
+            </a:r>
+            <a:endParaRPr lang="en-US" sz="1400" dirty="0"/>
+          </a:p>
+        </p:txBody>
+      </p:sp>
+      <p:sp>
+        <p:nvSpPr>
+          <p:cNvPr id="15" name="mas-2"/>
+          <p:cNvSpPr/>
+          <p:nvPr/>
+        </p:nvSpPr>
+        <p:spPr>
+          <a:xfrm>
+            <a:off x="8046720" y="2011680"/>
+            <a:ext cx="3520440" cy="3931920"/>
+          </a:xfrm>
+          <a:prstGeom prst="roundRect">
+            <a:avLst>
+              <a:gd name="adj" fmla="val 2078"/>
+            </a:avLst>
+          </a:prstGeom>
+          <a:solidFill>
+            <a:srgbClr val="F2F2F0"/>
+          </a:solidFill>
+          <a:ln w="12700">
+            <a:solidFill>
+              <a:srgbClr val="F2F2F0"/>
+            </a:solidFill>
+            <a:prstDash val="solid"/>
+          </a:ln>
+        </p:spPr>
+      </p:sp>
+      <p:pic>
+        <p:nvPicPr>
+          <p:cNvPr id="16" name="Image 2" descr="preencoded.png">    </p:cNvPr>
+          <p:cNvPicPr>
+            <a:picLocks noChangeAspect="1"/>
+          </p:cNvPicPr>
+          <p:nvPr/>
+        </p:nvPicPr>
+        <p:blipFill>
+          <a:blip r:embed="rId3"/>
+          <a:stretch>
+            <a:fillRect/>
+          </a:stretch>
+        </p:blipFill>
+        <p:spPr>
+          <a:xfrm>
+            <a:off x="8366760" y="2286000"/>
+            <a:ext cx="502920" cy="502920"/>
+          </a:xfrm>
+          <a:prstGeom prst="rect">
+            <a:avLst/>
+          </a:prstGeom>
+        </p:spPr>
+      </p:pic>
+      <p:sp>
+        <p:nvSpPr>
+          <p:cNvPr id="17" name="Text 11"/>
+          <p:cNvSpPr txBox="1"/>
+          <p:nvPr/>
+        </p:nvSpPr>
+        <p:spPr>
+          <a:xfrm>
+            <a:off x="8366760" y="2926080"/>
+            <a:ext cx="2926080" cy="457200"/>
+          </a:xfrm>
+          <a:prstGeom prst="rect">
+            <a:avLst/>
+          </a:prstGeom>
+          <a:noFill/>
+          <a:ln/>
+        </p:spPr>
+        <p:txBody>
+          <a:bodyPr wrap="square" lIns="0" tIns="0" rIns="0" bIns="0" rtlCol="0" anchor="t"/>
+          <a:lstStyle/>
+          <a:p>
+            <a:pPr indent="0" marL="0">
+              <a:buNone/>
+            </a:pPr>
+            <a:r>
+              <a:rPr lang="en-US" sz="2000" b="1" dirty="0">
+                <a:solidFill>
+                  <a:srgbClr val="1A1A1A"/>
+                </a:solidFill>
+                <a:latin typeface="Calibri" pitchFamily="34" charset="0"/>
+                <a:ea typeface="Calibri" pitchFamily="34" charset="-122"/>
+                <a:cs typeface="Calibri" pitchFamily="34" charset="-120"/>
+              </a:rPr>
+              <a:t>Aprendizaje activo</a:t>
+            </a:r>
+            <a:endParaRPr lang="en-US" sz="2000" dirty="0"/>
+          </a:p>
+        </p:txBody>
+      </p:sp>
+      <p:sp>
+        <p:nvSpPr>
+          <p:cNvPr id="18" name="Text 12"/>
+          <p:cNvSpPr txBox="1"/>
+          <p:nvPr/>
+        </p:nvSpPr>
+        <p:spPr>
+          <a:xfrm>
+            <a:off x="8366760" y="3429000"/>
+            <a:ext cx="2926080" cy="1645920"/>
+          </a:xfrm>
+          <a:prstGeom prst="rect">
+            <a:avLst/>
+          </a:prstGeom>
+          <a:noFill/>
+          <a:ln/>
+        </p:spPr>
+        <p:txBody>
+          <a:bodyPr wrap="square" lIns="0" tIns="0" rIns="0" bIns="0" rtlCol="0" anchor="t"/>
+          <a:lstStyle/>
+          <a:p>
+            <a:pPr indent="0" marL="0">
+              <a:buNone/>
+            </a:pPr>
+            <a:r>
+              <a:rPr lang="en-US" sz="1500" dirty="0">
+                <a:solidFill>
+                  <a:srgbClr val="6B6B6B"/>
+                </a:solidFill>
+                <a:latin typeface="Calibri" pitchFamily="34" charset="0"/>
+                <a:ea typeface="Calibri" pitchFamily="34" charset="-122"/>
+                <a:cs typeface="Calibri" pitchFamily="34" charset="-120"/>
+              </a:rPr>
+              <a:t>El modelo de tono elige los 60 titulares donde más duda para etiquetarlos a mano y reentrenar.</a:t>
+            </a:r>
+            <a:endParaRPr lang="en-US" sz="1500" dirty="0"/>
+          </a:p>
+        </p:txBody>
+      </p:sp>
+      <p:sp>
+        <p:nvSpPr>
+          <p:cNvPr id="19" name="Text 13"/>
+          <p:cNvSpPr txBox="1"/>
+          <p:nvPr/>
+        </p:nvSpPr>
+        <p:spPr>
+          <a:xfrm>
+            <a:off x="8366760" y="5166360"/>
+            <a:ext cx="2926080" cy="548640"/>
+          </a:xfrm>
+          <a:prstGeom prst="rect">
+            <a:avLst/>
+          </a:prstGeom>
+          <a:noFill/>
+          <a:ln/>
+        </p:spPr>
+        <p:txBody>
+          <a:bodyPr wrap="square" lIns="0" tIns="0" rIns="0" bIns="0" rtlCol="0" anchor="t"/>
+          <a:lstStyle/>
+          <a:p>
+            <a:pPr indent="0" marL="0">
+              <a:buNone/>
+            </a:pPr>
+            <a:r>
+              <a:rPr lang="en-US" sz="1400" b="1" dirty="0">
+                <a:solidFill>
+                  <a:srgbClr val="1F5F8B"/>
+                </a:solidFill>
+                <a:latin typeface="Calibri" pitchFamily="34" charset="0"/>
+                <a:ea typeface="Calibri" pitchFamily="34" charset="-122"/>
+                <a:cs typeface="Calibri" pitchFamily="34" charset="-120"/>
+              </a:rPr>
+              <a:t>Tema de la clase 3, aplicado</a:t>
+            </a:r>
+            <a:endParaRPr lang="en-US" sz="1400" dirty="0"/>
           </a:p>
         </p:txBody>
       </p:sp>
@@ -5720,7 +6194,7 @@
                   <a:schemeClr val="accent1"/>
                 </a:solidFill>
               </a:rPr>
-              <a:t>CÓMO TITULA CADA MEDIO</a:t>
+              <a:t>EL DÍA EN UN NÚMERO</a:t>
             </a:r>
             <a:endParaRPr lang="en-US" sz="1200" dirty="0"/>
           </a:p>
@@ -5761,22 +6235,46 @@
                 <a:ea typeface="Cambria" pitchFamily="34" charset="-122"/>
                 <a:cs typeface="Cambria" pitchFamily="34" charset="-120"/>
               </a:rPr>
-              <a:t>Tres indicadores para medir el estilo, no solo el contenido</a:t>
+              <a:t>Un termómetro y un resumen que se escriben solos</a:t>
             </a:r>
             <a:endParaRPr lang="en-US" sz="3200" dirty="0"/>
           </a:p>
         </p:txBody>
       </p:sp>
-      <p:sp>
-        <p:nvSpPr>
-          <p:cNvPr id="5" name="Text 2"/>
+      <p:pic>
+        <p:nvPicPr>
+          <p:cNvPr id="5" name="termometro" descr="C:\Users\SBI\Documents\Martin Ceriotti Personales\Master Data Science\webmining\Web-Mining\docs\_fuentes\img\termo.png">    </p:cNvPr>
+          <p:cNvPicPr>
+            <a:picLocks noChangeAspect="1"/>
+          </p:cNvPicPr>
+          <p:nvPr/>
+        </p:nvPicPr>
+        <p:blipFill>
+          <a:blip r:embed="rId1"/>
+          <a:stretch>
+            <a:fillRect/>
+          </a:stretch>
+        </p:blipFill>
+        <p:spPr>
+          <a:xfrm>
+            <a:off x="548640" y="2011680"/>
+            <a:ext cx="11094415" cy="2804768"/>
+          </a:xfrm>
+          <a:prstGeom prst="rect">
+            <a:avLst/>
+          </a:prstGeom>
+        </p:spPr>
+      </p:pic>
+      <p:sp>
+        <p:nvSpPr>
+          <p:cNvPr id="6" name="Text 2"/>
           <p:cNvSpPr txBox="1"/>
           <p:nvPr/>
         </p:nvSpPr>
         <p:spPr>
           <a:xfrm>
-            <a:off x="548640" y="2011680"/>
-            <a:ext cx="640080" cy="914400"/>
+            <a:off x="548640" y="5120640"/>
+            <a:ext cx="11094415" cy="914400"/>
           </a:xfrm>
           <a:prstGeom prst="rect">
             <a:avLst/>
@@ -5789,49 +6287,13 @@
           <a:lstStyle/>
           <a:p>
             <a:pPr indent="0" marL="0">
-              <a:buNone/>
-            </a:pPr>
-            <a:r>
-              <a:rPr lang="en-US" sz="4800" b="1" dirty="0">
-                <a:solidFill>
-                  <a:srgbClr val="C8102E"/>
-                </a:solidFill>
-                <a:latin typeface="Cambria" pitchFamily="34" charset="0"/>
-                <a:ea typeface="Cambria" pitchFamily="34" charset="-122"/>
-                <a:cs typeface="Cambria" pitchFamily="34" charset="-120"/>
-              </a:rPr>
-              <a:t>1</a:t>
-            </a:r>
-            <a:endParaRPr lang="en-US" sz="4800" dirty="0"/>
-          </a:p>
-        </p:txBody>
-      </p:sp>
-      <p:sp>
-        <p:nvSpPr>
-          <p:cNvPr id="6" name="Text 3"/>
-          <p:cNvSpPr txBox="1"/>
-          <p:nvPr/>
-        </p:nvSpPr>
-        <p:spPr>
-          <a:xfrm>
-            <a:off x="1371600" y="2057400"/>
-            <a:ext cx="3108960" cy="457200"/>
-          </a:xfrm>
-          <a:prstGeom prst="rect">
-            <a:avLst/>
-          </a:prstGeom>
-          <a:noFill/>
-          <a:ln/>
-        </p:spPr>
-        <p:txBody>
-          <a:bodyPr wrap="square" lIns="0" tIns="0" rIns="0" bIns="0" rtlCol="0" anchor="t"/>
-          <a:lstStyle/>
-          <a:p>
-            <a:pPr indent="0" marL="0">
-              <a:buNone/>
-            </a:pPr>
-            <a:r>
-              <a:rPr lang="en-US" sz="2200" b="1" dirty="0">
+              <a:spcAft>
+                <a:spcPts val="600"/>
+              </a:spcAft>
+              <a:buNone/>
+            </a:pPr>
+            <a:r>
+              <a:rPr lang="en-US" sz="1600" b="1" dirty="0">
                 <a:solidFill>
                   <a:srgbClr val="1A1A1A"/>
                 </a:solidFill>
@@ -5839,104 +6301,36 @@
                 <a:ea typeface="Calibri" pitchFamily="34" charset="-122"/>
                 <a:cs typeface="Calibri" pitchFamily="34" charset="-120"/>
               </a:rPr>
-              <a:t>Exageración</a:t>
-            </a:r>
-            <a:endParaRPr lang="en-US" sz="2200" dirty="0"/>
-          </a:p>
-        </p:txBody>
-      </p:sp>
-      <p:sp>
-        <p:nvSpPr>
-          <p:cNvPr id="7" name="Text 4"/>
-          <p:cNvSpPr txBox="1"/>
-          <p:nvPr/>
-        </p:nvSpPr>
-        <p:spPr>
-          <a:xfrm>
-            <a:off x="1371600" y="2560320"/>
-            <a:ext cx="3291840" cy="731520"/>
-          </a:xfrm>
-          <a:prstGeom prst="rect">
-            <a:avLst/>
-          </a:prstGeom>
-          <a:noFill/>
-          <a:ln/>
-        </p:spPr>
-        <p:txBody>
-          <a:bodyPr wrap="square" lIns="0" tIns="0" rIns="0" bIns="0" rtlCol="0" anchor="t"/>
-          <a:lstStyle/>
-          <a:p>
-            <a:pPr indent="0" marL="0">
-              <a:buNone/>
-            </a:pPr>
-            <a:r>
-              <a:rPr lang="en-US" sz="1400" dirty="0">
-                <a:solidFill>
-                  <a:srgbClr val="6B6B6B"/>
+              <a:t>Termómetro: </a:t>
+            </a:r>
+            <a:pPr indent="0" marL="0">
+              <a:spcAft>
+                <a:spcPts val="600"/>
+              </a:spcAft>
+              <a:buNone/>
+            </a:pPr>
+            <a:r>
+              <a:rPr lang="en-US" sz="1600" dirty="0">
+                <a:solidFill>
+                  <a:srgbClr val="1A1A1A"/>
                 </a:solidFill>
                 <a:latin typeface="Calibri" pitchFamily="34" charset="0"/>
                 <a:ea typeface="Calibri" pitchFamily="34" charset="-122"/>
                 <a:cs typeface="Calibri" pitchFamily="34" charset="-120"/>
               </a:rPr>
-              <a:t>El título es negativo y la bajada del propio medio no lo es.</a:t>
-            </a:r>
-            <a:endParaRPr lang="en-US" sz="1400" dirty="0"/>
-          </a:p>
-        </p:txBody>
-      </p:sp>
-      <p:sp>
-        <p:nvSpPr>
-          <p:cNvPr id="8" name="ejemplo-0"/>
-          <p:cNvSpPr/>
-          <p:nvPr/>
-        </p:nvSpPr>
-        <p:spPr>
-          <a:xfrm>
-            <a:off x="4937760" y="2011680"/>
-            <a:ext cx="6702552" cy="1143000"/>
-          </a:xfrm>
-          <a:prstGeom prst="roundRect">
-            <a:avLst>
-              <a:gd name="adj" fmla="val 6400"/>
-            </a:avLst>
-          </a:prstGeom>
-          <a:solidFill>
-            <a:srgbClr val="F2F2F0"/>
-          </a:solidFill>
-          <a:ln w="12700">
-            <a:solidFill>
-              <a:srgbClr val="F2F2F0"/>
-            </a:solidFill>
-            <a:prstDash val="solid"/>
-          </a:ln>
-        </p:spPr>
-      </p:sp>
-      <p:sp>
-        <p:nvSpPr>
-          <p:cNvPr id="9" name="Text 6"/>
-          <p:cNvSpPr txBox="1"/>
-          <p:nvPr/>
-        </p:nvSpPr>
-        <p:spPr>
-          <a:xfrm>
-            <a:off x="5212080" y="2148840"/>
-            <a:ext cx="6217920" cy="868680"/>
-          </a:xfrm>
-          <a:prstGeom prst="rect">
-            <a:avLst/>
-          </a:prstGeom>
-          <a:noFill/>
-          <a:ln/>
-        </p:spPr>
-        <p:txBody>
-          <a:bodyPr wrap="square" lIns="0" tIns="0" rIns="0" bIns="0" rtlCol="0" anchor="ctr"/>
-          <a:lstStyle/>
-          <a:p>
-            <a:pPr indent="0" marL="0">
-              <a:buNone/>
-            </a:pPr>
-            <a:r>
-              <a:rPr lang="en-US" sz="1600" i="1" dirty="0">
+              <a:t>% de notas negativas de las últimas 24 h (calmo, moderado, tenso, muy tenso).</a:t>
+            </a:r>
+            <a:endParaRPr lang="en-US" sz="1600" dirty="0"/>
+          </a:p>
+          <a:p>
+            <a:pPr indent="0" marL="0">
+              <a:spcAft>
+                <a:spcPts val="600"/>
+              </a:spcAft>
+              <a:buNone/>
+            </a:pPr>
+            <a:r>
+              <a:rPr lang="en-US" sz="1600" b="1" dirty="0">
                 <a:solidFill>
                   <a:srgbClr val="1A1A1A"/>
                 </a:solidFill>
@@ -5944,77 +6338,16 @@
                 <a:ea typeface="Calibri" pitchFamily="34" charset="-122"/>
                 <a:cs typeface="Calibri" pitchFamily="34" charset="-120"/>
               </a:rPr>
-              <a:t>"El dramático relato…" → bajada: datos del vuelo y los pasajeros</a:t>
-            </a:r>
-            <a:endParaRPr lang="en-US" sz="1600" dirty="0"/>
-          </a:p>
-        </p:txBody>
-      </p:sp>
-      <p:sp>
-        <p:nvSpPr>
-          <p:cNvPr id="10" name="Text 7"/>
-          <p:cNvSpPr txBox="1"/>
-          <p:nvPr/>
-        </p:nvSpPr>
-        <p:spPr>
-          <a:xfrm>
-            <a:off x="548640" y="3383280"/>
-            <a:ext cx="640080" cy="914400"/>
-          </a:xfrm>
-          <a:prstGeom prst="rect">
-            <a:avLst/>
-          </a:prstGeom>
-          <a:noFill/>
-          <a:ln/>
-        </p:spPr>
-        <p:txBody>
-          <a:bodyPr wrap="square" lIns="0" tIns="0" rIns="0" bIns="0" rtlCol="0" anchor="t"/>
-          <a:lstStyle/>
-          <a:p>
-            <a:pPr indent="0" marL="0">
-              <a:buNone/>
-            </a:pPr>
-            <a:r>
-              <a:rPr lang="en-US" sz="4800" b="1" dirty="0">
-                <a:solidFill>
-                  <a:srgbClr val="C8102E"/>
-                </a:solidFill>
-                <a:latin typeface="Cambria" pitchFamily="34" charset="0"/>
-                <a:ea typeface="Cambria" pitchFamily="34" charset="-122"/>
-                <a:cs typeface="Cambria" pitchFamily="34" charset="-120"/>
-              </a:rPr>
-              <a:t>2</a:t>
-            </a:r>
-            <a:endParaRPr lang="en-US" sz="4800" dirty="0"/>
-          </a:p>
-        </p:txBody>
-      </p:sp>
-      <p:sp>
-        <p:nvSpPr>
-          <p:cNvPr id="11" name="Text 8"/>
-          <p:cNvSpPr txBox="1"/>
-          <p:nvPr/>
-        </p:nvSpPr>
-        <p:spPr>
-          <a:xfrm>
-            <a:off x="1371600" y="3429000"/>
-            <a:ext cx="3108960" cy="457200"/>
-          </a:xfrm>
-          <a:prstGeom prst="rect">
-            <a:avLst/>
-          </a:prstGeom>
-          <a:noFill/>
-          <a:ln/>
-        </p:spPr>
-        <p:txBody>
-          <a:bodyPr wrap="square" lIns="0" tIns="0" rIns="0" bIns="0" rtlCol="0" anchor="t"/>
-          <a:lstStyle/>
-          <a:p>
-            <a:pPr indent="0" marL="0">
-              <a:buNone/>
-            </a:pPr>
-            <a:r>
-              <a:rPr lang="en-US" sz="2200" b="1" dirty="0">
+              <a:t>Resumen: </a:t>
+            </a:r>
+            <a:pPr indent="0" marL="0">
+              <a:spcAft>
+                <a:spcPts val="600"/>
+              </a:spcAft>
+              <a:buNone/>
+            </a:pPr>
+            <a:r>
+              <a:rPr lang="en-US" sz="1600" dirty="0">
                 <a:solidFill>
                   <a:srgbClr val="1A1A1A"/>
                 </a:solidFill>
@@ -6022,295 +6355,7 @@
                 <a:ea typeface="Calibri" pitchFamily="34" charset="-122"/>
                 <a:cs typeface="Calibri" pitchFamily="34" charset="-120"/>
               </a:rPr>
-              <a:t>Cebo (clickbait)</a:t>
-            </a:r>
-            <a:endParaRPr lang="en-US" sz="2200" dirty="0"/>
-          </a:p>
-        </p:txBody>
-      </p:sp>
-      <p:sp>
-        <p:nvSpPr>
-          <p:cNvPr id="12" name="Text 9"/>
-          <p:cNvSpPr txBox="1"/>
-          <p:nvPr/>
-        </p:nvSpPr>
-        <p:spPr>
-          <a:xfrm>
-            <a:off x="1371600" y="3931920"/>
-            <a:ext cx="3291840" cy="731520"/>
-          </a:xfrm>
-          <a:prstGeom prst="rect">
-            <a:avLst/>
-          </a:prstGeom>
-          <a:noFill/>
-          <a:ln/>
-        </p:spPr>
-        <p:txBody>
-          <a:bodyPr wrap="square" lIns="0" tIns="0" rIns="0" bIns="0" rtlCol="0" anchor="t"/>
-          <a:lstStyle/>
-          <a:p>
-            <a:pPr indent="0" marL="0">
-              <a:buNone/>
-            </a:pPr>
-            <a:r>
-              <a:rPr lang="en-US" sz="1400" dirty="0">
-                <a:solidFill>
-                  <a:srgbClr val="6B6B6B"/>
-                </a:solidFill>
-                <a:latin typeface="Calibri" pitchFamily="34" charset="0"/>
-                <a:ea typeface="Calibri" pitchFamily="34" charset="-122"/>
-                <a:cs typeface="Calibri" pitchFamily="34" charset="-120"/>
-              </a:rPr>
-              <a:t>Preguntas, exclamaciones, adjetivos exagerados, intriga, segunda persona, listas.</a:t>
-            </a:r>
-            <a:endParaRPr lang="en-US" sz="1400" dirty="0"/>
-          </a:p>
-        </p:txBody>
-      </p:sp>
-      <p:sp>
-        <p:nvSpPr>
-          <p:cNvPr id="13" name="ejemplo-1"/>
-          <p:cNvSpPr/>
-          <p:nvPr/>
-        </p:nvSpPr>
-        <p:spPr>
-          <a:xfrm>
-            <a:off x="4937760" y="3383280"/>
-            <a:ext cx="6702552" cy="1143000"/>
-          </a:xfrm>
-          <a:prstGeom prst="roundRect">
-            <a:avLst>
-              <a:gd name="adj" fmla="val 6400"/>
-            </a:avLst>
-          </a:prstGeom>
-          <a:solidFill>
-            <a:srgbClr val="F2F2F0"/>
-          </a:solidFill>
-          <a:ln w="12700">
-            <a:solidFill>
-              <a:srgbClr val="F2F2F0"/>
-            </a:solidFill>
-            <a:prstDash val="solid"/>
-          </a:ln>
-        </p:spPr>
-      </p:sp>
-      <p:sp>
-        <p:nvSpPr>
-          <p:cNvPr id="14" name="Text 11"/>
-          <p:cNvSpPr txBox="1"/>
-          <p:nvPr/>
-        </p:nvSpPr>
-        <p:spPr>
-          <a:xfrm>
-            <a:off x="5212080" y="3520440"/>
-            <a:ext cx="6217920" cy="868680"/>
-          </a:xfrm>
-          <a:prstGeom prst="rect">
-            <a:avLst/>
-          </a:prstGeom>
-          <a:noFill/>
-          <a:ln/>
-        </p:spPr>
-        <p:txBody>
-          <a:bodyPr wrap="square" lIns="0" tIns="0" rIns="0" bIns="0" rtlCol="0" anchor="ctr"/>
-          <a:lstStyle/>
-          <a:p>
-            <a:pPr indent="0" marL="0">
-              <a:buNone/>
-            </a:pPr>
-            <a:r>
-              <a:rPr lang="en-US" sz="1600" i="1" dirty="0">
-                <a:solidFill>
-                  <a:srgbClr val="1A1A1A"/>
-                </a:solidFill>
-                <a:latin typeface="Calibri" pitchFamily="34" charset="0"/>
-                <a:ea typeface="Calibri" pitchFamily="34" charset="-122"/>
-                <a:cs typeface="Calibri" pitchFamily="34" charset="-120"/>
-              </a:rPr>
-              <a:t>"¡Escándalo! Aseguran que…" · "El truco viral para…"</a:t>
-            </a:r>
-            <a:endParaRPr lang="en-US" sz="1600" dirty="0"/>
-          </a:p>
-        </p:txBody>
-      </p:sp>
-      <p:sp>
-        <p:nvSpPr>
-          <p:cNvPr id="15" name="Text 12"/>
-          <p:cNvSpPr txBox="1"/>
-          <p:nvPr/>
-        </p:nvSpPr>
-        <p:spPr>
-          <a:xfrm>
-            <a:off x="548640" y="4754880"/>
-            <a:ext cx="640080" cy="914400"/>
-          </a:xfrm>
-          <a:prstGeom prst="rect">
-            <a:avLst/>
-          </a:prstGeom>
-          <a:noFill/>
-          <a:ln/>
-        </p:spPr>
-        <p:txBody>
-          <a:bodyPr wrap="square" lIns="0" tIns="0" rIns="0" bIns="0" rtlCol="0" anchor="t"/>
-          <a:lstStyle/>
-          <a:p>
-            <a:pPr indent="0" marL="0">
-              <a:buNone/>
-            </a:pPr>
-            <a:r>
-              <a:rPr lang="en-US" sz="4800" b="1" dirty="0">
-                <a:solidFill>
-                  <a:srgbClr val="C8102E"/>
-                </a:solidFill>
-                <a:latin typeface="Cambria" pitchFamily="34" charset="0"/>
-                <a:ea typeface="Cambria" pitchFamily="34" charset="-122"/>
-                <a:cs typeface="Cambria" pitchFamily="34" charset="-120"/>
-              </a:rPr>
-              <a:t>3</a:t>
-            </a:r>
-            <a:endParaRPr lang="en-US" sz="4800" dirty="0"/>
-          </a:p>
-        </p:txBody>
-      </p:sp>
-      <p:sp>
-        <p:nvSpPr>
-          <p:cNvPr id="16" name="Text 13"/>
-          <p:cNvSpPr txBox="1"/>
-          <p:nvPr/>
-        </p:nvSpPr>
-        <p:spPr>
-          <a:xfrm>
-            <a:off x="1371600" y="4800600"/>
-            <a:ext cx="3108960" cy="457200"/>
-          </a:xfrm>
-          <a:prstGeom prst="rect">
-            <a:avLst/>
-          </a:prstGeom>
-          <a:noFill/>
-          <a:ln/>
-        </p:spPr>
-        <p:txBody>
-          <a:bodyPr wrap="square" lIns="0" tIns="0" rIns="0" bIns="0" rtlCol="0" anchor="t"/>
-          <a:lstStyle/>
-          <a:p>
-            <a:pPr indent="0" marL="0">
-              <a:buNone/>
-            </a:pPr>
-            <a:r>
-              <a:rPr lang="en-US" sz="2200" b="1" dirty="0">
-                <a:solidFill>
-                  <a:srgbClr val="1A1A1A"/>
-                </a:solidFill>
-                <a:latin typeface="Calibri" pitchFamily="34" charset="0"/>
-                <a:ea typeface="Calibri" pitchFamily="34" charset="-122"/>
-                <a:cs typeface="Calibri" pitchFamily="34" charset="-120"/>
-              </a:rPr>
-              <a:t>Transparencia</a:t>
-            </a:r>
-            <a:endParaRPr lang="en-US" sz="2200" dirty="0"/>
-          </a:p>
-        </p:txBody>
-      </p:sp>
-      <p:sp>
-        <p:nvSpPr>
-          <p:cNvPr id="17" name="Text 14"/>
-          <p:cNvSpPr txBox="1"/>
-          <p:nvPr/>
-        </p:nvSpPr>
-        <p:spPr>
-          <a:xfrm>
-            <a:off x="1371600" y="5303520"/>
-            <a:ext cx="3291840" cy="731520"/>
-          </a:xfrm>
-          <a:prstGeom prst="rect">
-            <a:avLst/>
-          </a:prstGeom>
-          <a:noFill/>
-          <a:ln/>
-        </p:spPr>
-        <p:txBody>
-          <a:bodyPr wrap="square" lIns="0" tIns="0" rIns="0" bIns="0" rtlCol="0" anchor="t"/>
-          <a:lstStyle/>
-          <a:p>
-            <a:pPr indent="0" marL="0">
-              <a:buNone/>
-            </a:pPr>
-            <a:r>
-              <a:rPr lang="en-US" sz="1400" dirty="0">
-                <a:solidFill>
-                  <a:srgbClr val="6B6B6B"/>
-                </a:solidFill>
-                <a:latin typeface="Calibri" pitchFamily="34" charset="0"/>
-                <a:ea typeface="Calibri" pitchFamily="34" charset="-122"/>
-                <a:cs typeface="Calibri" pitchFamily="34" charset="-120"/>
-              </a:rPr>
-              <a:t>Notas firmadas por un periodista, según los datos estructurados de la nota.</a:t>
-            </a:r>
-            <a:endParaRPr lang="en-US" sz="1400" dirty="0"/>
-          </a:p>
-        </p:txBody>
-      </p:sp>
-      <p:sp>
-        <p:nvSpPr>
-          <p:cNvPr id="18" name="ejemplo-2"/>
-          <p:cNvSpPr/>
-          <p:nvPr/>
-        </p:nvSpPr>
-        <p:spPr>
-          <a:xfrm>
-            <a:off x="4937760" y="4754880"/>
-            <a:ext cx="6702552" cy="1143000"/>
-          </a:xfrm>
-          <a:prstGeom prst="roundRect">
-            <a:avLst>
-              <a:gd name="adj" fmla="val 6400"/>
-            </a:avLst>
-          </a:prstGeom>
-          <a:solidFill>
-            <a:srgbClr val="F2F2F0"/>
-          </a:solidFill>
-          <a:ln w="12700">
-            <a:solidFill>
-              <a:srgbClr val="F2F2F0"/>
-            </a:solidFill>
-            <a:prstDash val="solid"/>
-          </a:ln>
-        </p:spPr>
-      </p:sp>
-      <p:sp>
-        <p:nvSpPr>
-          <p:cNvPr id="19" name="Text 16"/>
-          <p:cNvSpPr txBox="1"/>
-          <p:nvPr/>
-        </p:nvSpPr>
-        <p:spPr>
-          <a:xfrm>
-            <a:off x="5212080" y="4892040"/>
-            <a:ext cx="6217920" cy="868680"/>
-          </a:xfrm>
-          <a:prstGeom prst="rect">
-            <a:avLst/>
-          </a:prstGeom>
-          <a:noFill/>
-          <a:ln/>
-        </p:spPr>
-        <p:txBody>
-          <a:bodyPr wrap="square" lIns="0" tIns="0" rIns="0" bIns="0" rtlCol="0" anchor="ctr"/>
-          <a:lstStyle/>
-          <a:p>
-            <a:pPr indent="0" marL="0">
-              <a:buNone/>
-            </a:pPr>
-            <a:r>
-              <a:rPr lang="en-US" sz="1600" i="1" dirty="0">
-                <a:solidFill>
-                  <a:srgbClr val="1A1A1A"/>
-                </a:solidFill>
-                <a:latin typeface="Calibri" pitchFamily="34" charset="0"/>
-                <a:ea typeface="Calibri" pitchFamily="34" charset="-122"/>
-                <a:cs typeface="Calibri" pitchFamily="34" charset="-120"/>
-              </a:rPr>
-              <a:t>"Redacción" o el nombre del medio no cuentan como firma</a:t>
+              <a:t>redactado con plantillas a partir de los datos del día; sin modelo de lenguaje, reproducible.</a:t>
             </a:r>
             <a:endParaRPr lang="en-US" sz="1600" dirty="0"/>
           </a:p>
@@ -6418,7 +6463,7 @@
                   <a:schemeClr val="accent1"/>
                 </a:solidFill>
               </a:rPr>
-              <a:t>CEBO</a:t>
+              <a:t>CÓMO TITULA CADA MEDIO</a:t>
             </a:r>
             <a:endParaRPr lang="en-US" sz="1200" dirty="0"/>
           </a:p>
@@ -6459,42 +6504,143 @@
                 <a:ea typeface="Cambria" pitchFamily="34" charset="-122"/>
                 <a:cs typeface="Cambria" pitchFamily="34" charset="-120"/>
               </a:rPr>
-              <a:t>A24 y El Destape usan recursos de cebo en casi 1 de cada 5 títulos</a:t>
+              <a:t>Tres indicadores para medir el estilo, no solo el contenido</a:t>
             </a:r>
             <a:endParaRPr lang="en-US" sz="3200" dirty="0"/>
           </a:p>
         </p:txBody>
       </p:sp>
-      <p:graphicFrame>
-        <p:nvGraphicFramePr>
-          <p:cNvPr id="5" name="grafico" descr=""/>
-          <p:cNvGraphicFramePr/>
-          <p:nvPr/>
-        </p:nvGraphicFramePr>
-        <p:xfrm>
-          <a:off x="457200" y="1874520"/>
-          <a:ext cx="7132320" cy="4343400"/>
-        </p:xfrm>
-        <a:graphic xmlns:a="http://schemas.openxmlformats.org/drawingml/2006/main">
-          <a:graphicData uri="http://schemas.openxmlformats.org/drawingml/2006/chart">
-            <c:chart xmlns:c="http://schemas.openxmlformats.org/drawingml/2006/chart" r:id="rId1"/>
-          </a:graphicData>
-        </a:graphic>
-      </p:graphicFrame>
-      <p:sp>
-        <p:nvSpPr>
-          <p:cNvPr id="6" name="extremo"/>
+      <p:sp>
+        <p:nvSpPr>
+          <p:cNvPr id="5" name="Text 2"/>
+          <p:cNvSpPr txBox="1"/>
+          <p:nvPr/>
+        </p:nvSpPr>
+        <p:spPr>
+          <a:xfrm>
+            <a:off x="548640" y="2011680"/>
+            <a:ext cx="640080" cy="914400"/>
+          </a:xfrm>
+          <a:prstGeom prst="rect">
+            <a:avLst/>
+          </a:prstGeom>
+          <a:noFill/>
+          <a:ln/>
+        </p:spPr>
+        <p:txBody>
+          <a:bodyPr wrap="square" lIns="0" tIns="0" rIns="0" bIns="0" rtlCol="0" anchor="t"/>
+          <a:lstStyle/>
+          <a:p>
+            <a:pPr indent="0" marL="0">
+              <a:buNone/>
+            </a:pPr>
+            <a:r>
+              <a:rPr lang="en-US" sz="4800" b="1" dirty="0">
+                <a:solidFill>
+                  <a:srgbClr val="C8102E"/>
+                </a:solidFill>
+                <a:latin typeface="Cambria" pitchFamily="34" charset="0"/>
+                <a:ea typeface="Cambria" pitchFamily="34" charset="-122"/>
+                <a:cs typeface="Cambria" pitchFamily="34" charset="-120"/>
+              </a:rPr>
+              <a:t>1</a:t>
+            </a:r>
+            <a:endParaRPr lang="en-US" sz="4800" dirty="0"/>
+          </a:p>
+        </p:txBody>
+      </p:sp>
+      <p:sp>
+        <p:nvSpPr>
+          <p:cNvPr id="6" name="Text 3"/>
+          <p:cNvSpPr txBox="1"/>
+          <p:nvPr/>
+        </p:nvSpPr>
+        <p:spPr>
+          <a:xfrm>
+            <a:off x="1371600" y="2057400"/>
+            <a:ext cx="3108960" cy="457200"/>
+          </a:xfrm>
+          <a:prstGeom prst="rect">
+            <a:avLst/>
+          </a:prstGeom>
+          <a:noFill/>
+          <a:ln/>
+        </p:spPr>
+        <p:txBody>
+          <a:bodyPr wrap="square" lIns="0" tIns="0" rIns="0" bIns="0" rtlCol="0" anchor="t"/>
+          <a:lstStyle/>
+          <a:p>
+            <a:pPr indent="0" marL="0">
+              <a:buNone/>
+            </a:pPr>
+            <a:r>
+              <a:rPr lang="en-US" sz="2200" b="1" dirty="0">
+                <a:solidFill>
+                  <a:srgbClr val="1A1A1A"/>
+                </a:solidFill>
+                <a:latin typeface="Calibri" pitchFamily="34" charset="0"/>
+                <a:ea typeface="Calibri" pitchFamily="34" charset="-122"/>
+                <a:cs typeface="Calibri" pitchFamily="34" charset="-120"/>
+              </a:rPr>
+              <a:t>Exageración</a:t>
+            </a:r>
+            <a:endParaRPr lang="en-US" sz="2200" dirty="0"/>
+          </a:p>
+        </p:txBody>
+      </p:sp>
+      <p:sp>
+        <p:nvSpPr>
+          <p:cNvPr id="7" name="Text 4"/>
+          <p:cNvSpPr txBox="1"/>
+          <p:nvPr/>
+        </p:nvSpPr>
+        <p:spPr>
+          <a:xfrm>
+            <a:off x="1371600" y="2560320"/>
+            <a:ext cx="3291840" cy="731520"/>
+          </a:xfrm>
+          <a:prstGeom prst="rect">
+            <a:avLst/>
+          </a:prstGeom>
+          <a:noFill/>
+          <a:ln/>
+        </p:spPr>
+        <p:txBody>
+          <a:bodyPr wrap="square" lIns="0" tIns="0" rIns="0" bIns="0" rtlCol="0" anchor="t"/>
+          <a:lstStyle/>
+          <a:p>
+            <a:pPr indent="0" marL="0">
+              <a:buNone/>
+            </a:pPr>
+            <a:r>
+              <a:rPr lang="en-US" sz="1400" dirty="0">
+                <a:solidFill>
+                  <a:srgbClr val="6B6B6B"/>
+                </a:solidFill>
+                <a:latin typeface="Calibri" pitchFamily="34" charset="0"/>
+                <a:ea typeface="Calibri" pitchFamily="34" charset="-122"/>
+                <a:cs typeface="Calibri" pitchFamily="34" charset="-120"/>
+              </a:rPr>
+              <a:t>El título es negativo y la bajada del propio medio no lo es.</a:t>
+            </a:r>
+            <a:endParaRPr lang="en-US" sz="1400" dirty="0"/>
+          </a:p>
+        </p:txBody>
+      </p:sp>
+      <p:sp>
+        <p:nvSpPr>
+          <p:cNvPr id="8" name="ejemplo-0"/>
           <p:cNvSpPr/>
           <p:nvPr/>
         </p:nvSpPr>
         <p:spPr>
           <a:xfrm>
-            <a:off x="8046720" y="2011680"/>
-            <a:ext cx="3593592" cy="3931920"/>
+            <a:off x="4937760" y="2011680"/>
+            <a:ext cx="6702552" cy="1143000"/>
           </a:xfrm>
           <a:prstGeom prst="roundRect">
             <a:avLst>
-              <a:gd name="adj" fmla="val 2036"/>
+              <a:gd name="adj" fmla="val 6400"/>
             </a:avLst>
           </a:prstGeom>
           <a:solidFill>
@@ -6510,30 +6656,30 @@
       </p:sp>
       <p:sp>
         <p:nvSpPr>
-          <p:cNvPr id="7" name="Text 3"/>
+          <p:cNvPr id="9" name="Text 6"/>
           <p:cNvSpPr txBox="1"/>
           <p:nvPr/>
         </p:nvSpPr>
         <p:spPr>
           <a:xfrm>
-            <a:off x="8321040" y="2240280"/>
-            <a:ext cx="3108960" cy="411480"/>
-          </a:xfrm>
-          <a:prstGeom prst="rect">
-            <a:avLst/>
-          </a:prstGeom>
-          <a:noFill/>
-          <a:ln/>
-        </p:spPr>
-        <p:txBody>
-          <a:bodyPr wrap="square" lIns="0" tIns="0" rIns="0" bIns="0" rtlCol="0" anchor="t"/>
-          <a:lstStyle/>
-          <a:p>
-            <a:pPr indent="0" marL="0">
-              <a:buNone/>
-            </a:pPr>
-            <a:r>
-              <a:rPr lang="en-US" sz="1800" b="1" dirty="0">
+            <a:off x="5212080" y="2148840"/>
+            <a:ext cx="6217920" cy="868680"/>
+          </a:xfrm>
+          <a:prstGeom prst="rect">
+            <a:avLst/>
+          </a:prstGeom>
+          <a:noFill/>
+          <a:ln/>
+        </p:spPr>
+        <p:txBody>
+          <a:bodyPr wrap="square" lIns="0" tIns="0" rIns="0" bIns="0" rtlCol="0" anchor="ctr"/>
+          <a:lstStyle/>
+          <a:p>
+            <a:pPr indent="0" marL="0">
+              <a:buNone/>
+            </a:pPr>
+            <a:r>
+              <a:rPr lang="en-US" sz="1600" i="1" dirty="0">
                 <a:solidFill>
                   <a:srgbClr val="1A1A1A"/>
                 </a:solidFill>
@@ -6541,22 +6687,22 @@
                 <a:ea typeface="Calibri" pitchFamily="34" charset="-122"/>
                 <a:cs typeface="Calibri" pitchFamily="34" charset="-120"/>
               </a:rPr>
-              <a:t>En el otro extremo</a:t>
-            </a:r>
-            <a:endParaRPr lang="en-US" sz="1800" dirty="0"/>
-          </a:p>
-        </p:txBody>
-      </p:sp>
-      <p:sp>
-        <p:nvSpPr>
-          <p:cNvPr id="8" name="Text 4"/>
+              <a:t>"El dramático relato…" → bajada: datos del vuelo y los pasajeros</a:t>
+            </a:r>
+            <a:endParaRPr lang="en-US" sz="1600" dirty="0"/>
+          </a:p>
+        </p:txBody>
+      </p:sp>
+      <p:sp>
+        <p:nvSpPr>
+          <p:cNvPr id="10" name="Text 7"/>
           <p:cNvSpPr txBox="1"/>
           <p:nvPr/>
         </p:nvSpPr>
         <p:spPr>
           <a:xfrm>
-            <a:off x="8321040" y="2788920"/>
-            <a:ext cx="3108960" cy="1828800"/>
+            <a:off x="548640" y="3383280"/>
+            <a:ext cx="640080" cy="914400"/>
           </a:xfrm>
           <a:prstGeom prst="rect">
             <a:avLst/>
@@ -6568,15 +6714,50 @@
           <a:bodyPr wrap="square" lIns="0" tIns="0" rIns="0" bIns="0" rtlCol="0" anchor="t"/>
           <a:lstStyle/>
           <a:p>
-            <a:pPr marL="342900" indent="-342900">
-              <a:spcAft>
-                <a:spcPts val="800"/>
-              </a:spcAft>
-              <a:buSzPct val="100000"/>
-              <a:buChar char="•"/>
-            </a:pPr>
-            <a:r>
-              <a:rPr lang="en-US" sz="1600" dirty="0">
+            <a:pPr indent="0" marL="0">
+              <a:buNone/>
+            </a:pPr>
+            <a:r>
+              <a:rPr lang="en-US" sz="4800" b="1" dirty="0">
+                <a:solidFill>
+                  <a:srgbClr val="C8102E"/>
+                </a:solidFill>
+                <a:latin typeface="Cambria" pitchFamily="34" charset="0"/>
+                <a:ea typeface="Cambria" pitchFamily="34" charset="-122"/>
+                <a:cs typeface="Cambria" pitchFamily="34" charset="-120"/>
+              </a:rPr>
+              <a:t>2</a:t>
+            </a:r>
+            <a:endParaRPr lang="en-US" sz="4800" dirty="0"/>
+          </a:p>
+        </p:txBody>
+      </p:sp>
+      <p:sp>
+        <p:nvSpPr>
+          <p:cNvPr id="11" name="Text 8"/>
+          <p:cNvSpPr txBox="1"/>
+          <p:nvPr/>
+        </p:nvSpPr>
+        <p:spPr>
+          <a:xfrm>
+            <a:off x="1371600" y="3429000"/>
+            <a:ext cx="3108960" cy="457200"/>
+          </a:xfrm>
+          <a:prstGeom prst="rect">
+            <a:avLst/>
+          </a:prstGeom>
+          <a:noFill/>
+          <a:ln/>
+        </p:spPr>
+        <p:txBody>
+          <a:bodyPr wrap="square" lIns="0" tIns="0" rIns="0" bIns="0" rtlCol="0" anchor="t"/>
+          <a:lstStyle/>
+          <a:p>
+            <a:pPr indent="0" marL="0">
+              <a:buNone/>
+            </a:pPr>
+            <a:r>
+              <a:rPr lang="en-US" sz="2200" b="1" dirty="0">
                 <a:solidFill>
                   <a:srgbClr val="1A1A1A"/>
                 </a:solidFill>
@@ -6584,41 +6765,104 @@
                 <a:ea typeface="Calibri" pitchFamily="34" charset="-122"/>
                 <a:cs typeface="Calibri" pitchFamily="34" charset="-120"/>
               </a:rPr>
-              <a:t>Perfil: 1,6%</a:t>
-            </a:r>
-            <a:endParaRPr lang="en-US" sz="1600" dirty="0"/>
-          </a:p>
-          <a:p>
-            <a:pPr marL="342900" indent="-342900">
-              <a:spcAft>
-                <a:spcPts val="800"/>
-              </a:spcAft>
-              <a:buSzPct val="100000"/>
-              <a:buChar char="•"/>
-            </a:pPr>
-            <a:r>
-              <a:rPr lang="en-US" sz="1600" dirty="0">
-                <a:solidFill>
-                  <a:srgbClr val="1A1A1A"/>
+              <a:t>Cebo (clickbait)</a:t>
+            </a:r>
+            <a:endParaRPr lang="en-US" sz="2200" dirty="0"/>
+          </a:p>
+        </p:txBody>
+      </p:sp>
+      <p:sp>
+        <p:nvSpPr>
+          <p:cNvPr id="12" name="Text 9"/>
+          <p:cNvSpPr txBox="1"/>
+          <p:nvPr/>
+        </p:nvSpPr>
+        <p:spPr>
+          <a:xfrm>
+            <a:off x="1371600" y="3931920"/>
+            <a:ext cx="3291840" cy="731520"/>
+          </a:xfrm>
+          <a:prstGeom prst="rect">
+            <a:avLst/>
+          </a:prstGeom>
+          <a:noFill/>
+          <a:ln/>
+        </p:spPr>
+        <p:txBody>
+          <a:bodyPr wrap="square" lIns="0" tIns="0" rIns="0" bIns="0" rtlCol="0" anchor="t"/>
+          <a:lstStyle/>
+          <a:p>
+            <a:pPr indent="0" marL="0">
+              <a:buNone/>
+            </a:pPr>
+            <a:r>
+              <a:rPr lang="en-US" sz="1400" dirty="0">
+                <a:solidFill>
+                  <a:srgbClr val="6B6B6B"/>
                 </a:solidFill>
                 <a:latin typeface="Calibri" pitchFamily="34" charset="0"/>
                 <a:ea typeface="Calibri" pitchFamily="34" charset="-122"/>
                 <a:cs typeface="Calibri" pitchFamily="34" charset="-120"/>
               </a:rPr>
-              <a:t>El Chubut: 1,8%</a:t>
-            </a:r>
-            <a:endParaRPr lang="en-US" sz="1600" dirty="0"/>
-          </a:p>
-          <a:p>
-            <a:pPr marL="342900" indent="-342900">
-              <a:spcAft>
-                <a:spcPts val="800"/>
-              </a:spcAft>
-              <a:buSzPct val="100000"/>
-              <a:buChar char="•"/>
-            </a:pPr>
-            <a:r>
-              <a:rPr lang="en-US" sz="1600" dirty="0">
+              <a:t>Preguntas, exclamaciones, adjetivos exagerados, intriga, segunda persona, listas.</a:t>
+            </a:r>
+            <a:endParaRPr lang="en-US" sz="1400" dirty="0"/>
+          </a:p>
+        </p:txBody>
+      </p:sp>
+      <p:sp>
+        <p:nvSpPr>
+          <p:cNvPr id="13" name="ejemplo-1"/>
+          <p:cNvSpPr/>
+          <p:nvPr/>
+        </p:nvSpPr>
+        <p:spPr>
+          <a:xfrm>
+            <a:off x="4937760" y="3383280"/>
+            <a:ext cx="6702552" cy="1143000"/>
+          </a:xfrm>
+          <a:prstGeom prst="roundRect">
+            <a:avLst>
+              <a:gd name="adj" fmla="val 6400"/>
+            </a:avLst>
+          </a:prstGeom>
+          <a:solidFill>
+            <a:srgbClr val="F2F2F0"/>
+          </a:solidFill>
+          <a:ln w="12700">
+            <a:solidFill>
+              <a:srgbClr val="F2F2F0"/>
+            </a:solidFill>
+            <a:prstDash val="solid"/>
+          </a:ln>
+        </p:spPr>
+      </p:sp>
+      <p:sp>
+        <p:nvSpPr>
+          <p:cNvPr id="14" name="Text 11"/>
+          <p:cNvSpPr txBox="1"/>
+          <p:nvPr/>
+        </p:nvSpPr>
+        <p:spPr>
+          <a:xfrm>
+            <a:off x="5212080" y="3520440"/>
+            <a:ext cx="6217920" cy="868680"/>
+          </a:xfrm>
+          <a:prstGeom prst="rect">
+            <a:avLst/>
+          </a:prstGeom>
+          <a:noFill/>
+          <a:ln/>
+        </p:spPr>
+        <p:txBody>
+          <a:bodyPr wrap="square" lIns="0" tIns="0" rIns="0" bIns="0" rtlCol="0" anchor="ctr"/>
+          <a:lstStyle/>
+          <a:p>
+            <a:pPr indent="0" marL="0">
+              <a:buNone/>
+            </a:pPr>
+            <a:r>
+              <a:rPr lang="en-US" sz="1600" i="1" dirty="0">
                 <a:solidFill>
                   <a:srgbClr val="1A1A1A"/>
                 </a:solidFill>
@@ -6626,20 +6870,77 @@
                 <a:ea typeface="Calibri" pitchFamily="34" charset="-122"/>
                 <a:cs typeface="Calibri" pitchFamily="34" charset="-120"/>
               </a:rPr>
-              <a:t>Rosario Nuestro: 2,4%</a:t>
+              <a:t>"¡Escándalo! Aseguran que…" · "El truco viral para…"</a:t>
             </a:r>
             <a:endParaRPr lang="en-US" sz="1600" dirty="0"/>
           </a:p>
-          <a:p>
-            <a:pPr marL="342900" indent="-342900">
-              <a:spcAft>
-                <a:spcPts val="800"/>
-              </a:spcAft>
-              <a:buSzPct val="100000"/>
-              <a:buChar char="•"/>
-            </a:pPr>
-            <a:r>
-              <a:rPr lang="en-US" sz="1600" dirty="0">
+        </p:txBody>
+      </p:sp>
+      <p:sp>
+        <p:nvSpPr>
+          <p:cNvPr id="15" name="Text 12"/>
+          <p:cNvSpPr txBox="1"/>
+          <p:nvPr/>
+        </p:nvSpPr>
+        <p:spPr>
+          <a:xfrm>
+            <a:off x="548640" y="4754880"/>
+            <a:ext cx="640080" cy="914400"/>
+          </a:xfrm>
+          <a:prstGeom prst="rect">
+            <a:avLst/>
+          </a:prstGeom>
+          <a:noFill/>
+          <a:ln/>
+        </p:spPr>
+        <p:txBody>
+          <a:bodyPr wrap="square" lIns="0" tIns="0" rIns="0" bIns="0" rtlCol="0" anchor="t"/>
+          <a:lstStyle/>
+          <a:p>
+            <a:pPr indent="0" marL="0">
+              <a:buNone/>
+            </a:pPr>
+            <a:r>
+              <a:rPr lang="en-US" sz="4800" b="1" dirty="0">
+                <a:solidFill>
+                  <a:srgbClr val="C8102E"/>
+                </a:solidFill>
+                <a:latin typeface="Cambria" pitchFamily="34" charset="0"/>
+                <a:ea typeface="Cambria" pitchFamily="34" charset="-122"/>
+                <a:cs typeface="Cambria" pitchFamily="34" charset="-120"/>
+              </a:rPr>
+              <a:t>3</a:t>
+            </a:r>
+            <a:endParaRPr lang="en-US" sz="4800" dirty="0"/>
+          </a:p>
+        </p:txBody>
+      </p:sp>
+      <p:sp>
+        <p:nvSpPr>
+          <p:cNvPr id="16" name="Text 13"/>
+          <p:cNvSpPr txBox="1"/>
+          <p:nvPr/>
+        </p:nvSpPr>
+        <p:spPr>
+          <a:xfrm>
+            <a:off x="1371600" y="4800600"/>
+            <a:ext cx="3108960" cy="457200"/>
+          </a:xfrm>
+          <a:prstGeom prst="rect">
+            <a:avLst/>
+          </a:prstGeom>
+          <a:noFill/>
+          <a:ln/>
+        </p:spPr>
+        <p:txBody>
+          <a:bodyPr wrap="square" lIns="0" tIns="0" rIns="0" bIns="0" rtlCol="0" anchor="t"/>
+          <a:lstStyle/>
+          <a:p>
+            <a:pPr indent="0" marL="0">
+              <a:buNone/>
+            </a:pPr>
+            <a:r>
+              <a:rPr lang="en-US" sz="2200" b="1" dirty="0">
                 <a:solidFill>
                   <a:srgbClr val="1A1A1A"/>
                 </a:solidFill>
@@ -6647,22 +6948,22 @@
                 <a:ea typeface="Calibri" pitchFamily="34" charset="-122"/>
                 <a:cs typeface="Calibri" pitchFamily="34" charset="-120"/>
               </a:rPr>
-              <a:t>La Capital: 2,7%</a:t>
-            </a:r>
-            <a:endParaRPr lang="en-US" sz="1600" dirty="0"/>
-          </a:p>
-        </p:txBody>
-      </p:sp>
-      <p:sp>
-        <p:nvSpPr>
-          <p:cNvPr id="9" name="Text 5"/>
+              <a:t>Transparencia</a:t>
+            </a:r>
+            <a:endParaRPr lang="en-US" sz="2200" dirty="0"/>
+          </a:p>
+        </p:txBody>
+      </p:sp>
+      <p:sp>
+        <p:nvSpPr>
+          <p:cNvPr id="17" name="Text 14"/>
           <p:cNvSpPr txBox="1"/>
           <p:nvPr/>
         </p:nvSpPr>
         <p:spPr>
           <a:xfrm>
-            <a:off x="8321040" y="4846320"/>
-            <a:ext cx="3108960" cy="914400"/>
+            <a:off x="1371600" y="5303520"/>
+            <a:ext cx="3291840" cy="731520"/>
           </a:xfrm>
           <a:prstGeom prst="rect">
             <a:avLst/>
@@ -6678,7 +6979,7 @@
               <a:buNone/>
             </a:pPr>
             <a:r>
-              <a:rPr lang="en-US" sz="1200" dirty="0">
+              <a:rPr lang="en-US" sz="1400" dirty="0">
                 <a:solidFill>
                   <a:srgbClr val="6B6B6B"/>
                 </a:solidFill>
@@ -6686,9 +6987,75 @@
                 <a:ea typeface="Calibri" pitchFamily="34" charset="-122"/>
                 <a:cs typeface="Calibri" pitchFamily="34" charset="-120"/>
               </a:rPr>
-              <a:t>Porcentaje de títulos con al menos un recurso de cebo; medios con 40 notas o más.</a:t>
-            </a:r>
-            <a:endParaRPr lang="en-US" sz="1200" dirty="0"/>
+              <a:t>Notas firmadas por un periodista, según los datos estructurados de la nota.</a:t>
+            </a:r>
+            <a:endParaRPr lang="en-US" sz="1400" dirty="0"/>
+          </a:p>
+        </p:txBody>
+      </p:sp>
+      <p:sp>
+        <p:nvSpPr>
+          <p:cNvPr id="18" name="ejemplo-2"/>
+          <p:cNvSpPr/>
+          <p:nvPr/>
+        </p:nvSpPr>
+        <p:spPr>
+          <a:xfrm>
+            <a:off x="4937760" y="4754880"/>
+            <a:ext cx="6702552" cy="1143000"/>
+          </a:xfrm>
+          <a:prstGeom prst="roundRect">
+            <a:avLst>
+              <a:gd name="adj" fmla="val 6400"/>
+            </a:avLst>
+          </a:prstGeom>
+          <a:solidFill>
+            <a:srgbClr val="F2F2F0"/>
+          </a:solidFill>
+          <a:ln w="12700">
+            <a:solidFill>
+              <a:srgbClr val="F2F2F0"/>
+            </a:solidFill>
+            <a:prstDash val="solid"/>
+          </a:ln>
+        </p:spPr>
+      </p:sp>
+      <p:sp>
+        <p:nvSpPr>
+          <p:cNvPr id="19" name="Text 16"/>
+          <p:cNvSpPr txBox="1"/>
+          <p:nvPr/>
+        </p:nvSpPr>
+        <p:spPr>
+          <a:xfrm>
+            <a:off x="5212080" y="4892040"/>
+            <a:ext cx="6217920" cy="868680"/>
+          </a:xfrm>
+          <a:prstGeom prst="rect">
+            <a:avLst/>
+          </a:prstGeom>
+          <a:noFill/>
+          <a:ln/>
+        </p:spPr>
+        <p:txBody>
+          <a:bodyPr wrap="square" lIns="0" tIns="0" rIns="0" bIns="0" rtlCol="0" anchor="ctr"/>
+          <a:lstStyle/>
+          <a:p>
+            <a:pPr indent="0" marL="0">
+              <a:buNone/>
+            </a:pPr>
+            <a:r>
+              <a:rPr lang="en-US" sz="1600" i="1" dirty="0">
+                <a:solidFill>
+                  <a:srgbClr val="1A1A1A"/>
+                </a:solidFill>
+                <a:latin typeface="Calibri" pitchFamily="34" charset="0"/>
+                <a:ea typeface="Calibri" pitchFamily="34" charset="-122"/>
+                <a:cs typeface="Calibri" pitchFamily="34" charset="-120"/>
+              </a:rPr>
+              <a:t>"Redacción" o el nombre del medio no cuentan como firma</a:t>
+            </a:r>
+            <a:endParaRPr lang="en-US" sz="1600" dirty="0"/>
           </a:p>
         </p:txBody>
       </p:sp>
@@ -6794,7 +7161,7 @@
                   <a:schemeClr val="accent1"/>
                 </a:solidFill>
               </a:rPr>
-              <a:t>SENSACIONALISMO</a:t>
+              <a:t>CEBO</a:t>
             </a:r>
             <a:endParaRPr lang="en-US" sz="1200" dirty="0"/>
           </a:p>
@@ -6835,50 +7202,42 @@
                 <a:ea typeface="Cambria" pitchFamily="34" charset="-122"/>
                 <a:cs typeface="Cambria" pitchFamily="34" charset="-120"/>
               </a:rPr>
-              <a:t>El mapa: quién exagera y quién busca el clic</a:t>
+              <a:t>A24 y El Destape usan recursos de cebo en casi 1 de cada 5 títulos</a:t>
             </a:r>
             <a:endParaRPr lang="en-US" sz="3200" dirty="0"/>
           </a:p>
         </p:txBody>
       </p:sp>
-      <p:pic>
-        <p:nvPicPr>
-          <p:cNvPr id="5" name="mapa" descr="C:\Users\SBI\Documents\Martin Ceriotti Personales\Master Data Science\webmining\Web-Mining\docs\_fuentes\img\mapa-sensacionalismo.png">    </p:cNvPr>
-          <p:cNvPicPr>
-            <a:picLocks noChangeAspect="1"/>
-          </p:cNvPicPr>
-          <p:nvPr/>
-        </p:nvPicPr>
-        <p:blipFill>
-          <a:blip r:embed="rId1"/>
-          <a:stretch>
-            <a:fillRect/>
-          </a:stretch>
-        </p:blipFill>
-        <p:spPr>
-          <a:xfrm>
-            <a:off x="548640" y="1920240"/>
-            <a:ext cx="8229600" cy="3684181"/>
-          </a:xfrm>
-          <a:prstGeom prst="rect">
-            <a:avLst/>
-          </a:prstGeom>
-        </p:spPr>
-      </p:pic>
-      <p:sp>
-        <p:nvSpPr>
-          <p:cNvPr id="6" name="lectura"/>
+      <p:graphicFrame>
+        <p:nvGraphicFramePr>
+          <p:cNvPr id="5" name="grafico" descr=""/>
+          <p:cNvGraphicFramePr/>
+          <p:nvPr/>
+        </p:nvGraphicFramePr>
+        <p:xfrm>
+          <a:off x="457200" y="1874520"/>
+          <a:ext cx="7132320" cy="4343400"/>
+        </p:xfrm>
+        <a:graphic xmlns:a="http://schemas.openxmlformats.org/drawingml/2006/main">
+          <a:graphicData uri="http://schemas.openxmlformats.org/drawingml/2006/chart">
+            <c:chart xmlns:c="http://schemas.openxmlformats.org/drawingml/2006/chart" r:id="rId1"/>
+          </a:graphicData>
+        </a:graphic>
+      </p:graphicFrame>
+      <p:sp>
+        <p:nvSpPr>
+          <p:cNvPr id="6" name="extremo"/>
           <p:cNvSpPr/>
           <p:nvPr/>
         </p:nvSpPr>
         <p:spPr>
           <a:xfrm>
-            <a:off x="9052560" y="1920240"/>
-            <a:ext cx="2587752" cy="3657600"/>
+            <a:off x="8046720" y="2011680"/>
+            <a:ext cx="3593592" cy="3931920"/>
           </a:xfrm>
           <a:prstGeom prst="roundRect">
             <a:avLst>
-              <a:gd name="adj" fmla="val 2827"/>
+              <a:gd name="adj" fmla="val 2036"/>
             </a:avLst>
           </a:prstGeom>
           <a:solidFill>
@@ -6900,8 +7259,8 @@
         </p:nvSpPr>
         <p:spPr>
           <a:xfrm>
-            <a:off x="9281160" y="2148840"/>
-            <a:ext cx="2194560" cy="411480"/>
+            <a:off x="8321040" y="2240280"/>
+            <a:ext cx="3108960" cy="411480"/>
           </a:xfrm>
           <a:prstGeom prst="rect">
             <a:avLst/>
@@ -6917,7 +7276,7 @@
               <a:buNone/>
             </a:pPr>
             <a:r>
-              <a:rPr lang="en-US" sz="1700" b="1" dirty="0">
+              <a:rPr lang="en-US" sz="1800" b="1" dirty="0">
                 <a:solidFill>
                   <a:srgbClr val="1A1A1A"/>
                 </a:solidFill>
@@ -6925,9 +7284,9 @@
                 <a:ea typeface="Calibri" pitchFamily="34" charset="-122"/>
                 <a:cs typeface="Calibri" pitchFamily="34" charset="-120"/>
               </a:rPr>
-              <a:t>Cómo leerlo</a:t>
-            </a:r>
-            <a:endParaRPr lang="en-US" sz="1700" dirty="0"/>
+              <a:t>En el otro extremo</a:t>
+            </a:r>
+            <a:endParaRPr lang="en-US" sz="1800" dirty="0"/>
           </a:p>
         </p:txBody>
       </p:sp>
@@ -6939,8 +7298,8 @@
         </p:nvSpPr>
         <p:spPr>
           <a:xfrm>
-            <a:off x="9281160" y="2651760"/>
-            <a:ext cx="2194560" cy="2743200"/>
+            <a:off x="8321040" y="2788920"/>
+            <a:ext cx="3108960" cy="1828800"/>
           </a:xfrm>
           <a:prstGeom prst="rect">
             <a:avLst/>
@@ -6952,14 +7311,15 @@
           <a:bodyPr wrap="square" lIns="0" tIns="0" rIns="0" bIns="0" rtlCol="0" anchor="t"/>
           <a:lstStyle/>
           <a:p>
-            <a:pPr indent="0" marL="0">
+            <a:pPr marL="342900" indent="-342900">
               <a:spcAft>
-                <a:spcPts val="1000"/>
+                <a:spcPts val="800"/>
               </a:spcAft>
-              <a:buNone/>
-            </a:pPr>
-            <a:r>
-              <a:rPr lang="en-US" sz="1400" b="1" dirty="0">
+              <a:buSzPct val="100000"/>
+              <a:buChar char="•"/>
+            </a:pPr>
+            <a:r>
+              <a:rPr lang="en-US" sz="1600" dirty="0">
                 <a:solidFill>
                   <a:srgbClr val="1A1A1A"/>
                 </a:solidFill>
@@ -6967,16 +7327,20 @@
                 <a:ea typeface="Calibri" pitchFamily="34" charset="-122"/>
                 <a:cs typeface="Calibri" pitchFamily="34" charset="-120"/>
               </a:rPr>
-              <a:t>Arriba a la derecha: </a:t>
-            </a:r>
-            <a:pPr indent="0" marL="0">
+              <a:t>Perfil: 1,6%</a:t>
+            </a:r>
+            <a:endParaRPr lang="en-US" sz="1600" dirty="0"/>
+          </a:p>
+          <a:p>
+            <a:pPr marL="342900" indent="-342900">
               <a:spcAft>
-                <a:spcPts val="1000"/>
+                <a:spcPts val="800"/>
               </a:spcAft>
-              <a:buNone/>
-            </a:pPr>
-            <a:r>
-              <a:rPr lang="en-US" sz="1400" dirty="0">
+              <a:buSzPct val="100000"/>
+              <a:buChar char="•"/>
+            </a:pPr>
+            <a:r>
+              <a:rPr lang="en-US" sz="1600" dirty="0">
                 <a:solidFill>
                   <a:srgbClr val="1A1A1A"/>
                 </a:solidFill>
@@ -6984,19 +7348,20 @@
                 <a:ea typeface="Calibri" pitchFamily="34" charset="-122"/>
                 <a:cs typeface="Calibri" pitchFamily="34" charset="-120"/>
               </a:rPr>
-              <a:t>títulos con cebo que además exageran.</a:t>
-            </a:r>
-            <a:endParaRPr lang="en-US" sz="1400" dirty="0"/>
-          </a:p>
-          <a:p>
-            <a:pPr indent="0" marL="0">
+              <a:t>El Chubut: 1,8%</a:t>
+            </a:r>
+            <a:endParaRPr lang="en-US" sz="1600" dirty="0"/>
+          </a:p>
+          <a:p>
+            <a:pPr marL="342900" indent="-342900">
               <a:spcAft>
-                <a:spcPts val="1000"/>
+                <a:spcPts val="800"/>
               </a:spcAft>
-              <a:buNone/>
-            </a:pPr>
-            <a:r>
-              <a:rPr lang="en-US" sz="1400" b="1" dirty="0">
+              <a:buSzPct val="100000"/>
+              <a:buChar char="•"/>
+            </a:pPr>
+            <a:r>
+              <a:rPr lang="en-US" sz="1600" dirty="0">
                 <a:solidFill>
                   <a:srgbClr val="1A1A1A"/>
                 </a:solidFill>
@@ -7004,16 +7369,20 @@
                 <a:ea typeface="Calibri" pitchFamily="34" charset="-122"/>
                 <a:cs typeface="Calibri" pitchFamily="34" charset="-120"/>
               </a:rPr>
-              <a:t>Abajo a la izquierda: </a:t>
-            </a:r>
-            <a:pPr indent="0" marL="0">
+              <a:t>Rosario Nuestro: 2,4%</a:t>
+            </a:r>
+            <a:endParaRPr lang="en-US" sz="1600" dirty="0"/>
+          </a:p>
+          <a:p>
+            <a:pPr marL="342900" indent="-342900">
               <a:spcAft>
-                <a:spcPts val="1000"/>
+                <a:spcPts val="800"/>
               </a:spcAft>
-              <a:buNone/>
-            </a:pPr>
-            <a:r>
-              <a:rPr lang="en-US" sz="1400" dirty="0">
+              <a:buSzPct val="100000"/>
+              <a:buChar char="•"/>
+            </a:pPr>
+            <a:r>
+              <a:rPr lang="en-US" sz="1600" dirty="0">
                 <a:solidFill>
                   <a:srgbClr val="1A1A1A"/>
                 </a:solidFill>
@@ -7021,9 +7390,48 @@
                 <a:ea typeface="Calibri" pitchFamily="34" charset="-122"/>
                 <a:cs typeface="Calibri" pitchFamily="34" charset="-120"/>
               </a:rPr>
-              <a:t>títulos sobrios y fieles a su bajada.</a:t>
-            </a:r>
-            <a:endParaRPr lang="en-US" sz="1400" dirty="0"/>
+              <a:t>La Capital: 2,7%</a:t>
+            </a:r>
+            <a:endParaRPr lang="en-US" sz="1600" dirty="0"/>
+          </a:p>
+        </p:txBody>
+      </p:sp>
+      <p:sp>
+        <p:nvSpPr>
+          <p:cNvPr id="9" name="Text 5"/>
+          <p:cNvSpPr txBox="1"/>
+          <p:nvPr/>
+        </p:nvSpPr>
+        <p:spPr>
+          <a:xfrm>
+            <a:off x="8321040" y="4846320"/>
+            <a:ext cx="3108960" cy="914400"/>
+          </a:xfrm>
+          <a:prstGeom prst="rect">
+            <a:avLst/>
+          </a:prstGeom>
+          <a:noFill/>
+          <a:ln/>
+        </p:spPr>
+        <p:txBody>
+          <a:bodyPr wrap="square" lIns="0" tIns="0" rIns="0" bIns="0" rtlCol="0" anchor="t"/>
+          <a:lstStyle/>
+          <a:p>
+            <a:pPr indent="0" marL="0">
+              <a:buNone/>
+            </a:pPr>
+            <a:r>
+              <a:rPr lang="en-US" sz="1200" dirty="0">
+                <a:solidFill>
+                  <a:srgbClr val="6B6B6B"/>
+                </a:solidFill>
+                <a:latin typeface="Calibri" pitchFamily="34" charset="0"/>
+                <a:ea typeface="Calibri" pitchFamily="34" charset="-122"/>
+                <a:cs typeface="Calibri" pitchFamily="34" charset="-120"/>
+              </a:rPr>
+              <a:t>Porcentaje de títulos con al menos un recurso de cebo; medios con 40 notas o más.</a:t>
+            </a:r>
+            <a:endParaRPr lang="en-US" sz="1200" dirty="0"/>
           </a:p>
         </p:txBody>
       </p:sp>
@@ -7129,7 +7537,7 @@
                   <a:schemeClr val="accent1"/>
                 </a:solidFill>
               </a:rPr>
-              <a:t>TONO</a:t>
+              <a:t>SENSACIONALISMO</a:t>
             </a:r>
             <a:endParaRPr lang="en-US" sz="1200" dirty="0"/>
           </a:p>
@@ -7170,42 +7578,50 @@
                 <a:ea typeface="Cambria" pitchFamily="34" charset="-122"/>
                 <a:cs typeface="Cambria" pitchFamily="34" charset="-120"/>
               </a:rPr>
-              <a:t>En Diario Chaco, 1 de cada 2 notas es negativa; en El Chubut, 1 de cada 5</a:t>
+              <a:t>El mapa: quién exagera y quién busca el clic</a:t>
             </a:r>
             <a:endParaRPr lang="en-US" sz="3200" dirty="0"/>
           </a:p>
         </p:txBody>
       </p:sp>
-      <p:graphicFrame>
-        <p:nvGraphicFramePr>
-          <p:cNvPr id="5" name="grafico" descr=""/>
-          <p:cNvGraphicFramePr/>
-          <p:nvPr/>
-        </p:nvGraphicFramePr>
-        <p:xfrm>
-          <a:off x="457200" y="1874520"/>
-          <a:ext cx="7315200" cy="4343400"/>
-        </p:xfrm>
-        <a:graphic xmlns:a="http://schemas.openxmlformats.org/drawingml/2006/main">
-          <a:graphicData uri="http://schemas.openxmlformats.org/drawingml/2006/chart">
-            <c:chart xmlns:c="http://schemas.openxmlformats.org/drawingml/2006/chart" r:id="rId1"/>
-          </a:graphicData>
-        </a:graphic>
-      </p:graphicFrame>
-      <p:sp>
-        <p:nvSpPr>
-          <p:cNvPr id="6" name="tono-total"/>
+      <p:pic>
+        <p:nvPicPr>
+          <p:cNvPr id="5" name="mapa" descr="C:\Users\SBI\Documents\Martin Ceriotti Personales\Master Data Science\webmining\Web-Mining\docs\_fuentes\img\mapa-sensacionalismo.png">    </p:cNvPr>
+          <p:cNvPicPr>
+            <a:picLocks noChangeAspect="1"/>
+          </p:cNvPicPr>
+          <p:nvPr/>
+        </p:nvPicPr>
+        <p:blipFill>
+          <a:blip r:embed="rId1"/>
+          <a:stretch>
+            <a:fillRect/>
+          </a:stretch>
+        </p:blipFill>
+        <p:spPr>
+          <a:xfrm>
+            <a:off x="548640" y="1920240"/>
+            <a:ext cx="8229600" cy="3684181"/>
+          </a:xfrm>
+          <a:prstGeom prst="rect">
+            <a:avLst/>
+          </a:prstGeom>
+        </p:spPr>
+      </p:pic>
+      <p:sp>
+        <p:nvSpPr>
+          <p:cNvPr id="6" name="lectura"/>
           <p:cNvSpPr/>
           <p:nvPr/>
         </p:nvSpPr>
         <p:spPr>
           <a:xfrm>
-            <a:off x="8229600" y="2011680"/>
-            <a:ext cx="3410712" cy="3931920"/>
+            <a:off x="9052560" y="1920240"/>
+            <a:ext cx="2587752" cy="3657600"/>
           </a:xfrm>
           <a:prstGeom prst="roundRect">
             <a:avLst>
-              <a:gd name="adj" fmla="val 2145"/>
+              <a:gd name="adj" fmla="val 2827"/>
             </a:avLst>
           </a:prstGeom>
           <a:solidFill>
@@ -7227,8 +7643,8 @@
         </p:nvSpPr>
         <p:spPr>
           <a:xfrm>
-            <a:off x="8503920" y="2240280"/>
-            <a:ext cx="2926080" cy="411480"/>
+            <a:off x="9281160" y="2148840"/>
+            <a:ext cx="2194560" cy="411480"/>
           </a:xfrm>
           <a:prstGeom prst="rect">
             <a:avLst/>
@@ -7244,7 +7660,7 @@
               <a:buNone/>
             </a:pPr>
             <a:r>
-              <a:rPr lang="en-US" sz="1800" b="1" dirty="0">
+              <a:rPr lang="en-US" sz="1700" b="1" dirty="0">
                 <a:solidFill>
                   <a:srgbClr val="1A1A1A"/>
                 </a:solidFill>
@@ -7252,9 +7668,9 @@
                 <a:ea typeface="Calibri" pitchFamily="34" charset="-122"/>
                 <a:cs typeface="Calibri" pitchFamily="34" charset="-120"/>
               </a:rPr>
-              <a:t>En toda la base</a:t>
-            </a:r>
-            <a:endParaRPr lang="en-US" sz="1800" dirty="0"/>
+              <a:t>Cómo leerlo</a:t>
+            </a:r>
+            <a:endParaRPr lang="en-US" sz="1700" dirty="0"/>
           </a:p>
         </p:txBody>
       </p:sp>
@@ -7266,8 +7682,8 @@
         </p:nvSpPr>
         <p:spPr>
           <a:xfrm>
-            <a:off x="8503920" y="2788920"/>
-            <a:ext cx="1463040" cy="685800"/>
+            <a:off x="9281160" y="2651760"/>
+            <a:ext cx="2194560" cy="2743200"/>
           </a:xfrm>
           <a:prstGeom prst="rect">
             <a:avLst/>
@@ -7280,49 +7696,13 @@
           <a:lstStyle/>
           <a:p>
             <a:pPr indent="0" marL="0">
-              <a:buNone/>
-            </a:pPr>
-            <a:r>
-              <a:rPr lang="en-US" sz="3600" b="1" dirty="0">
-                <a:solidFill>
-                  <a:srgbClr val="C8102E"/>
-                </a:solidFill>
-                <a:latin typeface="Cambria" pitchFamily="34" charset="0"/>
-                <a:ea typeface="Cambria" pitchFamily="34" charset="-122"/>
-                <a:cs typeface="Cambria" pitchFamily="34" charset="-120"/>
-              </a:rPr>
-              <a:t>39%</a:t>
-            </a:r>
-            <a:endParaRPr lang="en-US" sz="3600" dirty="0"/>
-          </a:p>
-        </p:txBody>
-      </p:sp>
-      <p:sp>
-        <p:nvSpPr>
-          <p:cNvPr id="9" name="Text 5"/>
-          <p:cNvSpPr txBox="1"/>
-          <p:nvPr/>
-        </p:nvSpPr>
-        <p:spPr>
-          <a:xfrm>
-            <a:off x="10012680" y="2971800"/>
-            <a:ext cx="1463040" cy="411480"/>
-          </a:xfrm>
-          <a:prstGeom prst="rect">
-            <a:avLst/>
-          </a:prstGeom>
-          <a:noFill/>
-          <a:ln/>
-        </p:spPr>
-        <p:txBody>
-          <a:bodyPr wrap="square" lIns="0" tIns="0" rIns="0" bIns="0" rtlCol="0" anchor="t"/>
-          <a:lstStyle/>
-          <a:p>
-            <a:pPr indent="0" marL="0">
-              <a:buNone/>
-            </a:pPr>
-            <a:r>
-              <a:rPr lang="en-US" sz="1600" dirty="0">
+              <a:spcAft>
+                <a:spcPts val="1000"/>
+              </a:spcAft>
+              <a:buNone/>
+            </a:pPr>
+            <a:r>
+              <a:rPr lang="en-US" sz="1400" b="1" dirty="0">
                 <a:solidFill>
                   <a:srgbClr val="1A1A1A"/>
                 </a:solidFill>
@@ -7330,77 +7710,16 @@
                 <a:ea typeface="Calibri" pitchFamily="34" charset="-122"/>
                 <a:cs typeface="Calibri" pitchFamily="34" charset="-120"/>
               </a:rPr>
-              <a:t>Negativo</a:t>
-            </a:r>
-            <a:endParaRPr lang="en-US" sz="1600" dirty="0"/>
-          </a:p>
-        </p:txBody>
-      </p:sp>
-      <p:sp>
-        <p:nvSpPr>
-          <p:cNvPr id="10" name="Text 6"/>
-          <p:cNvSpPr txBox="1"/>
-          <p:nvPr/>
-        </p:nvSpPr>
-        <p:spPr>
-          <a:xfrm>
-            <a:off x="8503920" y="3749040"/>
-            <a:ext cx="1463040" cy="685800"/>
-          </a:xfrm>
-          <a:prstGeom prst="rect">
-            <a:avLst/>
-          </a:prstGeom>
-          <a:noFill/>
-          <a:ln/>
-        </p:spPr>
-        <p:txBody>
-          <a:bodyPr wrap="square" lIns="0" tIns="0" rIns="0" bIns="0" rtlCol="0" anchor="t"/>
-          <a:lstStyle/>
-          <a:p>
-            <a:pPr indent="0" marL="0">
-              <a:buNone/>
-            </a:pPr>
-            <a:r>
-              <a:rPr lang="en-US" sz="3600" b="1" dirty="0">
-                <a:solidFill>
-                  <a:srgbClr val="6B6B6B"/>
-                </a:solidFill>
-                <a:latin typeface="Cambria" pitchFamily="34" charset="0"/>
-                <a:ea typeface="Cambria" pitchFamily="34" charset="-122"/>
-                <a:cs typeface="Cambria" pitchFamily="34" charset="-120"/>
-              </a:rPr>
-              <a:t>49%</a:t>
-            </a:r>
-            <a:endParaRPr lang="en-US" sz="3600" dirty="0"/>
-          </a:p>
-        </p:txBody>
-      </p:sp>
-      <p:sp>
-        <p:nvSpPr>
-          <p:cNvPr id="11" name="Text 7"/>
-          <p:cNvSpPr txBox="1"/>
-          <p:nvPr/>
-        </p:nvSpPr>
-        <p:spPr>
-          <a:xfrm>
-            <a:off x="10012680" y="3931920"/>
-            <a:ext cx="1463040" cy="411480"/>
-          </a:xfrm>
-          <a:prstGeom prst="rect">
-            <a:avLst/>
-          </a:prstGeom>
-          <a:noFill/>
-          <a:ln/>
-        </p:spPr>
-        <p:txBody>
-          <a:bodyPr wrap="square" lIns="0" tIns="0" rIns="0" bIns="0" rtlCol="0" anchor="t"/>
-          <a:lstStyle/>
-          <a:p>
-            <a:pPr indent="0" marL="0">
-              <a:buNone/>
-            </a:pPr>
-            <a:r>
-              <a:rPr lang="en-US" sz="1600" dirty="0">
+              <a:t>Arriba a la derecha: </a:t>
+            </a:r>
+            <a:pPr indent="0" marL="0">
+              <a:spcAft>
+                <a:spcPts val="1000"/>
+              </a:spcAft>
+              <a:buNone/>
+            </a:pPr>
+            <a:r>
+              <a:rPr lang="en-US" sz="1400" dirty="0">
                 <a:solidFill>
                   <a:srgbClr val="1A1A1A"/>
                 </a:solidFill>
@@ -7408,77 +7727,19 @@
                 <a:ea typeface="Calibri" pitchFamily="34" charset="-122"/>
                 <a:cs typeface="Calibri" pitchFamily="34" charset="-120"/>
               </a:rPr>
-              <a:t>Neutro</a:t>
-            </a:r>
-            <a:endParaRPr lang="en-US" sz="1600" dirty="0"/>
-          </a:p>
-        </p:txBody>
-      </p:sp>
-      <p:sp>
-        <p:nvSpPr>
-          <p:cNvPr id="12" name="Text 8"/>
-          <p:cNvSpPr txBox="1"/>
-          <p:nvPr/>
-        </p:nvSpPr>
-        <p:spPr>
-          <a:xfrm>
-            <a:off x="8503920" y="4709160"/>
-            <a:ext cx="1463040" cy="685800"/>
-          </a:xfrm>
-          <a:prstGeom prst="rect">
-            <a:avLst/>
-          </a:prstGeom>
-          <a:noFill/>
-          <a:ln/>
-        </p:spPr>
-        <p:txBody>
-          <a:bodyPr wrap="square" lIns="0" tIns="0" rIns="0" bIns="0" rtlCol="0" anchor="t"/>
-          <a:lstStyle/>
-          <a:p>
-            <a:pPr indent="0" marL="0">
-              <a:buNone/>
-            </a:pPr>
-            <a:r>
-              <a:rPr lang="en-US" sz="3600" b="1" dirty="0">
-                <a:solidFill>
-                  <a:srgbClr val="3D8A5A"/>
-                </a:solidFill>
-                <a:latin typeface="Cambria" pitchFamily="34" charset="0"/>
-                <a:ea typeface="Cambria" pitchFamily="34" charset="-122"/>
-                <a:cs typeface="Cambria" pitchFamily="34" charset="-120"/>
-              </a:rPr>
-              <a:t>13%</a:t>
-            </a:r>
-            <a:endParaRPr lang="en-US" sz="3600" dirty="0"/>
-          </a:p>
-        </p:txBody>
-      </p:sp>
-      <p:sp>
-        <p:nvSpPr>
-          <p:cNvPr id="13" name="Text 9"/>
-          <p:cNvSpPr txBox="1"/>
-          <p:nvPr/>
-        </p:nvSpPr>
-        <p:spPr>
-          <a:xfrm>
-            <a:off x="10012680" y="4892040"/>
-            <a:ext cx="1463040" cy="411480"/>
-          </a:xfrm>
-          <a:prstGeom prst="rect">
-            <a:avLst/>
-          </a:prstGeom>
-          <a:noFill/>
-          <a:ln/>
-        </p:spPr>
-        <p:txBody>
-          <a:bodyPr wrap="square" lIns="0" tIns="0" rIns="0" bIns="0" rtlCol="0" anchor="t"/>
-          <a:lstStyle/>
-          <a:p>
-            <a:pPr indent="0" marL="0">
-              <a:buNone/>
-            </a:pPr>
-            <a:r>
-              <a:rPr lang="en-US" sz="1600" dirty="0">
+              <a:t>títulos con cebo que además exageran.</a:t>
+            </a:r>
+            <a:endParaRPr lang="en-US" sz="1400" dirty="0"/>
+          </a:p>
+          <a:p>
+            <a:pPr indent="0" marL="0">
+              <a:spcAft>
+                <a:spcPts val="1000"/>
+              </a:spcAft>
+              <a:buNone/>
+            </a:pPr>
+            <a:r>
+              <a:rPr lang="en-US" sz="1400" b="1" dirty="0">
                 <a:solidFill>
                   <a:srgbClr val="1A1A1A"/>
                 </a:solidFill>
@@ -7486,9 +7747,26 @@
                 <a:ea typeface="Calibri" pitchFamily="34" charset="-122"/>
                 <a:cs typeface="Calibri" pitchFamily="34" charset="-120"/>
               </a:rPr>
-              <a:t>Positivo</a:t>
-            </a:r>
-            <a:endParaRPr lang="en-US" sz="1600" dirty="0"/>
+              <a:t>Abajo a la izquierda: </a:t>
+            </a:r>
+            <a:pPr indent="0" marL="0">
+              <a:spcAft>
+                <a:spcPts val="1000"/>
+              </a:spcAft>
+              <a:buNone/>
+            </a:pPr>
+            <a:r>
+              <a:rPr lang="en-US" sz="1400" dirty="0">
+                <a:solidFill>
+                  <a:srgbClr val="1A1A1A"/>
+                </a:solidFill>
+                <a:latin typeface="Calibri" pitchFamily="34" charset="0"/>
+                <a:ea typeface="Calibri" pitchFamily="34" charset="-122"/>
+                <a:cs typeface="Calibri" pitchFamily="34" charset="-120"/>
+              </a:rPr>
+              <a:t>títulos sobrios y fieles a su bajada.</a:t>
+            </a:r>
+            <a:endParaRPr lang="en-US" sz="1400" dirty="0"/>
           </a:p>
         </p:txBody>
       </p:sp>
@@ -7594,7 +7872,7 @@
                   <a:schemeClr val="accent1"/>
                 </a:solidFill>
               </a:rPr>
-              <a:t>TRANSPARENCIA</a:t>
+              <a:t>TONO</a:t>
             </a:r>
             <a:endParaRPr lang="en-US" sz="1200" dirty="0"/>
           </a:p>
@@ -7635,7 +7913,7 @@
                 <a:ea typeface="Cambria" pitchFamily="34" charset="-122"/>
                 <a:cs typeface="Cambria" pitchFamily="34" charset="-120"/>
               </a:rPr>
-              <a:t>Perfil firma el 92% de sus notas; Radio Mitre y Rosario3, ninguna</a:t>
+              <a:t>En Diario Chaco, 1 de cada 2 notas es negativa; en El Chubut, 1 de cada 5</a:t>
             </a:r>
             <a:endParaRPr lang="en-US" sz="3200" dirty="0"/>
           </a:p>
@@ -7649,7 +7927,7 @@
         </p:nvGraphicFramePr>
         <p:xfrm>
           <a:off x="457200" y="1874520"/>
-          <a:ext cx="7132320" cy="4343400"/>
+          <a:ext cx="7315200" cy="4343400"/>
         </p:xfrm>
         <a:graphic xmlns:a="http://schemas.openxmlformats.org/drawingml/2006/main">
           <a:graphicData uri="http://schemas.openxmlformats.org/drawingml/2006/chart">
@@ -7659,18 +7937,18 @@
       </p:graphicFrame>
       <p:sp>
         <p:nvSpPr>
-          <p:cNvPr id="6" name="sin-firma"/>
+          <p:cNvPr id="6" name="tono-total"/>
           <p:cNvSpPr/>
           <p:nvPr/>
         </p:nvSpPr>
         <p:spPr>
           <a:xfrm>
-            <a:off x="8046720" y="2011680"/>
-            <a:ext cx="3593592" cy="3931920"/>
+            <a:off x="8229600" y="2011680"/>
+            <a:ext cx="3410712" cy="3931920"/>
           </a:xfrm>
           <a:prstGeom prst="roundRect">
             <a:avLst>
-              <a:gd name="adj" fmla="val 2036"/>
+              <a:gd name="adj" fmla="val 2145"/>
             </a:avLst>
           </a:prstGeom>
           <a:solidFill>
@@ -7692,8 +7970,8 @@
         </p:nvSpPr>
         <p:spPr>
           <a:xfrm>
-            <a:off x="8321040" y="2240280"/>
-            <a:ext cx="3108960" cy="411480"/>
+            <a:off x="8503920" y="2240280"/>
+            <a:ext cx="2926080" cy="411480"/>
           </a:xfrm>
           <a:prstGeom prst="rect">
             <a:avLst/>
@@ -7717,7 +7995,7 @@
                 <a:ea typeface="Calibri" pitchFamily="34" charset="-122"/>
                 <a:cs typeface="Calibri" pitchFamily="34" charset="-120"/>
               </a:rPr>
-              <a:t>Sin ninguna nota firmada</a:t>
+              <a:t>En toda la base</a:t>
             </a:r>
             <a:endParaRPr lang="en-US" sz="1800" dirty="0"/>
           </a:p>
@@ -7731,8 +8009,8 @@
         </p:nvSpPr>
         <p:spPr>
           <a:xfrm>
-            <a:off x="8321040" y="2788920"/>
-            <a:ext cx="3108960" cy="2926080"/>
+            <a:off x="8503920" y="2788920"/>
+            <a:ext cx="1463040" cy="685800"/>
           </a:xfrm>
           <a:prstGeom prst="rect">
             <a:avLst/>
@@ -7744,12 +8022,47 @@
           <a:bodyPr wrap="square" lIns="0" tIns="0" rIns="0" bIns="0" rtlCol="0" anchor="t"/>
           <a:lstStyle/>
           <a:p>
-            <a:pPr marL="342900" indent="-342900">
-              <a:spcAft>
-                <a:spcPts val="600"/>
-              </a:spcAft>
-              <a:buSzPct val="100000"/>
-              <a:buChar char="•"/>
+            <a:pPr indent="0" marL="0">
+              <a:buNone/>
+            </a:pPr>
+            <a:r>
+              <a:rPr lang="en-US" sz="3600" b="1" dirty="0">
+                <a:solidFill>
+                  <a:srgbClr val="C8102E"/>
+                </a:solidFill>
+                <a:latin typeface="Cambria" pitchFamily="34" charset="0"/>
+                <a:ea typeface="Cambria" pitchFamily="34" charset="-122"/>
+                <a:cs typeface="Cambria" pitchFamily="34" charset="-120"/>
+              </a:rPr>
+              <a:t>39%</a:t>
+            </a:r>
+            <a:endParaRPr lang="en-US" sz="3600" dirty="0"/>
+          </a:p>
+        </p:txBody>
+      </p:sp>
+      <p:sp>
+        <p:nvSpPr>
+          <p:cNvPr id="9" name="Text 5"/>
+          <p:cNvSpPr txBox="1"/>
+          <p:nvPr/>
+        </p:nvSpPr>
+        <p:spPr>
+          <a:xfrm>
+            <a:off x="10012680" y="2971800"/>
+            <a:ext cx="1463040" cy="411480"/>
+          </a:xfrm>
+          <a:prstGeom prst="rect">
+            <a:avLst/>
+          </a:prstGeom>
+          <a:noFill/>
+          <a:ln/>
+        </p:spPr>
+        <p:txBody>
+          <a:bodyPr wrap="square" lIns="0" tIns="0" rIns="0" bIns="0" rtlCol="0" anchor="t"/>
+          <a:lstStyle/>
+          <a:p>
+            <a:pPr indent="0" marL="0">
+              <a:buNone/>
             </a:pPr>
             <a:r>
               <a:rPr lang="en-US" sz="1600" dirty="0">
@@ -7760,17 +8073,74 @@
                 <a:ea typeface="Calibri" pitchFamily="34" charset="-122"/>
                 <a:cs typeface="Calibri" pitchFamily="34" charset="-120"/>
               </a:rPr>
-              <a:t>Elonce</a:t>
+              <a:t>Negativo</a:t>
             </a:r>
             <a:endParaRPr lang="en-US" sz="1600" dirty="0"/>
           </a:p>
-          <a:p>
-            <a:pPr marL="342900" indent="-342900">
-              <a:spcAft>
-                <a:spcPts val="600"/>
-              </a:spcAft>
-              <a:buSzPct val="100000"/>
-              <a:buChar char="•"/>
+        </p:txBody>
+      </p:sp>
+      <p:sp>
+        <p:nvSpPr>
+          <p:cNvPr id="10" name="Text 6"/>
+          <p:cNvSpPr txBox="1"/>
+          <p:nvPr/>
+        </p:nvSpPr>
+        <p:spPr>
+          <a:xfrm>
+            <a:off x="8503920" y="3749040"/>
+            <a:ext cx="1463040" cy="685800"/>
+          </a:xfrm>
+          <a:prstGeom prst="rect">
+            <a:avLst/>
+          </a:prstGeom>
+          <a:noFill/>
+          <a:ln/>
+        </p:spPr>
+        <p:txBody>
+          <a:bodyPr wrap="square" lIns="0" tIns="0" rIns="0" bIns="0" rtlCol="0" anchor="t"/>
+          <a:lstStyle/>
+          <a:p>
+            <a:pPr indent="0" marL="0">
+              <a:buNone/>
+            </a:pPr>
+            <a:r>
+              <a:rPr lang="en-US" sz="3600" b="1" dirty="0">
+                <a:solidFill>
+                  <a:srgbClr val="6B6B6B"/>
+                </a:solidFill>
+                <a:latin typeface="Cambria" pitchFamily="34" charset="0"/>
+                <a:ea typeface="Cambria" pitchFamily="34" charset="-122"/>
+                <a:cs typeface="Cambria" pitchFamily="34" charset="-120"/>
+              </a:rPr>
+              <a:t>49%</a:t>
+            </a:r>
+            <a:endParaRPr lang="en-US" sz="3600" dirty="0"/>
+          </a:p>
+        </p:txBody>
+      </p:sp>
+      <p:sp>
+        <p:nvSpPr>
+          <p:cNvPr id="11" name="Text 7"/>
+          <p:cNvSpPr txBox="1"/>
+          <p:nvPr/>
+        </p:nvSpPr>
+        <p:spPr>
+          <a:xfrm>
+            <a:off x="10012680" y="3931920"/>
+            <a:ext cx="1463040" cy="411480"/>
+          </a:xfrm>
+          <a:prstGeom prst="rect">
+            <a:avLst/>
+          </a:prstGeom>
+          <a:noFill/>
+          <a:ln/>
+        </p:spPr>
+        <p:txBody>
+          <a:bodyPr wrap="square" lIns="0" tIns="0" rIns="0" bIns="0" rtlCol="0" anchor="t"/>
+          <a:lstStyle/>
+          <a:p>
+            <a:pPr indent="0" marL="0">
+              <a:buNone/>
             </a:pPr>
             <a:r>
               <a:rPr lang="en-US" sz="1600" dirty="0">
@@ -7781,17 +8151,74 @@
                 <a:ea typeface="Calibri" pitchFamily="34" charset="-122"/>
                 <a:cs typeface="Calibri" pitchFamily="34" charset="-120"/>
               </a:rPr>
-              <a:t>La Capital (Mar del Plata)</a:t>
+              <a:t>Neutro</a:t>
             </a:r>
             <a:endParaRPr lang="en-US" sz="1600" dirty="0"/>
           </a:p>
-          <a:p>
-            <a:pPr marL="342900" indent="-342900">
-              <a:spcAft>
-                <a:spcPts val="600"/>
-              </a:spcAft>
-              <a:buSzPct val="100000"/>
-              <a:buChar char="•"/>
+        </p:txBody>
+      </p:sp>
+      <p:sp>
+        <p:nvSpPr>
+          <p:cNvPr id="12" name="Text 8"/>
+          <p:cNvSpPr txBox="1"/>
+          <p:nvPr/>
+        </p:nvSpPr>
+        <p:spPr>
+          <a:xfrm>
+            <a:off x="8503920" y="4709160"/>
+            <a:ext cx="1463040" cy="685800"/>
+          </a:xfrm>
+          <a:prstGeom prst="rect">
+            <a:avLst/>
+          </a:prstGeom>
+          <a:noFill/>
+          <a:ln/>
+        </p:spPr>
+        <p:txBody>
+          <a:bodyPr wrap="square" lIns="0" tIns="0" rIns="0" bIns="0" rtlCol="0" anchor="t"/>
+          <a:lstStyle/>
+          <a:p>
+            <a:pPr indent="0" marL="0">
+              <a:buNone/>
+            </a:pPr>
+            <a:r>
+              <a:rPr lang="en-US" sz="3600" b="1" dirty="0">
+                <a:solidFill>
+                  <a:srgbClr val="3D8A5A"/>
+                </a:solidFill>
+                <a:latin typeface="Cambria" pitchFamily="34" charset="0"/>
+                <a:ea typeface="Cambria" pitchFamily="34" charset="-122"/>
+                <a:cs typeface="Cambria" pitchFamily="34" charset="-120"/>
+              </a:rPr>
+              <a:t>13%</a:t>
+            </a:r>
+            <a:endParaRPr lang="en-US" sz="3600" dirty="0"/>
+          </a:p>
+        </p:txBody>
+      </p:sp>
+      <p:sp>
+        <p:nvSpPr>
+          <p:cNvPr id="13" name="Text 9"/>
+          <p:cNvSpPr txBox="1"/>
+          <p:nvPr/>
+        </p:nvSpPr>
+        <p:spPr>
+          <a:xfrm>
+            <a:off x="10012680" y="4892040"/>
+            <a:ext cx="1463040" cy="411480"/>
+          </a:xfrm>
+          <a:prstGeom prst="rect">
+            <a:avLst/>
+          </a:prstGeom>
+          <a:noFill/>
+          <a:ln/>
+        </p:spPr>
+        <p:txBody>
+          <a:bodyPr wrap="square" lIns="0" tIns="0" rIns="0" bIns="0" rtlCol="0" anchor="t"/>
+          <a:lstStyle/>
+          <a:p>
+            <a:pPr indent="0" marL="0">
+              <a:buNone/>
             </a:pPr>
             <a:r>
               <a:rPr lang="en-US" sz="1600" dirty="0">
@@ -7802,70 +8229,7 @@
                 <a:ea typeface="Calibri" pitchFamily="34" charset="-122"/>
                 <a:cs typeface="Calibri" pitchFamily="34" charset="-120"/>
               </a:rPr>
-              <a:t>Radio Continental</a:t>
-            </a:r>
-            <a:endParaRPr lang="en-US" sz="1600" dirty="0"/>
-          </a:p>
-          <a:p>
-            <a:pPr marL="342900" indent="-342900">
-              <a:spcAft>
-                <a:spcPts val="600"/>
-              </a:spcAft>
-              <a:buSzPct val="100000"/>
-              <a:buChar char="•"/>
-            </a:pPr>
-            <a:r>
-              <a:rPr lang="en-US" sz="1600" dirty="0">
-                <a:solidFill>
-                  <a:srgbClr val="1A1A1A"/>
-                </a:solidFill>
-                <a:latin typeface="Calibri" pitchFamily="34" charset="0"/>
-                <a:ea typeface="Calibri" pitchFamily="34" charset="-122"/>
-                <a:cs typeface="Calibri" pitchFamily="34" charset="-120"/>
-              </a:rPr>
-              <a:t>Radio Mitre</a:t>
-            </a:r>
-            <a:endParaRPr lang="en-US" sz="1600" dirty="0"/>
-          </a:p>
-          <a:p>
-            <a:pPr marL="342900" indent="-342900">
-              <a:spcAft>
-                <a:spcPts val="600"/>
-              </a:spcAft>
-              <a:buSzPct val="100000"/>
-              <a:buChar char="•"/>
-            </a:pPr>
-            <a:r>
-              <a:rPr lang="en-US" sz="1600" dirty="0">
-                <a:solidFill>
-                  <a:srgbClr val="1A1A1A"/>
-                </a:solidFill>
-                <a:latin typeface="Calibri" pitchFamily="34" charset="0"/>
-                <a:ea typeface="Calibri" pitchFamily="34" charset="-122"/>
-                <a:cs typeface="Calibri" pitchFamily="34" charset="-120"/>
-              </a:rPr>
-              <a:t>Rosario Nuestro</a:t>
-            </a:r>
-            <a:endParaRPr lang="en-US" sz="1600" dirty="0"/>
-          </a:p>
-          <a:p>
-            <a:pPr marL="342900" indent="-342900">
-              <a:spcAft>
-                <a:spcPts val="600"/>
-              </a:spcAft>
-              <a:buSzPct val="100000"/>
-              <a:buChar char="•"/>
-            </a:pPr>
-            <a:r>
-              <a:rPr lang="en-US" sz="1600" dirty="0">
-                <a:solidFill>
-                  <a:srgbClr val="1A1A1A"/>
-                </a:solidFill>
-                <a:latin typeface="Calibri" pitchFamily="34" charset="0"/>
-                <a:ea typeface="Calibri" pitchFamily="34" charset="-122"/>
-                <a:cs typeface="Calibri" pitchFamily="34" charset="-120"/>
-              </a:rPr>
-              <a:t>Rosario3</a:t>
+              <a:t>Positivo</a:t>
             </a:r>
             <a:endParaRPr lang="en-US" sz="1600" dirty="0"/>
           </a:p>
@@ -7973,7 +8337,7 @@
                   <a:schemeClr val="accent1"/>
                 </a:solidFill>
               </a:rPr>
-              <a:t>ENCUADRE</a:t>
+              <a:t>TRANSPARENCIA</a:t>
             </a:r>
             <a:endParaRPr lang="en-US" sz="1200" dirty="0"/>
           </a:p>
@@ -8014,50 +8378,42 @@
                 <a:ea typeface="Cambria" pitchFamily="34" charset="-122"/>
                 <a:cs typeface="Cambria" pitchFamily="34" charset="-120"/>
               </a:rPr>
-              <a:t>Una noticia, muchos encuadres</a:t>
+              <a:t>Perfil firma el 92% de sus notas; Radio Mitre y Rosario3, ninguna</a:t>
             </a:r>
             <a:endParaRPr lang="en-US" sz="3200" dirty="0"/>
           </a:p>
         </p:txBody>
       </p:sp>
-      <p:pic>
-        <p:nvPicPr>
-          <p:cNvPr id="5" name="encuadre" descr="C:\Users\SBI\Documents\Martin Ceriotti Personales\Master Data Science\webmining\Web-Mining\docs\_fuentes\img\encuadre.png">    </p:cNvPr>
-          <p:cNvPicPr>
-            <a:picLocks noChangeAspect="1"/>
-          </p:cNvPicPr>
-          <p:nvPr/>
-        </p:nvPicPr>
-        <p:blipFill>
-          <a:blip r:embed="rId1"/>
-          <a:stretch>
-            <a:fillRect/>
-          </a:stretch>
-        </p:blipFill>
-        <p:spPr>
-          <a:xfrm>
-            <a:off x="548640" y="1874520"/>
-            <a:ext cx="6949440" cy="4528849"/>
-          </a:xfrm>
-          <a:prstGeom prst="rect">
-            <a:avLst/>
-          </a:prstGeom>
-        </p:spPr>
-      </p:pic>
-      <p:sp>
-        <p:nvSpPr>
-          <p:cNvPr id="6" name="primicia"/>
+      <p:graphicFrame>
+        <p:nvGraphicFramePr>
+          <p:cNvPr id="5" name="grafico" descr=""/>
+          <p:cNvGraphicFramePr/>
+          <p:nvPr/>
+        </p:nvGraphicFramePr>
+        <p:xfrm>
+          <a:off x="457200" y="1874520"/>
+          <a:ext cx="7132320" cy="4343400"/>
+        </p:xfrm>
+        <a:graphic xmlns:a="http://schemas.openxmlformats.org/drawingml/2006/main">
+          <a:graphicData uri="http://schemas.openxmlformats.org/drawingml/2006/chart">
+            <c:chart xmlns:c="http://schemas.openxmlformats.org/drawingml/2006/chart" r:id="rId1"/>
+          </a:graphicData>
+        </a:graphic>
+      </p:graphicFrame>
+      <p:sp>
+        <p:nvSpPr>
+          <p:cNvPr id="6" name="sin-firma"/>
           <p:cNvSpPr/>
           <p:nvPr/>
         </p:nvSpPr>
         <p:spPr>
           <a:xfrm>
-            <a:off x="7863840" y="1874520"/>
-            <a:ext cx="3776472" cy="4160520"/>
+            <a:off x="8046720" y="2011680"/>
+            <a:ext cx="3593592" cy="3931920"/>
           </a:xfrm>
           <a:prstGeom prst="roundRect">
             <a:avLst>
-              <a:gd name="adj" fmla="val 1937"/>
+              <a:gd name="adj" fmla="val 2036"/>
             </a:avLst>
           </a:prstGeom>
           <a:solidFill>
@@ -8079,8 +8435,8 @@
         </p:nvSpPr>
         <p:spPr>
           <a:xfrm>
-            <a:off x="8138160" y="2103120"/>
-            <a:ext cx="3291840" cy="411480"/>
+            <a:off x="8321040" y="2240280"/>
+            <a:ext cx="3108960" cy="411480"/>
           </a:xfrm>
           <a:prstGeom prst="rect">
             <a:avLst/>
@@ -8104,7 +8460,7 @@
                 <a:ea typeface="Calibri" pitchFamily="34" charset="-122"/>
                 <a:cs typeface="Calibri" pitchFamily="34" charset="-120"/>
               </a:rPr>
-              <a:t>Quién llega primero</a:t>
+              <a:t>Sin ninguna nota firmada</a:t>
             </a:r>
             <a:endParaRPr lang="en-US" sz="1800" dirty="0"/>
           </a:p>
@@ -8118,8 +8474,8 @@
         </p:nvSpPr>
         <p:spPr>
           <a:xfrm>
-            <a:off x="8138160" y="2606040"/>
-            <a:ext cx="3291840" cy="822960"/>
+            <a:off x="8321040" y="2788920"/>
+            <a:ext cx="3108960" cy="2926080"/>
           </a:xfrm>
           <a:prstGeom prst="rect">
             <a:avLst/>
@@ -8131,89 +8487,36 @@
           <a:bodyPr wrap="square" lIns="0" tIns="0" rIns="0" bIns="0" rtlCol="0" anchor="t"/>
           <a:lstStyle/>
           <a:p>
-            <a:pPr indent="0" marL="0">
-              <a:buNone/>
-            </a:pPr>
-            <a:r>
-              <a:rPr lang="en-US" sz="1400" dirty="0">
-                <a:solidFill>
-                  <a:srgbClr val="6B6B6B"/>
+            <a:pPr marL="342900" indent="-342900">
+              <a:spcAft>
+                <a:spcPts val="600"/>
+              </a:spcAft>
+              <a:buSzPct val="100000"/>
+              <a:buChar char="•"/>
+            </a:pPr>
+            <a:r>
+              <a:rPr lang="en-US" sz="1600" dirty="0">
+                <a:solidFill>
+                  <a:srgbClr val="1A1A1A"/>
                 </a:solidFill>
                 <a:latin typeface="Calibri" pitchFamily="34" charset="0"/>
                 <a:ea typeface="Calibri" pitchFamily="34" charset="-122"/>
                 <a:cs typeface="Calibri" pitchFamily="34" charset="-120"/>
               </a:rPr>
-              <a:t>Medio que más veces publicó primero una historia que después cubrieron otros:</a:t>
-            </a:r>
-            <a:endParaRPr lang="en-US" sz="1400" dirty="0"/>
-          </a:p>
-        </p:txBody>
-      </p:sp>
-      <p:sp>
-        <p:nvSpPr>
-          <p:cNvPr id="9" name="Text 5"/>
-          <p:cNvSpPr txBox="1"/>
-          <p:nvPr/>
-        </p:nvSpPr>
-        <p:spPr>
-          <a:xfrm>
-            <a:off x="8138160" y="3474720"/>
-            <a:ext cx="3291840" cy="731520"/>
-          </a:xfrm>
-          <a:prstGeom prst="rect">
-            <a:avLst/>
-          </a:prstGeom>
-          <a:noFill/>
-          <a:ln/>
-        </p:spPr>
-        <p:txBody>
-          <a:bodyPr wrap="square" lIns="0" tIns="0" rIns="0" bIns="0" rtlCol="0" anchor="t"/>
-          <a:lstStyle/>
-          <a:p>
-            <a:pPr indent="0" marL="0">
-              <a:buNone/>
-            </a:pPr>
-            <a:r>
-              <a:rPr lang="en-US" sz="4000" b="1" dirty="0">
-                <a:solidFill>
-                  <a:srgbClr val="C8102E"/>
-                </a:solidFill>
-                <a:latin typeface="Cambria" pitchFamily="34" charset="0"/>
-                <a:ea typeface="Cambria" pitchFamily="34" charset="-122"/>
-                <a:cs typeface="Cambria" pitchFamily="34" charset="-120"/>
-              </a:rPr>
-              <a:t>Eldoce</a:t>
-            </a:r>
-            <a:endParaRPr lang="en-US" sz="4000" dirty="0"/>
-          </a:p>
-        </p:txBody>
-      </p:sp>
-      <p:sp>
-        <p:nvSpPr>
-          <p:cNvPr id="10" name="Text 6"/>
-          <p:cNvSpPr txBox="1"/>
-          <p:nvPr/>
-        </p:nvSpPr>
-        <p:spPr>
-          <a:xfrm>
-            <a:off x="8138160" y="4343400"/>
-            <a:ext cx="3291840" cy="1463040"/>
-          </a:xfrm>
-          <a:prstGeom prst="rect">
-            <a:avLst/>
-          </a:prstGeom>
-          <a:noFill/>
-          <a:ln/>
-        </p:spPr>
-        <p:txBody>
-          <a:bodyPr wrap="square" lIns="0" tIns="0" rIns="0" bIns="0" rtlCol="0" anchor="t"/>
-          <a:lstStyle/>
-          <a:p>
-            <a:pPr indent="0" marL="0">
-              <a:buNone/>
-            </a:pPr>
-            <a:r>
-              <a:rPr lang="en-US" sz="1400" dirty="0">
+              <a:t>Elonce</a:t>
+            </a:r>
+            <a:endParaRPr lang="en-US" sz="1600" dirty="0"/>
+          </a:p>
+          <a:p>
+            <a:pPr marL="342900" indent="-342900">
+              <a:spcAft>
+                <a:spcPts val="600"/>
+              </a:spcAft>
+              <a:buSzPct val="100000"/>
+              <a:buChar char="•"/>
+            </a:pPr>
+            <a:r>
+              <a:rPr lang="en-US" sz="1600" dirty="0">
                 <a:solidFill>
                   <a:srgbClr val="1A1A1A"/>
                 </a:solidFill>
@@ -8221,9 +8524,93 @@
                 <a:ea typeface="Calibri" pitchFamily="34" charset="-122"/>
                 <a:cs typeface="Calibri" pitchFamily="34" charset="-120"/>
               </a:rPr>
-              <a:t>Cada tarjeta muestra el tono del título, sus recursos de cebo y los minutos de demora respecto del primero.</a:t>
-            </a:r>
-            <a:endParaRPr lang="en-US" sz="1400" dirty="0"/>
+              <a:t>La Capital (Mar del Plata)</a:t>
+            </a:r>
+            <a:endParaRPr lang="en-US" sz="1600" dirty="0"/>
+          </a:p>
+          <a:p>
+            <a:pPr marL="342900" indent="-342900">
+              <a:spcAft>
+                <a:spcPts val="600"/>
+              </a:spcAft>
+              <a:buSzPct val="100000"/>
+              <a:buChar char="•"/>
+            </a:pPr>
+            <a:r>
+              <a:rPr lang="en-US" sz="1600" dirty="0">
+                <a:solidFill>
+                  <a:srgbClr val="1A1A1A"/>
+                </a:solidFill>
+                <a:latin typeface="Calibri" pitchFamily="34" charset="0"/>
+                <a:ea typeface="Calibri" pitchFamily="34" charset="-122"/>
+                <a:cs typeface="Calibri" pitchFamily="34" charset="-120"/>
+              </a:rPr>
+              <a:t>Radio Continental</a:t>
+            </a:r>
+            <a:endParaRPr lang="en-US" sz="1600" dirty="0"/>
+          </a:p>
+          <a:p>
+            <a:pPr marL="342900" indent="-342900">
+              <a:spcAft>
+                <a:spcPts val="600"/>
+              </a:spcAft>
+              <a:buSzPct val="100000"/>
+              <a:buChar char="•"/>
+            </a:pPr>
+            <a:r>
+              <a:rPr lang="en-US" sz="1600" dirty="0">
+                <a:solidFill>
+                  <a:srgbClr val="1A1A1A"/>
+                </a:solidFill>
+                <a:latin typeface="Calibri" pitchFamily="34" charset="0"/>
+                <a:ea typeface="Calibri" pitchFamily="34" charset="-122"/>
+                <a:cs typeface="Calibri" pitchFamily="34" charset="-120"/>
+              </a:rPr>
+              <a:t>Radio Mitre</a:t>
+            </a:r>
+            <a:endParaRPr lang="en-US" sz="1600" dirty="0"/>
+          </a:p>
+          <a:p>
+            <a:pPr marL="342900" indent="-342900">
+              <a:spcAft>
+                <a:spcPts val="600"/>
+              </a:spcAft>
+              <a:buSzPct val="100000"/>
+              <a:buChar char="•"/>
+            </a:pPr>
+            <a:r>
+              <a:rPr lang="en-US" sz="1600" dirty="0">
+                <a:solidFill>
+                  <a:srgbClr val="1A1A1A"/>
+                </a:solidFill>
+                <a:latin typeface="Calibri" pitchFamily="34" charset="0"/>
+                <a:ea typeface="Calibri" pitchFamily="34" charset="-122"/>
+                <a:cs typeface="Calibri" pitchFamily="34" charset="-120"/>
+              </a:rPr>
+              <a:t>Rosario Nuestro</a:t>
+            </a:r>
+            <a:endParaRPr lang="en-US" sz="1600" dirty="0"/>
+          </a:p>
+          <a:p>
+            <a:pPr marL="342900" indent="-342900">
+              <a:spcAft>
+                <a:spcPts val="600"/>
+              </a:spcAft>
+              <a:buSzPct val="100000"/>
+              <a:buChar char="•"/>
+            </a:pPr>
+            <a:r>
+              <a:rPr lang="en-US" sz="1600" dirty="0">
+                <a:solidFill>
+                  <a:srgbClr val="1A1A1A"/>
+                </a:solidFill>
+                <a:latin typeface="Calibri" pitchFamily="34" charset="0"/>
+                <a:ea typeface="Calibri" pitchFamily="34" charset="-122"/>
+                <a:cs typeface="Calibri" pitchFamily="34" charset="-120"/>
+              </a:rPr>
+              <a:t>Rosario3</a:t>
+            </a:r>
+            <a:endParaRPr lang="en-US" sz="1600" dirty="0"/>
           </a:p>
         </p:txBody>
       </p:sp>
@@ -8329,7 +8716,7 @@
                   <a:schemeClr val="accent1"/>
                 </a:solidFill>
               </a:rPr>
-              <a:t>TONO POR FIGURA</a:t>
+              <a:t>ENCUADRE</a:t>
             </a:r>
             <a:endParaRPr lang="en-US" sz="1200" dirty="0"/>
           </a:p>
@@ -8370,7 +8757,7 @@
                 <a:ea typeface="Cambria" pitchFamily="34" charset="-122"/>
                 <a:cs typeface="Cambria" pitchFamily="34" charset="-120"/>
               </a:rPr>
-              <a:t>Cómo trata cada medio a cada figura</a:t>
+              <a:t>Una noticia, muchos encuadres</a:t>
             </a:r>
             <a:endParaRPr lang="en-US" sz="3200" dirty="0"/>
           </a:p>
@@ -8378,7 +8765,7 @@
       </p:sp>
       <p:pic>
         <p:nvPicPr>
-          <p:cNvPr id="5" name="figuras" descr="C:\Users\SBI\Documents\Martin Ceriotti Personales\Master Data Science\webmining\Web-Mining\docs\_fuentes\img\figuras.png">    </p:cNvPr>
+          <p:cNvPr id="5" name="encuadre" descr="C:\Users\SBI\Documents\Martin Ceriotti Personales\Master Data Science\webmining\Web-Mining\docs\_fuentes\img\encuadre.png">    </p:cNvPr>
           <p:cNvPicPr>
             <a:picLocks noChangeAspect="1"/>
           </p:cNvPicPr>
@@ -8393,7 +8780,7 @@
         <p:spPr>
           <a:xfrm>
             <a:off x="548640" y="1874520"/>
-            <a:ext cx="8412480" cy="2315795"/>
+            <a:ext cx="6949440" cy="4528849"/>
           </a:xfrm>
           <a:prstGeom prst="rect">
             <a:avLst/>
@@ -8402,18 +8789,18 @@
       </p:pic>
       <p:sp>
         <p:nvSpPr>
-          <p:cNvPr id="6" name="figuras-lectura"/>
+          <p:cNvPr id="6" name="primicia"/>
           <p:cNvSpPr/>
           <p:nvPr/>
         </p:nvSpPr>
         <p:spPr>
           <a:xfrm>
-            <a:off x="9235440" y="1874520"/>
-            <a:ext cx="2404872" cy="3566160"/>
+            <a:off x="7863840" y="1874520"/>
+            <a:ext cx="3776472" cy="4160520"/>
           </a:xfrm>
           <a:prstGeom prst="roundRect">
             <a:avLst>
-              <a:gd name="adj" fmla="val 3042"/>
+              <a:gd name="adj" fmla="val 1937"/>
             </a:avLst>
           </a:prstGeom>
           <a:solidFill>
@@ -8435,8 +8822,8 @@
         </p:nvSpPr>
         <p:spPr>
           <a:xfrm>
-            <a:off x="9464040" y="2103120"/>
-            <a:ext cx="2011680" cy="3200400"/>
+            <a:off x="8138160" y="2103120"/>
+            <a:ext cx="3291840" cy="411480"/>
           </a:xfrm>
           <a:prstGeom prst="rect">
             <a:avLst/>
@@ -8449,95 +8836,135 @@
           <a:lstStyle/>
           <a:p>
             <a:pPr indent="0" marL="0">
-              <a:spcAft>
-                <a:spcPts val="800"/>
-              </a:spcAft>
-              <a:buNone/>
-            </a:pPr>
-            <a:r>
-              <a:rPr lang="en-US" sz="1400" b="1" dirty="0">
-                <a:solidFill>
-                  <a:srgbClr val="C8102E"/>
+              <a:buNone/>
+            </a:pPr>
+            <a:r>
+              <a:rPr lang="en-US" sz="1800" b="1" dirty="0">
+                <a:solidFill>
+                  <a:srgbClr val="1A1A1A"/>
                 </a:solidFill>
                 <a:latin typeface="Calibri" pitchFamily="34" charset="0"/>
                 <a:ea typeface="Calibri" pitchFamily="34" charset="-122"/>
                 <a:cs typeface="Calibri" pitchFamily="34" charset="-120"/>
               </a:rPr>
-              <a:t>Rojo: </a:t>
-            </a:r>
-            <a:pPr indent="0" marL="0">
-              <a:spcAft>
-                <a:spcPts val="800"/>
-              </a:spcAft>
+              <a:t>Quién llega primero</a:t>
+            </a:r>
+            <a:endParaRPr lang="en-US" sz="1800" dirty="0"/>
+          </a:p>
+        </p:txBody>
+      </p:sp>
+      <p:sp>
+        <p:nvSpPr>
+          <p:cNvPr id="8" name="Text 4"/>
+          <p:cNvSpPr txBox="1"/>
+          <p:nvPr/>
+        </p:nvSpPr>
+        <p:spPr>
+          <a:xfrm>
+            <a:off x="8138160" y="2606040"/>
+            <a:ext cx="3291840" cy="822960"/>
+          </a:xfrm>
+          <a:prstGeom prst="rect">
+            <a:avLst/>
+          </a:prstGeom>
+          <a:noFill/>
+          <a:ln/>
+        </p:spPr>
+        <p:txBody>
+          <a:bodyPr wrap="square" lIns="0" tIns="0" rIns="0" bIns="0" rtlCol="0" anchor="t"/>
+          <a:lstStyle/>
+          <a:p>
+            <a:pPr indent="0" marL="0">
               <a:buNone/>
             </a:pPr>
             <a:r>
               <a:rPr lang="en-US" sz="1400" dirty="0">
                 <a:solidFill>
-                  <a:srgbClr val="1A1A1A"/>
+                  <a:srgbClr val="6B6B6B"/>
                 </a:solidFill>
                 <a:latin typeface="Calibri" pitchFamily="34" charset="0"/>
                 <a:ea typeface="Calibri" pitchFamily="34" charset="-122"/>
                 <a:cs typeface="Calibri" pitchFamily="34" charset="-120"/>
               </a:rPr>
-              <a:t>más negativo que el promedio de los medios con esa figura.</a:t>
+              <a:t>Medio que más veces publicó primero una historia que después cubrieron otros:</a:t>
             </a:r>
             <a:endParaRPr lang="en-US" sz="1400" dirty="0"/>
           </a:p>
-          <a:p>
-            <a:pPr indent="0" marL="0">
-              <a:spcAft>
-                <a:spcPts val="800"/>
-              </a:spcAft>
-              <a:buNone/>
-            </a:pPr>
-            <a:r>
-              <a:rPr lang="en-US" sz="1400" b="1" dirty="0">
-                <a:solidFill>
-                  <a:srgbClr val="3D8A5A"/>
+        </p:txBody>
+      </p:sp>
+      <p:sp>
+        <p:nvSpPr>
+          <p:cNvPr id="9" name="Text 5"/>
+          <p:cNvSpPr txBox="1"/>
+          <p:nvPr/>
+        </p:nvSpPr>
+        <p:spPr>
+          <a:xfrm>
+            <a:off x="8138160" y="3474720"/>
+            <a:ext cx="3291840" cy="731520"/>
+          </a:xfrm>
+          <a:prstGeom prst="rect">
+            <a:avLst/>
+          </a:prstGeom>
+          <a:noFill/>
+          <a:ln/>
+        </p:spPr>
+        <p:txBody>
+          <a:bodyPr wrap="square" lIns="0" tIns="0" rIns="0" bIns="0" rtlCol="0" anchor="t"/>
+          <a:lstStyle/>
+          <a:p>
+            <a:pPr indent="0" marL="0">
+              <a:buNone/>
+            </a:pPr>
+            <a:r>
+              <a:rPr lang="en-US" sz="4000" b="1" dirty="0">
+                <a:solidFill>
+                  <a:srgbClr val="C8102E"/>
+                </a:solidFill>
+                <a:latin typeface="Cambria" pitchFamily="34" charset="0"/>
+                <a:ea typeface="Cambria" pitchFamily="34" charset="-122"/>
+                <a:cs typeface="Cambria" pitchFamily="34" charset="-120"/>
+              </a:rPr>
+              <a:t>Eldoce</a:t>
+            </a:r>
+            <a:endParaRPr lang="en-US" sz="4000" dirty="0"/>
+          </a:p>
+        </p:txBody>
+      </p:sp>
+      <p:sp>
+        <p:nvSpPr>
+          <p:cNvPr id="10" name="Text 6"/>
+          <p:cNvSpPr txBox="1"/>
+          <p:nvPr/>
+        </p:nvSpPr>
+        <p:spPr>
+          <a:xfrm>
+            <a:off x="8138160" y="4343400"/>
+            <a:ext cx="3291840" cy="1463040"/>
+          </a:xfrm>
+          <a:prstGeom prst="rect">
+            <a:avLst/>
+          </a:prstGeom>
+          <a:noFill/>
+          <a:ln/>
+        </p:spPr>
+        <p:txBody>
+          <a:bodyPr wrap="square" lIns="0" tIns="0" rIns="0" bIns="0" rtlCol="0" anchor="t"/>
+          <a:lstStyle/>
+          <a:p>
+            <a:pPr indent="0" marL="0">
+              <a:buNone/>
+            </a:pPr>
+            <a:r>
+              <a:rPr lang="en-US" sz="1400" dirty="0">
+                <a:solidFill>
+                  <a:srgbClr val="1A1A1A"/>
                 </a:solidFill>
                 <a:latin typeface="Calibri" pitchFamily="34" charset="0"/>
                 <a:ea typeface="Calibri" pitchFamily="34" charset="-122"/>
                 <a:cs typeface="Calibri" pitchFamily="34" charset="-120"/>
               </a:rPr>
-              <a:t>Verde: </a:t>
-            </a:r>
-            <a:pPr indent="0" marL="0">
-              <a:spcAft>
-                <a:spcPts val="800"/>
-              </a:spcAft>
-              <a:buNone/>
-            </a:pPr>
-            <a:r>
-              <a:rPr lang="en-US" sz="1400" dirty="0">
-                <a:solidFill>
-                  <a:srgbClr val="1A1A1A"/>
-                </a:solidFill>
-                <a:latin typeface="Calibri" pitchFamily="34" charset="0"/>
-                <a:ea typeface="Calibri" pitchFamily="34" charset="-122"/>
-                <a:cs typeface="Calibri" pitchFamily="34" charset="-120"/>
-              </a:rPr>
-              <a:t>menos negativo.</a:t>
-            </a:r>
-            <a:endParaRPr lang="en-US" sz="1400" dirty="0"/>
-          </a:p>
-          <a:p>
-            <a:pPr indent="0" marL="0">
-              <a:spcAft>
-                <a:spcPts val="800"/>
-              </a:spcAft>
-              <a:buNone/>
-            </a:pPr>
-            <a:r>
-              <a:rPr lang="en-US" sz="1400" dirty="0">
-                <a:solidFill>
-                  <a:srgbClr val="1A1A1A"/>
-                </a:solidFill>
-                <a:latin typeface="Calibri" pitchFamily="34" charset="0"/>
-                <a:ea typeface="Calibri" pitchFamily="34" charset="-122"/>
-                <a:cs typeface="Calibri" pitchFamily="34" charset="-120"/>
-              </a:rPr>
-              <a:t>Entre paréntesis, la cantidad de notas.</a:t>
+              <a:t>Cada tarjeta muestra el tono del título, sus recursos de cebo y los minutos de demora respecto del primero.</a:t>
             </a:r>
             <a:endParaRPr lang="en-US" sz="1400" dirty="0"/>
           </a:p>
@@ -8645,7 +9072,7 @@
                   <a:schemeClr val="accent1"/>
                 </a:solidFill>
               </a:rPr>
-              <a:t>MINERÍA DE ESTRUCTURA</a:t>
+              <a:t>TONO POR FIGURA</a:t>
             </a:r>
             <a:endParaRPr lang="en-US" sz="1200" dirty="0"/>
           </a:p>
@@ -8686,7 +9113,7 @@
                 <a:ea typeface="Cambria" pitchFamily="34" charset="-122"/>
                 <a:cs typeface="Cambria" pitchFamily="34" charset="-120"/>
               </a:rPr>
-              <a:t>El mapa de medios: quién comparte agenda con quién</a:t>
+              <a:t>Cómo trata cada medio a cada figura</a:t>
             </a:r>
             <a:endParaRPr lang="en-US" sz="3200" dirty="0"/>
           </a:p>
@@ -8694,7 +9121,7 @@
       </p:sp>
       <p:pic>
         <p:nvPicPr>
-          <p:cNvPr id="5" name="grafo" descr="C:\Users\SBI\Documents\Martin Ceriotti Personales\Master Data Science\webmining\Web-Mining\docs\_fuentes\img\grafo.png">    </p:cNvPr>
+          <p:cNvPr id="5" name="figuras" descr="C:\Users\SBI\Documents\Martin Ceriotti Personales\Master Data Science\webmining\Web-Mining\docs\_fuentes\img\figuras.png">    </p:cNvPr>
           <p:cNvPicPr>
             <a:picLocks noChangeAspect="1"/>
           </p:cNvPicPr>
@@ -8708,8 +9135,8 @@
         </p:blipFill>
         <p:spPr>
           <a:xfrm>
-            <a:off x="548640" y="1828800"/>
-            <a:ext cx="6675120" cy="4087573"/>
+            <a:off x="548640" y="1874520"/>
+            <a:ext cx="8412480" cy="2315795"/>
           </a:xfrm>
           <a:prstGeom prst="rect">
             <a:avLst/>
@@ -8718,18 +9145,18 @@
       </p:pic>
       <p:sp>
         <p:nvSpPr>
-          <p:cNvPr id="6" name="grafo-lectura"/>
+          <p:cNvPr id="6" name="figuras-lectura"/>
           <p:cNvSpPr/>
           <p:nvPr/>
         </p:nvSpPr>
         <p:spPr>
           <a:xfrm>
-            <a:off x="7589520" y="1874520"/>
-            <a:ext cx="4050792" cy="4160520"/>
+            <a:off x="9235440" y="1874520"/>
+            <a:ext cx="2404872" cy="3566160"/>
           </a:xfrm>
           <a:prstGeom prst="roundRect">
             <a:avLst>
-              <a:gd name="adj" fmla="val 1806"/>
+              <a:gd name="adj" fmla="val 3042"/>
             </a:avLst>
           </a:prstGeom>
           <a:solidFill>
@@ -8751,8 +9178,8 @@
         </p:nvSpPr>
         <p:spPr>
           <a:xfrm>
-            <a:off x="7863840" y="2103120"/>
-            <a:ext cx="3566160" cy="411480"/>
+            <a:off x="9464040" y="2103120"/>
+            <a:ext cx="2011680" cy="3200400"/>
           </a:xfrm>
           <a:prstGeom prst="rect">
             <a:avLst/>
@@ -8765,53 +9192,30 @@
           <a:lstStyle/>
           <a:p>
             <a:pPr indent="0" marL="0">
-              <a:buNone/>
-            </a:pPr>
-            <a:r>
-              <a:rPr lang="en-US" sz="1800" b="1" dirty="0">
-                <a:solidFill>
-                  <a:srgbClr val="1A1A1A"/>
+              <a:spcAft>
+                <a:spcPts val="800"/>
+              </a:spcAft>
+              <a:buNone/>
+            </a:pPr>
+            <a:r>
+              <a:rPr lang="en-US" sz="1400" b="1" dirty="0">
+                <a:solidFill>
+                  <a:srgbClr val="C8102E"/>
                 </a:solidFill>
                 <a:latin typeface="Calibri" pitchFamily="34" charset="0"/>
                 <a:ea typeface="Calibri" pitchFamily="34" charset="-122"/>
                 <a:cs typeface="Calibri" pitchFamily="34" charset="-120"/>
               </a:rPr>
-              <a:t>Cómo se arma</a:t>
-            </a:r>
-            <a:endParaRPr lang="en-US" sz="1800" dirty="0"/>
-          </a:p>
-        </p:txBody>
-      </p:sp>
-      <p:sp>
-        <p:nvSpPr>
-          <p:cNvPr id="8" name="Text 4"/>
-          <p:cNvSpPr txBox="1"/>
-          <p:nvPr/>
-        </p:nvSpPr>
-        <p:spPr>
-          <a:xfrm>
-            <a:off x="7863840" y="2651760"/>
-            <a:ext cx="3611880" cy="3200400"/>
-          </a:xfrm>
-          <a:prstGeom prst="rect">
-            <a:avLst/>
-          </a:prstGeom>
-          <a:noFill/>
-          <a:ln/>
-        </p:spPr>
-        <p:txBody>
-          <a:bodyPr wrap="square" lIns="0" tIns="0" rIns="0" bIns="0" rtlCol="0" anchor="t"/>
-          <a:lstStyle/>
-          <a:p>
-            <a:pPr marL="342900" indent="-342900">
+              <a:t>Rojo: </a:t>
+            </a:r>
+            <a:pPr indent="0" marL="0">
               <a:spcAft>
                 <a:spcPts val="800"/>
               </a:spcAft>
-              <a:buSzPct val="100000"/>
-              <a:buChar char="•"/>
-            </a:pPr>
-            <a:r>
-              <a:rPr lang="en-US" sz="1500" dirty="0">
+              <a:buNone/>
+            </a:pPr>
+            <a:r>
+              <a:rPr lang="en-US" sz="1400" dirty="0">
                 <a:solidFill>
                   <a:srgbClr val="1A1A1A"/>
                 </a:solidFill>
@@ -8819,41 +9223,36 @@
                 <a:ea typeface="Calibri" pitchFamily="34" charset="-122"/>
                 <a:cs typeface="Calibri" pitchFamily="34" charset="-120"/>
               </a:rPr>
-              <a:t>Nodos: medios; tamaño según historias compartidas</a:t>
-            </a:r>
-            <a:endParaRPr lang="en-US" sz="1500" dirty="0"/>
-          </a:p>
-          <a:p>
-            <a:pPr marL="342900" indent="-342900">
+              <a:t>más negativo que el promedio de los medios con esa figura.</a:t>
+            </a:r>
+            <a:endParaRPr lang="en-US" sz="1400" dirty="0"/>
+          </a:p>
+          <a:p>
+            <a:pPr indent="0" marL="0">
               <a:spcAft>
                 <a:spcPts val="800"/>
               </a:spcAft>
-              <a:buSzPct val="100000"/>
-              <a:buChar char="•"/>
-            </a:pPr>
-            <a:r>
-              <a:rPr lang="en-US" sz="1500" dirty="0">
-                <a:solidFill>
-                  <a:srgbClr val="1A1A1A"/>
+              <a:buNone/>
+            </a:pPr>
+            <a:r>
+              <a:rPr lang="en-US" sz="1400" b="1" dirty="0">
+                <a:solidFill>
+                  <a:srgbClr val="3D8A5A"/>
                 </a:solidFill>
                 <a:latin typeface="Calibri" pitchFamily="34" charset="0"/>
                 <a:ea typeface="Calibri" pitchFamily="34" charset="-122"/>
                 <a:cs typeface="Calibri" pitchFamily="34" charset="-120"/>
               </a:rPr>
-              <a:t>Aristas: cubren las mismas historias</a:t>
-            </a:r>
-            <a:endParaRPr lang="en-US" sz="1500" dirty="0"/>
-          </a:p>
-          <a:p>
-            <a:pPr marL="342900" indent="-342900">
+              <a:t>Verde: </a:t>
+            </a:r>
+            <a:pPr indent="0" marL="0">
               <a:spcAft>
                 <a:spcPts val="800"/>
               </a:spcAft>
-              <a:buSzPct val="100000"/>
-              <a:buChar char="•"/>
-            </a:pPr>
-            <a:r>
-              <a:rPr lang="en-US" sz="1500" dirty="0">
+              <a:buNone/>
+            </a:pPr>
+            <a:r>
+              <a:rPr lang="en-US" sz="1400" dirty="0">
                 <a:solidFill>
                   <a:srgbClr val="1A1A1A"/>
                 </a:solidFill>
@@ -8861,20 +9260,19 @@
                 <a:ea typeface="Calibri" pitchFamily="34" charset="-122"/>
                 <a:cs typeface="Calibri" pitchFamily="34" charset="-120"/>
               </a:rPr>
-              <a:t>Colores: comunidades detectadas por propagación de etiquetas</a:t>
-            </a:r>
-            <a:endParaRPr lang="en-US" sz="1500" dirty="0"/>
-          </a:p>
-          <a:p>
-            <a:pPr marL="342900" indent="-342900">
+              <a:t>menos negativo.</a:t>
+            </a:r>
+            <a:endParaRPr lang="en-US" sz="1400" dirty="0"/>
+          </a:p>
+          <a:p>
+            <a:pPr indent="0" marL="0">
               <a:spcAft>
                 <a:spcPts val="800"/>
               </a:spcAft>
-              <a:buSzPct val="100000"/>
-              <a:buChar char="•"/>
-            </a:pPr>
-            <a:r>
-              <a:rPr lang="en-US" sz="1500" dirty="0">
+              <a:buNone/>
+            </a:pPr>
+            <a:r>
+              <a:rPr lang="en-US" sz="1400" dirty="0">
                 <a:solidFill>
                   <a:srgbClr val="1A1A1A"/>
                 </a:solidFill>
@@ -8882,9 +9280,9 @@
                 <a:ea typeface="Calibri" pitchFamily="34" charset="-122"/>
                 <a:cs typeface="Calibri" pitchFamily="34" charset="-120"/>
               </a:rPr>
-              <a:t>Disposición por fuerzas, animada en el tablero</a:t>
-            </a:r>
-            <a:endParaRPr lang="en-US" sz="1500" dirty="0"/>
+              <a:t>Entre paréntesis, la cantidad de notas.</a:t>
+            </a:r>
+            <a:endParaRPr lang="en-US" sz="1400" dirty="0"/>
           </a:p>
         </p:txBody>
       </p:sp>
@@ -9723,7 +10121,7 @@
                   <a:schemeClr val="accent1"/>
                 </a:solidFill>
               </a:rPr>
-              <a:t>EL TABLERO</a:t>
+              <a:t>MINERÍA DE ESTRUCTURA</a:t>
             </a:r>
             <a:endParaRPr lang="en-US" sz="1200" dirty="0"/>
           </a:p>
@@ -9764,7 +10162,7 @@
                 <a:ea typeface="Cambria" pitchFamily="34" charset="-122"/>
                 <a:cs typeface="Cambria" pitchFamily="34" charset="-120"/>
               </a:rPr>
-              <a:t>Todo esto, en un tablero público que se actualiza solo</a:t>
+              <a:t>El mapa de medios: quién comparte agenda con quién</a:t>
             </a:r>
             <a:endParaRPr lang="en-US" sz="3200" dirty="0"/>
           </a:p>
@@ -9772,7 +10170,7 @@
       </p:sp>
       <p:pic>
         <p:nvPicPr>
-          <p:cNvPr id="5" name="captura" descr="C:\Users\SBI\Documents\Martin Ceriotti Personales\Master Data Science\webmining\Web-Mining\docs\_fuentes\img\tablero-resumen.png">    </p:cNvPr>
+          <p:cNvPr id="5" name="grafo" descr="C:\Users\SBI\Documents\Martin Ceriotti Personales\Master Data Science\webmining\Web-Mining\docs\_fuentes\img\grafo.png">    </p:cNvPr>
           <p:cNvPicPr>
             <a:picLocks noChangeAspect="1"/>
           </p:cNvPicPr>
@@ -9786,8 +10184,8 @@
         </p:blipFill>
         <p:spPr>
           <a:xfrm>
-            <a:off x="548640" y="1874520"/>
-            <a:ext cx="6583680" cy="4114800"/>
+            <a:off x="548640" y="1828800"/>
+            <a:ext cx="6675120" cy="4087573"/>
           </a:xfrm>
           <a:prstGeom prst="rect">
             <a:avLst/>
@@ -9796,21 +10194,26 @@
       </p:pic>
       <p:sp>
         <p:nvSpPr>
-          <p:cNvPr id="6" name="marco"/>
+          <p:cNvPr id="6" name="grafo-lectura"/>
           <p:cNvSpPr/>
           <p:nvPr/>
         </p:nvSpPr>
         <p:spPr>
           <a:xfrm>
-            <a:off x="548640" y="1874520"/>
-            <a:ext cx="6583680" cy="4114800"/>
-          </a:xfrm>
-          <a:prstGeom prst="rect">
-            <a:avLst/>
-          </a:prstGeom>
+            <a:off x="7589520" y="1874520"/>
+            <a:ext cx="4050792" cy="4160520"/>
+          </a:xfrm>
+          <a:prstGeom prst="roundRect">
+            <a:avLst>
+              <a:gd name="adj" fmla="val 1806"/>
+            </a:avLst>
+          </a:prstGeom>
+          <a:solidFill>
+            <a:srgbClr val="F2F2F0"/>
+          </a:solidFill>
           <a:ln w="12700">
             <a:solidFill>
-              <a:srgbClr val="D9D9D6"/>
+              <a:srgbClr val="F2F2F0"/>
             </a:solidFill>
             <a:prstDash val="solid"/>
           </a:ln>
@@ -9824,8 +10227,8 @@
         </p:nvSpPr>
         <p:spPr>
           <a:xfrm>
-            <a:off x="7498080" y="1920240"/>
-            <a:ext cx="4114800" cy="566928"/>
+            <a:off x="7863840" y="2103120"/>
+            <a:ext cx="3566160" cy="411480"/>
           </a:xfrm>
           <a:prstGeom prst="rect">
             <a:avLst/>
@@ -9841,7 +10244,7 @@
               <a:buNone/>
             </a:pPr>
             <a:r>
-              <a:rPr lang="en-US" sz="1400" b="1" dirty="0">
+              <a:rPr lang="en-US" sz="1800" b="1" dirty="0">
                 <a:solidFill>
                   <a:srgbClr val="1A1A1A"/>
                 </a:solidFill>
@@ -9849,55 +10252,63 @@
                 <a:ea typeface="Calibri" pitchFamily="34" charset="-122"/>
                 <a:cs typeface="Calibri" pitchFamily="34" charset="-120"/>
               </a:rPr>
-              <a:t>Resumen</a:t>
-            </a:r>
-            <a:endParaRPr lang="en-US" sz="1400" dirty="0"/>
-          </a:p>
-          <a:p>
-            <a:pPr indent="0" marL="0">
-              <a:buNone/>
-            </a:pPr>
-            <a:r>
-              <a:rPr lang="en-US" sz="1400" dirty="0">
-                <a:solidFill>
-                  <a:srgbClr val="6B6B6B"/>
+              <a:t>Cómo se arma</a:t>
+            </a:r>
+            <a:endParaRPr lang="en-US" sz="1800" dirty="0"/>
+          </a:p>
+        </p:txBody>
+      </p:sp>
+      <p:sp>
+        <p:nvSpPr>
+          <p:cNvPr id="8" name="Text 4"/>
+          <p:cNvSpPr txBox="1"/>
+          <p:nvPr/>
+        </p:nvSpPr>
+        <p:spPr>
+          <a:xfrm>
+            <a:off x="7863840" y="2651760"/>
+            <a:ext cx="3611880" cy="3200400"/>
+          </a:xfrm>
+          <a:prstGeom prst="rect">
+            <a:avLst/>
+          </a:prstGeom>
+          <a:noFill/>
+          <a:ln/>
+        </p:spPr>
+        <p:txBody>
+          <a:bodyPr wrap="square" lIns="0" tIns="0" rIns="0" bIns="0" rtlCol="0" anchor="t"/>
+          <a:lstStyle/>
+          <a:p>
+            <a:pPr marL="342900" indent="-342900">
+              <a:spcAft>
+                <a:spcPts val="800"/>
+              </a:spcAft>
+              <a:buSzPct val="100000"/>
+              <a:buChar char="•"/>
+            </a:pPr>
+            <a:r>
+              <a:rPr lang="en-US" sz="1500" dirty="0">
+                <a:solidFill>
+                  <a:srgbClr val="1A1A1A"/>
                 </a:solidFill>
                 <a:latin typeface="Calibri" pitchFamily="34" charset="0"/>
                 <a:ea typeface="Calibri" pitchFamily="34" charset="-122"/>
                 <a:cs typeface="Calibri" pitchFamily="34" charset="-120"/>
               </a:rPr>
-              <a:t>termómetro, resumen del día y noticias compartidas</a:t>
-            </a:r>
-            <a:endParaRPr lang="en-US" sz="1400" dirty="0"/>
-          </a:p>
-        </p:txBody>
-      </p:sp>
-      <p:sp>
-        <p:nvSpPr>
-          <p:cNvPr id="8" name="Text 4"/>
-          <p:cNvSpPr txBox="1"/>
-          <p:nvPr/>
-        </p:nvSpPr>
-        <p:spPr>
-          <a:xfrm>
-            <a:off x="7498080" y="2505456"/>
-            <a:ext cx="4114800" cy="566928"/>
-          </a:xfrm>
-          <a:prstGeom prst="rect">
-            <a:avLst/>
-          </a:prstGeom>
-          <a:noFill/>
-          <a:ln/>
-        </p:spPr>
-        <p:txBody>
-          <a:bodyPr wrap="square" lIns="0" tIns="0" rIns="0" bIns="0" rtlCol="0" anchor="t"/>
-          <a:lstStyle/>
-          <a:p>
-            <a:pPr indent="0" marL="0">
-              <a:buNone/>
-            </a:pPr>
-            <a:r>
-              <a:rPr lang="en-US" sz="1400" b="1" dirty="0">
+              <a:t>Nodos: medios; tamaño según historias compartidas</a:t>
+            </a:r>
+            <a:endParaRPr lang="en-US" sz="1500" dirty="0"/>
+          </a:p>
+          <a:p>
+            <a:pPr marL="342900" indent="-342900">
+              <a:spcAft>
+                <a:spcPts val="800"/>
+              </a:spcAft>
+              <a:buSzPct val="100000"/>
+              <a:buChar char="•"/>
+            </a:pPr>
+            <a:r>
+              <a:rPr lang="en-US" sz="1500" dirty="0">
                 <a:solidFill>
                   <a:srgbClr val="1A1A1A"/>
                 </a:solidFill>
@@ -9905,55 +10316,41 @@
                 <a:ea typeface="Calibri" pitchFamily="34" charset="-122"/>
                 <a:cs typeface="Calibri" pitchFamily="34" charset="-120"/>
               </a:rPr>
-              <a:t>Titulares</a:t>
-            </a:r>
-            <a:endParaRPr lang="en-US" sz="1400" dirty="0"/>
-          </a:p>
-          <a:p>
-            <a:pPr indent="0" marL="0">
-              <a:buNone/>
-            </a:pPr>
-            <a:r>
-              <a:rPr lang="en-US" sz="1400" dirty="0">
-                <a:solidFill>
-                  <a:srgbClr val="6B6B6B"/>
+              <a:t>Aristas: cubren las mismas historias</a:t>
+            </a:r>
+            <a:endParaRPr lang="en-US" sz="1500" dirty="0"/>
+          </a:p>
+          <a:p>
+            <a:pPr marL="342900" indent="-342900">
+              <a:spcAft>
+                <a:spcPts val="800"/>
+              </a:spcAft>
+              <a:buSzPct val="100000"/>
+              <a:buChar char="•"/>
+            </a:pPr>
+            <a:r>
+              <a:rPr lang="en-US" sz="1500" dirty="0">
+                <a:solidFill>
+                  <a:srgbClr val="1A1A1A"/>
                 </a:solidFill>
                 <a:latin typeface="Calibri" pitchFamily="34" charset="0"/>
                 <a:ea typeface="Calibri" pitchFamily="34" charset="-122"/>
                 <a:cs typeface="Calibri" pitchFamily="34" charset="-120"/>
               </a:rPr>
-              <a:t>buscador y filtros por medio y tema</a:t>
-            </a:r>
-            <a:endParaRPr lang="en-US" sz="1400" dirty="0"/>
-          </a:p>
-        </p:txBody>
-      </p:sp>
-      <p:sp>
-        <p:nvSpPr>
-          <p:cNvPr id="9" name="Text 5"/>
-          <p:cNvSpPr txBox="1"/>
-          <p:nvPr/>
-        </p:nvSpPr>
-        <p:spPr>
-          <a:xfrm>
-            <a:off x="7498080" y="3090672"/>
-            <a:ext cx="4114800" cy="566928"/>
-          </a:xfrm>
-          <a:prstGeom prst="rect">
-            <a:avLst/>
-          </a:prstGeom>
-          <a:noFill/>
-          <a:ln/>
-        </p:spPr>
-        <p:txBody>
-          <a:bodyPr wrap="square" lIns="0" tIns="0" rIns="0" bIns="0" rtlCol="0" anchor="t"/>
-          <a:lstStyle/>
-          <a:p>
-            <a:pPr indent="0" marL="0">
-              <a:buNone/>
-            </a:pPr>
-            <a:r>
-              <a:rPr lang="en-US" sz="1400" b="1" dirty="0">
+              <a:t>Colores: comunidades detectadas por propagación de etiquetas</a:t>
+            </a:r>
+            <a:endParaRPr lang="en-US" sz="1500" dirty="0"/>
+          </a:p>
+          <a:p>
+            <a:pPr marL="342900" indent="-342900">
+              <a:spcAft>
+                <a:spcPts val="800"/>
+              </a:spcAft>
+              <a:buSzPct val="100000"/>
+              <a:buChar char="•"/>
+            </a:pPr>
+            <a:r>
+              <a:rPr lang="en-US" sz="1500" dirty="0">
                 <a:solidFill>
                   <a:srgbClr val="1A1A1A"/>
                 </a:solidFill>
@@ -9961,194 +10358,9 @@
                 <a:ea typeface="Calibri" pitchFamily="34" charset="-122"/>
                 <a:cs typeface="Calibri" pitchFamily="34" charset="-120"/>
               </a:rPr>
-              <a:t>Monitor</a:t>
-            </a:r>
-            <a:endParaRPr lang="en-US" sz="1400" dirty="0"/>
-          </a:p>
-          <a:p>
-            <a:pPr indent="0" marL="0">
-              <a:buNone/>
-            </a:pPr>
-            <a:r>
-              <a:rPr lang="en-US" sz="1400" dirty="0">
-                <a:solidFill>
-                  <a:srgbClr val="6B6B6B"/>
-                </a:solidFill>
-                <a:latin typeface="Calibri" pitchFamily="34" charset="0"/>
-                <a:ea typeface="Calibri" pitchFamily="34" charset="-122"/>
-                <a:cs typeface="Calibri" pitchFamily="34" charset="-120"/>
-              </a:rPr>
-              <a:t>seguir una persona o marca</a:t>
-            </a:r>
-            <a:endParaRPr lang="en-US" sz="1400" dirty="0"/>
-          </a:p>
-        </p:txBody>
-      </p:sp>
-      <p:sp>
-        <p:nvSpPr>
-          <p:cNvPr id="10" name="Text 6"/>
-          <p:cNvSpPr txBox="1"/>
-          <p:nvPr/>
-        </p:nvSpPr>
-        <p:spPr>
-          <a:xfrm>
-            <a:off x="7498080" y="3675888"/>
-            <a:ext cx="4114800" cy="566928"/>
-          </a:xfrm>
-          <a:prstGeom prst="rect">
-            <a:avLst/>
-          </a:prstGeom>
-          <a:noFill/>
-          <a:ln/>
-        </p:spPr>
-        <p:txBody>
-          <a:bodyPr wrap="square" lIns="0" tIns="0" rIns="0" bIns="0" rtlCol="0" anchor="t"/>
-          <a:lstStyle/>
-          <a:p>
-            <a:pPr indent="0" marL="0">
-              <a:buNone/>
-            </a:pPr>
-            <a:r>
-              <a:rPr lang="en-US" sz="1400" b="1" dirty="0">
-                <a:solidFill>
-                  <a:srgbClr val="1A1A1A"/>
-                </a:solidFill>
-                <a:latin typeface="Calibri" pitchFamily="34" charset="0"/>
-                <a:ea typeface="Calibri" pitchFamily="34" charset="-122"/>
-                <a:cs typeface="Calibri" pitchFamily="34" charset="-120"/>
-              </a:rPr>
-              <a:t>Análisis</a:t>
-            </a:r>
-            <a:endParaRPr lang="en-US" sz="1400" dirty="0"/>
-          </a:p>
-          <a:p>
-            <a:pPr indent="0" marL="0">
-              <a:buNone/>
-            </a:pPr>
-            <a:r>
-              <a:rPr lang="en-US" sz="1400" dirty="0">
-                <a:solidFill>
-                  <a:srgbClr val="6B6B6B"/>
-                </a:solidFill>
-                <a:latin typeface="Calibri" pitchFamily="34" charset="0"/>
-                <a:ea typeface="Calibri" pitchFamily="34" charset="-122"/>
-                <a:cs typeface="Calibri" pitchFamily="34" charset="-120"/>
-              </a:rPr>
-              <a:t>filtros, agenda, encuadre y mapa de medios</a:t>
-            </a:r>
-            <a:endParaRPr lang="en-US" sz="1400" dirty="0"/>
-          </a:p>
-        </p:txBody>
-      </p:sp>
-      <p:sp>
-        <p:nvSpPr>
-          <p:cNvPr id="11" name="Text 7"/>
-          <p:cNvSpPr txBox="1"/>
-          <p:nvPr/>
-        </p:nvSpPr>
-        <p:spPr>
-          <a:xfrm>
-            <a:off x="7498080" y="4261104"/>
-            <a:ext cx="4114800" cy="566928"/>
-          </a:xfrm>
-          <a:prstGeom prst="rect">
-            <a:avLst/>
-          </a:prstGeom>
-          <a:noFill/>
-          <a:ln/>
-        </p:spPr>
-        <p:txBody>
-          <a:bodyPr wrap="square" lIns="0" tIns="0" rIns="0" bIns="0" rtlCol="0" anchor="t"/>
-          <a:lstStyle/>
-          <a:p>
-            <a:pPr indent="0" marL="0">
-              <a:buNone/>
-            </a:pPr>
-            <a:r>
-              <a:rPr lang="en-US" sz="1400" b="1" dirty="0">
-                <a:solidFill>
-                  <a:srgbClr val="1A1A1A"/>
-                </a:solidFill>
-                <a:latin typeface="Calibri" pitchFamily="34" charset="0"/>
-                <a:ea typeface="Calibri" pitchFamily="34" charset="-122"/>
-                <a:cs typeface="Calibri" pitchFamily="34" charset="-120"/>
-              </a:rPr>
-              <a:t>Cómo titulan</a:t>
-            </a:r>
-            <a:endParaRPr lang="en-US" sz="1400" dirty="0"/>
-          </a:p>
-          <a:p>
-            <a:pPr indent="0" marL="0">
-              <a:buNone/>
-            </a:pPr>
-            <a:r>
-              <a:rPr lang="en-US" sz="1400" dirty="0">
-                <a:solidFill>
-                  <a:srgbClr val="6B6B6B"/>
-                </a:solidFill>
-                <a:latin typeface="Calibri" pitchFamily="34" charset="0"/>
-                <a:ea typeface="Calibri" pitchFamily="34" charset="-122"/>
-                <a:cs typeface="Calibri" pitchFamily="34" charset="-120"/>
-              </a:rPr>
-              <a:t>mapa, rankings y ejemplos</a:t>
-            </a:r>
-            <a:endParaRPr lang="en-US" sz="1400" dirty="0"/>
-          </a:p>
-        </p:txBody>
-      </p:sp>
-      <p:sp>
-        <p:nvSpPr>
-          <p:cNvPr id="12" name="Text 8"/>
-          <p:cNvSpPr txBox="1"/>
-          <p:nvPr/>
-        </p:nvSpPr>
-        <p:spPr>
-          <a:xfrm>
-            <a:off x="7498080" y="4846320"/>
-            <a:ext cx="4114800" cy="566928"/>
-          </a:xfrm>
-          <a:prstGeom prst="rect">
-            <a:avLst/>
-          </a:prstGeom>
-          <a:noFill/>
-          <a:ln/>
-        </p:spPr>
-        <p:txBody>
-          <a:bodyPr wrap="square" lIns="0" tIns="0" rIns="0" bIns="0" rtlCol="0" anchor="t"/>
-          <a:lstStyle/>
-          <a:p>
-            <a:pPr indent="0" marL="0">
-              <a:buNone/>
-            </a:pPr>
-            <a:r>
-              <a:rPr lang="en-US" sz="1400" b="1" dirty="0">
-                <a:solidFill>
-                  <a:srgbClr val="1A1A1A"/>
-                </a:solidFill>
-                <a:latin typeface="Calibri" pitchFamily="34" charset="0"/>
-                <a:ea typeface="Calibri" pitchFamily="34" charset="-122"/>
-                <a:cs typeface="Calibri" pitchFamily="34" charset="-120"/>
-              </a:rPr>
-              <a:t>Salud de datos</a:t>
-            </a:r>
-            <a:endParaRPr lang="en-US" sz="1400" dirty="0"/>
-          </a:p>
-          <a:p>
-            <a:pPr indent="0" marL="0">
-              <a:buNone/>
-            </a:pPr>
-            <a:r>
-              <a:rPr lang="en-US" sz="1400" dirty="0">
-                <a:solidFill>
-                  <a:srgbClr val="6B6B6B"/>
-                </a:solidFill>
-                <a:latin typeface="Calibri" pitchFamily="34" charset="0"/>
-                <a:ea typeface="Calibri" pitchFamily="34" charset="-122"/>
-                <a:cs typeface="Calibri" pitchFamily="34" charset="-120"/>
-              </a:rPr>
-              <a:t>fuentes y scraping</a:t>
-            </a:r>
-            <a:endParaRPr lang="en-US" sz="1400" dirty="0"/>
+              <a:t>Disposición por fuerzas, animada en el tablero</a:t>
+            </a:r>
+            <a:endParaRPr lang="en-US" sz="1500" dirty="0"/>
           </a:p>
         </p:txBody>
       </p:sp>
@@ -10254,7 +10466,7 @@
                   <a:schemeClr val="accent1"/>
                 </a:solidFill>
               </a:rPr>
-              <a:t>DEMO EN VIVO</a:t>
+              <a:t>EL TABLERO</a:t>
             </a:r>
             <a:endParaRPr lang="en-US" sz="1200" dirty="0"/>
           </a:p>
@@ -10295,34 +10507,53 @@
                 <a:ea typeface="Cambria" pitchFamily="34" charset="-122"/>
                 <a:cs typeface="Cambria" pitchFamily="34" charset="-120"/>
               </a:rPr>
-              <a:t>La base se consulta con SQL desde el navegador</a:t>
+              <a:t>Todo esto, en un tablero público que se actualiza solo</a:t>
             </a:r>
             <a:endParaRPr lang="en-US" sz="3200" dirty="0"/>
           </a:p>
         </p:txBody>
       </p:sp>
-      <p:sp>
-        <p:nvSpPr>
-          <p:cNvPr id="5" name="sql"/>
+      <p:pic>
+        <p:nvPicPr>
+          <p:cNvPr id="5" name="captura" descr="C:\Users\SBI\Documents\Martin Ceriotti Personales\Master Data Science\webmining\Web-Mining\docs\_fuentes\img\tablero-resumen.png">    </p:cNvPr>
+          <p:cNvPicPr>
+            <a:picLocks noChangeAspect="1"/>
+          </p:cNvPicPr>
+          <p:nvPr/>
+        </p:nvPicPr>
+        <p:blipFill>
+          <a:blip r:embed="rId1"/>
+          <a:stretch>
+            <a:fillRect/>
+          </a:stretch>
+        </p:blipFill>
+        <p:spPr>
+          <a:xfrm>
+            <a:off x="548640" y="1874520"/>
+            <a:ext cx="6583680" cy="4114800"/>
+          </a:xfrm>
+          <a:prstGeom prst="rect">
+            <a:avLst/>
+          </a:prstGeom>
+        </p:spPr>
+      </p:pic>
+      <p:sp>
+        <p:nvSpPr>
+          <p:cNvPr id="6" name="marco"/>
           <p:cNvSpPr/>
           <p:nvPr/>
         </p:nvSpPr>
         <p:spPr>
           <a:xfrm>
-            <a:off x="548640" y="2011680"/>
-            <a:ext cx="6400800" cy="3931920"/>
-          </a:xfrm>
-          <a:prstGeom prst="roundRect">
-            <a:avLst>
-              <a:gd name="adj" fmla="val 1860"/>
-            </a:avLst>
-          </a:prstGeom>
-          <a:solidFill>
-            <a:srgbClr val="F2F2F0"/>
-          </a:solidFill>
+            <a:off x="548640" y="1874520"/>
+            <a:ext cx="6583680" cy="4114800"/>
+          </a:xfrm>
+          <a:prstGeom prst="rect">
+            <a:avLst/>
+          </a:prstGeom>
           <a:ln w="12700">
             <a:solidFill>
-              <a:srgbClr val="F2F2F0"/>
+              <a:srgbClr val="D9D9D6"/>
             </a:solidFill>
             <a:prstDash val="solid"/>
           </a:ln>
@@ -10330,14 +10561,14 @@
       </p:sp>
       <p:sp>
         <p:nvSpPr>
-          <p:cNvPr id="6" name="Text 3"/>
+          <p:cNvPr id="7" name="Text 3"/>
           <p:cNvSpPr txBox="1"/>
           <p:nvPr/>
         </p:nvSpPr>
         <p:spPr>
           <a:xfrm>
-            <a:off x="868680" y="2331720"/>
-            <a:ext cx="5852160" cy="3383280"/>
+            <a:off x="7498080" y="1920240"/>
+            <a:ext cx="4114800" cy="566928"/>
           </a:xfrm>
           <a:prstGeom prst="rect">
             <a:avLst/>
@@ -10353,187 +10584,7 @@
               <a:buNone/>
             </a:pPr>
             <a:r>
-              <a:rPr lang="en-US" sz="1800" dirty="0">
-                <a:solidFill>
-                  <a:srgbClr val="1A1A1A"/>
-                </a:solidFill>
-                <a:latin typeface="Courier New" pitchFamily="34" charset="0"/>
-                <a:ea typeface="Courier New" pitchFamily="34" charset="-122"/>
-                <a:cs typeface="Courier New" pitchFamily="34" charset="-120"/>
-              </a:rPr>
-              <a:t>SELECT medio,</a:t>
-            </a:r>
-            <a:endParaRPr lang="en-US" sz="1800" dirty="0"/>
-          </a:p>
-          <a:p>
-            <a:pPr indent="0" marL="0">
-              <a:buNone/>
-            </a:pPr>
-            <a:r>
-              <a:rPr lang="en-US" sz="1800" dirty="0">
-                <a:solidFill>
-                  <a:srgbClr val="1A1A1A"/>
-                </a:solidFill>
-                <a:latin typeface="Courier New" pitchFamily="34" charset="0"/>
-                <a:ea typeface="Courier New" pitchFamily="34" charset="-122"/>
-                <a:cs typeface="Courier New" pitchFamily="34" charset="-120"/>
-              </a:rPr>
-              <a:t>  ROUND(100*AVG(cebo&gt;=1), 1) AS cebo,</a:t>
-            </a:r>
-            <a:endParaRPr lang="en-US" sz="1800" dirty="0"/>
-          </a:p>
-          <a:p>
-            <a:pPr indent="0" marL="0">
-              <a:buNone/>
-            </a:pPr>
-            <a:r>
-              <a:rPr lang="en-US" sz="1800" dirty="0">
-                <a:solidFill>
-                  <a:srgbClr val="1A1A1A"/>
-                </a:solidFill>
-                <a:latin typeface="Courier New" pitchFamily="34" charset="0"/>
-                <a:ea typeface="Courier New" pitchFamily="34" charset="-122"/>
-                <a:cs typeface="Courier New" pitchFamily="34" charset="-120"/>
-              </a:rPr>
-              <a:t>  ROUND(100*AVG(tono_auto='n'), 1) AS neg</a:t>
-            </a:r>
-            <a:endParaRPr lang="en-US" sz="1800" dirty="0"/>
-          </a:p>
-          <a:p>
-            <a:pPr indent="0" marL="0">
-              <a:buNone/>
-            </a:pPr>
-            <a:r>
-              <a:rPr lang="en-US" sz="1800" dirty="0">
-                <a:solidFill>
-                  <a:srgbClr val="1A1A1A"/>
-                </a:solidFill>
-                <a:latin typeface="Courier New" pitchFamily="34" charset="0"/>
-                <a:ea typeface="Courier New" pitchFamily="34" charset="-122"/>
-                <a:cs typeface="Courier New" pitchFamily="34" charset="-120"/>
-              </a:rPr>
-              <a:t>FROM items</a:t>
-            </a:r>
-            <a:endParaRPr lang="en-US" sz="1800" dirty="0"/>
-          </a:p>
-          <a:p>
-            <a:pPr indent="0" marL="0">
-              <a:buNone/>
-            </a:pPr>
-            <a:r>
-              <a:rPr lang="en-US" sz="1800" dirty="0">
-                <a:solidFill>
-                  <a:srgbClr val="1A1A1A"/>
-                </a:solidFill>
-                <a:latin typeface="Courier New" pitchFamily="34" charset="0"/>
-                <a:ea typeface="Courier New" pitchFamily="34" charset="-122"/>
-                <a:cs typeface="Courier New" pitchFamily="34" charset="-120"/>
-              </a:rPr>
-              <a:t>GROUP BY medio</a:t>
-            </a:r>
-            <a:endParaRPr lang="en-US" sz="1800" dirty="0"/>
-          </a:p>
-          <a:p>
-            <a:pPr indent="0" marL="0">
-              <a:buNone/>
-            </a:pPr>
-            <a:r>
-              <a:rPr lang="en-US" sz="1800" dirty="0">
-                <a:solidFill>
-                  <a:srgbClr val="1A1A1A"/>
-                </a:solidFill>
-                <a:latin typeface="Courier New" pitchFamily="34" charset="0"/>
-                <a:ea typeface="Courier New" pitchFamily="34" charset="-122"/>
-                <a:cs typeface="Courier New" pitchFamily="34" charset="-120"/>
-              </a:rPr>
-              <a:t>HAVING COUNT(*) &gt;= 50</a:t>
-            </a:r>
-            <a:endParaRPr lang="en-US" sz="1800" dirty="0"/>
-          </a:p>
-          <a:p>
-            <a:pPr indent="0" marL="0">
-              <a:buNone/>
-            </a:pPr>
-            <a:r>
-              <a:rPr lang="en-US" sz="1800" dirty="0">
-                <a:solidFill>
-                  <a:srgbClr val="1A1A1A"/>
-                </a:solidFill>
-                <a:latin typeface="Courier New" pitchFamily="34" charset="0"/>
-                <a:ea typeface="Courier New" pitchFamily="34" charset="-122"/>
-                <a:cs typeface="Courier New" pitchFamily="34" charset="-120"/>
-              </a:rPr>
-              <a:t>ORDER BY cebo DESC;</a:t>
-            </a:r>
-            <a:endParaRPr lang="en-US" sz="1800" dirty="0"/>
-          </a:p>
-        </p:txBody>
-      </p:sp>
-      <p:sp>
-        <p:nvSpPr>
-          <p:cNvPr id="7" name="Text 4"/>
-          <p:cNvSpPr txBox="1"/>
-          <p:nvPr/>
-        </p:nvSpPr>
-        <p:spPr>
-          <a:xfrm>
-            <a:off x="7406640" y="2057400"/>
-            <a:ext cx="548640" cy="640080"/>
-          </a:xfrm>
-          <a:prstGeom prst="rect">
-            <a:avLst/>
-          </a:prstGeom>
-          <a:noFill/>
-          <a:ln/>
-        </p:spPr>
-        <p:txBody>
-          <a:bodyPr wrap="square" lIns="0" tIns="0" rIns="0" bIns="0" rtlCol="0" anchor="t"/>
-          <a:lstStyle/>
-          <a:p>
-            <a:pPr indent="0" marL="0">
-              <a:buNone/>
-            </a:pPr>
-            <a:r>
-              <a:rPr lang="en-US" sz="3200" b="1" dirty="0">
-                <a:solidFill>
-                  <a:srgbClr val="C8102E"/>
-                </a:solidFill>
-                <a:latin typeface="Cambria" pitchFamily="34" charset="0"/>
-                <a:ea typeface="Cambria" pitchFamily="34" charset="-122"/>
-                <a:cs typeface="Cambria" pitchFamily="34" charset="-120"/>
-              </a:rPr>
-              <a:t>1</a:t>
-            </a:r>
-            <a:endParaRPr lang="en-US" sz="3200" dirty="0"/>
-          </a:p>
-        </p:txBody>
-      </p:sp>
-      <p:sp>
-        <p:nvSpPr>
-          <p:cNvPr id="8" name="Text 5"/>
-          <p:cNvSpPr txBox="1"/>
-          <p:nvPr/>
-        </p:nvSpPr>
-        <p:spPr>
-          <a:xfrm>
-            <a:off x="8046720" y="2194560"/>
-            <a:ext cx="3566160" cy="548640"/>
-          </a:xfrm>
-          <a:prstGeom prst="rect">
-            <a:avLst/>
-          </a:prstGeom>
-          <a:noFill/>
-          <a:ln/>
-        </p:spPr>
-        <p:txBody>
-          <a:bodyPr wrap="square" lIns="0" tIns="0" rIns="0" bIns="0" rtlCol="0" anchor="t"/>
-          <a:lstStyle/>
-          <a:p>
-            <a:pPr indent="0" marL="0">
-              <a:buNone/>
-            </a:pPr>
-            <a:r>
-              <a:rPr lang="en-US" sz="1700" dirty="0">
+              <a:rPr lang="en-US" sz="1400" b="1" dirty="0">
                 <a:solidFill>
                   <a:srgbClr val="1A1A1A"/>
                 </a:solidFill>
@@ -10541,100 +10592,39 @@
                 <a:ea typeface="Calibri" pitchFamily="34" charset="-122"/>
                 <a:cs typeface="Calibri" pitchFamily="34" charset="-120"/>
               </a:rPr>
-              <a:t>Abrir el tablero (QR al final)</a:t>
-            </a:r>
-            <a:endParaRPr lang="en-US" sz="1700" dirty="0"/>
-          </a:p>
-        </p:txBody>
-      </p:sp>
-      <p:sp>
-        <p:nvSpPr>
-          <p:cNvPr id="9" name="Text 6"/>
-          <p:cNvSpPr txBox="1"/>
-          <p:nvPr/>
-        </p:nvSpPr>
-        <p:spPr>
-          <a:xfrm>
-            <a:off x="7406640" y="2971800"/>
-            <a:ext cx="548640" cy="640080"/>
-          </a:xfrm>
-          <a:prstGeom prst="rect">
-            <a:avLst/>
-          </a:prstGeom>
-          <a:noFill/>
-          <a:ln/>
-        </p:spPr>
-        <p:txBody>
-          <a:bodyPr wrap="square" lIns="0" tIns="0" rIns="0" bIns="0" rtlCol="0" anchor="t"/>
-          <a:lstStyle/>
-          <a:p>
-            <a:pPr indent="0" marL="0">
-              <a:buNone/>
-            </a:pPr>
-            <a:r>
-              <a:rPr lang="en-US" sz="3200" b="1" dirty="0">
-                <a:solidFill>
-                  <a:srgbClr val="C8102E"/>
-                </a:solidFill>
-                <a:latin typeface="Cambria" pitchFamily="34" charset="0"/>
-                <a:ea typeface="Cambria" pitchFamily="34" charset="-122"/>
-                <a:cs typeface="Cambria" pitchFamily="34" charset="-120"/>
-              </a:rPr>
-              <a:t>2</a:t>
-            </a:r>
-            <a:endParaRPr lang="en-US" sz="3200" dirty="0"/>
-          </a:p>
-        </p:txBody>
-      </p:sp>
-      <p:sp>
-        <p:nvSpPr>
-          <p:cNvPr id="10" name="Text 7"/>
-          <p:cNvSpPr txBox="1"/>
-          <p:nvPr/>
-        </p:nvSpPr>
-        <p:spPr>
-          <a:xfrm>
-            <a:off x="8046720" y="3108960"/>
-            <a:ext cx="3566160" cy="548640"/>
-          </a:xfrm>
-          <a:prstGeom prst="rect">
-            <a:avLst/>
-          </a:prstGeom>
-          <a:noFill/>
-          <a:ln/>
-        </p:spPr>
-        <p:txBody>
-          <a:bodyPr wrap="square" lIns="0" tIns="0" rIns="0" bIns="0" rtlCol="0" anchor="t"/>
-          <a:lstStyle/>
-          <a:p>
-            <a:pPr indent="0" marL="0">
-              <a:buNone/>
-            </a:pPr>
-            <a:r>
-              <a:rPr lang="en-US" sz="1700" dirty="0">
-                <a:solidFill>
-                  <a:srgbClr val="1A1A1A"/>
+              <a:t>Resumen</a:t>
+            </a:r>
+            <a:endParaRPr lang="en-US" sz="1400" dirty="0"/>
+          </a:p>
+          <a:p>
+            <a:pPr indent="0" marL="0">
+              <a:buNone/>
+            </a:pPr>
+            <a:r>
+              <a:rPr lang="en-US" sz="1400" dirty="0">
+                <a:solidFill>
+                  <a:srgbClr val="6B6B6B"/>
                 </a:solidFill>
                 <a:latin typeface="Calibri" pitchFamily="34" charset="0"/>
                 <a:ea typeface="Calibri" pitchFamily="34" charset="-122"/>
                 <a:cs typeface="Calibri" pitchFamily="34" charset="-120"/>
               </a:rPr>
-              <a:t>Tocar "Explorar la base (SQL)"</a:t>
-            </a:r>
-            <a:endParaRPr lang="en-US" sz="1700" dirty="0"/>
-          </a:p>
-        </p:txBody>
-      </p:sp>
-      <p:sp>
-        <p:nvSpPr>
-          <p:cNvPr id="11" name="Text 8"/>
+              <a:t>termómetro, resumen del día y noticias compartidas</a:t>
+            </a:r>
+            <a:endParaRPr lang="en-US" sz="1400" dirty="0"/>
+          </a:p>
+        </p:txBody>
+      </p:sp>
+      <p:sp>
+        <p:nvSpPr>
+          <p:cNvPr id="8" name="Text 4"/>
           <p:cNvSpPr txBox="1"/>
           <p:nvPr/>
         </p:nvSpPr>
         <p:spPr>
           <a:xfrm>
-            <a:off x="7406640" y="3886200"/>
-            <a:ext cx="548640" cy="640080"/>
+            <a:off x="7498080" y="2505456"/>
+            <a:ext cx="4114800" cy="566928"/>
           </a:xfrm>
           <a:prstGeom prst="rect">
             <a:avLst/>
@@ -10650,46 +10640,7 @@
               <a:buNone/>
             </a:pPr>
             <a:r>
-              <a:rPr lang="en-US" sz="3200" b="1" dirty="0">
-                <a:solidFill>
-                  <a:srgbClr val="C8102E"/>
-                </a:solidFill>
-                <a:latin typeface="Cambria" pitchFamily="34" charset="0"/>
-                <a:ea typeface="Cambria" pitchFamily="34" charset="-122"/>
-                <a:cs typeface="Cambria" pitchFamily="34" charset="-120"/>
-              </a:rPr>
-              <a:t>3</a:t>
-            </a:r>
-            <a:endParaRPr lang="en-US" sz="3200" dirty="0"/>
-          </a:p>
-        </p:txBody>
-      </p:sp>
-      <p:sp>
-        <p:nvSpPr>
-          <p:cNvPr id="12" name="Text 9"/>
-          <p:cNvSpPr txBox="1"/>
-          <p:nvPr/>
-        </p:nvSpPr>
-        <p:spPr>
-          <a:xfrm>
-            <a:off x="8046720" y="4023360"/>
-            <a:ext cx="3566160" cy="548640"/>
-          </a:xfrm>
-          <a:prstGeom prst="rect">
-            <a:avLst/>
-          </a:prstGeom>
-          <a:noFill/>
-          <a:ln/>
-        </p:spPr>
-        <p:txBody>
-          <a:bodyPr wrap="square" lIns="0" tIns="0" rIns="0" bIns="0" rtlCol="0" anchor="t"/>
-          <a:lstStyle/>
-          <a:p>
-            <a:pPr indent="0" marL="0">
-              <a:buNone/>
-            </a:pPr>
-            <a:r>
-              <a:rPr lang="en-US" sz="1700" dirty="0">
+              <a:rPr lang="en-US" sz="1400" b="1" dirty="0">
                 <a:solidFill>
                   <a:srgbClr val="1A1A1A"/>
                 </a:solidFill>
@@ -10697,87 +10648,250 @@
                 <a:ea typeface="Calibri" pitchFamily="34" charset="-122"/>
                 <a:cs typeface="Calibri" pitchFamily="34" charset="-120"/>
               </a:rPr>
-              <a:t>Elegir la tabla items o escribir una consulta</a:t>
-            </a:r>
-            <a:endParaRPr lang="en-US" sz="1700" dirty="0"/>
-          </a:p>
-        </p:txBody>
-      </p:sp>
-      <p:sp>
-        <p:nvSpPr>
-          <p:cNvPr id="13" name="Text 10"/>
-          <p:cNvSpPr txBox="1"/>
-          <p:nvPr/>
-        </p:nvSpPr>
-        <p:spPr>
-          <a:xfrm>
-            <a:off x="7406640" y="4800600"/>
-            <a:ext cx="548640" cy="640080"/>
-          </a:xfrm>
-          <a:prstGeom prst="rect">
-            <a:avLst/>
-          </a:prstGeom>
-          <a:noFill/>
-          <a:ln/>
-        </p:spPr>
-        <p:txBody>
-          <a:bodyPr wrap="square" lIns="0" tIns="0" rIns="0" bIns="0" rtlCol="0" anchor="t"/>
-          <a:lstStyle/>
-          <a:p>
-            <a:pPr indent="0" marL="0">
-              <a:buNone/>
-            </a:pPr>
-            <a:r>
-              <a:rPr lang="en-US" sz="3200" b="1" dirty="0">
-                <a:solidFill>
-                  <a:srgbClr val="C8102E"/>
-                </a:solidFill>
-                <a:latin typeface="Cambria" pitchFamily="34" charset="0"/>
-                <a:ea typeface="Cambria" pitchFamily="34" charset="-122"/>
-                <a:cs typeface="Cambria" pitchFamily="34" charset="-120"/>
-              </a:rPr>
-              <a:t>4</a:t>
-            </a:r>
-            <a:endParaRPr lang="en-US" sz="3200" dirty="0"/>
-          </a:p>
-        </p:txBody>
-      </p:sp>
-      <p:sp>
-        <p:nvSpPr>
-          <p:cNvPr id="14" name="Text 11"/>
-          <p:cNvSpPr txBox="1"/>
-          <p:nvPr/>
-        </p:nvSpPr>
-        <p:spPr>
-          <a:xfrm>
-            <a:off x="8046720" y="4937760"/>
-            <a:ext cx="3566160" cy="548640"/>
-          </a:xfrm>
-          <a:prstGeom prst="rect">
-            <a:avLst/>
-          </a:prstGeom>
-          <a:noFill/>
-          <a:ln/>
-        </p:spPr>
-        <p:txBody>
-          <a:bodyPr wrap="square" lIns="0" tIns="0" rIns="0" bIns="0" rtlCol="0" anchor="t"/>
-          <a:lstStyle/>
-          <a:p>
-            <a:pPr indent="0" marL="0">
-              <a:buNone/>
-            </a:pPr>
-            <a:r>
-              <a:rPr lang="en-US" sz="1700" dirty="0">
-                <a:solidFill>
-                  <a:srgbClr val="1A1A1A"/>
+              <a:t>Titulares</a:t>
+            </a:r>
+            <a:endParaRPr lang="en-US" sz="1400" dirty="0"/>
+          </a:p>
+          <a:p>
+            <a:pPr indent="0" marL="0">
+              <a:buNone/>
+            </a:pPr>
+            <a:r>
+              <a:rPr lang="en-US" sz="1400" dirty="0">
+                <a:solidFill>
+                  <a:srgbClr val="6B6B6B"/>
                 </a:solidFill>
                 <a:latin typeface="Calibri" pitchFamily="34" charset="0"/>
                 <a:ea typeface="Calibri" pitchFamily="34" charset="-122"/>
                 <a:cs typeface="Calibri" pitchFamily="34" charset="-120"/>
               </a:rPr>
-              <a:t>Descargar la base o el CSV si se quiere</a:t>
-            </a:r>
-            <a:endParaRPr lang="en-US" sz="1700" dirty="0"/>
+              <a:t>buscador por texto o por significado y notas parecidas</a:t>
+            </a:r>
+            <a:endParaRPr lang="en-US" sz="1400" dirty="0"/>
+          </a:p>
+        </p:txBody>
+      </p:sp>
+      <p:sp>
+        <p:nvSpPr>
+          <p:cNvPr id="9" name="Text 5"/>
+          <p:cNvSpPr txBox="1"/>
+          <p:nvPr/>
+        </p:nvSpPr>
+        <p:spPr>
+          <a:xfrm>
+            <a:off x="7498080" y="3090672"/>
+            <a:ext cx="4114800" cy="566928"/>
+          </a:xfrm>
+          <a:prstGeom prst="rect">
+            <a:avLst/>
+          </a:prstGeom>
+          <a:noFill/>
+          <a:ln/>
+        </p:spPr>
+        <p:txBody>
+          <a:bodyPr wrap="square" lIns="0" tIns="0" rIns="0" bIns="0" rtlCol="0" anchor="t"/>
+          <a:lstStyle/>
+          <a:p>
+            <a:pPr indent="0" marL="0">
+              <a:buNone/>
+            </a:pPr>
+            <a:r>
+              <a:rPr lang="en-US" sz="1400" b="1" dirty="0">
+                <a:solidFill>
+                  <a:srgbClr val="1A1A1A"/>
+                </a:solidFill>
+                <a:latin typeface="Calibri" pitchFamily="34" charset="0"/>
+                <a:ea typeface="Calibri" pitchFamily="34" charset="-122"/>
+                <a:cs typeface="Calibri" pitchFamily="34" charset="-120"/>
+              </a:rPr>
+              <a:t>Monitor</a:t>
+            </a:r>
+            <a:endParaRPr lang="en-US" sz="1400" dirty="0"/>
+          </a:p>
+          <a:p>
+            <a:pPr indent="0" marL="0">
+              <a:buNone/>
+            </a:pPr>
+            <a:r>
+              <a:rPr lang="en-US" sz="1400" dirty="0">
+                <a:solidFill>
+                  <a:srgbClr val="6B6B6B"/>
+                </a:solidFill>
+                <a:latin typeface="Calibri" pitchFamily="34" charset="0"/>
+                <a:ea typeface="Calibri" pitchFamily="34" charset="-122"/>
+                <a:cs typeface="Calibri" pitchFamily="34" charset="-120"/>
+              </a:rPr>
+              <a:t>figuras nuevas (NER) y seguimiento de una persona</a:t>
+            </a:r>
+            <a:endParaRPr lang="en-US" sz="1400" dirty="0"/>
+          </a:p>
+        </p:txBody>
+      </p:sp>
+      <p:sp>
+        <p:nvSpPr>
+          <p:cNvPr id="10" name="Text 6"/>
+          <p:cNvSpPr txBox="1"/>
+          <p:nvPr/>
+        </p:nvSpPr>
+        <p:spPr>
+          <a:xfrm>
+            <a:off x="7498080" y="3675888"/>
+            <a:ext cx="4114800" cy="566928"/>
+          </a:xfrm>
+          <a:prstGeom prst="rect">
+            <a:avLst/>
+          </a:prstGeom>
+          <a:noFill/>
+          <a:ln/>
+        </p:spPr>
+        <p:txBody>
+          <a:bodyPr wrap="square" lIns="0" tIns="0" rIns="0" bIns="0" rtlCol="0" anchor="t"/>
+          <a:lstStyle/>
+          <a:p>
+            <a:pPr indent="0" marL="0">
+              <a:buNone/>
+            </a:pPr>
+            <a:r>
+              <a:rPr lang="en-US" sz="1400" b="1" dirty="0">
+                <a:solidFill>
+                  <a:srgbClr val="1A1A1A"/>
+                </a:solidFill>
+                <a:latin typeface="Calibri" pitchFamily="34" charset="0"/>
+                <a:ea typeface="Calibri" pitchFamily="34" charset="-122"/>
+                <a:cs typeface="Calibri" pitchFamily="34" charset="-120"/>
+              </a:rPr>
+              <a:t>Análisis</a:t>
+            </a:r>
+            <a:endParaRPr lang="en-US" sz="1400" dirty="0"/>
+          </a:p>
+          <a:p>
+            <a:pPr indent="0" marL="0">
+              <a:buNone/>
+            </a:pPr>
+            <a:r>
+              <a:rPr lang="en-US" sz="1400" dirty="0">
+                <a:solidFill>
+                  <a:srgbClr val="6B6B6B"/>
+                </a:solidFill>
+                <a:latin typeface="Calibri" pitchFamily="34" charset="0"/>
+                <a:ea typeface="Calibri" pitchFamily="34" charset="-122"/>
+                <a:cs typeface="Calibri" pitchFamily="34" charset="-120"/>
+              </a:rPr>
+              <a:t>filtros, agenda, encuadre y mapa de medios</a:t>
+            </a:r>
+            <a:endParaRPr lang="en-US" sz="1400" dirty="0"/>
+          </a:p>
+        </p:txBody>
+      </p:sp>
+      <p:sp>
+        <p:nvSpPr>
+          <p:cNvPr id="11" name="Text 7"/>
+          <p:cNvSpPr txBox="1"/>
+          <p:nvPr/>
+        </p:nvSpPr>
+        <p:spPr>
+          <a:xfrm>
+            <a:off x="7498080" y="4261104"/>
+            <a:ext cx="4114800" cy="566928"/>
+          </a:xfrm>
+          <a:prstGeom prst="rect">
+            <a:avLst/>
+          </a:prstGeom>
+          <a:noFill/>
+          <a:ln/>
+        </p:spPr>
+        <p:txBody>
+          <a:bodyPr wrap="square" lIns="0" tIns="0" rIns="0" bIns="0" rtlCol="0" anchor="t"/>
+          <a:lstStyle/>
+          <a:p>
+            <a:pPr indent="0" marL="0">
+              <a:buNone/>
+            </a:pPr>
+            <a:r>
+              <a:rPr lang="en-US" sz="1400" b="1" dirty="0">
+                <a:solidFill>
+                  <a:srgbClr val="1A1A1A"/>
+                </a:solidFill>
+                <a:latin typeface="Calibri" pitchFamily="34" charset="0"/>
+                <a:ea typeface="Calibri" pitchFamily="34" charset="-122"/>
+                <a:cs typeface="Calibri" pitchFamily="34" charset="-120"/>
+              </a:rPr>
+              <a:t>Cómo titulan</a:t>
+            </a:r>
+            <a:endParaRPr lang="en-US" sz="1400" dirty="0"/>
+          </a:p>
+          <a:p>
+            <a:pPr indent="0" marL="0">
+              <a:buNone/>
+            </a:pPr>
+            <a:r>
+              <a:rPr lang="en-US" sz="1400" dirty="0">
+                <a:solidFill>
+                  <a:srgbClr val="6B6B6B"/>
+                </a:solidFill>
+                <a:latin typeface="Calibri" pitchFamily="34" charset="0"/>
+                <a:ea typeface="Calibri" pitchFamily="34" charset="-122"/>
+                <a:cs typeface="Calibri" pitchFamily="34" charset="-120"/>
+              </a:rPr>
+              <a:t>mapa, rankings y ejemplos</a:t>
+            </a:r>
+            <a:endParaRPr lang="en-US" sz="1400" dirty="0"/>
+          </a:p>
+        </p:txBody>
+      </p:sp>
+      <p:sp>
+        <p:nvSpPr>
+          <p:cNvPr id="12" name="Text 8"/>
+          <p:cNvSpPr txBox="1"/>
+          <p:nvPr/>
+        </p:nvSpPr>
+        <p:spPr>
+          <a:xfrm>
+            <a:off x="7498080" y="4846320"/>
+            <a:ext cx="4114800" cy="566928"/>
+          </a:xfrm>
+          <a:prstGeom prst="rect">
+            <a:avLst/>
+          </a:prstGeom>
+          <a:noFill/>
+          <a:ln/>
+        </p:spPr>
+        <p:txBody>
+          <a:bodyPr wrap="square" lIns="0" tIns="0" rIns="0" bIns="0" rtlCol="0" anchor="t"/>
+          <a:lstStyle/>
+          <a:p>
+            <a:pPr indent="0" marL="0">
+              <a:buNone/>
+            </a:pPr>
+            <a:r>
+              <a:rPr lang="en-US" sz="1400" b="1" dirty="0">
+                <a:solidFill>
+                  <a:srgbClr val="1A1A1A"/>
+                </a:solidFill>
+                <a:latin typeface="Calibri" pitchFamily="34" charset="0"/>
+                <a:ea typeface="Calibri" pitchFamily="34" charset="-122"/>
+                <a:cs typeface="Calibri" pitchFamily="34" charset="-120"/>
+              </a:rPr>
+              <a:t>Salud de datos</a:t>
+            </a:r>
+            <a:endParaRPr lang="en-US" sz="1400" dirty="0"/>
+          </a:p>
+          <a:p>
+            <a:pPr indent="0" marL="0">
+              <a:buNone/>
+            </a:pPr>
+            <a:r>
+              <a:rPr lang="en-US" sz="1400" dirty="0">
+                <a:solidFill>
+                  <a:srgbClr val="6B6B6B"/>
+                </a:solidFill>
+                <a:latin typeface="Calibri" pitchFamily="34" charset="0"/>
+                <a:ea typeface="Calibri" pitchFamily="34" charset="-122"/>
+                <a:cs typeface="Calibri" pitchFamily="34" charset="-120"/>
+              </a:rPr>
+              <a:t>fuentes y scraping</a:t>
+            </a:r>
+            <a:endParaRPr lang="en-US" sz="1400" dirty="0"/>
           </a:p>
         </p:txBody>
       </p:sp>
@@ -10883,7 +10997,7 @@
                   <a:schemeClr val="accent1"/>
                 </a:solidFill>
               </a:rPr>
-              <a:t>HERRAMIENTAS</a:t>
+              <a:t>DEMO EN VIVO</a:t>
             </a:r>
             <a:endParaRPr lang="en-US" sz="1200" dirty="0"/>
           </a:p>
@@ -10924,7 +11038,7 @@
                 <a:ea typeface="Cambria" pitchFamily="34" charset="-122"/>
                 <a:cs typeface="Cambria" pitchFamily="34" charset="-120"/>
               </a:rPr>
-              <a:t>Un stack simple, gratuito y reproducible</a:t>
+              <a:t>La base se consulta con SQL desde el navegador</a:t>
             </a:r>
             <a:endParaRPr lang="en-US" sz="3200" dirty="0"/>
           </a:p>
@@ -10932,18 +11046,18 @@
       </p:sp>
       <p:sp>
         <p:nvSpPr>
-          <p:cNvPr id="5" name="stack-0"/>
+          <p:cNvPr id="5" name="sql"/>
           <p:cNvSpPr/>
           <p:nvPr/>
         </p:nvSpPr>
         <p:spPr>
           <a:xfrm>
             <a:off x="548640" y="2011680"/>
-            <a:ext cx="5394960" cy="1143000"/>
+            <a:ext cx="6400800" cy="3931920"/>
           </a:xfrm>
           <a:prstGeom prst="roundRect">
             <a:avLst>
-              <a:gd name="adj" fmla="val 6400"/>
+              <a:gd name="adj" fmla="val 1860"/>
             </a:avLst>
           </a:prstGeom>
           <a:solidFill>
@@ -10965,8 +11079,8 @@
         </p:nvSpPr>
         <p:spPr>
           <a:xfrm>
-            <a:off x="822960" y="2148840"/>
-            <a:ext cx="4846320" cy="365760"/>
+            <a:off x="868680" y="2331720"/>
+            <a:ext cx="5852160" cy="3383280"/>
           </a:xfrm>
           <a:prstGeom prst="rect">
             <a:avLst/>
@@ -10982,15 +11096,195 @@
               <a:buNone/>
             </a:pPr>
             <a:r>
-              <a:rPr lang="en-US" sz="1700" b="1" dirty="0">
+              <a:rPr lang="en-US" sz="1800" dirty="0">
+                <a:solidFill>
+                  <a:srgbClr val="1A1A1A"/>
+                </a:solidFill>
+                <a:latin typeface="Courier New" pitchFamily="34" charset="0"/>
+                <a:ea typeface="Courier New" pitchFamily="34" charset="-122"/>
+                <a:cs typeface="Courier New" pitchFamily="34" charset="-120"/>
+              </a:rPr>
+              <a:t>SELECT medio,</a:t>
+            </a:r>
+            <a:endParaRPr lang="en-US" sz="1800" dirty="0"/>
+          </a:p>
+          <a:p>
+            <a:pPr indent="0" marL="0">
+              <a:buNone/>
+            </a:pPr>
+            <a:r>
+              <a:rPr lang="en-US" sz="1800" dirty="0">
+                <a:solidFill>
+                  <a:srgbClr val="1A1A1A"/>
+                </a:solidFill>
+                <a:latin typeface="Courier New" pitchFamily="34" charset="0"/>
+                <a:ea typeface="Courier New" pitchFamily="34" charset="-122"/>
+                <a:cs typeface="Courier New" pitchFamily="34" charset="-120"/>
+              </a:rPr>
+              <a:t>  ROUND(100*AVG(cebo&gt;=1), 1) AS cebo,</a:t>
+            </a:r>
+            <a:endParaRPr lang="en-US" sz="1800" dirty="0"/>
+          </a:p>
+          <a:p>
+            <a:pPr indent="0" marL="0">
+              <a:buNone/>
+            </a:pPr>
+            <a:r>
+              <a:rPr lang="en-US" sz="1800" dirty="0">
+                <a:solidFill>
+                  <a:srgbClr val="1A1A1A"/>
+                </a:solidFill>
+                <a:latin typeface="Courier New" pitchFamily="34" charset="0"/>
+                <a:ea typeface="Courier New" pitchFamily="34" charset="-122"/>
+                <a:cs typeface="Courier New" pitchFamily="34" charset="-120"/>
+              </a:rPr>
+              <a:t>  ROUND(100*AVG(tono_auto='n'), 1) AS neg</a:t>
+            </a:r>
+            <a:endParaRPr lang="en-US" sz="1800" dirty="0"/>
+          </a:p>
+          <a:p>
+            <a:pPr indent="0" marL="0">
+              <a:buNone/>
+            </a:pPr>
+            <a:r>
+              <a:rPr lang="en-US" sz="1800" dirty="0">
+                <a:solidFill>
+                  <a:srgbClr val="1A1A1A"/>
+                </a:solidFill>
+                <a:latin typeface="Courier New" pitchFamily="34" charset="0"/>
+                <a:ea typeface="Courier New" pitchFamily="34" charset="-122"/>
+                <a:cs typeface="Courier New" pitchFamily="34" charset="-120"/>
+              </a:rPr>
+              <a:t>FROM items</a:t>
+            </a:r>
+            <a:endParaRPr lang="en-US" sz="1800" dirty="0"/>
+          </a:p>
+          <a:p>
+            <a:pPr indent="0" marL="0">
+              <a:buNone/>
+            </a:pPr>
+            <a:r>
+              <a:rPr lang="en-US" sz="1800" dirty="0">
+                <a:solidFill>
+                  <a:srgbClr val="1A1A1A"/>
+                </a:solidFill>
+                <a:latin typeface="Courier New" pitchFamily="34" charset="0"/>
+                <a:ea typeface="Courier New" pitchFamily="34" charset="-122"/>
+                <a:cs typeface="Courier New" pitchFamily="34" charset="-120"/>
+              </a:rPr>
+              <a:t>GROUP BY medio</a:t>
+            </a:r>
+            <a:endParaRPr lang="en-US" sz="1800" dirty="0"/>
+          </a:p>
+          <a:p>
+            <a:pPr indent="0" marL="0">
+              <a:buNone/>
+            </a:pPr>
+            <a:r>
+              <a:rPr lang="en-US" sz="1800" dirty="0">
+                <a:solidFill>
+                  <a:srgbClr val="1A1A1A"/>
+                </a:solidFill>
+                <a:latin typeface="Courier New" pitchFamily="34" charset="0"/>
+                <a:ea typeface="Courier New" pitchFamily="34" charset="-122"/>
+                <a:cs typeface="Courier New" pitchFamily="34" charset="-120"/>
+              </a:rPr>
+              <a:t>HAVING COUNT(*) &gt;= 50</a:t>
+            </a:r>
+            <a:endParaRPr lang="en-US" sz="1800" dirty="0"/>
+          </a:p>
+          <a:p>
+            <a:pPr indent="0" marL="0">
+              <a:buNone/>
+            </a:pPr>
+            <a:r>
+              <a:rPr lang="en-US" sz="1800" dirty="0">
+                <a:solidFill>
+                  <a:srgbClr val="1A1A1A"/>
+                </a:solidFill>
+                <a:latin typeface="Courier New" pitchFamily="34" charset="0"/>
+                <a:ea typeface="Courier New" pitchFamily="34" charset="-122"/>
+                <a:cs typeface="Courier New" pitchFamily="34" charset="-120"/>
+              </a:rPr>
+              <a:t>ORDER BY cebo DESC;</a:t>
+            </a:r>
+            <a:endParaRPr lang="en-US" sz="1800" dirty="0"/>
+          </a:p>
+        </p:txBody>
+      </p:sp>
+      <p:sp>
+        <p:nvSpPr>
+          <p:cNvPr id="7" name="Text 4"/>
+          <p:cNvSpPr txBox="1"/>
+          <p:nvPr/>
+        </p:nvSpPr>
+        <p:spPr>
+          <a:xfrm>
+            <a:off x="7406640" y="2057400"/>
+            <a:ext cx="548640" cy="640080"/>
+          </a:xfrm>
+          <a:prstGeom prst="rect">
+            <a:avLst/>
+          </a:prstGeom>
+          <a:noFill/>
+          <a:ln/>
+        </p:spPr>
+        <p:txBody>
+          <a:bodyPr wrap="square" lIns="0" tIns="0" rIns="0" bIns="0" rtlCol="0" anchor="t"/>
+          <a:lstStyle/>
+          <a:p>
+            <a:pPr indent="0" marL="0">
+              <a:buNone/>
+            </a:pPr>
+            <a:r>
+              <a:rPr lang="en-US" sz="3200" b="1" dirty="0">
                 <a:solidFill>
                   <a:srgbClr val="C8102E"/>
+                </a:solidFill>
+                <a:latin typeface="Cambria" pitchFamily="34" charset="0"/>
+                <a:ea typeface="Cambria" pitchFamily="34" charset="-122"/>
+                <a:cs typeface="Cambria" pitchFamily="34" charset="-120"/>
+              </a:rPr>
+              <a:t>1</a:t>
+            </a:r>
+            <a:endParaRPr lang="en-US" sz="3200" dirty="0"/>
+          </a:p>
+        </p:txBody>
+      </p:sp>
+      <p:sp>
+        <p:nvSpPr>
+          <p:cNvPr id="8" name="Text 5"/>
+          <p:cNvSpPr txBox="1"/>
+          <p:nvPr/>
+        </p:nvSpPr>
+        <p:spPr>
+          <a:xfrm>
+            <a:off x="8046720" y="2194560"/>
+            <a:ext cx="3566160" cy="548640"/>
+          </a:xfrm>
+          <a:prstGeom prst="rect">
+            <a:avLst/>
+          </a:prstGeom>
+          <a:noFill/>
+          <a:ln/>
+        </p:spPr>
+        <p:txBody>
+          <a:bodyPr wrap="square" lIns="0" tIns="0" rIns="0" bIns="0" rtlCol="0" anchor="t"/>
+          <a:lstStyle/>
+          <a:p>
+            <a:pPr indent="0" marL="0">
+              <a:buNone/>
+            </a:pPr>
+            <a:r>
+              <a:rPr lang="en-US" sz="1700" dirty="0">
+                <a:solidFill>
+                  <a:srgbClr val="1A1A1A"/>
                 </a:solidFill>
                 <a:latin typeface="Calibri" pitchFamily="34" charset="0"/>
                 <a:ea typeface="Calibri" pitchFamily="34" charset="-122"/>
                 <a:cs typeface="Calibri" pitchFamily="34" charset="-120"/>
               </a:rPr>
-              <a:t>Recolección</a:t>
+              <a:t>Abrir el tablero (QR al final)</a:t>
             </a:r>
             <a:endParaRPr lang="en-US" sz="1700" dirty="0"/>
           </a:p>
@@ -10998,14 +11292,14 @@
       </p:sp>
       <p:sp>
         <p:nvSpPr>
-          <p:cNvPr id="7" name="Text 4"/>
+          <p:cNvPr id="9" name="Text 6"/>
           <p:cNvSpPr txBox="1"/>
           <p:nvPr/>
         </p:nvSpPr>
         <p:spPr>
           <a:xfrm>
-            <a:off x="822960" y="2542032"/>
-            <a:ext cx="4937760" cy="548640"/>
+            <a:off x="7406640" y="2971800"/>
+            <a:ext cx="548640" cy="640080"/>
           </a:xfrm>
           <a:prstGeom prst="rect">
             <a:avLst/>
@@ -11021,7 +11315,46 @@
               <a:buNone/>
             </a:pPr>
             <a:r>
-              <a:rPr lang="en-US" sz="1500" dirty="0">
+              <a:rPr lang="en-US" sz="3200" b="1" dirty="0">
+                <a:solidFill>
+                  <a:srgbClr val="C8102E"/>
+                </a:solidFill>
+                <a:latin typeface="Cambria" pitchFamily="34" charset="0"/>
+                <a:ea typeface="Cambria" pitchFamily="34" charset="-122"/>
+                <a:cs typeface="Cambria" pitchFamily="34" charset="-120"/>
+              </a:rPr>
+              <a:t>2</a:t>
+            </a:r>
+            <a:endParaRPr lang="en-US" sz="3200" dirty="0"/>
+          </a:p>
+        </p:txBody>
+      </p:sp>
+      <p:sp>
+        <p:nvSpPr>
+          <p:cNvPr id="10" name="Text 7"/>
+          <p:cNvSpPr txBox="1"/>
+          <p:nvPr/>
+        </p:nvSpPr>
+        <p:spPr>
+          <a:xfrm>
+            <a:off x="8046720" y="3108960"/>
+            <a:ext cx="3566160" cy="548640"/>
+          </a:xfrm>
+          <a:prstGeom prst="rect">
+            <a:avLst/>
+          </a:prstGeom>
+          <a:noFill/>
+          <a:ln/>
+        </p:spPr>
+        <p:txBody>
+          <a:bodyPr wrap="square" lIns="0" tIns="0" rIns="0" bIns="0" rtlCol="0" anchor="t"/>
+          <a:lstStyle/>
+          <a:p>
+            <a:pPr indent="0" marL="0">
+              <a:buNone/>
+            </a:pPr>
+            <a:r>
+              <a:rPr lang="en-US" sz="1700" dirty="0">
                 <a:solidFill>
                   <a:srgbClr val="1A1A1A"/>
                 </a:solidFill>
@@ -11029,49 +11362,22 @@
                 <a:ea typeface="Calibri" pitchFamily="34" charset="-122"/>
                 <a:cs typeface="Calibri" pitchFamily="34" charset="-120"/>
               </a:rPr>
-              <a:t>requests · feedparser · googlenewsdecoder · urllib.robotparser</a:t>
-            </a:r>
-            <a:endParaRPr lang="en-US" sz="1500" dirty="0"/>
-          </a:p>
-        </p:txBody>
-      </p:sp>
-      <p:sp>
-        <p:nvSpPr>
-          <p:cNvPr id="8" name="stack-1"/>
-          <p:cNvSpPr/>
-          <p:nvPr/>
-        </p:nvSpPr>
-        <p:spPr>
-          <a:xfrm>
-            <a:off x="6217920" y="2011680"/>
-            <a:ext cx="5394960" cy="1143000"/>
-          </a:xfrm>
-          <a:prstGeom prst="roundRect">
-            <a:avLst>
-              <a:gd name="adj" fmla="val 6400"/>
-            </a:avLst>
-          </a:prstGeom>
-          <a:solidFill>
-            <a:srgbClr val="F2F2F0"/>
-          </a:solidFill>
-          <a:ln w="12700">
-            <a:solidFill>
-              <a:srgbClr val="F2F2F0"/>
-            </a:solidFill>
-            <a:prstDash val="solid"/>
-          </a:ln>
-        </p:spPr>
-      </p:sp>
-      <p:sp>
-        <p:nvSpPr>
-          <p:cNvPr id="9" name="Text 6"/>
+              <a:t>Tocar "Explorar la base (SQL)"</a:t>
+            </a:r>
+            <a:endParaRPr lang="en-US" sz="1700" dirty="0"/>
+          </a:p>
+        </p:txBody>
+      </p:sp>
+      <p:sp>
+        <p:nvSpPr>
+          <p:cNvPr id="11" name="Text 8"/>
           <p:cNvSpPr txBox="1"/>
           <p:nvPr/>
         </p:nvSpPr>
         <p:spPr>
           <a:xfrm>
-            <a:off x="6492240" y="2148840"/>
-            <a:ext cx="4846320" cy="365760"/>
+            <a:off x="7406640" y="3886200"/>
+            <a:ext cx="548640" cy="640080"/>
           </a:xfrm>
           <a:prstGeom prst="rect">
             <a:avLst/>
@@ -11087,15 +11393,54 @@
               <a:buNone/>
             </a:pPr>
             <a:r>
-              <a:rPr lang="en-US" sz="1700" b="1" dirty="0">
+              <a:rPr lang="en-US" sz="3200" b="1" dirty="0">
                 <a:solidFill>
                   <a:srgbClr val="C8102E"/>
+                </a:solidFill>
+                <a:latin typeface="Cambria" pitchFamily="34" charset="0"/>
+                <a:ea typeface="Cambria" pitchFamily="34" charset="-122"/>
+                <a:cs typeface="Cambria" pitchFamily="34" charset="-120"/>
+              </a:rPr>
+              <a:t>3</a:t>
+            </a:r>
+            <a:endParaRPr lang="en-US" sz="3200" dirty="0"/>
+          </a:p>
+        </p:txBody>
+      </p:sp>
+      <p:sp>
+        <p:nvSpPr>
+          <p:cNvPr id="12" name="Text 9"/>
+          <p:cNvSpPr txBox="1"/>
+          <p:nvPr/>
+        </p:nvSpPr>
+        <p:spPr>
+          <a:xfrm>
+            <a:off x="8046720" y="4023360"/>
+            <a:ext cx="3566160" cy="548640"/>
+          </a:xfrm>
+          <a:prstGeom prst="rect">
+            <a:avLst/>
+          </a:prstGeom>
+          <a:noFill/>
+          <a:ln/>
+        </p:spPr>
+        <p:txBody>
+          <a:bodyPr wrap="square" lIns="0" tIns="0" rIns="0" bIns="0" rtlCol="0" anchor="t"/>
+          <a:lstStyle/>
+          <a:p>
+            <a:pPr indent="0" marL="0">
+              <a:buNone/>
+            </a:pPr>
+            <a:r>
+              <a:rPr lang="en-US" sz="1700" dirty="0">
+                <a:solidFill>
+                  <a:srgbClr val="1A1A1A"/>
                 </a:solidFill>
                 <a:latin typeface="Calibri" pitchFamily="34" charset="0"/>
                 <a:ea typeface="Calibri" pitchFamily="34" charset="-122"/>
                 <a:cs typeface="Calibri" pitchFamily="34" charset="-120"/>
               </a:rPr>
-              <a:t>Extracción</a:t>
+              <a:t>Elegir la tabla items o escribir una consulta</a:t>
             </a:r>
             <a:endParaRPr lang="en-US" sz="1700" dirty="0"/>
           </a:p>
@@ -11103,14 +11448,14 @@
       </p:sp>
       <p:sp>
         <p:nvSpPr>
-          <p:cNvPr id="10" name="Text 7"/>
+          <p:cNvPr id="13" name="Text 10"/>
           <p:cNvSpPr txBox="1"/>
           <p:nvPr/>
         </p:nvSpPr>
         <p:spPr>
           <a:xfrm>
-            <a:off x="6492240" y="2542032"/>
-            <a:ext cx="4937760" cy="548640"/>
+            <a:off x="7406640" y="4800600"/>
+            <a:ext cx="548640" cy="640080"/>
           </a:xfrm>
           <a:prstGeom prst="rect">
             <a:avLst/>
@@ -11126,7 +11471,46 @@
               <a:buNone/>
             </a:pPr>
             <a:r>
-              <a:rPr lang="en-US" sz="1500" dirty="0">
+              <a:rPr lang="en-US" sz="3200" b="1" dirty="0">
+                <a:solidFill>
+                  <a:srgbClr val="C8102E"/>
+                </a:solidFill>
+                <a:latin typeface="Cambria" pitchFamily="34" charset="0"/>
+                <a:ea typeface="Cambria" pitchFamily="34" charset="-122"/>
+                <a:cs typeface="Cambria" pitchFamily="34" charset="-120"/>
+              </a:rPr>
+              <a:t>4</a:t>
+            </a:r>
+            <a:endParaRPr lang="en-US" sz="3200" dirty="0"/>
+          </a:p>
+        </p:txBody>
+      </p:sp>
+      <p:sp>
+        <p:nvSpPr>
+          <p:cNvPr id="14" name="Text 11"/>
+          <p:cNvSpPr txBox="1"/>
+          <p:nvPr/>
+        </p:nvSpPr>
+        <p:spPr>
+          <a:xfrm>
+            <a:off x="8046720" y="4937760"/>
+            <a:ext cx="3566160" cy="548640"/>
+          </a:xfrm>
+          <a:prstGeom prst="rect">
+            <a:avLst/>
+          </a:prstGeom>
+          <a:noFill/>
+          <a:ln/>
+        </p:spPr>
+        <p:txBody>
+          <a:bodyPr wrap="square" lIns="0" tIns="0" rIns="0" bIns="0" rtlCol="0" anchor="t"/>
+          <a:lstStyle/>
+          <a:p>
+            <a:pPr indent="0" marL="0">
+              <a:buNone/>
+            </a:pPr>
+            <a:r>
+              <a:rPr lang="en-US" sz="1700" dirty="0">
                 <a:solidFill>
                   <a:srgbClr val="1A1A1A"/>
                 </a:solidFill>
@@ -11134,429 +11518,9 @@
                 <a:ea typeface="Calibri" pitchFamily="34" charset="-122"/>
                 <a:cs typeface="Calibri" pitchFamily="34" charset="-120"/>
               </a:rPr>
-              <a:t>expresiones regulares · JSON-LD (schema.org) · HTML</a:t>
-            </a:r>
-            <a:endParaRPr lang="en-US" sz="1500" dirty="0"/>
-          </a:p>
-        </p:txBody>
-      </p:sp>
-      <p:sp>
-        <p:nvSpPr>
-          <p:cNvPr id="11" name="stack-2"/>
-          <p:cNvSpPr/>
-          <p:nvPr/>
-        </p:nvSpPr>
-        <p:spPr>
-          <a:xfrm>
-            <a:off x="548640" y="3337560"/>
-            <a:ext cx="5394960" cy="1143000"/>
-          </a:xfrm>
-          <a:prstGeom prst="roundRect">
-            <a:avLst>
-              <a:gd name="adj" fmla="val 6400"/>
-            </a:avLst>
-          </a:prstGeom>
-          <a:solidFill>
-            <a:srgbClr val="F2F2F0"/>
-          </a:solidFill>
-          <a:ln w="12700">
-            <a:solidFill>
-              <a:srgbClr val="F2F2F0"/>
-            </a:solidFill>
-            <a:prstDash val="solid"/>
-          </a:ln>
-        </p:spPr>
-      </p:sp>
-      <p:sp>
-        <p:nvSpPr>
-          <p:cNvPr id="12" name="Text 9"/>
-          <p:cNvSpPr txBox="1"/>
-          <p:nvPr/>
-        </p:nvSpPr>
-        <p:spPr>
-          <a:xfrm>
-            <a:off x="822960" y="3474720"/>
-            <a:ext cx="4846320" cy="365760"/>
-          </a:xfrm>
-          <a:prstGeom prst="rect">
-            <a:avLst/>
-          </a:prstGeom>
-          <a:noFill/>
-          <a:ln/>
-        </p:spPr>
-        <p:txBody>
-          <a:bodyPr wrap="square" lIns="0" tIns="0" rIns="0" bIns="0" rtlCol="0" anchor="t"/>
-          <a:lstStyle/>
-          <a:p>
-            <a:pPr indent="0" marL="0">
-              <a:buNone/>
-            </a:pPr>
-            <a:r>
-              <a:rPr lang="en-US" sz="1700" b="1" dirty="0">
-                <a:solidFill>
-                  <a:srgbClr val="C8102E"/>
-                </a:solidFill>
-                <a:latin typeface="Calibri" pitchFamily="34" charset="0"/>
-                <a:ea typeface="Calibri" pitchFamily="34" charset="-122"/>
-                <a:cs typeface="Calibri" pitchFamily="34" charset="-120"/>
-              </a:rPr>
-              <a:t>Lenguaje</a:t>
+              <a:t>Descargar la base o el CSV si se quiere</a:t>
             </a:r>
             <a:endParaRPr lang="en-US" sz="1700" dirty="0"/>
-          </a:p>
-        </p:txBody>
-      </p:sp>
-      <p:sp>
-        <p:nvSpPr>
-          <p:cNvPr id="13" name="Text 10"/>
-          <p:cNvSpPr txBox="1"/>
-          <p:nvPr/>
-        </p:nvSpPr>
-        <p:spPr>
-          <a:xfrm>
-            <a:off x="822960" y="3867912"/>
-            <a:ext cx="4937760" cy="548640"/>
-          </a:xfrm>
-          <a:prstGeom prst="rect">
-            <a:avLst/>
-          </a:prstGeom>
-          <a:noFill/>
-          <a:ln/>
-        </p:spPr>
-        <p:txBody>
-          <a:bodyPr wrap="square" lIns="0" tIns="0" rIns="0" bIns="0" rtlCol="0" anchor="t"/>
-          <a:lstStyle/>
-          <a:p>
-            <a:pPr indent="0" marL="0">
-              <a:buNone/>
-            </a:pPr>
-            <a:r>
-              <a:rPr lang="en-US" sz="1500" dirty="0">
-                <a:solidFill>
-                  <a:srgbClr val="1A1A1A"/>
-                </a:solidFill>
-                <a:latin typeface="Calibri" pitchFamily="34" charset="0"/>
-                <a:ea typeface="Calibri" pitchFamily="34" charset="-122"/>
-                <a:cs typeface="Calibri" pitchFamily="34" charset="-120"/>
-              </a:rPr>
-              <a:t>bolsa de palabras · Naive Bayes · regresión logística · XLM-RoBERTa (PyTorch, transformers)</a:t>
-            </a:r>
-            <a:endParaRPr lang="en-US" sz="1500" dirty="0"/>
-          </a:p>
-        </p:txBody>
-      </p:sp>
-      <p:sp>
-        <p:nvSpPr>
-          <p:cNvPr id="14" name="stack-3"/>
-          <p:cNvSpPr/>
-          <p:nvPr/>
-        </p:nvSpPr>
-        <p:spPr>
-          <a:xfrm>
-            <a:off x="6217920" y="3337560"/>
-            <a:ext cx="5394960" cy="1143000"/>
-          </a:xfrm>
-          <a:prstGeom prst="roundRect">
-            <a:avLst>
-              <a:gd name="adj" fmla="val 6400"/>
-            </a:avLst>
-          </a:prstGeom>
-          <a:solidFill>
-            <a:srgbClr val="F2F2F0"/>
-          </a:solidFill>
-          <a:ln w="12700">
-            <a:solidFill>
-              <a:srgbClr val="F2F2F0"/>
-            </a:solidFill>
-            <a:prstDash val="solid"/>
-          </a:ln>
-        </p:spPr>
-      </p:sp>
-      <p:sp>
-        <p:nvSpPr>
-          <p:cNvPr id="15" name="Text 12"/>
-          <p:cNvSpPr txBox="1"/>
-          <p:nvPr/>
-        </p:nvSpPr>
-        <p:spPr>
-          <a:xfrm>
-            <a:off x="6492240" y="3474720"/>
-            <a:ext cx="4846320" cy="365760"/>
-          </a:xfrm>
-          <a:prstGeom prst="rect">
-            <a:avLst/>
-          </a:prstGeom>
-          <a:noFill/>
-          <a:ln/>
-        </p:spPr>
-        <p:txBody>
-          <a:bodyPr wrap="square" lIns="0" tIns="0" rIns="0" bIns="0" rtlCol="0" anchor="t"/>
-          <a:lstStyle/>
-          <a:p>
-            <a:pPr indent="0" marL="0">
-              <a:buNone/>
-            </a:pPr>
-            <a:r>
-              <a:rPr lang="en-US" sz="1700" b="1" dirty="0">
-                <a:solidFill>
-                  <a:srgbClr val="C8102E"/>
-                </a:solidFill>
-                <a:latin typeface="Calibri" pitchFamily="34" charset="0"/>
-                <a:ea typeface="Calibri" pitchFamily="34" charset="-122"/>
-                <a:cs typeface="Calibri" pitchFamily="34" charset="-120"/>
-              </a:rPr>
-              <a:t>Datos</a:t>
-            </a:r>
-            <a:endParaRPr lang="en-US" sz="1700" dirty="0"/>
-          </a:p>
-        </p:txBody>
-      </p:sp>
-      <p:sp>
-        <p:nvSpPr>
-          <p:cNvPr id="16" name="Text 13"/>
-          <p:cNvSpPr txBox="1"/>
-          <p:nvPr/>
-        </p:nvSpPr>
-        <p:spPr>
-          <a:xfrm>
-            <a:off x="6492240" y="3867912"/>
-            <a:ext cx="4937760" cy="548640"/>
-          </a:xfrm>
-          <a:prstGeom prst="rect">
-            <a:avLst/>
-          </a:prstGeom>
-          <a:noFill/>
-          <a:ln/>
-        </p:spPr>
-        <p:txBody>
-          <a:bodyPr wrap="square" lIns="0" tIns="0" rIns="0" bIns="0" rtlCol="0" anchor="t"/>
-          <a:lstStyle/>
-          <a:p>
-            <a:pPr indent="0" marL="0">
-              <a:buNone/>
-            </a:pPr>
-            <a:r>
-              <a:rPr lang="en-US" sz="1500" dirty="0">
-                <a:solidFill>
-                  <a:srgbClr val="1A1A1A"/>
-                </a:solidFill>
-                <a:latin typeface="Calibri" pitchFamily="34" charset="0"/>
-                <a:ea typeface="Calibri" pitchFamily="34" charset="-122"/>
-                <a:cs typeface="Calibri" pitchFamily="34" charset="-120"/>
-              </a:rPr>
-              <a:t>SQLite · CSV · Datasette Lite · notebook con pandas</a:t>
-            </a:r>
-            <a:endParaRPr lang="en-US" sz="1500" dirty="0"/>
-          </a:p>
-        </p:txBody>
-      </p:sp>
-      <p:sp>
-        <p:nvSpPr>
-          <p:cNvPr id="17" name="stack-4"/>
-          <p:cNvSpPr/>
-          <p:nvPr/>
-        </p:nvSpPr>
-        <p:spPr>
-          <a:xfrm>
-            <a:off x="548640" y="4663440"/>
-            <a:ext cx="5394960" cy="1143000"/>
-          </a:xfrm>
-          <a:prstGeom prst="roundRect">
-            <a:avLst>
-              <a:gd name="adj" fmla="val 6400"/>
-            </a:avLst>
-          </a:prstGeom>
-          <a:solidFill>
-            <a:srgbClr val="F2F2F0"/>
-          </a:solidFill>
-          <a:ln w="12700">
-            <a:solidFill>
-              <a:srgbClr val="F2F2F0"/>
-            </a:solidFill>
-            <a:prstDash val="solid"/>
-          </a:ln>
-        </p:spPr>
-      </p:sp>
-      <p:sp>
-        <p:nvSpPr>
-          <p:cNvPr id="18" name="Text 15"/>
-          <p:cNvSpPr txBox="1"/>
-          <p:nvPr/>
-        </p:nvSpPr>
-        <p:spPr>
-          <a:xfrm>
-            <a:off x="822960" y="4800600"/>
-            <a:ext cx="4846320" cy="365760"/>
-          </a:xfrm>
-          <a:prstGeom prst="rect">
-            <a:avLst/>
-          </a:prstGeom>
-          <a:noFill/>
-          <a:ln/>
-        </p:spPr>
-        <p:txBody>
-          <a:bodyPr wrap="square" lIns="0" tIns="0" rIns="0" bIns="0" rtlCol="0" anchor="t"/>
-          <a:lstStyle/>
-          <a:p>
-            <a:pPr indent="0" marL="0">
-              <a:buNone/>
-            </a:pPr>
-            <a:r>
-              <a:rPr lang="en-US" sz="1700" b="1" dirty="0">
-                <a:solidFill>
-                  <a:srgbClr val="C8102E"/>
-                </a:solidFill>
-                <a:latin typeface="Calibri" pitchFamily="34" charset="0"/>
-                <a:ea typeface="Calibri" pitchFamily="34" charset="-122"/>
-                <a:cs typeface="Calibri" pitchFamily="34" charset="-120"/>
-              </a:rPr>
-              <a:t>Automatización</a:t>
-            </a:r>
-            <a:endParaRPr lang="en-US" sz="1700" dirty="0"/>
-          </a:p>
-        </p:txBody>
-      </p:sp>
-      <p:sp>
-        <p:nvSpPr>
-          <p:cNvPr id="19" name="Text 16"/>
-          <p:cNvSpPr txBox="1"/>
-          <p:nvPr/>
-        </p:nvSpPr>
-        <p:spPr>
-          <a:xfrm>
-            <a:off x="822960" y="5193792"/>
-            <a:ext cx="4937760" cy="548640"/>
-          </a:xfrm>
-          <a:prstGeom prst="rect">
-            <a:avLst/>
-          </a:prstGeom>
-          <a:noFill/>
-          <a:ln/>
-        </p:spPr>
-        <p:txBody>
-          <a:bodyPr wrap="square" lIns="0" tIns="0" rIns="0" bIns="0" rtlCol="0" anchor="t"/>
-          <a:lstStyle/>
-          <a:p>
-            <a:pPr indent="0" marL="0">
-              <a:buNone/>
-            </a:pPr>
-            <a:r>
-              <a:rPr lang="en-US" sz="1500" dirty="0">
-                <a:solidFill>
-                  <a:srgbClr val="1A1A1A"/>
-                </a:solidFill>
-                <a:latin typeface="Calibri" pitchFamily="34" charset="0"/>
-                <a:ea typeface="Calibri" pitchFamily="34" charset="-122"/>
-                <a:cs typeface="Calibri" pitchFamily="34" charset="-120"/>
-              </a:rPr>
-              <a:t>GitHub Actions (cada hora) · rama de datos</a:t>
-            </a:r>
-            <a:endParaRPr lang="en-US" sz="1500" dirty="0"/>
-          </a:p>
-        </p:txBody>
-      </p:sp>
-      <p:sp>
-        <p:nvSpPr>
-          <p:cNvPr id="20" name="stack-5"/>
-          <p:cNvSpPr/>
-          <p:nvPr/>
-        </p:nvSpPr>
-        <p:spPr>
-          <a:xfrm>
-            <a:off x="6217920" y="4663440"/>
-            <a:ext cx="5394960" cy="1143000"/>
-          </a:xfrm>
-          <a:prstGeom prst="roundRect">
-            <a:avLst>
-              <a:gd name="adj" fmla="val 6400"/>
-            </a:avLst>
-          </a:prstGeom>
-          <a:solidFill>
-            <a:srgbClr val="F2F2F0"/>
-          </a:solidFill>
-          <a:ln w="12700">
-            <a:solidFill>
-              <a:srgbClr val="F2F2F0"/>
-            </a:solidFill>
-            <a:prstDash val="solid"/>
-          </a:ln>
-        </p:spPr>
-      </p:sp>
-      <p:sp>
-        <p:nvSpPr>
-          <p:cNvPr id="21" name="Text 18"/>
-          <p:cNvSpPr txBox="1"/>
-          <p:nvPr/>
-        </p:nvSpPr>
-        <p:spPr>
-          <a:xfrm>
-            <a:off x="6492240" y="4800600"/>
-            <a:ext cx="4846320" cy="365760"/>
-          </a:xfrm>
-          <a:prstGeom prst="rect">
-            <a:avLst/>
-          </a:prstGeom>
-          <a:noFill/>
-          <a:ln/>
-        </p:spPr>
-        <p:txBody>
-          <a:bodyPr wrap="square" lIns="0" tIns="0" rIns="0" bIns="0" rtlCol="0" anchor="t"/>
-          <a:lstStyle/>
-          <a:p>
-            <a:pPr indent="0" marL="0">
-              <a:buNone/>
-            </a:pPr>
-            <a:r>
-              <a:rPr lang="en-US" sz="1700" b="1" dirty="0">
-                <a:solidFill>
-                  <a:srgbClr val="C8102E"/>
-                </a:solidFill>
-                <a:latin typeface="Calibri" pitchFamily="34" charset="0"/>
-                <a:ea typeface="Calibri" pitchFamily="34" charset="-122"/>
-                <a:cs typeface="Calibri" pitchFamily="34" charset="-120"/>
-              </a:rPr>
-              <a:t>Visualización</a:t>
-            </a:r>
-            <a:endParaRPr lang="en-US" sz="1700" dirty="0"/>
-          </a:p>
-        </p:txBody>
-      </p:sp>
-      <p:sp>
-        <p:nvSpPr>
-          <p:cNvPr id="22" name="Text 19"/>
-          <p:cNvSpPr txBox="1"/>
-          <p:nvPr/>
-        </p:nvSpPr>
-        <p:spPr>
-          <a:xfrm>
-            <a:off x="6492240" y="5193792"/>
-            <a:ext cx="4937760" cy="548640"/>
-          </a:xfrm>
-          <a:prstGeom prst="rect">
-            <a:avLst/>
-          </a:prstGeom>
-          <a:noFill/>
-          <a:ln/>
-        </p:spPr>
-        <p:txBody>
-          <a:bodyPr wrap="square" lIns="0" tIns="0" rIns="0" bIns="0" rtlCol="0" anchor="t"/>
-          <a:lstStyle/>
-          <a:p>
-            <a:pPr indent="0" marL="0">
-              <a:buNone/>
-            </a:pPr>
-            <a:r>
-              <a:rPr lang="en-US" sz="1500" dirty="0">
-                <a:solidFill>
-                  <a:srgbClr val="1A1A1A"/>
-                </a:solidFill>
-                <a:latin typeface="Calibri" pitchFamily="34" charset="0"/>
-                <a:ea typeface="Calibri" pitchFamily="34" charset="-122"/>
-                <a:cs typeface="Calibri" pitchFamily="34" charset="-120"/>
-              </a:rPr>
-              <a:t>HTML, CSS y JavaScript sin frameworks · GitHub Pages</a:t>
-            </a:r>
-            <a:endParaRPr lang="en-US" sz="1500" dirty="0"/>
           </a:p>
         </p:txBody>
       </p:sp>
@@ -11662,7 +11626,7 @@
                   <a:schemeClr val="accent1"/>
                 </a:solidFill>
               </a:rPr>
-              <a:t>LO QUE SIGUE</a:t>
+              <a:t>HERRAMIENTAS</a:t>
             </a:r>
             <a:endParaRPr lang="en-US" sz="1200" dirty="0"/>
           </a:p>
@@ -11703,7 +11667,7 @@
                 <a:ea typeface="Cambria" pitchFamily="34" charset="-122"/>
                 <a:cs typeface="Cambria" pitchFamily="34" charset="-120"/>
               </a:rPr>
-              <a:t>Limitaciones honestas y próximos pasos</a:t>
+              <a:t>Un stack simple, gratuito y reproducible</a:t>
             </a:r>
             <a:endParaRPr lang="en-US" sz="3200" dirty="0"/>
           </a:p>
@@ -11711,18 +11675,18 @@
       </p:sp>
       <p:sp>
         <p:nvSpPr>
-          <p:cNvPr id="5" name="cierre-0"/>
+          <p:cNvPr id="5" name="stack-0"/>
           <p:cNvSpPr/>
           <p:nvPr/>
         </p:nvSpPr>
         <p:spPr>
           <a:xfrm>
             <a:off x="548640" y="2011680"/>
-            <a:ext cx="5394960" cy="3931920"/>
+            <a:ext cx="5394960" cy="1143000"/>
           </a:xfrm>
           <a:prstGeom prst="roundRect">
             <a:avLst>
-              <a:gd name="adj" fmla="val 1860"/>
+              <a:gd name="adj" fmla="val 6400"/>
             </a:avLst>
           </a:prstGeom>
           <a:solidFill>
@@ -11736,79 +11700,55 @@
           </a:ln>
         </p:spPr>
       </p:sp>
-      <p:pic>
-        <p:nvPicPr>
-          <p:cNvPr id="6" name="Image 0" descr="preencoded.png">    </p:cNvPr>
-          <p:cNvPicPr>
-            <a:picLocks noChangeAspect="1"/>
-          </p:cNvPicPr>
-          <p:nvPr/>
-        </p:nvPicPr>
-        <p:blipFill>
-          <a:blip r:embed="rId1"/>
-          <a:stretch>
-            <a:fillRect/>
-          </a:stretch>
-        </p:blipFill>
-        <p:spPr>
-          <a:xfrm>
-            <a:off x="868680" y="2286000"/>
-            <a:ext cx="411480" cy="411480"/>
-          </a:xfrm>
-          <a:prstGeom prst="rect">
-            <a:avLst/>
-          </a:prstGeom>
-        </p:spPr>
-      </p:pic>
-      <p:sp>
-        <p:nvSpPr>
-          <p:cNvPr id="7" name="Text 3"/>
+      <p:sp>
+        <p:nvSpPr>
+          <p:cNvPr id="6" name="Text 3"/>
           <p:cNvSpPr txBox="1"/>
           <p:nvPr/>
         </p:nvSpPr>
         <p:spPr>
           <a:xfrm>
-            <a:off x="1463040" y="2286000"/>
-            <a:ext cx="4114800" cy="411480"/>
-          </a:xfrm>
-          <a:prstGeom prst="rect">
-            <a:avLst/>
-          </a:prstGeom>
-          <a:noFill/>
-          <a:ln/>
-        </p:spPr>
-        <p:txBody>
-          <a:bodyPr wrap="square" lIns="0" tIns="0" rIns="0" bIns="0" rtlCol="0" anchor="ctr"/>
-          <a:lstStyle/>
-          <a:p>
-            <a:pPr indent="0" marL="0">
-              <a:buNone/>
-            </a:pPr>
-            <a:r>
-              <a:rPr lang="en-US" sz="2200" b="1" dirty="0">
-                <a:solidFill>
-                  <a:srgbClr val="1A1A1A"/>
+            <a:off x="822960" y="2148840"/>
+            <a:ext cx="4846320" cy="365760"/>
+          </a:xfrm>
+          <a:prstGeom prst="rect">
+            <a:avLst/>
+          </a:prstGeom>
+          <a:noFill/>
+          <a:ln/>
+        </p:spPr>
+        <p:txBody>
+          <a:bodyPr wrap="square" lIns="0" tIns="0" rIns="0" bIns="0" rtlCol="0" anchor="t"/>
+          <a:lstStyle/>
+          <a:p>
+            <a:pPr indent="0" marL="0">
+              <a:buNone/>
+            </a:pPr>
+            <a:r>
+              <a:rPr lang="en-US" sz="1700" b="1" dirty="0">
+                <a:solidFill>
+                  <a:srgbClr val="C8102E"/>
                 </a:solidFill>
                 <a:latin typeface="Calibri" pitchFamily="34" charset="0"/>
                 <a:ea typeface="Calibri" pitchFamily="34" charset="-122"/>
                 <a:cs typeface="Calibri" pitchFamily="34" charset="-120"/>
               </a:rPr>
-              <a:t>Limitaciones</a:t>
-            </a:r>
-            <a:endParaRPr lang="en-US" sz="2200" dirty="0"/>
-          </a:p>
-        </p:txBody>
-      </p:sp>
-      <p:sp>
-        <p:nvSpPr>
-          <p:cNvPr id="8" name="Text 4"/>
+              <a:t>Recolección</a:t>
+            </a:r>
+            <a:endParaRPr lang="en-US" sz="1700" dirty="0"/>
+          </a:p>
+        </p:txBody>
+      </p:sp>
+      <p:sp>
+        <p:nvSpPr>
+          <p:cNvPr id="7" name="Text 4"/>
           <p:cNvSpPr txBox="1"/>
           <p:nvPr/>
         </p:nvSpPr>
         <p:spPr>
           <a:xfrm>
-            <a:off x="868680" y="2971800"/>
-            <a:ext cx="4800600" cy="2743200"/>
+            <a:off x="822960" y="2542032"/>
+            <a:ext cx="4937760" cy="548640"/>
           </a:xfrm>
           <a:prstGeom prst="rect">
             <a:avLst/>
@@ -11820,15 +11760,11 @@
           <a:bodyPr wrap="square" lIns="0" tIns="0" rIns="0" bIns="0" rtlCol="0" anchor="t"/>
           <a:lstStyle/>
           <a:p>
-            <a:pPr marL="342900" indent="-342900">
-              <a:spcAft>
-                <a:spcPts val="1000"/>
-              </a:spcAft>
-              <a:buSzPct val="100000"/>
-              <a:buChar char="•"/>
-            </a:pPr>
-            <a:r>
-              <a:rPr lang="en-US" sz="1600" dirty="0">
+            <a:pPr indent="0" marL="0">
+              <a:buNone/>
+            </a:pPr>
+            <a:r>
+              <a:rPr lang="en-US" sz="1500" dirty="0">
                 <a:solidFill>
                   <a:srgbClr val="1A1A1A"/>
                 </a:solidFill>
@@ -11836,89 +11772,26 @@
                 <a:ea typeface="Calibri" pitchFamily="34" charset="-122"/>
                 <a:cs typeface="Calibri" pitchFamily="34" charset="-120"/>
               </a:rPr>
-              <a:t>Tono del título y la bajada, no de la nota completa</a:t>
-            </a:r>
-            <a:endParaRPr lang="en-US" sz="1600" dirty="0"/>
-          </a:p>
-          <a:p>
-            <a:pPr marL="342900" indent="-342900">
-              <a:spcAft>
-                <a:spcPts val="1000"/>
-              </a:spcAft>
-              <a:buSzPct val="100000"/>
-              <a:buChar char="•"/>
-            </a:pPr>
-            <a:r>
-              <a:rPr lang="en-US" sz="1600" dirty="0">
-                <a:solidFill>
-                  <a:srgbClr val="1A1A1A"/>
-                </a:solidFill>
-                <a:latin typeface="Calibri" pitchFamily="34" charset="0"/>
-                <a:ea typeface="Calibri" pitchFamily="34" charset="-122"/>
-                <a:cs typeface="Calibri" pitchFamily="34" charset="-120"/>
-              </a:rPr>
-              <a:t>77% de acierto con 340 etiquetas de un solo criterio</a:t>
-            </a:r>
-            <a:endParaRPr lang="en-US" sz="1600" dirty="0"/>
-          </a:p>
-          <a:p>
-            <a:pPr marL="342900" indent="-342900">
-              <a:spcAft>
-                <a:spcPts val="1000"/>
-              </a:spcAft>
-              <a:buSzPct val="100000"/>
-              <a:buChar char="•"/>
-            </a:pPr>
-            <a:r>
-              <a:rPr lang="en-US" sz="1600" dirty="0">
-                <a:solidFill>
-                  <a:srgbClr val="1A1A1A"/>
-                </a:solidFill>
-                <a:latin typeface="Calibri" pitchFamily="34" charset="0"/>
-                <a:ea typeface="Calibri" pitchFamily="34" charset="-122"/>
-                <a:cs typeface="Calibri" pitchFamily="34" charset="-120"/>
-              </a:rPr>
-              <a:t>Pocos días de histórico: los rankings se estabilizan con semanas</a:t>
-            </a:r>
-            <a:endParaRPr lang="en-US" sz="1600" dirty="0"/>
-          </a:p>
-          <a:p>
-            <a:pPr marL="342900" indent="-342900">
-              <a:spcAft>
-                <a:spcPts val="1000"/>
-              </a:spcAft>
-              <a:buSzPct val="100000"/>
-              <a:buChar char="•"/>
-            </a:pPr>
-            <a:r>
-              <a:rPr lang="en-US" sz="1600" dirty="0">
-                <a:solidFill>
-                  <a:srgbClr val="1A1A1A"/>
-                </a:solidFill>
-                <a:latin typeface="Calibri" pitchFamily="34" charset="0"/>
-                <a:ea typeface="Calibri" pitchFamily="34" charset="-122"/>
-                <a:cs typeface="Calibri" pitchFamily="34" charset="-120"/>
-              </a:rPr>
-              <a:t>Temas y entidades por diccionario requieren mantenimiento</a:t>
-            </a:r>
-            <a:endParaRPr lang="en-US" sz="1600" dirty="0"/>
-          </a:p>
-        </p:txBody>
-      </p:sp>
-      <p:sp>
-        <p:nvSpPr>
-          <p:cNvPr id="9" name="cierre-1"/>
+              <a:t>requests · feedparser · googlenewsdecoder · urllib.robotparser</a:t>
+            </a:r>
+            <a:endParaRPr lang="en-US" sz="1500" dirty="0"/>
+          </a:p>
+        </p:txBody>
+      </p:sp>
+      <p:sp>
+        <p:nvSpPr>
+          <p:cNvPr id="8" name="stack-1"/>
           <p:cNvSpPr/>
           <p:nvPr/>
         </p:nvSpPr>
         <p:spPr>
           <a:xfrm>
             <a:off x="6217920" y="2011680"/>
-            <a:ext cx="5394960" cy="3931920"/>
+            <a:ext cx="5394960" cy="1143000"/>
           </a:xfrm>
           <a:prstGeom prst="roundRect">
             <a:avLst>
-              <a:gd name="adj" fmla="val 1860"/>
+              <a:gd name="adj" fmla="val 6400"/>
             </a:avLst>
           </a:prstGeom>
           <a:solidFill>
@@ -11932,79 +11805,55 @@
           </a:ln>
         </p:spPr>
       </p:sp>
-      <p:pic>
-        <p:nvPicPr>
-          <p:cNvPr id="10" name="Image 1" descr="preencoded.png">    </p:cNvPr>
-          <p:cNvPicPr>
-            <a:picLocks noChangeAspect="1"/>
-          </p:cNvPicPr>
-          <p:nvPr/>
-        </p:nvPicPr>
-        <p:blipFill>
-          <a:blip r:embed="rId2"/>
-          <a:stretch>
-            <a:fillRect/>
-          </a:stretch>
-        </p:blipFill>
-        <p:spPr>
-          <a:xfrm>
-            <a:off x="6537960" y="2286000"/>
-            <a:ext cx="411480" cy="411480"/>
-          </a:xfrm>
-          <a:prstGeom prst="rect">
-            <a:avLst/>
-          </a:prstGeom>
-        </p:spPr>
-      </p:pic>
-      <p:sp>
-        <p:nvSpPr>
-          <p:cNvPr id="11" name="Text 6"/>
+      <p:sp>
+        <p:nvSpPr>
+          <p:cNvPr id="9" name="Text 6"/>
           <p:cNvSpPr txBox="1"/>
           <p:nvPr/>
         </p:nvSpPr>
         <p:spPr>
           <a:xfrm>
-            <a:off x="7132320" y="2286000"/>
-            <a:ext cx="4114800" cy="411480"/>
-          </a:xfrm>
-          <a:prstGeom prst="rect">
-            <a:avLst/>
-          </a:prstGeom>
-          <a:noFill/>
-          <a:ln/>
-        </p:spPr>
-        <p:txBody>
-          <a:bodyPr wrap="square" lIns="0" tIns="0" rIns="0" bIns="0" rtlCol="0" anchor="ctr"/>
-          <a:lstStyle/>
-          <a:p>
-            <a:pPr indent="0" marL="0">
-              <a:buNone/>
-            </a:pPr>
-            <a:r>
-              <a:rPr lang="en-US" sz="2200" b="1" dirty="0">
-                <a:solidFill>
-                  <a:srgbClr val="1A1A1A"/>
+            <a:off x="6492240" y="2148840"/>
+            <a:ext cx="4846320" cy="365760"/>
+          </a:xfrm>
+          <a:prstGeom prst="rect">
+            <a:avLst/>
+          </a:prstGeom>
+          <a:noFill/>
+          <a:ln/>
+        </p:spPr>
+        <p:txBody>
+          <a:bodyPr wrap="square" lIns="0" tIns="0" rIns="0" bIns="0" rtlCol="0" anchor="t"/>
+          <a:lstStyle/>
+          <a:p>
+            <a:pPr indent="0" marL="0">
+              <a:buNone/>
+            </a:pPr>
+            <a:r>
+              <a:rPr lang="en-US" sz="1700" b="1" dirty="0">
+                <a:solidFill>
+                  <a:srgbClr val="C8102E"/>
                 </a:solidFill>
                 <a:latin typeface="Calibri" pitchFamily="34" charset="0"/>
                 <a:ea typeface="Calibri" pitchFamily="34" charset="-122"/>
                 <a:cs typeface="Calibri" pitchFamily="34" charset="-120"/>
               </a:rPr>
-              <a:t>Próximos pasos</a:t>
-            </a:r>
-            <a:endParaRPr lang="en-US" sz="2200" dirty="0"/>
-          </a:p>
-        </p:txBody>
-      </p:sp>
-      <p:sp>
-        <p:nvSpPr>
-          <p:cNvPr id="12" name="Text 7"/>
+              <a:t>Extracción</a:t>
+            </a:r>
+            <a:endParaRPr lang="en-US" sz="1700" dirty="0"/>
+          </a:p>
+        </p:txBody>
+      </p:sp>
+      <p:sp>
+        <p:nvSpPr>
+          <p:cNvPr id="10" name="Text 7"/>
           <p:cNvSpPr txBox="1"/>
           <p:nvPr/>
         </p:nvSpPr>
         <p:spPr>
           <a:xfrm>
-            <a:off x="6537960" y="2971800"/>
-            <a:ext cx="4800600" cy="2743200"/>
+            <a:off x="6492240" y="2542032"/>
+            <a:ext cx="4937760" cy="548640"/>
           </a:xfrm>
           <a:prstGeom prst="rect">
             <a:avLst/>
@@ -12016,15 +11865,11 @@
           <a:bodyPr wrap="square" lIns="0" tIns="0" rIns="0" bIns="0" rtlCol="0" anchor="t"/>
           <a:lstStyle/>
           <a:p>
-            <a:pPr marL="342900" indent="-342900">
-              <a:spcAft>
-                <a:spcPts val="1000"/>
-              </a:spcAft>
-              <a:buSzPct val="100000"/>
-              <a:buChar char="•"/>
-            </a:pPr>
-            <a:r>
-              <a:rPr lang="en-US" sz="1600" dirty="0">
+            <a:pPr indent="0" marL="0">
+              <a:buNone/>
+            </a:pPr>
+            <a:r>
+              <a:rPr lang="en-US" sz="1500" dirty="0">
                 <a:solidFill>
                   <a:srgbClr val="1A1A1A"/>
                 </a:solidFill>
@@ -12032,41 +11877,104 @@
                 <a:ea typeface="Calibri" pitchFamily="34" charset="-122"/>
                 <a:cs typeface="Calibri" pitchFamily="34" charset="-120"/>
               </a:rPr>
-              <a:t>Entidades con spaCy (NER) para descubrir figuras nuevas</a:t>
-            </a:r>
-            <a:endParaRPr lang="en-US" sz="1600" dirty="0"/>
-          </a:p>
-          <a:p>
-            <a:pPr marL="342900" indent="-342900">
-              <a:spcAft>
-                <a:spcPts val="1000"/>
-              </a:spcAft>
-              <a:buSzPct val="100000"/>
-              <a:buChar char="•"/>
-            </a:pPr>
-            <a:r>
-              <a:rPr lang="en-US" sz="1600" dirty="0">
-                <a:solidFill>
-                  <a:srgbClr val="1A1A1A"/>
+              <a:t>expresiones regulares · JSON-LD (schema.org) · HTML</a:t>
+            </a:r>
+            <a:endParaRPr lang="en-US" sz="1500" dirty="0"/>
+          </a:p>
+        </p:txBody>
+      </p:sp>
+      <p:sp>
+        <p:nvSpPr>
+          <p:cNvPr id="11" name="stack-2"/>
+          <p:cNvSpPr/>
+          <p:nvPr/>
+        </p:nvSpPr>
+        <p:spPr>
+          <a:xfrm>
+            <a:off x="548640" y="3337560"/>
+            <a:ext cx="5394960" cy="1143000"/>
+          </a:xfrm>
+          <a:prstGeom prst="roundRect">
+            <a:avLst>
+              <a:gd name="adj" fmla="val 6400"/>
+            </a:avLst>
+          </a:prstGeom>
+          <a:solidFill>
+            <a:srgbClr val="F2F2F0"/>
+          </a:solidFill>
+          <a:ln w="12700">
+            <a:solidFill>
+              <a:srgbClr val="F2F2F0"/>
+            </a:solidFill>
+            <a:prstDash val="solid"/>
+          </a:ln>
+        </p:spPr>
+      </p:sp>
+      <p:sp>
+        <p:nvSpPr>
+          <p:cNvPr id="12" name="Text 9"/>
+          <p:cNvSpPr txBox="1"/>
+          <p:nvPr/>
+        </p:nvSpPr>
+        <p:spPr>
+          <a:xfrm>
+            <a:off x="822960" y="3474720"/>
+            <a:ext cx="4846320" cy="365760"/>
+          </a:xfrm>
+          <a:prstGeom prst="rect">
+            <a:avLst/>
+          </a:prstGeom>
+          <a:noFill/>
+          <a:ln/>
+        </p:spPr>
+        <p:txBody>
+          <a:bodyPr wrap="square" lIns="0" tIns="0" rIns="0" bIns="0" rtlCol="0" anchor="t"/>
+          <a:lstStyle/>
+          <a:p>
+            <a:pPr indent="0" marL="0">
+              <a:buNone/>
+            </a:pPr>
+            <a:r>
+              <a:rPr lang="en-US" sz="1700" b="1" dirty="0">
+                <a:solidFill>
+                  <a:srgbClr val="C8102E"/>
                 </a:solidFill>
                 <a:latin typeface="Calibri" pitchFamily="34" charset="0"/>
                 <a:ea typeface="Calibri" pitchFamily="34" charset="-122"/>
                 <a:cs typeface="Calibri" pitchFamily="34" charset="-120"/>
               </a:rPr>
-              <a:t>Evolución de las comunidades a lo largo de las semanas</a:t>
-            </a:r>
-            <a:endParaRPr lang="en-US" sz="1600" dirty="0"/>
-          </a:p>
-          <a:p>
-            <a:pPr marL="342900" indent="-342900">
-              <a:spcAft>
-                <a:spcPts val="1000"/>
-              </a:spcAft>
-              <a:buSzPct val="100000"/>
-              <a:buChar char="•"/>
-            </a:pPr>
-            <a:r>
-              <a:rPr lang="en-US" sz="1600" dirty="0">
+              <a:t>Lenguaje</a:t>
+            </a:r>
+            <a:endParaRPr lang="en-US" sz="1700" dirty="0"/>
+          </a:p>
+        </p:txBody>
+      </p:sp>
+      <p:sp>
+        <p:nvSpPr>
+          <p:cNvPr id="13" name="Text 10"/>
+          <p:cNvSpPr txBox="1"/>
+          <p:nvPr/>
+        </p:nvSpPr>
+        <p:spPr>
+          <a:xfrm>
+            <a:off x="822960" y="3867912"/>
+            <a:ext cx="4937760" cy="548640"/>
+          </a:xfrm>
+          <a:prstGeom prst="rect">
+            <a:avLst/>
+          </a:prstGeom>
+          <a:noFill/>
+          <a:ln/>
+        </p:spPr>
+        <p:txBody>
+          <a:bodyPr wrap="square" lIns="0" tIns="0" rIns="0" bIns="0" rtlCol="0" anchor="t"/>
+          <a:lstStyle/>
+          <a:p>
+            <a:pPr indent="0" marL="0">
+              <a:buNone/>
+            </a:pPr>
+            <a:r>
+              <a:rPr lang="en-US" sz="1500" dirty="0">
                 <a:solidFill>
                   <a:srgbClr val="1A1A1A"/>
                 </a:solidFill>
@@ -12074,30 +11982,324 @@
                 <a:ea typeface="Calibri" pitchFamily="34" charset="-122"/>
                 <a:cs typeface="Calibri" pitchFamily="34" charset="-120"/>
               </a:rPr>
-              <a:t>Cruzar el termómetro con el dólar y otros datos</a:t>
-            </a:r>
-            <a:endParaRPr lang="en-US" sz="1600" dirty="0"/>
-          </a:p>
-          <a:p>
-            <a:pPr marL="342900" indent="-342900">
-              <a:spcAft>
-                <a:spcPts val="1000"/>
-              </a:spcAft>
-              <a:buSzPct val="100000"/>
-              <a:buChar char="•"/>
-            </a:pPr>
-            <a:r>
-              <a:rPr lang="en-US" sz="1600" dirty="0">
-                <a:solidFill>
-                  <a:srgbClr val="1A1A1A"/>
+              <a:t>bolsa de palabras · Naive Bayes · regresión logística · XLM-RoBERTa · MiniLM · spaCy (NER)</a:t>
+            </a:r>
+            <a:endParaRPr lang="en-US" sz="1500" dirty="0"/>
+          </a:p>
+        </p:txBody>
+      </p:sp>
+      <p:sp>
+        <p:nvSpPr>
+          <p:cNvPr id="14" name="stack-3"/>
+          <p:cNvSpPr/>
+          <p:nvPr/>
+        </p:nvSpPr>
+        <p:spPr>
+          <a:xfrm>
+            <a:off x="6217920" y="3337560"/>
+            <a:ext cx="5394960" cy="1143000"/>
+          </a:xfrm>
+          <a:prstGeom prst="roundRect">
+            <a:avLst>
+              <a:gd name="adj" fmla="val 6400"/>
+            </a:avLst>
+          </a:prstGeom>
+          <a:solidFill>
+            <a:srgbClr val="F2F2F0"/>
+          </a:solidFill>
+          <a:ln w="12700">
+            <a:solidFill>
+              <a:srgbClr val="F2F2F0"/>
+            </a:solidFill>
+            <a:prstDash val="solid"/>
+          </a:ln>
+        </p:spPr>
+      </p:sp>
+      <p:sp>
+        <p:nvSpPr>
+          <p:cNvPr id="15" name="Text 12"/>
+          <p:cNvSpPr txBox="1"/>
+          <p:nvPr/>
+        </p:nvSpPr>
+        <p:spPr>
+          <a:xfrm>
+            <a:off x="6492240" y="3474720"/>
+            <a:ext cx="4846320" cy="365760"/>
+          </a:xfrm>
+          <a:prstGeom prst="rect">
+            <a:avLst/>
+          </a:prstGeom>
+          <a:noFill/>
+          <a:ln/>
+        </p:spPr>
+        <p:txBody>
+          <a:bodyPr wrap="square" lIns="0" tIns="0" rIns="0" bIns="0" rtlCol="0" anchor="t"/>
+          <a:lstStyle/>
+          <a:p>
+            <a:pPr indent="0" marL="0">
+              <a:buNone/>
+            </a:pPr>
+            <a:r>
+              <a:rPr lang="en-US" sz="1700" b="1" dirty="0">
+                <a:solidFill>
+                  <a:srgbClr val="C8102E"/>
                 </a:solidFill>
                 <a:latin typeface="Calibri" pitchFamily="34" charset="0"/>
                 <a:ea typeface="Calibri" pitchFamily="34" charset="-122"/>
                 <a:cs typeface="Calibri" pitchFamily="34" charset="-120"/>
               </a:rPr>
-              <a:t>Más etiquetas manuales, con varios anotadores</a:t>
-            </a:r>
-            <a:endParaRPr lang="en-US" sz="1600" dirty="0"/>
+              <a:t>Datos</a:t>
+            </a:r>
+            <a:endParaRPr lang="en-US" sz="1700" dirty="0"/>
+          </a:p>
+        </p:txBody>
+      </p:sp>
+      <p:sp>
+        <p:nvSpPr>
+          <p:cNvPr id="16" name="Text 13"/>
+          <p:cNvSpPr txBox="1"/>
+          <p:nvPr/>
+        </p:nvSpPr>
+        <p:spPr>
+          <a:xfrm>
+            <a:off x="6492240" y="3867912"/>
+            <a:ext cx="4937760" cy="548640"/>
+          </a:xfrm>
+          <a:prstGeom prst="rect">
+            <a:avLst/>
+          </a:prstGeom>
+          <a:noFill/>
+          <a:ln/>
+        </p:spPr>
+        <p:txBody>
+          <a:bodyPr wrap="square" lIns="0" tIns="0" rIns="0" bIns="0" rtlCol="0" anchor="t"/>
+          <a:lstStyle/>
+          <a:p>
+            <a:pPr indent="0" marL="0">
+              <a:buNone/>
+            </a:pPr>
+            <a:r>
+              <a:rPr lang="en-US" sz="1500" dirty="0">
+                <a:solidFill>
+                  <a:srgbClr val="1A1A1A"/>
+                </a:solidFill>
+                <a:latin typeface="Calibri" pitchFamily="34" charset="0"/>
+                <a:ea typeface="Calibri" pitchFamily="34" charset="-122"/>
+                <a:cs typeface="Calibri" pitchFamily="34" charset="-120"/>
+              </a:rPr>
+              <a:t>SQLite · CSV · Datasette Lite · notebook con pandas</a:t>
+            </a:r>
+            <a:endParaRPr lang="en-US" sz="1500" dirty="0"/>
+          </a:p>
+        </p:txBody>
+      </p:sp>
+      <p:sp>
+        <p:nvSpPr>
+          <p:cNvPr id="17" name="stack-4"/>
+          <p:cNvSpPr/>
+          <p:nvPr/>
+        </p:nvSpPr>
+        <p:spPr>
+          <a:xfrm>
+            <a:off x="548640" y="4663440"/>
+            <a:ext cx="5394960" cy="1143000"/>
+          </a:xfrm>
+          <a:prstGeom prst="roundRect">
+            <a:avLst>
+              <a:gd name="adj" fmla="val 6400"/>
+            </a:avLst>
+          </a:prstGeom>
+          <a:solidFill>
+            <a:srgbClr val="F2F2F0"/>
+          </a:solidFill>
+          <a:ln w="12700">
+            <a:solidFill>
+              <a:srgbClr val="F2F2F0"/>
+            </a:solidFill>
+            <a:prstDash val="solid"/>
+          </a:ln>
+        </p:spPr>
+      </p:sp>
+      <p:sp>
+        <p:nvSpPr>
+          <p:cNvPr id="18" name="Text 15"/>
+          <p:cNvSpPr txBox="1"/>
+          <p:nvPr/>
+        </p:nvSpPr>
+        <p:spPr>
+          <a:xfrm>
+            <a:off x="822960" y="4800600"/>
+            <a:ext cx="4846320" cy="365760"/>
+          </a:xfrm>
+          <a:prstGeom prst="rect">
+            <a:avLst/>
+          </a:prstGeom>
+          <a:noFill/>
+          <a:ln/>
+        </p:spPr>
+        <p:txBody>
+          <a:bodyPr wrap="square" lIns="0" tIns="0" rIns="0" bIns="0" rtlCol="0" anchor="t"/>
+          <a:lstStyle/>
+          <a:p>
+            <a:pPr indent="0" marL="0">
+              <a:buNone/>
+            </a:pPr>
+            <a:r>
+              <a:rPr lang="en-US" sz="1700" b="1" dirty="0">
+                <a:solidFill>
+                  <a:srgbClr val="C8102E"/>
+                </a:solidFill>
+                <a:latin typeface="Calibri" pitchFamily="34" charset="0"/>
+                <a:ea typeface="Calibri" pitchFamily="34" charset="-122"/>
+                <a:cs typeface="Calibri" pitchFamily="34" charset="-120"/>
+              </a:rPr>
+              <a:t>Automatización</a:t>
+            </a:r>
+            <a:endParaRPr lang="en-US" sz="1700" dirty="0"/>
+          </a:p>
+        </p:txBody>
+      </p:sp>
+      <p:sp>
+        <p:nvSpPr>
+          <p:cNvPr id="19" name="Text 16"/>
+          <p:cNvSpPr txBox="1"/>
+          <p:nvPr/>
+        </p:nvSpPr>
+        <p:spPr>
+          <a:xfrm>
+            <a:off x="822960" y="5193792"/>
+            <a:ext cx="4937760" cy="548640"/>
+          </a:xfrm>
+          <a:prstGeom prst="rect">
+            <a:avLst/>
+          </a:prstGeom>
+          <a:noFill/>
+          <a:ln/>
+        </p:spPr>
+        <p:txBody>
+          <a:bodyPr wrap="square" lIns="0" tIns="0" rIns="0" bIns="0" rtlCol="0" anchor="t"/>
+          <a:lstStyle/>
+          <a:p>
+            <a:pPr indent="0" marL="0">
+              <a:buNone/>
+            </a:pPr>
+            <a:r>
+              <a:rPr lang="en-US" sz="1500" dirty="0">
+                <a:solidFill>
+                  <a:srgbClr val="1A1A1A"/>
+                </a:solidFill>
+                <a:latin typeface="Calibri" pitchFamily="34" charset="0"/>
+                <a:ea typeface="Calibri" pitchFamily="34" charset="-122"/>
+                <a:cs typeface="Calibri" pitchFamily="34" charset="-120"/>
+              </a:rPr>
+              <a:t>GitHub Actions (cada hora) · rama de datos</a:t>
+            </a:r>
+            <a:endParaRPr lang="en-US" sz="1500" dirty="0"/>
+          </a:p>
+        </p:txBody>
+      </p:sp>
+      <p:sp>
+        <p:nvSpPr>
+          <p:cNvPr id="20" name="stack-5"/>
+          <p:cNvSpPr/>
+          <p:nvPr/>
+        </p:nvSpPr>
+        <p:spPr>
+          <a:xfrm>
+            <a:off x="6217920" y="4663440"/>
+            <a:ext cx="5394960" cy="1143000"/>
+          </a:xfrm>
+          <a:prstGeom prst="roundRect">
+            <a:avLst>
+              <a:gd name="adj" fmla="val 6400"/>
+            </a:avLst>
+          </a:prstGeom>
+          <a:solidFill>
+            <a:srgbClr val="F2F2F0"/>
+          </a:solidFill>
+          <a:ln w="12700">
+            <a:solidFill>
+              <a:srgbClr val="F2F2F0"/>
+            </a:solidFill>
+            <a:prstDash val="solid"/>
+          </a:ln>
+        </p:spPr>
+      </p:sp>
+      <p:sp>
+        <p:nvSpPr>
+          <p:cNvPr id="21" name="Text 18"/>
+          <p:cNvSpPr txBox="1"/>
+          <p:nvPr/>
+        </p:nvSpPr>
+        <p:spPr>
+          <a:xfrm>
+            <a:off x="6492240" y="4800600"/>
+            <a:ext cx="4846320" cy="365760"/>
+          </a:xfrm>
+          <a:prstGeom prst="rect">
+            <a:avLst/>
+          </a:prstGeom>
+          <a:noFill/>
+          <a:ln/>
+        </p:spPr>
+        <p:txBody>
+          <a:bodyPr wrap="square" lIns="0" tIns="0" rIns="0" bIns="0" rtlCol="0" anchor="t"/>
+          <a:lstStyle/>
+          <a:p>
+            <a:pPr indent="0" marL="0">
+              <a:buNone/>
+            </a:pPr>
+            <a:r>
+              <a:rPr lang="en-US" sz="1700" b="1" dirty="0">
+                <a:solidFill>
+                  <a:srgbClr val="C8102E"/>
+                </a:solidFill>
+                <a:latin typeface="Calibri" pitchFamily="34" charset="0"/>
+                <a:ea typeface="Calibri" pitchFamily="34" charset="-122"/>
+                <a:cs typeface="Calibri" pitchFamily="34" charset="-120"/>
+              </a:rPr>
+              <a:t>Visualización</a:t>
+            </a:r>
+            <a:endParaRPr lang="en-US" sz="1700" dirty="0"/>
+          </a:p>
+        </p:txBody>
+      </p:sp>
+      <p:sp>
+        <p:nvSpPr>
+          <p:cNvPr id="22" name="Text 19"/>
+          <p:cNvSpPr txBox="1"/>
+          <p:nvPr/>
+        </p:nvSpPr>
+        <p:spPr>
+          <a:xfrm>
+            <a:off x="6492240" y="5193792"/>
+            <a:ext cx="4937760" cy="548640"/>
+          </a:xfrm>
+          <a:prstGeom prst="rect">
+            <a:avLst/>
+          </a:prstGeom>
+          <a:noFill/>
+          <a:ln/>
+        </p:spPr>
+        <p:txBody>
+          <a:bodyPr wrap="square" lIns="0" tIns="0" rIns="0" bIns="0" rtlCol="0" anchor="t"/>
+          <a:lstStyle/>
+          <a:p>
+            <a:pPr indent="0" marL="0">
+              <a:buNone/>
+            </a:pPr>
+            <a:r>
+              <a:rPr lang="en-US" sz="1500" dirty="0">
+                <a:solidFill>
+                  <a:srgbClr val="1A1A1A"/>
+                </a:solidFill>
+                <a:latin typeface="Calibri" pitchFamily="34" charset="0"/>
+                <a:ea typeface="Calibri" pitchFamily="34" charset="-122"/>
+                <a:cs typeface="Calibri" pitchFamily="34" charset="-120"/>
+              </a:rPr>
+              <a:t>HTML, CSS y JavaScript sin frameworks · GitHub Pages</a:t>
+            </a:r>
+            <a:endParaRPr lang="en-US" sz="1500" dirty="0"/>
           </a:p>
         </p:txBody>
       </p:sp>
@@ -12157,6 +12359,547 @@
 <file path=ppt/slides/slide24.xml><?xml version="1.0" encoding="utf-8"?>
 <p:sld xmlns:a="http://schemas.openxmlformats.org/drawingml/2006/main" xmlns:r="http://schemas.openxmlformats.org/officeDocument/2006/relationships" xmlns:p="http://schemas.openxmlformats.org/presentationml/2006/main">
   <p:cSld name="Slide 24">
+    <p:spTree>
+      <p:nvGrpSpPr>
+        <p:cNvPr id="1" name=""/>
+        <p:cNvGrpSpPr/>
+        <p:nvPr/>
+      </p:nvGrpSpPr>
+      <p:grpSpPr>
+        <a:xfrm>
+          <a:off x="0" y="0"/>
+          <a:ext cx="0" cy="0"/>
+          <a:chOff x="0" y="0"/>
+          <a:chExt cx="0" cy="0"/>
+        </a:xfrm>
+      </p:grpSpPr>
+      <p:sp>
+        <p:nvSpPr>
+          <p:cNvPr id="2" name="Text 0"/>
+          <p:cNvSpPr/>
+          <p:nvPr>
+            <p:ph idx="100" type="body" hasCustomPrompt="1"/>
+          </p:nvPr>
+        </p:nvSpPr>
+        <p:spPr>
+          <a:xfrm>
+            <a:off x="548640" y="365760"/>
+            <a:ext cx="8229600" cy="320040"/>
+          </a:xfrm>
+          <a:prstGeom prst="rect">
+            <a:avLst/>
+          </a:prstGeom>
+          <a:noFill/>
+          <a:ln/>
+        </p:spPr>
+        <p:txBody>
+          <a:bodyPr wrap="square" lIns="0" tIns="0" rIns="0" bIns="0" rtlCol="0"/>
+          <a:lstStyle/>
+          <a:p>
+            <a:pPr indent="0" marL="0">
+              <a:buNone/>
+            </a:pPr>
+            <a:r>
+              <a:rPr lang="en-US" sz="1200" b="1" spc="200" kern="0" dirty="0">
+                <a:solidFill>
+                  <a:schemeClr val="accent1"/>
+                </a:solidFill>
+              </a:rPr>
+              <a:t>LO QUE SIGUE</a:t>
+            </a:r>
+            <a:endParaRPr lang="en-US" sz="1200" dirty="0"/>
+          </a:p>
+        </p:txBody>
+      </p:sp>
+      <p:sp>
+        <p:nvSpPr>
+          <p:cNvPr id="3" name="Text 0"/>
+          <p:cNvSpPr/>
+          <p:nvPr>
+            <p:ph idx="101" type="title" hasCustomPrompt="1"/>
+          </p:nvPr>
+        </p:nvSpPr>
+        <p:spPr>
+          <a:xfrm>
+            <a:off x="548640" y="685800"/>
+            <a:ext cx="11094415" cy="1051560"/>
+          </a:xfrm>
+          <a:prstGeom prst="rect">
+            <a:avLst/>
+          </a:prstGeom>
+          <a:noFill/>
+          <a:ln/>
+        </p:spPr>
+        <p:txBody>
+          <a:bodyPr wrap="square" lIns="0" tIns="0" rIns="0" bIns="0" rtlCol="0" anchor="t"/>
+          <a:lstStyle/>
+          <a:p>
+            <a:pPr algn="l" indent="0" marL="0">
+              <a:buNone/>
+            </a:pPr>
+            <a:r>
+              <a:rPr lang="en-US" sz="3200" b="1" dirty="0">
+                <a:solidFill>
+                  <a:schemeClr val="tx1"/>
+                </a:solidFill>
+                <a:latin typeface="Cambria" pitchFamily="34" charset="0"/>
+                <a:ea typeface="Cambria" pitchFamily="34" charset="-122"/>
+                <a:cs typeface="Cambria" pitchFamily="34" charset="-120"/>
+              </a:rPr>
+              <a:t>Limitaciones honestas y próximos pasos</a:t>
+            </a:r>
+            <a:endParaRPr lang="en-US" sz="3200" dirty="0"/>
+          </a:p>
+        </p:txBody>
+      </p:sp>
+      <p:sp>
+        <p:nvSpPr>
+          <p:cNvPr id="5" name="cierre-0"/>
+          <p:cNvSpPr/>
+          <p:nvPr/>
+        </p:nvSpPr>
+        <p:spPr>
+          <a:xfrm>
+            <a:off x="548640" y="2011680"/>
+            <a:ext cx="5394960" cy="3931920"/>
+          </a:xfrm>
+          <a:prstGeom prst="roundRect">
+            <a:avLst>
+              <a:gd name="adj" fmla="val 1860"/>
+            </a:avLst>
+          </a:prstGeom>
+          <a:solidFill>
+            <a:srgbClr val="F2F2F0"/>
+          </a:solidFill>
+          <a:ln w="12700">
+            <a:solidFill>
+              <a:srgbClr val="F2F2F0"/>
+            </a:solidFill>
+            <a:prstDash val="solid"/>
+          </a:ln>
+        </p:spPr>
+      </p:sp>
+      <p:pic>
+        <p:nvPicPr>
+          <p:cNvPr id="6" name="Image 0" descr="preencoded.png">    </p:cNvPr>
+          <p:cNvPicPr>
+            <a:picLocks noChangeAspect="1"/>
+          </p:cNvPicPr>
+          <p:nvPr/>
+        </p:nvPicPr>
+        <p:blipFill>
+          <a:blip r:embed="rId1"/>
+          <a:stretch>
+            <a:fillRect/>
+          </a:stretch>
+        </p:blipFill>
+        <p:spPr>
+          <a:xfrm>
+            <a:off x="868680" y="2286000"/>
+            <a:ext cx="411480" cy="411480"/>
+          </a:xfrm>
+          <a:prstGeom prst="rect">
+            <a:avLst/>
+          </a:prstGeom>
+        </p:spPr>
+      </p:pic>
+      <p:sp>
+        <p:nvSpPr>
+          <p:cNvPr id="7" name="Text 3"/>
+          <p:cNvSpPr txBox="1"/>
+          <p:nvPr/>
+        </p:nvSpPr>
+        <p:spPr>
+          <a:xfrm>
+            <a:off x="1463040" y="2286000"/>
+            <a:ext cx="4114800" cy="411480"/>
+          </a:xfrm>
+          <a:prstGeom prst="rect">
+            <a:avLst/>
+          </a:prstGeom>
+          <a:noFill/>
+          <a:ln/>
+        </p:spPr>
+        <p:txBody>
+          <a:bodyPr wrap="square" lIns="0" tIns="0" rIns="0" bIns="0" rtlCol="0" anchor="ctr"/>
+          <a:lstStyle/>
+          <a:p>
+            <a:pPr indent="0" marL="0">
+              <a:buNone/>
+            </a:pPr>
+            <a:r>
+              <a:rPr lang="en-US" sz="2200" b="1" dirty="0">
+                <a:solidFill>
+                  <a:srgbClr val="1A1A1A"/>
+                </a:solidFill>
+                <a:latin typeface="Calibri" pitchFamily="34" charset="0"/>
+                <a:ea typeface="Calibri" pitchFamily="34" charset="-122"/>
+                <a:cs typeface="Calibri" pitchFamily="34" charset="-120"/>
+              </a:rPr>
+              <a:t>Limitaciones</a:t>
+            </a:r>
+            <a:endParaRPr lang="en-US" sz="2200" dirty="0"/>
+          </a:p>
+        </p:txBody>
+      </p:sp>
+      <p:sp>
+        <p:nvSpPr>
+          <p:cNvPr id="8" name="Text 4"/>
+          <p:cNvSpPr txBox="1"/>
+          <p:nvPr/>
+        </p:nvSpPr>
+        <p:spPr>
+          <a:xfrm>
+            <a:off x="868680" y="2971800"/>
+            <a:ext cx="4800600" cy="2743200"/>
+          </a:xfrm>
+          <a:prstGeom prst="rect">
+            <a:avLst/>
+          </a:prstGeom>
+          <a:noFill/>
+          <a:ln/>
+        </p:spPr>
+        <p:txBody>
+          <a:bodyPr wrap="square" lIns="0" tIns="0" rIns="0" bIns="0" rtlCol="0" anchor="t"/>
+          <a:lstStyle/>
+          <a:p>
+            <a:pPr marL="342900" indent="-342900">
+              <a:spcAft>
+                <a:spcPts val="1000"/>
+              </a:spcAft>
+              <a:buSzPct val="100000"/>
+              <a:buChar char="•"/>
+            </a:pPr>
+            <a:r>
+              <a:rPr lang="en-US" sz="1600" dirty="0">
+                <a:solidFill>
+                  <a:srgbClr val="1A1A1A"/>
+                </a:solidFill>
+                <a:latin typeface="Calibri" pitchFamily="34" charset="0"/>
+                <a:ea typeface="Calibri" pitchFamily="34" charset="-122"/>
+                <a:cs typeface="Calibri" pitchFamily="34" charset="-120"/>
+              </a:rPr>
+              <a:t>Tono del título y la bajada, no de la nota completa</a:t>
+            </a:r>
+            <a:endParaRPr lang="en-US" sz="1600" dirty="0"/>
+          </a:p>
+          <a:p>
+            <a:pPr marL="342900" indent="-342900">
+              <a:spcAft>
+                <a:spcPts val="1000"/>
+              </a:spcAft>
+              <a:buSzPct val="100000"/>
+              <a:buChar char="•"/>
+            </a:pPr>
+            <a:r>
+              <a:rPr lang="en-US" sz="1600" dirty="0">
+                <a:solidFill>
+                  <a:srgbClr val="1A1A1A"/>
+                </a:solidFill>
+                <a:latin typeface="Calibri" pitchFamily="34" charset="0"/>
+                <a:ea typeface="Calibri" pitchFamily="34" charset="-122"/>
+                <a:cs typeface="Calibri" pitchFamily="34" charset="-120"/>
+              </a:rPr>
+              <a:t>77% de acierto con 340 etiquetas de un solo criterio</a:t>
+            </a:r>
+            <a:endParaRPr lang="en-US" sz="1600" dirty="0"/>
+          </a:p>
+          <a:p>
+            <a:pPr marL="342900" indent="-342900">
+              <a:spcAft>
+                <a:spcPts val="1000"/>
+              </a:spcAft>
+              <a:buSzPct val="100000"/>
+              <a:buChar char="•"/>
+            </a:pPr>
+            <a:r>
+              <a:rPr lang="en-US" sz="1600" dirty="0">
+                <a:solidFill>
+                  <a:srgbClr val="1A1A1A"/>
+                </a:solidFill>
+                <a:latin typeface="Calibri" pitchFamily="34" charset="0"/>
+                <a:ea typeface="Calibri" pitchFamily="34" charset="-122"/>
+                <a:cs typeface="Calibri" pitchFamily="34" charset="-120"/>
+              </a:rPr>
+              <a:t>Pocos días de histórico: los rankings se estabilizan con semanas</a:t>
+            </a:r>
+            <a:endParaRPr lang="en-US" sz="1600" dirty="0"/>
+          </a:p>
+          <a:p>
+            <a:pPr marL="342900" indent="-342900">
+              <a:spcAft>
+                <a:spcPts val="1000"/>
+              </a:spcAft>
+              <a:buSzPct val="100000"/>
+              <a:buChar char="•"/>
+            </a:pPr>
+            <a:r>
+              <a:rPr lang="en-US" sz="1600" dirty="0">
+                <a:solidFill>
+                  <a:srgbClr val="1A1A1A"/>
+                </a:solidFill>
+                <a:latin typeface="Calibri" pitchFamily="34" charset="0"/>
+                <a:ea typeface="Calibri" pitchFamily="34" charset="-122"/>
+                <a:cs typeface="Calibri" pitchFamily="34" charset="-120"/>
+              </a:rPr>
+              <a:t>Temas y entidades por diccionario requieren mantenimiento</a:t>
+            </a:r>
+            <a:endParaRPr lang="en-US" sz="1600" dirty="0"/>
+          </a:p>
+        </p:txBody>
+      </p:sp>
+      <p:sp>
+        <p:nvSpPr>
+          <p:cNvPr id="9" name="cierre-1"/>
+          <p:cNvSpPr/>
+          <p:nvPr/>
+        </p:nvSpPr>
+        <p:spPr>
+          <a:xfrm>
+            <a:off x="6217920" y="2011680"/>
+            <a:ext cx="5394960" cy="3931920"/>
+          </a:xfrm>
+          <a:prstGeom prst="roundRect">
+            <a:avLst>
+              <a:gd name="adj" fmla="val 1860"/>
+            </a:avLst>
+          </a:prstGeom>
+          <a:solidFill>
+            <a:srgbClr val="F2F2F0"/>
+          </a:solidFill>
+          <a:ln w="12700">
+            <a:solidFill>
+              <a:srgbClr val="F2F2F0"/>
+            </a:solidFill>
+            <a:prstDash val="solid"/>
+          </a:ln>
+        </p:spPr>
+      </p:sp>
+      <p:pic>
+        <p:nvPicPr>
+          <p:cNvPr id="10" name="Image 1" descr="preencoded.png">    </p:cNvPr>
+          <p:cNvPicPr>
+            <a:picLocks noChangeAspect="1"/>
+          </p:cNvPicPr>
+          <p:nvPr/>
+        </p:nvPicPr>
+        <p:blipFill>
+          <a:blip r:embed="rId2"/>
+          <a:stretch>
+            <a:fillRect/>
+          </a:stretch>
+        </p:blipFill>
+        <p:spPr>
+          <a:xfrm>
+            <a:off x="6537960" y="2286000"/>
+            <a:ext cx="411480" cy="411480"/>
+          </a:xfrm>
+          <a:prstGeom prst="rect">
+            <a:avLst/>
+          </a:prstGeom>
+        </p:spPr>
+      </p:pic>
+      <p:sp>
+        <p:nvSpPr>
+          <p:cNvPr id="11" name="Text 6"/>
+          <p:cNvSpPr txBox="1"/>
+          <p:nvPr/>
+        </p:nvSpPr>
+        <p:spPr>
+          <a:xfrm>
+            <a:off x="7132320" y="2286000"/>
+            <a:ext cx="4114800" cy="411480"/>
+          </a:xfrm>
+          <a:prstGeom prst="rect">
+            <a:avLst/>
+          </a:prstGeom>
+          <a:noFill/>
+          <a:ln/>
+        </p:spPr>
+        <p:txBody>
+          <a:bodyPr wrap="square" lIns="0" tIns="0" rIns="0" bIns="0" rtlCol="0" anchor="ctr"/>
+          <a:lstStyle/>
+          <a:p>
+            <a:pPr indent="0" marL="0">
+              <a:buNone/>
+            </a:pPr>
+            <a:r>
+              <a:rPr lang="en-US" sz="2200" b="1" dirty="0">
+                <a:solidFill>
+                  <a:srgbClr val="1A1A1A"/>
+                </a:solidFill>
+                <a:latin typeface="Calibri" pitchFamily="34" charset="0"/>
+                <a:ea typeface="Calibri" pitchFamily="34" charset="-122"/>
+                <a:cs typeface="Calibri" pitchFamily="34" charset="-120"/>
+              </a:rPr>
+              <a:t>Próximos pasos</a:t>
+            </a:r>
+            <a:endParaRPr lang="en-US" sz="2200" dirty="0"/>
+          </a:p>
+        </p:txBody>
+      </p:sp>
+      <p:sp>
+        <p:nvSpPr>
+          <p:cNvPr id="12" name="Text 7"/>
+          <p:cNvSpPr txBox="1"/>
+          <p:nvPr/>
+        </p:nvSpPr>
+        <p:spPr>
+          <a:xfrm>
+            <a:off x="6537960" y="2971800"/>
+            <a:ext cx="4800600" cy="2743200"/>
+          </a:xfrm>
+          <a:prstGeom prst="rect">
+            <a:avLst/>
+          </a:prstGeom>
+          <a:noFill/>
+          <a:ln/>
+        </p:spPr>
+        <p:txBody>
+          <a:bodyPr wrap="square" lIns="0" tIns="0" rIns="0" bIns="0" rtlCol="0" anchor="t"/>
+          <a:lstStyle/>
+          <a:p>
+            <a:pPr marL="342900" indent="-342900">
+              <a:spcAft>
+                <a:spcPts val="1000"/>
+              </a:spcAft>
+              <a:buSzPct val="100000"/>
+              <a:buChar char="•"/>
+            </a:pPr>
+            <a:r>
+              <a:rPr lang="en-US" sz="1600" dirty="0">
+                <a:solidFill>
+                  <a:srgbClr val="1A1A1A"/>
+                </a:solidFill>
+                <a:latin typeface="Calibri" pitchFamily="34" charset="0"/>
+                <a:ea typeface="Calibri" pitchFamily="34" charset="-122"/>
+                <a:cs typeface="Calibri" pitchFamily="34" charset="-120"/>
+              </a:rPr>
+              <a:t>Completar rondas de aprendizaje activo y medir la mejora</a:t>
+            </a:r>
+            <a:endParaRPr lang="en-US" sz="1600" dirty="0"/>
+          </a:p>
+          <a:p>
+            <a:pPr marL="342900" indent="-342900">
+              <a:spcAft>
+                <a:spcPts val="1000"/>
+              </a:spcAft>
+              <a:buSzPct val="100000"/>
+              <a:buChar char="•"/>
+            </a:pPr>
+            <a:r>
+              <a:rPr lang="en-US" sz="1600" dirty="0">
+                <a:solidFill>
+                  <a:srgbClr val="1A1A1A"/>
+                </a:solidFill>
+                <a:latin typeface="Calibri" pitchFamily="34" charset="0"/>
+                <a:ea typeface="Calibri" pitchFamily="34" charset="-122"/>
+                <a:cs typeface="Calibri" pitchFamily="34" charset="-120"/>
+              </a:rPr>
+              <a:t>Evolución de las comunidades a lo largo de las semanas</a:t>
+            </a:r>
+            <a:endParaRPr lang="en-US" sz="1600" dirty="0"/>
+          </a:p>
+          <a:p>
+            <a:pPr marL="342900" indent="-342900">
+              <a:spcAft>
+                <a:spcPts val="1000"/>
+              </a:spcAft>
+              <a:buSzPct val="100000"/>
+              <a:buChar char="•"/>
+            </a:pPr>
+            <a:r>
+              <a:rPr lang="en-US" sz="1600" dirty="0">
+                <a:solidFill>
+                  <a:srgbClr val="1A1A1A"/>
+                </a:solidFill>
+                <a:latin typeface="Calibri" pitchFamily="34" charset="0"/>
+                <a:ea typeface="Calibri" pitchFamily="34" charset="-122"/>
+                <a:cs typeface="Calibri" pitchFamily="34" charset="-120"/>
+              </a:rPr>
+              <a:t>Cruzar el termómetro con el dólar y otros datos</a:t>
+            </a:r>
+            <a:endParaRPr lang="en-US" sz="1600" dirty="0"/>
+          </a:p>
+          <a:p>
+            <a:pPr marL="342900" indent="-342900">
+              <a:spcAft>
+                <a:spcPts val="1000"/>
+              </a:spcAft>
+              <a:buSzPct val="100000"/>
+              <a:buChar char="•"/>
+            </a:pPr>
+            <a:r>
+              <a:rPr lang="en-US" sz="1600" dirty="0">
+                <a:solidFill>
+                  <a:srgbClr val="1A1A1A"/>
+                </a:solidFill>
+                <a:latin typeface="Calibri" pitchFamily="34" charset="0"/>
+                <a:ea typeface="Calibri" pitchFamily="34" charset="-122"/>
+                <a:cs typeface="Calibri" pitchFamily="34" charset="-120"/>
+              </a:rPr>
+              <a:t>Más etiquetas manuales, con varios anotadores</a:t>
+            </a:r>
+            <a:endParaRPr lang="en-US" sz="1600" dirty="0"/>
+          </a:p>
+        </p:txBody>
+      </p:sp>
+      <p:sp>
+        <p:nvSpPr>
+          <p:cNvPr id="25" name="Slide Number Placeholder 0"/>
+          <p:cNvSpPr>
+            <a:spLocks noGrp="1"/>
+          </p:cNvSpPr>
+          <p:nvPr>
+            <p:ph type="sldNum" sz="quarter" idx="4294967295"/>
+          </p:nvPr>
+        </p:nvSpPr>
+        <p:spPr>
+          <a:xfrm>
+            <a:off x="11094415" y="6400800"/>
+            <a:ext cx="548640" cy="274320"/>
+          </a:xfrm>
+          <a:prstGeom prst="rect">
+            <a:avLst/>
+          </a:prstGeom>
+          <a:extLst>
+            <a:ext uri="{C572A759-6A51-4108-AA02-DFA0A04FC94B}">
+              <ma14:wrappingTextBoxFlag xmlns:ma14="http://schemas.microsoft.com/office/mac/drawingml/2011/main" val="0"/>
+            </a:ext>
+          </a:extLst>
+        </p:spPr>
+        <p:txBody>
+          <a:bodyPr/>
+          <a:lstStyle>
+            <a:lvl1pPr>
+              <a:defRPr sz="1000">
+                <a:solidFill>
+                  <a:srgbClr val="6B6B6B"/>
+                </a:solidFill>
+              </a:defRPr>
+            </a:lvl1pPr>
+          </a:lstStyle>
+          <a:p>
+            <a:pPr algn="r"/>
+            <a:fld id="{F7021451-1387-4CA6-816F-3879F97B5CBC}" type="slidenum">
+              <a:rPr b="0" lang="en-US"/>
+              <a:t>24</a:t>
+            </a:fld>
+            <a:endParaRPr lang="en-US"/>
+          </a:p>
+        </p:txBody>
+      </p:sp>
+    </p:spTree>
+  </p:cSld>
+  <p:clrMapOvr>
+    <a:masterClrMapping/>
+  </p:clrMapOvr>
+</p:sld>
+</file>
+
+<file path=ppt/slides/slide25.xml><?xml version="1.0" encoding="utf-8"?>
+<p:sld xmlns:a="http://schemas.openxmlformats.org/drawingml/2006/main" xmlns:r="http://schemas.openxmlformats.org/officeDocument/2006/relationships" xmlns:p="http://schemas.openxmlformats.org/presentationml/2006/main">
+  <p:cSld name="Slide 25">
     <p:spTree>
       <p:nvGrpSpPr>
         <p:cNvPr id="1" name=""/>

--- a/docs/presentacion-tp.pptx
+++ b/docs/presentacion-tp.pptx
@@ -131,18 +131,18 @@
   <p:extLst>
     <p:ext uri="{521415D9-36F7-43E2-AB2F-B90AF26B5E84}">
       <p14:sectionLst xmlns:p14="http://schemas.microsoft.com/office/powerpoint/2010/main">
-        <p14:section name="Apertura" id="{586e4289-a590-1a03-14f0-58b980e8dec4}">
+        <p14:section name="Apertura" id="{93ea5e1d-5e86-f31e-902c-b97e5094f4ac}">
           <p14:sldIdLst>
             <p14:sldId id="256"/>
           </p14:sldIdLst>
         </p14:section>
-        <p14:section name="Problema" id="{94062e0d-5809-ccfd-df4e-0fb88bb95b34}">
+        <p14:section name="Problema" id="{56da9b91-3e27-96aa-37f2-f9527ec52396}">
           <p14:sldIdLst>
             <p14:sldId id="257"/>
             <p14:sldId id="258"/>
           </p14:sldIdLst>
         </p14:section>
-        <p14:section name="Cómo funciona" id="{3c75d1b5-bc39-1f71-8f4d-bbcc376c0521}">
+        <p14:section name="Cómo funciona" id="{0afe72ac-9e5d-f485-b1d1-fd317001aee4}">
           <p14:sldIdLst>
             <p14:sldId id="259"/>
             <p14:sldId id="260"/>
@@ -154,7 +154,7 @@
             <p14:sldId id="266"/>
           </p14:sldIdLst>
         </p14:section>
-        <p14:section name="Qué encontramos" id="{cb945d4d-aabb-fd22-1340-9a83886991e7}">
+        <p14:section name="Qué encontramos" id="{7b737213-3f9b-4da9-1c64-259f92bdb675}">
           <p14:sldIdLst>
             <p14:sldId id="267"/>
             <p14:sldId id="268"/>
@@ -167,7 +167,7 @@
             <p14:sldId id="275"/>
           </p14:sldIdLst>
         </p14:section>
-        <p14:section name="Cierre" id="{f179b449-c666-7ace-ccdd-480431db7851}">
+        <p14:section name="Cierre" id="{0f916704-ac10-b7ca-efdb-3af129763910}">
           <p14:sldIdLst>
             <p14:sldId id="276"/>
             <p14:sldId id="277"/>
@@ -2312,7 +2312,7 @@
           <a:p>
             <a:r>
               <a:rPr lang="en-US" dirty="0"/>
-              <a:t>Tres técnicas para que el sistema no dependa solo de listas fijas. NER con spaCy descubre figuras nuevas, como Fundación Faro o Gonzalo Belloso. Los embeddings de oraciones encuentran la misma noticia contada con otras palabras y permiten buscar por significado desde el navegador. El aprendizaje activo elige los titulares donde el modelo de tono duda para que los etiquetemos a mano: el modelo pide ayuda donde más la necesita.</a:t>
+              <a:t>Tres técnicas para que el sistema no dependa solo de listas fijas. NER con spaCy descubre figuras nuevas, como Fundación Faro o Gonzalo Belloso. Los embeddings de oraciones encuentran la misma noticia contada con otras palabras y permiten buscar por significado desde el navegador. El aprendizaje activo elige los titulares donde el modelo de tono duda para que los etiquetemos a mano: el modelo pide ayuda donde más la necesita. En la primera ronda (60 titulares) el acierto se mantuvo en 76%: el modelo coincidía con nosotros solo en el 42% de esos casos y, aun reentrenado, acierta el 37% en ellos, casi el azar. Conclusión honesta: no eran errores aprendibles sino titulares ambiguos; la ronda sirvió para delimitar la frontera del criterio.</a:t>
             </a:r>
             <a:endParaRPr lang="en-US" dirty="0"/>
           </a:p>
@@ -6047,7 +6047,7 @@
                 <a:ea typeface="Calibri" pitchFamily="34" charset="-122"/>
                 <a:cs typeface="Calibri" pitchFamily="34" charset="-120"/>
               </a:rPr>
-              <a:t>El modelo de tono elige los 60 titulares donde más duda para etiquetarlos a mano y reentrenar.</a:t>
+              <a:t>El modelo de tono eligió los 60 titulares donde más dudaba; los etiquetamos a mano y reentrenamos.</a:t>
             </a:r>
             <a:endParaRPr lang="en-US" sz="1500" dirty="0"/>
           </a:p>
@@ -6086,7 +6086,7 @@
                 <a:ea typeface="Calibri" pitchFamily="34" charset="-122"/>
                 <a:cs typeface="Calibri" pitchFamily="34" charset="-120"/>
               </a:rPr>
-              <a:t>Tema de la clase 3, aplicado</a:t>
+              <a:t>Resultado: 76% → 76%; eran casos ambiguos</a:t>
             </a:r>
             <a:endParaRPr lang="en-US" sz="1400" dirty="0"/>
           </a:p>

--- a/docs/presentacion-tp.pptx
+++ b/docs/presentacion-tp.pptx
@@ -131,18 +131,18 @@
   <p:extLst>
     <p:ext uri="{521415D9-36F7-43E2-AB2F-B90AF26B5E84}">
       <p14:sectionLst xmlns:p14="http://schemas.microsoft.com/office/powerpoint/2010/main">
-        <p14:section name="Apertura" id="{93ea5e1d-5e86-f31e-902c-b97e5094f4ac}">
+        <p14:section name="Apertura" id="{8a2ec515-e8f7-3554-3d8f-c80a7cceb027}">
           <p14:sldIdLst>
             <p14:sldId id="256"/>
           </p14:sldIdLst>
         </p14:section>
-        <p14:section name="Problema" id="{56da9b91-3e27-96aa-37f2-f9527ec52396}">
+        <p14:section name="Problema" id="{a8e7a517-75e6-4294-bad1-df95cd66844d}">
           <p14:sldIdLst>
             <p14:sldId id="257"/>
             <p14:sldId id="258"/>
           </p14:sldIdLst>
         </p14:section>
-        <p14:section name="Cómo funciona" id="{0afe72ac-9e5d-f485-b1d1-fd317001aee4}">
+        <p14:section name="Cómo funciona" id="{c1a2326d-6535-a386-05f5-1c1bb5eaa6a2}">
           <p14:sldIdLst>
             <p14:sldId id="259"/>
             <p14:sldId id="260"/>
@@ -154,7 +154,7 @@
             <p14:sldId id="266"/>
           </p14:sldIdLst>
         </p14:section>
-        <p14:section name="Qué encontramos" id="{7b737213-3f9b-4da9-1c64-259f92bdb675}">
+        <p14:section name="Qué encontramos" id="{539d5d2a-5ae0-3259-b662-9b7ee0bbb488}">
           <p14:sldIdLst>
             <p14:sldId id="267"/>
             <p14:sldId id="268"/>
@@ -167,7 +167,7 @@
             <p14:sldId id="275"/>
           </p14:sldIdLst>
         </p14:section>
-        <p14:section name="Cierre" id="{0f916704-ac10-b7ca-efdb-3af129763910}">
+        <p14:section name="Cierre" id="{48c7c7cb-4d8c-2327-4190-f868de807b78}">
           <p14:sldIdLst>
             <p14:sldId id="276"/>
             <p14:sldId id="277"/>
@@ -9974,7 +9974,7 @@
                 <a:ea typeface="Calibri" pitchFamily="34" charset="-122"/>
                 <a:cs typeface="Calibri" pitchFamily="34" charset="-120"/>
               </a:rPr>
-              <a:t>titulares por corrida, de 46 medios, cada hora</a:t>
+              <a:t>titulares por corrida, de 46 medios, cada media hora</a:t>
             </a:r>
             <a:endParaRPr lang="en-US" sz="1700" dirty="0"/>
           </a:p>
@@ -12192,7 +12192,7 @@
                 <a:ea typeface="Calibri" pitchFamily="34" charset="-122"/>
                 <a:cs typeface="Calibri" pitchFamily="34" charset="-120"/>
               </a:rPr>
-              <a:t>GitHub Actions (cada hora) · rama de datos</a:t>
+              <a:t>GitHub Actions (cada 30 min, autodisparo) · pruebas automáticas</a:t>
             </a:r>
             <a:endParaRPr lang="en-US" sz="1500" dirty="0"/>
           </a:p>
@@ -12817,7 +12817,7 @@
                 <a:ea typeface="Calibri" pitchFamily="34" charset="-122"/>
                 <a:cs typeface="Calibri" pitchFamily="34" charset="-120"/>
               </a:rPr>
-              <a:t>Cruzar el termómetro con el dólar y otros datos</a:t>
+              <a:t>Con más días: ¿el tono acompaña al dólar?</a:t>
             </a:r>
             <a:endParaRPr lang="en-US" sz="1600" dirty="0"/>
           </a:p>
@@ -13231,7 +13231,7 @@
                 <a:ea typeface="Cambria" pitchFamily="34" charset="-122"/>
                 <a:cs typeface="Cambria" pitchFamily="34" charset="-120"/>
               </a:rPr>
-              <a:t>Un monitor que corre solo, cada hora, y publica todo</a:t>
+              <a:t>Un monitor que corre solo, cada 30 minutos, y publica todo</a:t>
             </a:r>
             <a:endParaRPr lang="en-US" sz="3200" dirty="0"/>
           </a:p>
@@ -13465,7 +13465,7 @@
                 <a:ea typeface="Calibri" pitchFamily="34" charset="-122"/>
                 <a:cs typeface="Calibri" pitchFamily="34" charset="-120"/>
               </a:rPr>
-              <a:t>GitHub Actions cada hora; tablero y base SQL publicados en GitHub Pages</a:t>
+              <a:t>GitHub Actions cada 30 minutos; tablero y base SQL publicados en GitHub Pages</a:t>
             </a:r>
             <a:endParaRPr lang="en-US" sz="1500" dirty="0"/>
           </a:p>
@@ -14731,7 +14731,7 @@
                 <a:ea typeface="Calibri" pitchFamily="34" charset="-122"/>
                 <a:cs typeface="Calibri" pitchFamily="34" charset="-120"/>
               </a:rPr>
-              <a:t>GitHub Actions corre el pipeline cada hora, guarda la base en una rama de datos y publica el tablero en GitHub Pages. La primera corrida con BERT tarda 10 minutos; las siguientes, 2.</a:t>
+              <a:t>GitHub Actions corre el pipeline cada 30 minutos, guarda la base en una rama de datos y publica el tablero en GitHub Pages. La primera corrida con BERT tarda 10 minutos; las siguientes, 2.</a:t>
             </a:r>
             <a:endParaRPr lang="en-US" sz="1600" dirty="0"/>
           </a:p>
